--- a/materials/PMM-M1/PMM-M1-S1-Core-Didactic-Principles/PMM-M1-S1-Core-Didactic-Principles-slides.pptx
+++ b/materials/PMM-M1/PMM-M1-S1-Core-Didactic-Principles/PMM-M1-S1-Core-Didactic-Principles-slides.pptx
@@ -5,7 +5,7 @@
     <p:sldMasterId id="2147483648" r:id="rId1"/>
   </p:sldMasterIdLst>
   <p:notesMasterIdLst>
-    <p:notesMasterId r:id="rId64"/>
+    <p:notesMasterId r:id="rId63"/>
   </p:notesMasterIdLst>
   <p:sldIdLst>
     <p:sldId id="256" r:id="rId2"/>
@@ -69,7 +69,6 @@
     <p:sldId id="314" r:id="rId60"/>
     <p:sldId id="315" r:id="rId61"/>
     <p:sldId id="316" r:id="rId62"/>
-    <p:sldId id="317" r:id="rId63"/>
   </p:sldIdLst>
   <p:sldSz cx="9144000" cy="5143500" type="screen16x9"/>
   <p:notesSz cx="6858000" cy="9144000"/>
@@ -611,7 +610,7 @@
           <a:p>
             <a:fld id="{18BDFEC3-8487-43E8-A154-7C12CBC1FFF2}" type="slidenum">
               <a:rPr lang="en-US"/>
-              <a:t>3</a:t>
+              <a:t>2</a:t>
             </a:fld>
             <a:endParaRPr lang="en-US"/>
           </a:p>
@@ -747,7 +746,7 @@
           <a:p>
             <a:fld id="{18BDFEC3-8487-43E8-A154-7C12CBC1FFF2}" type="slidenum">
               <a:rPr lang="en-US"/>
-              <a:t>17</a:t>
+              <a:t>16</a:t>
             </a:fld>
             <a:endParaRPr lang="en-US"/>
           </a:p>
@@ -867,7 +866,7 @@
           <a:p>
             <a:fld id="{18BDFEC3-8487-43E8-A154-7C12CBC1FFF2}" type="slidenum">
               <a:rPr lang="en-US"/>
-              <a:t>18</a:t>
+              <a:t>17</a:t>
             </a:fld>
             <a:endParaRPr lang="en-US"/>
           </a:p>
@@ -987,7 +986,7 @@
           <a:p>
             <a:fld id="{18BDFEC3-8487-43E8-A154-7C12CBC1FFF2}" type="slidenum">
               <a:rPr lang="en-US"/>
-              <a:t>19</a:t>
+              <a:t>18</a:t>
             </a:fld>
             <a:endParaRPr lang="en-US"/>
           </a:p>
@@ -1091,7 +1090,7 @@
           <a:p>
             <a:fld id="{18BDFEC3-8487-43E8-A154-7C12CBC1FFF2}" type="slidenum">
               <a:rPr lang="en-US"/>
-              <a:t>20</a:t>
+              <a:t>19</a:t>
             </a:fld>
             <a:endParaRPr lang="en-US"/>
           </a:p>
@@ -1237,7 +1236,7 @@
           <a:p>
             <a:fld id="{18BDFEC3-8487-43E8-A154-7C12CBC1FFF2}" type="slidenum">
               <a:rPr lang="en-US"/>
-              <a:t>21</a:t>
+              <a:t>20</a:t>
             </a:fld>
             <a:endParaRPr lang="en-US"/>
           </a:p>
@@ -1323,7 +1322,7 @@
           <a:p>
             <a:fld id="{18BDFEC3-8487-43E8-A154-7C12CBC1FFF2}" type="slidenum">
               <a:rPr lang="en-US"/>
-              <a:t>22</a:t>
+              <a:t>21</a:t>
             </a:fld>
             <a:endParaRPr lang="en-US"/>
           </a:p>
@@ -1441,7 +1440,7 @@
           <a:p>
             <a:fld id="{18BDFEC3-8487-43E8-A154-7C12CBC1FFF2}" type="slidenum">
               <a:rPr lang="en-US"/>
-              <a:t>23</a:t>
+              <a:t>22</a:t>
             </a:fld>
             <a:endParaRPr lang="en-US"/>
           </a:p>
@@ -1573,7 +1572,7 @@
           <a:p>
             <a:fld id="{18BDFEC3-8487-43E8-A154-7C12CBC1FFF2}" type="slidenum">
               <a:rPr lang="en-US"/>
-              <a:t>24</a:t>
+              <a:t>23</a:t>
             </a:fld>
             <a:endParaRPr lang="en-US"/>
           </a:p>
@@ -1685,7 +1684,7 @@
           <a:p>
             <a:fld id="{18BDFEC3-8487-43E8-A154-7C12CBC1FFF2}" type="slidenum">
               <a:rPr lang="en-US"/>
-              <a:t>25</a:t>
+              <a:t>24</a:t>
             </a:fld>
             <a:endParaRPr lang="en-US"/>
           </a:p>
@@ -1855,7 +1854,7 @@
           <a:p>
             <a:fld id="{18BDFEC3-8487-43E8-A154-7C12CBC1FFF2}" type="slidenum">
               <a:rPr lang="en-US"/>
-              <a:t>27</a:t>
+              <a:t>26</a:t>
             </a:fld>
             <a:endParaRPr lang="en-US"/>
           </a:p>
@@ -1993,7 +1992,7 @@
           <a:p>
             <a:fld id="{18BDFEC3-8487-43E8-A154-7C12CBC1FFF2}" type="slidenum">
               <a:rPr lang="en-US"/>
-              <a:t>4</a:t>
+              <a:t>3</a:t>
             </a:fld>
             <a:endParaRPr lang="en-US"/>
           </a:p>
@@ -2141,7 +2140,7 @@
           <a:p>
             <a:fld id="{18BDFEC3-8487-43E8-A154-7C12CBC1FFF2}" type="slidenum">
               <a:rPr lang="en-US"/>
-              <a:t>29</a:t>
+              <a:t>28</a:t>
             </a:fld>
             <a:endParaRPr lang="en-US"/>
           </a:p>
@@ -2245,7 +2244,7 @@
           <a:p>
             <a:fld id="{18BDFEC3-8487-43E8-A154-7C12CBC1FFF2}" type="slidenum">
               <a:rPr lang="en-US"/>
-              <a:t>30</a:t>
+              <a:t>29</a:t>
             </a:fld>
             <a:endParaRPr lang="en-US"/>
           </a:p>
@@ -2349,7 +2348,7 @@
           <a:p>
             <a:fld id="{18BDFEC3-8487-43E8-A154-7C12CBC1FFF2}" type="slidenum">
               <a:rPr lang="en-US"/>
-              <a:t>31</a:t>
+              <a:t>30</a:t>
             </a:fld>
             <a:endParaRPr lang="en-US"/>
           </a:p>
@@ -2495,7 +2494,7 @@
           <a:p>
             <a:fld id="{18BDFEC3-8487-43E8-A154-7C12CBC1FFF2}" type="slidenum">
               <a:rPr lang="en-US"/>
-              <a:t>32</a:t>
+              <a:t>31</a:t>
             </a:fld>
             <a:endParaRPr lang="en-US"/>
           </a:p>
@@ -2641,7 +2640,7 @@
           <a:p>
             <a:fld id="{18BDFEC3-8487-43E8-A154-7C12CBC1FFF2}" type="slidenum">
               <a:rPr lang="en-US"/>
-              <a:t>34</a:t>
+              <a:t>33</a:t>
             </a:fld>
             <a:endParaRPr lang="en-US"/>
           </a:p>
@@ -2727,7 +2726,7 @@
           <a:p>
             <a:fld id="{18BDFEC3-8487-43E8-A154-7C12CBC1FFF2}" type="slidenum">
               <a:rPr lang="en-US"/>
-              <a:t>35</a:t>
+              <a:t>34</a:t>
             </a:fld>
             <a:endParaRPr lang="en-US"/>
           </a:p>
@@ -2813,7 +2812,7 @@
           <a:p>
             <a:fld id="{18BDFEC3-8487-43E8-A154-7C12CBC1FFF2}" type="slidenum">
               <a:rPr lang="en-US"/>
-              <a:t>36</a:t>
+              <a:t>35</a:t>
             </a:fld>
             <a:endParaRPr lang="en-US"/>
           </a:p>
@@ -2899,7 +2898,7 @@
           <a:p>
             <a:fld id="{18BDFEC3-8487-43E8-A154-7C12CBC1FFF2}" type="slidenum">
               <a:rPr lang="en-US"/>
-              <a:t>37</a:t>
+              <a:t>36</a:t>
             </a:fld>
             <a:endParaRPr lang="en-US"/>
           </a:p>
@@ -3003,7 +3002,7 @@
           <a:p>
             <a:fld id="{18BDFEC3-8487-43E8-A154-7C12CBC1FFF2}" type="slidenum">
               <a:rPr lang="en-US"/>
-              <a:t>38</a:t>
+              <a:t>37</a:t>
             </a:fld>
             <a:endParaRPr lang="en-US"/>
           </a:p>
@@ -3117,7 +3116,7 @@
           <a:p>
             <a:fld id="{18BDFEC3-8487-43E8-A154-7C12CBC1FFF2}" type="slidenum">
               <a:rPr lang="en-US"/>
-              <a:t>39</a:t>
+              <a:t>38</a:t>
             </a:fld>
             <a:endParaRPr lang="en-US"/>
           </a:p>
@@ -3221,7 +3220,7 @@
           <a:p>
             <a:fld id="{18BDFEC3-8487-43E8-A154-7C12CBC1FFF2}" type="slidenum">
               <a:rPr lang="en-US"/>
-              <a:t>5</a:t>
+              <a:t>4</a:t>
             </a:fld>
             <a:endParaRPr lang="en-US"/>
           </a:p>
@@ -3323,7 +3322,7 @@
           <a:p>
             <a:fld id="{18BDFEC3-8487-43E8-A154-7C12CBC1FFF2}" type="slidenum">
               <a:rPr lang="en-US"/>
-              <a:t>40</a:t>
+              <a:t>39</a:t>
             </a:fld>
             <a:endParaRPr lang="en-US"/>
           </a:p>
@@ -3523,7 +3522,7 @@
           <a:p>
             <a:fld id="{18BDFEC3-8487-43E8-A154-7C12CBC1FFF2}" type="slidenum">
               <a:rPr lang="en-US"/>
-              <a:t>41</a:t>
+              <a:t>40</a:t>
             </a:fld>
             <a:endParaRPr lang="en-US"/>
           </a:p>
@@ -3755,7 +3754,7 @@
           <a:p>
             <a:fld id="{18BDFEC3-8487-43E8-A154-7C12CBC1FFF2}" type="slidenum">
               <a:rPr lang="en-US"/>
-              <a:t>42</a:t>
+              <a:t>41</a:t>
             </a:fld>
             <a:endParaRPr lang="en-US"/>
           </a:p>
@@ -3883,7 +3882,7 @@
           <a:p>
             <a:fld id="{18BDFEC3-8487-43E8-A154-7C12CBC1FFF2}" type="slidenum">
               <a:rPr lang="en-US"/>
-              <a:t>43</a:t>
+              <a:t>42</a:t>
             </a:fld>
             <a:endParaRPr lang="en-US"/>
           </a:p>
@@ -3997,7 +3996,7 @@
           <a:p>
             <a:fld id="{18BDFEC3-8487-43E8-A154-7C12CBC1FFF2}" type="slidenum">
               <a:rPr lang="en-US"/>
-              <a:t>44</a:t>
+              <a:t>43</a:t>
             </a:fld>
             <a:endParaRPr lang="en-US"/>
           </a:p>
@@ -4167,7 +4166,7 @@
           <a:p>
             <a:fld id="{18BDFEC3-8487-43E8-A154-7C12CBC1FFF2}" type="slidenum">
               <a:rPr lang="en-US"/>
-              <a:t>45</a:t>
+              <a:t>44</a:t>
             </a:fld>
             <a:endParaRPr lang="en-US"/>
           </a:p>
@@ -4351,7 +4350,7 @@
           <a:p>
             <a:fld id="{18BDFEC3-8487-43E8-A154-7C12CBC1FFF2}" type="slidenum">
               <a:rPr lang="en-US"/>
-              <a:t>46</a:t>
+              <a:t>45</a:t>
             </a:fld>
             <a:endParaRPr lang="en-US"/>
           </a:p>
@@ -4465,7 +4464,7 @@
           <a:p>
             <a:fld id="{18BDFEC3-8487-43E8-A154-7C12CBC1FFF2}" type="slidenum">
               <a:rPr lang="en-US"/>
-              <a:t>47</a:t>
+              <a:t>46</a:t>
             </a:fld>
             <a:endParaRPr lang="en-US"/>
           </a:p>
@@ -4587,7 +4586,7 @@
           <a:p>
             <a:fld id="{18BDFEC3-8487-43E8-A154-7C12CBC1FFF2}" type="slidenum">
               <a:rPr lang="en-US"/>
-              <a:t>48</a:t>
+              <a:t>47</a:t>
             </a:fld>
             <a:endParaRPr lang="en-US"/>
           </a:p>
@@ -4687,7 +4686,7 @@
           <a:p>
             <a:fld id="{18BDFEC3-8487-43E8-A154-7C12CBC1FFF2}" type="slidenum">
               <a:rPr lang="en-US"/>
-              <a:t>49</a:t>
+              <a:t>48</a:t>
             </a:fld>
             <a:endParaRPr lang="en-US"/>
           </a:p>
@@ -4825,7 +4824,7 @@
           <a:p>
             <a:fld id="{18BDFEC3-8487-43E8-A154-7C12CBC1FFF2}" type="slidenum">
               <a:rPr lang="en-US"/>
-              <a:t>10</a:t>
+              <a:t>9</a:t>
             </a:fld>
             <a:endParaRPr lang="en-US"/>
           </a:p>
@@ -5021,7 +5020,7 @@
           <a:p>
             <a:fld id="{18BDFEC3-8487-43E8-A154-7C12CBC1FFF2}" type="slidenum">
               <a:rPr lang="en-US"/>
-              <a:t>50</a:t>
+              <a:t>49</a:t>
             </a:fld>
             <a:endParaRPr lang="en-US"/>
           </a:p>
@@ -5141,7 +5140,7 @@
           <a:p>
             <a:fld id="{18BDFEC3-8487-43E8-A154-7C12CBC1FFF2}" type="slidenum">
               <a:rPr lang="en-US"/>
-              <a:t>51</a:t>
+              <a:t>50</a:t>
             </a:fld>
             <a:endParaRPr lang="en-US"/>
           </a:p>
@@ -5279,7 +5278,7 @@
           <a:p>
             <a:fld id="{18BDFEC3-8487-43E8-A154-7C12CBC1FFF2}" type="slidenum">
               <a:rPr lang="en-US"/>
-              <a:t>56</a:t>
+              <a:t>55</a:t>
             </a:fld>
             <a:endParaRPr lang="en-US"/>
           </a:p>
@@ -5365,7 +5364,7 @@
           <a:p>
             <a:fld id="{18BDFEC3-8487-43E8-A154-7C12CBC1FFF2}" type="slidenum">
               <a:rPr lang="en-US"/>
-              <a:t>57</a:t>
+              <a:t>56</a:t>
             </a:fld>
             <a:endParaRPr lang="en-US"/>
           </a:p>
@@ -5465,7 +5464,7 @@
           <a:p>
             <a:fld id="{18BDFEC3-8487-43E8-A154-7C12CBC1FFF2}" type="slidenum">
               <a:rPr lang="en-US"/>
-              <a:t>61</a:t>
+              <a:t>60</a:t>
             </a:fld>
             <a:endParaRPr lang="en-US"/>
           </a:p>
@@ -5565,7 +5564,7 @@
           <a:p>
             <a:fld id="{18BDFEC3-8487-43E8-A154-7C12CBC1FFF2}" type="slidenum">
               <a:rPr lang="en-US"/>
-              <a:t>62</a:t>
+              <a:t>61</a:t>
             </a:fld>
             <a:endParaRPr lang="en-US"/>
           </a:p>
@@ -5669,7 +5668,7 @@
           <a:p>
             <a:fld id="{18BDFEC3-8487-43E8-A154-7C12CBC1FFF2}" type="slidenum">
               <a:rPr lang="en-US"/>
-              <a:t>11</a:t>
+              <a:t>10</a:t>
             </a:fld>
             <a:endParaRPr lang="en-US"/>
           </a:p>
@@ -5781,7 +5780,7 @@
           <a:p>
             <a:fld id="{18BDFEC3-8487-43E8-A154-7C12CBC1FFF2}" type="slidenum">
               <a:rPr lang="en-US"/>
-              <a:t>12</a:t>
+              <a:t>11</a:t>
             </a:fld>
             <a:endParaRPr lang="en-US"/>
           </a:p>
@@ -5885,7 +5884,7 @@
           <a:p>
             <a:fld id="{18BDFEC3-8487-43E8-A154-7C12CBC1FFF2}" type="slidenum">
               <a:rPr lang="en-US"/>
-              <a:t>13</a:t>
+              <a:t>12</a:t>
             </a:fld>
             <a:endParaRPr lang="en-US"/>
           </a:p>
@@ -5989,7 +5988,7 @@
           <a:p>
             <a:fld id="{18BDFEC3-8487-43E8-A154-7C12CBC1FFF2}" type="slidenum">
               <a:rPr lang="en-US"/>
-              <a:t>14</a:t>
+              <a:t>13</a:t>
             </a:fld>
             <a:endParaRPr lang="en-US"/>
           </a:p>
@@ -6089,7 +6088,7 @@
           <a:p>
             <a:fld id="{18BDFEC3-8487-43E8-A154-7C12CBC1FFF2}" type="slidenum">
               <a:rPr lang="en-US"/>
-              <a:t>15</a:t>
+              <a:t>14</a:t>
             </a:fld>
             <a:endParaRPr lang="en-US"/>
           </a:p>
@@ -9194,7 +9193,7 @@
             </a:pPr>
             <a:r>
               <a:rPr/>
-              <a:t>Discussion of survey results</a:t>
+              <a:t>Today’s session journey</a:t>
             </a:r>
           </a:p>
         </p:txBody>
@@ -9224,7 +9223,34 @@
             </a:pPr>
             <a:r>
               <a:rPr/>
-              <a:t>What do we see in the results?</a:t>
+              <a:t>From</a:t>
+            </a:r>
+          </a:p>
+          <a:p>
+            <a:pPr lvl="0" indent="0" marL="0">
+              <a:buNone/>
+            </a:pPr>
+            <a:r>
+              <a:rPr b="1"/>
+              <a:t>I am not sure what good teaching in open research involves</a:t>
+            </a:r>
+          </a:p>
+          <a:p>
+            <a:pPr lvl="0" indent="0" marL="0">
+              <a:buNone/>
+            </a:pPr>
+            <a:r>
+              <a:rPr/>
+              <a:t>to</a:t>
+            </a:r>
+          </a:p>
+          <a:p>
+            <a:pPr lvl="0" indent="0" marL="0">
+              <a:buNone/>
+            </a:pPr>
+            <a:r>
+              <a:rPr b="1"/>
+              <a:t>I feel more confident that I can pass on my knowledge of open research to my learners using evidence-based didactic methods.</a:t>
             </a:r>
           </a:p>
         </p:txBody>
@@ -9271,7 +9297,7 @@
             </a:pPr>
             <a:r>
               <a:rPr/>
-              <a:t>Today’s session journey</a:t>
+              <a:t>Where are we at?</a:t>
             </a:r>
           </a:p>
         </p:txBody>
@@ -9294,32 +9320,20 @@
             <a:pPr lvl="0" indent="0" marL="0">
               <a:buNone/>
             </a:pPr>
-          </a:p>
-          <a:p>
-            <a:pPr lvl="0" indent="0" marL="0">
-              <a:buNone/>
-            </a:pPr>
-            <a:r>
-              <a:rPr/>
-              <a:t>From</a:t>
-            </a:r>
-          </a:p>
-          <a:p>
-            <a:pPr lvl="0" indent="0" marL="0">
-              <a:buNone/>
-            </a:pPr>
             <a:r>
               <a:rPr b="1"/>
-              <a:t>I am not sure what good teaching in open research involves</a:t>
-            </a:r>
-          </a:p>
-          <a:p>
-            <a:pPr lvl="0" indent="0" marL="0">
-              <a:buNone/>
-            </a:pPr>
-            <a:r>
-              <a:rPr/>
-              <a:t>to</a:t>
+              <a:t>Previously</a:t>
+            </a:r>
+            <a:r>
+              <a:rPr/>
+              <a:t>:</a:t>
+            </a:r>
+          </a:p>
+          <a:p>
+            <a:pPr lvl="0"/>
+            <a:r>
+              <a:rPr/>
+              <a:t>Getting to know the group</a:t>
             </a:r>
           </a:p>
           <a:p>
@@ -9328,7 +9342,53 @@
             </a:pPr>
             <a:r>
               <a:rPr b="1"/>
-              <a:t>I feel more confident that I can pass on my knowledge of open research to my learners using evidence-based didactic methods.</a:t>
+              <a:t>Up next</a:t>
+            </a:r>
+            <a:r>
+              <a:rPr/>
+              <a:t>:</a:t>
+            </a:r>
+          </a:p>
+          <a:p>
+            <a:pPr lvl="0"/>
+            <a:r>
+              <a:rPr/>
+              <a:t>What is learning?</a:t>
+            </a:r>
+          </a:p>
+          <a:p>
+            <a:pPr lvl="0"/>
+            <a:r>
+              <a:rPr/>
+              <a:t>Constructivism</a:t>
+            </a:r>
+          </a:p>
+          <a:p>
+            <a:pPr lvl="0"/>
+            <a:r>
+              <a:rPr/>
+              <a:t>Constructive alignment</a:t>
+            </a:r>
+          </a:p>
+          <a:p>
+            <a:pPr lvl="0"/>
+            <a:r>
+              <a:rPr/>
+              <a:t>Learning domains</a:t>
+            </a:r>
+          </a:p>
+          <a:p>
+            <a:pPr lvl="0"/>
+            <a:r>
+              <a:rPr/>
+              <a:t>Levels of knowledge: Bloom’s taxonomy</a:t>
+            </a:r>
+          </a:p>
+          <a:p>
+            <a:pPr lvl="0"/>
+            <a:r>
+              <a:rPr/>
+              <a:t>Formulating learning objectives</a:t>
             </a:r>
           </a:p>
         </p:txBody>
@@ -9339,144 +9399,6 @@
 </file>
 
 <file path=ppt/slides/slide12.xml><?xml version="1.0" encoding="utf-8"?>
-<p:sld xmlns:a="http://schemas.openxmlformats.org/drawingml/2006/main" xmlns:r="http://schemas.openxmlformats.org/officeDocument/2006/relationships" xmlns:p="http://schemas.openxmlformats.org/presentationml/2006/main">
-  <p:cSld>
-    <p:spTree>
-      <p:nvGrpSpPr>
-        <p:cNvPr id="1" name=""/>
-        <p:cNvGrpSpPr/>
-        <p:nvPr/>
-      </p:nvGrpSpPr>
-      <p:grpSpPr>
-        <a:xfrm>
-          <a:off x="0" y="0"/>
-          <a:ext cx="0" cy="0"/>
-          <a:chOff x="0" y="0"/>
-          <a:chExt cx="0" cy="0"/>
-        </a:xfrm>
-      </p:grpSpPr>
-      <p:sp>
-        <p:nvSpPr>
-          <p:cNvPr id="2" name="Title 1"/>
-          <p:cNvSpPr>
-            <a:spLocks noGrp="1"/>
-          </p:cNvSpPr>
-          <p:nvPr>
-            <p:ph type="title"/>
-          </p:nvPr>
-        </p:nvSpPr>
-        <p:spPr/>
-        <p:txBody>
-          <a:bodyPr/>
-          <a:lstStyle/>
-          <a:p>
-            <a:pPr lvl="0" indent="0" marL="0">
-              <a:buNone/>
-            </a:pPr>
-            <a:r>
-              <a:rPr/>
-              <a:t>Where are we at?</a:t>
-            </a:r>
-          </a:p>
-        </p:txBody>
-      </p:sp>
-      <p:sp>
-        <p:nvSpPr>
-          <p:cNvPr id="3" name="Content Placeholder 2"/>
-          <p:cNvSpPr>
-            <a:spLocks noGrp="1"/>
-          </p:cNvSpPr>
-          <p:nvPr>
-            <p:ph idx="1"/>
-          </p:nvPr>
-        </p:nvSpPr>
-        <p:spPr/>
-        <p:txBody>
-          <a:bodyPr/>
-          <a:lstStyle/>
-          <a:p>
-            <a:pPr lvl="0" indent="0" marL="0">
-              <a:buNone/>
-            </a:pPr>
-            <a:r>
-              <a:rPr b="1"/>
-              <a:t>Previously</a:t>
-            </a:r>
-            <a:r>
-              <a:rPr/>
-              <a:t>:</a:t>
-            </a:r>
-          </a:p>
-          <a:p>
-            <a:pPr lvl="0"/>
-            <a:r>
-              <a:rPr/>
-              <a:t>Getting to know the group</a:t>
-            </a:r>
-          </a:p>
-          <a:p>
-            <a:pPr lvl="0" indent="0" marL="0">
-              <a:buNone/>
-            </a:pPr>
-            <a:r>
-              <a:rPr b="1"/>
-              <a:t>Up next</a:t>
-            </a:r>
-            <a:r>
-              <a:rPr/>
-              <a:t>:</a:t>
-            </a:r>
-          </a:p>
-          <a:p>
-            <a:pPr lvl="0"/>
-            <a:r>
-              <a:rPr/>
-              <a:t>What is learning?</a:t>
-            </a:r>
-          </a:p>
-          <a:p>
-            <a:pPr lvl="0"/>
-            <a:r>
-              <a:rPr/>
-              <a:t>Constructivism</a:t>
-            </a:r>
-          </a:p>
-          <a:p>
-            <a:pPr lvl="0"/>
-            <a:r>
-              <a:rPr/>
-              <a:t>Constructive alignment</a:t>
-            </a:r>
-          </a:p>
-          <a:p>
-            <a:pPr lvl="0"/>
-            <a:r>
-              <a:rPr/>
-              <a:t>Learning domains</a:t>
-            </a:r>
-          </a:p>
-          <a:p>
-            <a:pPr lvl="0"/>
-            <a:r>
-              <a:rPr/>
-              <a:t>Levels of knowledge: Bloom’s taxonomy</a:t>
-            </a:r>
-          </a:p>
-          <a:p>
-            <a:pPr lvl="0"/>
-            <a:r>
-              <a:rPr/>
-              <a:t>Formulating learning objectives</a:t>
-            </a:r>
-          </a:p>
-        </p:txBody>
-      </p:sp>
-    </p:spTree>
-  </p:cSld>
-</p:sld>
-</file>
-
-<file path=ppt/slides/slide13.xml><?xml version="1.0" encoding="utf-8"?>
 <p:sld xmlns:a="http://schemas.openxmlformats.org/drawingml/2006/main" xmlns:r="http://schemas.openxmlformats.org/officeDocument/2006/relationships" xmlns:p="http://schemas.openxmlformats.org/presentationml/2006/main">
   <p:cSld>
     <p:spTree>
@@ -9761,7 +9683,7 @@
 </p:sld>
 </file>
 
-<file path=ppt/slides/slide14.xml><?xml version="1.0" encoding="utf-8"?>
+<file path=ppt/slides/slide13.xml><?xml version="1.0" encoding="utf-8"?>
 <p:sld xmlns:a="http://schemas.openxmlformats.org/drawingml/2006/main" xmlns:r="http://schemas.openxmlformats.org/officeDocument/2006/relationships" xmlns:p="http://schemas.openxmlformats.org/presentationml/2006/main">
   <p:cSld>
     <p:spTree>
@@ -9866,7 +9788,7 @@
 </p:sld>
 </file>
 
-<file path=ppt/slides/slide15.xml><?xml version="1.0" encoding="utf-8"?>
+<file path=ppt/slides/slide14.xml><?xml version="1.0" encoding="utf-8"?>
 <p:sld xmlns:a="http://schemas.openxmlformats.org/drawingml/2006/main" xmlns:r="http://schemas.openxmlformats.org/officeDocument/2006/relationships" xmlns:p="http://schemas.openxmlformats.org/presentationml/2006/main">
   <p:cSld>
     <p:spTree>
@@ -10211,7 +10133,7 @@
 </p:sld>
 </file>
 
-<file path=ppt/slides/slide16.xml><?xml version="1.0" encoding="utf-8"?>
+<file path=ppt/slides/slide15.xml><?xml version="1.0" encoding="utf-8"?>
 <p:sld xmlns:a="http://schemas.openxmlformats.org/drawingml/2006/main" xmlns:r="http://schemas.openxmlformats.org/officeDocument/2006/relationships" xmlns:p="http://schemas.openxmlformats.org/presentationml/2006/main">
   <p:cSld>
     <p:spTree>
@@ -10263,7 +10185,7 @@
 </p:sld>
 </file>
 
-<file path=ppt/slides/slide17.xml><?xml version="1.0" encoding="utf-8"?>
+<file path=ppt/slides/slide16.xml><?xml version="1.0" encoding="utf-8"?>
 <p:sld xmlns:a="http://schemas.openxmlformats.org/drawingml/2006/main" xmlns:r="http://schemas.openxmlformats.org/officeDocument/2006/relationships" xmlns:p="http://schemas.openxmlformats.org/presentationml/2006/main">
   <p:cSld>
     <p:spTree>
@@ -10385,7 +10307,7 @@
 </p:sld>
 </file>
 
-<file path=ppt/slides/slide18.xml><?xml version="1.0" encoding="utf-8"?>
+<file path=ppt/slides/slide17.xml><?xml version="1.0" encoding="utf-8"?>
 <p:sld xmlns:a="http://schemas.openxmlformats.org/drawingml/2006/main" xmlns:r="http://schemas.openxmlformats.org/officeDocument/2006/relationships" xmlns:p="http://schemas.openxmlformats.org/presentationml/2006/main">
   <p:cSld>
     <p:spTree>
@@ -10507,7 +10429,7 @@
 </p:sld>
 </file>
 
-<file path=ppt/slides/slide19.xml><?xml version="1.0" encoding="utf-8"?>
+<file path=ppt/slides/slide18.xml><?xml version="1.0" encoding="utf-8"?>
 <p:sld xmlns:a="http://schemas.openxmlformats.org/drawingml/2006/main" xmlns:r="http://schemas.openxmlformats.org/officeDocument/2006/relationships" xmlns:p="http://schemas.openxmlformats.org/presentationml/2006/main">
   <p:cSld>
     <p:spTree>
@@ -10621,6 +10543,61 @@
 </p:sld>
 </file>
 
+<file path=ppt/slides/slide19.xml><?xml version="1.0" encoding="utf-8"?>
+<p:sld xmlns:a="http://schemas.openxmlformats.org/drawingml/2006/main" xmlns:r="http://schemas.openxmlformats.org/officeDocument/2006/relationships" xmlns:p="http://schemas.openxmlformats.org/presentationml/2006/main">
+  <p:cSld>
+    <p:spTree>
+      <p:nvGrpSpPr>
+        <p:cNvPr id="1" name=""/>
+        <p:cNvGrpSpPr/>
+        <p:nvPr/>
+      </p:nvGrpSpPr>
+      <p:grpSpPr>
+        <a:xfrm>
+          <a:off x="0" y="0"/>
+          <a:ext cx="0" cy="0"/>
+          <a:chOff x="0" y="0"/>
+          <a:chExt cx="0" cy="0"/>
+        </a:xfrm>
+      </p:grpSpPr>
+      <p:sp>
+        <p:nvSpPr>
+          <p:cNvPr id="2" name="Title 1"/>
+          <p:cNvSpPr>
+            <a:spLocks noGrp="1"/>
+          </p:cNvSpPr>
+          <p:nvPr>
+            <p:ph type="title"/>
+          </p:nvPr>
+        </p:nvSpPr>
+        <p:spPr/>
+        <p:txBody>
+          <a:bodyPr/>
+          <a:lstStyle/>
+          <a:p>
+            <a:pPr lvl="0" indent="0" marL="0">
+              <a:buNone/>
+            </a:pPr>
+            <a:r>
+              <a:rPr/>
+              <a:t>Your turn: What </a:t>
+            </a:r>
+            <a:r>
+              <a:rPr i="1"/>
+              <a:t>is</a:t>
+            </a:r>
+            <a:r>
+              <a:rPr/>
+              <a:t> learning?</a:t>
+            </a:r>
+          </a:p>
+        </p:txBody>
+      </p:sp>
+    </p:spTree>
+  </p:cSld>
+</p:sld>
+</file>
+
 <file path=ppt/slides/slide2.xml><?xml version="1.0" encoding="utf-8"?>
 <p:sld xmlns:a="http://schemas.openxmlformats.org/drawingml/2006/main" xmlns:r="http://schemas.openxmlformats.org/officeDocument/2006/relationships" xmlns:p="http://schemas.openxmlformats.org/presentationml/2006/main">
   <p:cSld>
@@ -10658,7 +10635,7 @@
             </a:pPr>
             <a:r>
               <a:rPr/>
-              <a:t>TO DO</a:t>
+              <a:t>Licence</a:t>
             </a:r>
           </a:p>
         </p:txBody>
@@ -10678,45 +10655,51 @@
           <a:bodyPr/>
           <a:lstStyle/>
           <a:p>
-            <a:pPr lvl="0"/>
-            <a:r>
-              <a:rPr/>
-              <a:t>☐ check with day 1 outline google doc if all points were ccovered and if outline matches</a:t>
-            </a:r>
-          </a:p>
-          <a:p>
-            <a:pPr lvl="0"/>
-            <a:r>
-              <a:rPr/>
-              <a:t>☐ sort out presenter notes</a:t>
-            </a:r>
-          </a:p>
-          <a:p>
-            <a:pPr lvl="0"/>
-            <a:r>
-              <a:rPr/>
-              <a:t>☐ sort out instructor notes</a:t>
-            </a:r>
-          </a:p>
-          <a:p>
-            <a:pPr lvl="0"/>
-            <a:r>
-              <a:rPr/>
-              <a:t>☐ sort out accessibility tips</a:t>
-            </a:r>
-          </a:p>
-          <a:p>
-            <a:pPr lvl="0"/>
-            <a:r>
-              <a:rPr/>
-              <a:t>☐ sort out references and credit</a:t>
-            </a:r>
-          </a:p>
-          <a:p>
-            <a:pPr lvl="0"/>
-            <a:r>
-              <a:rPr/>
-              <a:t>☐ reformat and use callout boxes? Or conditional formatting?</a:t>
+            <a:pPr lvl="0" indent="0" marL="0">
+              <a:buNone/>
+            </a:pPr>
+          </a:p>
+          <a:p>
+            <a:pPr lvl="0" indent="0" marL="0">
+              <a:buNone/>
+            </a:pPr>
+          </a:p>
+          <a:p>
+            <a:pPr lvl="0" indent="0" marL="0">
+              <a:buNone/>
+            </a:pPr>
+            <a:r>
+              <a:rPr/>
+              <a:t>This current work by Sarah von Grebmer zu Wolfsthurn, Sara Lil Middleton and Malika Ihle is licensed under a CC-BY-SA 4.0 </a:t>
+            </a:r>
+            <a:r>
+              <a:rPr>
+                <a:hlinkClick r:id="rId3"/>
+              </a:rPr>
+              <a:t>Creative Commons Attribution 4.0 International SA License</a:t>
+            </a:r>
+            <a:r>
+              <a:rPr/>
+              <a:t>. It permits unrestricted re-use, distribution, and reproduction in any medium, provided the original work is properly cited. If you remix, transform, or build upon the material, you must distribute your contributions under the same license as the original.</a:t>
+            </a:r>
+          </a:p>
+          <a:p>
+            <a:pPr lvl="0" indent="0" marL="0">
+              <a:buNone/>
+            </a:pPr>
+            <a:r>
+              <a:rPr/>
+              <a:t>Code snippets are dedicated to the public domain and licenced under a CC0 1.0 </a:t>
+            </a:r>
+            <a:r>
+              <a:rPr>
+                <a:hlinkClick r:id="rId4"/>
+              </a:rPr>
+              <a:t>Creative Commons Universal Licence</a:t>
+            </a:r>
+            <a:r>
+              <a:rPr/>
+              <a:t>. You may use, modify, distribute, and sell the code snippets for any purpose, without permission or attribution. The code snippets are provided “as is”, without warranty of any kind.</a:t>
             </a:r>
           </a:p>
         </p:txBody>
@@ -10763,7 +10746,7 @@
             </a:pPr>
             <a:r>
               <a:rPr/>
-              <a:t>Your turn: What </a:t>
+              <a:t>What </a:t>
             </a:r>
             <a:r>
               <a:rPr i="1"/>
@@ -10772,6 +10755,97 @@
             <a:r>
               <a:rPr/>
               <a:t> learning?</a:t>
+            </a:r>
+          </a:p>
+        </p:txBody>
+      </p:sp>
+      <p:sp>
+        <p:nvSpPr>
+          <p:cNvPr id="3" name="Content Placeholder 2"/>
+          <p:cNvSpPr>
+            <a:spLocks noGrp="1"/>
+          </p:cNvSpPr>
+          <p:nvPr>
+            <p:ph idx="1"/>
+          </p:nvPr>
+        </p:nvSpPr>
+        <p:spPr/>
+        <p:txBody>
+          <a:bodyPr/>
+          <a:lstStyle/>
+          <a:p>
+            <a:pPr lvl="0" indent="0" marL="0">
+              <a:buNone/>
+            </a:pPr>
+            <a:r>
+              <a:rPr/>
+              <a:t> </a:t>
+            </a:r>
+          </a:p>
+          <a:p>
+            <a:pPr lvl="0" indent="0" marL="0">
+              <a:buNone/>
+            </a:pPr>
+            <a:r>
+              <a:rPr/>
+              <a:t>“…a </a:t>
+            </a:r>
+            <a:r>
+              <a:rPr b="1"/>
+              <a:t>process</a:t>
+            </a:r>
+            <a:r>
+              <a:rPr/>
+              <a:t> that leads to </a:t>
+            </a:r>
+            <a:r>
+              <a:rPr b="1"/>
+              <a:t>change</a:t>
+            </a:r>
+            <a:r>
+              <a:rPr/>
+              <a:t>, which occurs as a result of </a:t>
+            </a:r>
+            <a:r>
+              <a:rPr b="1"/>
+              <a:t>experience</a:t>
+            </a:r>
+            <a:r>
+              <a:rPr/>
+              <a:t> and increases the potential for improved performance and </a:t>
+            </a:r>
+            <a:r>
+              <a:rPr b="1"/>
+              <a:t>future learning</a:t>
+            </a:r>
+            <a:r>
+              <a:rPr/>
+              <a:t>”</a:t>
+            </a:r>
+          </a:p>
+          <a:p>
+            <a:pPr lvl="0" indent="0" marL="0">
+              <a:buNone/>
+            </a:pPr>
+            <a:r>
+              <a:rPr/>
+              <a:t>Ambrose, S. A., Bridges, M. W., DiPietro, M., Lovett, M. C., Norman, M. K., &amp; Mayer, R. E. (2023), page 2-3. Slide adapted from Laura Carter: “Evidence-based Training” </a:t>
+            </a:r>
+            <a:r>
+              <a:rPr>
+                <a:hlinkClick r:id="rId3"/>
+              </a:rPr>
+              <a:t>https://zenodo.org/records/18905547</a:t>
+            </a:r>
+            <a:r>
+              <a:rPr/>
+              <a:t>. Slide originally licenced under CC BY 4.0: </a:t>
+            </a:r>
+            <a:r>
+              <a:rPr>
+                <a:hlinkClick r:id="rId4"/>
+              </a:rPr>
+              <a:t>https://creativecommons.org/licenses/by/4.0/</a:t>
             </a:r>
           </a:p>
         </p:txBody>
@@ -10782,152 +10856,6 @@
 </file>
 
 <file path=ppt/slides/slide21.xml><?xml version="1.0" encoding="utf-8"?>
-<p:sld xmlns:a="http://schemas.openxmlformats.org/drawingml/2006/main" xmlns:r="http://schemas.openxmlformats.org/officeDocument/2006/relationships" xmlns:p="http://schemas.openxmlformats.org/presentationml/2006/main">
-  <p:cSld>
-    <p:spTree>
-      <p:nvGrpSpPr>
-        <p:cNvPr id="1" name=""/>
-        <p:cNvGrpSpPr/>
-        <p:nvPr/>
-      </p:nvGrpSpPr>
-      <p:grpSpPr>
-        <a:xfrm>
-          <a:off x="0" y="0"/>
-          <a:ext cx="0" cy="0"/>
-          <a:chOff x="0" y="0"/>
-          <a:chExt cx="0" cy="0"/>
-        </a:xfrm>
-      </p:grpSpPr>
-      <p:sp>
-        <p:nvSpPr>
-          <p:cNvPr id="2" name="Title 1"/>
-          <p:cNvSpPr>
-            <a:spLocks noGrp="1"/>
-          </p:cNvSpPr>
-          <p:nvPr>
-            <p:ph type="title"/>
-          </p:nvPr>
-        </p:nvSpPr>
-        <p:spPr/>
-        <p:txBody>
-          <a:bodyPr/>
-          <a:lstStyle/>
-          <a:p>
-            <a:pPr lvl="0" indent="0" marL="0">
-              <a:buNone/>
-            </a:pPr>
-            <a:r>
-              <a:rPr/>
-              <a:t>What </a:t>
-            </a:r>
-            <a:r>
-              <a:rPr i="1"/>
-              <a:t>is</a:t>
-            </a:r>
-            <a:r>
-              <a:rPr/>
-              <a:t> learning?</a:t>
-            </a:r>
-          </a:p>
-        </p:txBody>
-      </p:sp>
-      <p:sp>
-        <p:nvSpPr>
-          <p:cNvPr id="3" name="Content Placeholder 2"/>
-          <p:cNvSpPr>
-            <a:spLocks noGrp="1"/>
-          </p:cNvSpPr>
-          <p:nvPr>
-            <p:ph idx="1"/>
-          </p:nvPr>
-        </p:nvSpPr>
-        <p:spPr/>
-        <p:txBody>
-          <a:bodyPr/>
-          <a:lstStyle/>
-          <a:p>
-            <a:pPr lvl="0" indent="0" marL="0">
-              <a:buNone/>
-            </a:pPr>
-            <a:r>
-              <a:rPr/>
-              <a:t> </a:t>
-            </a:r>
-          </a:p>
-          <a:p>
-            <a:pPr lvl="0" indent="0" marL="0">
-              <a:buNone/>
-            </a:pPr>
-            <a:r>
-              <a:rPr/>
-              <a:t>“…a </a:t>
-            </a:r>
-            <a:r>
-              <a:rPr b="1"/>
-              <a:t>process</a:t>
-            </a:r>
-            <a:r>
-              <a:rPr/>
-              <a:t> that leads to </a:t>
-            </a:r>
-            <a:r>
-              <a:rPr b="1"/>
-              <a:t>change</a:t>
-            </a:r>
-            <a:r>
-              <a:rPr/>
-              <a:t>, which occurs as a result of </a:t>
-            </a:r>
-            <a:r>
-              <a:rPr b="1"/>
-              <a:t>experience</a:t>
-            </a:r>
-            <a:r>
-              <a:rPr/>
-              <a:t> and increases the potential for improved performance and </a:t>
-            </a:r>
-            <a:r>
-              <a:rPr b="1"/>
-              <a:t>future learning</a:t>
-            </a:r>
-            <a:r>
-              <a:rPr/>
-              <a:t>”</a:t>
-            </a:r>
-          </a:p>
-          <a:p>
-            <a:pPr lvl="0" indent="0" marL="0">
-              <a:buNone/>
-            </a:pPr>
-            <a:r>
-              <a:rPr/>
-              <a:t>Ambrose, S. A., Bridges, M. W., DiPietro, M., Lovett, M. C., Norman, M. K., &amp; Mayer, R. E. (2023), page 2-3. Slide adapted from Laura Carter: “Evidence-based Training” </a:t>
-            </a:r>
-            <a:r>
-              <a:rPr>
-                <a:hlinkClick r:id="rId3"/>
-              </a:rPr>
-              <a:t>https://zenodo.org/records/18905547</a:t>
-            </a:r>
-            <a:r>
-              <a:rPr/>
-              <a:t>. Slide originally licenced under CC BY 4.0: </a:t>
-            </a:r>
-            <a:r>
-              <a:rPr>
-                <a:hlinkClick r:id="rId4"/>
-              </a:rPr>
-              <a:t>https://creativecommons.org/licenses/by/4.0/</a:t>
-            </a:r>
-          </a:p>
-        </p:txBody>
-      </p:sp>
-    </p:spTree>
-  </p:cSld>
-</p:sld>
-</file>
-
-<file path=ppt/slides/slide22.xml><?xml version="1.0" encoding="utf-8"?>
 <p:sld xmlns:a="http://schemas.openxmlformats.org/drawingml/2006/main" xmlns:r="http://schemas.openxmlformats.org/officeDocument/2006/relationships" xmlns:p="http://schemas.openxmlformats.org/presentationml/2006/main">
   <p:cSld>
     <p:spTree>
@@ -11401,7 +11329,7 @@
 </p:sld>
 </file>
 
-<file path=ppt/slides/slide23.xml><?xml version="1.0" encoding="utf-8"?>
+<file path=ppt/slides/slide22.xml><?xml version="1.0" encoding="utf-8"?>
 <p:sld xmlns:a="http://schemas.openxmlformats.org/drawingml/2006/main" xmlns:r="http://schemas.openxmlformats.org/officeDocument/2006/relationships" xmlns:p="http://schemas.openxmlformats.org/presentationml/2006/main">
   <p:cSld>
     <p:spTree>
@@ -11511,7 +11439,7 @@
 </p:sld>
 </file>
 
-<file path=ppt/slides/slide24.xml><?xml version="1.0" encoding="utf-8"?>
+<file path=ppt/slides/slide23.xml><?xml version="1.0" encoding="utf-8"?>
 <p:sld xmlns:a="http://schemas.openxmlformats.org/drawingml/2006/main" xmlns:r="http://schemas.openxmlformats.org/officeDocument/2006/relationships" xmlns:p="http://schemas.openxmlformats.org/presentationml/2006/main">
   <p:cSld>
     <p:spTree>
@@ -11800,7 +11728,7 @@
 </p:sld>
 </file>
 
-<file path=ppt/slides/slide25.xml><?xml version="1.0" encoding="utf-8"?>
+<file path=ppt/slides/slide24.xml><?xml version="1.0" encoding="utf-8"?>
 <p:sld xmlns:a="http://schemas.openxmlformats.org/drawingml/2006/main" xmlns:r="http://schemas.openxmlformats.org/officeDocument/2006/relationships" xmlns:p="http://schemas.openxmlformats.org/presentationml/2006/main">
   <p:cSld>
     <p:spTree>
@@ -11939,7 +11867,7 @@
 </p:sld>
 </file>
 
-<file path=ppt/slides/slide26.xml><?xml version="1.0" encoding="utf-8"?>
+<file path=ppt/slides/slide25.xml><?xml version="1.0" encoding="utf-8"?>
 <p:sld xmlns:a="http://schemas.openxmlformats.org/drawingml/2006/main" xmlns:r="http://schemas.openxmlformats.org/officeDocument/2006/relationships" xmlns:p="http://schemas.openxmlformats.org/presentationml/2006/main">
   <p:cSld>
     <p:spTree>
@@ -12016,7 +11944,7 @@
 </p:sld>
 </file>
 
-<file path=ppt/slides/slide27.xml><?xml version="1.0" encoding="utf-8"?>
+<file path=ppt/slides/slide26.xml><?xml version="1.0" encoding="utf-8"?>
 <p:sld xmlns:a="http://schemas.openxmlformats.org/drawingml/2006/main" xmlns:r="http://schemas.openxmlformats.org/officeDocument/2006/relationships" xmlns:p="http://schemas.openxmlformats.org/presentationml/2006/main">
   <p:cSld>
     <p:spTree>
@@ -12074,7 +12002,7 @@
 </p:sld>
 </file>
 
-<file path=ppt/slides/slide28.xml><?xml version="1.0" encoding="utf-8"?>
+<file path=ppt/slides/slide27.xml><?xml version="1.0" encoding="utf-8"?>
 <p:sld xmlns:a="http://schemas.openxmlformats.org/drawingml/2006/main" xmlns:r="http://schemas.openxmlformats.org/officeDocument/2006/relationships" xmlns:p="http://schemas.openxmlformats.org/presentationml/2006/main">
   <p:cSld>
     <p:spTree>
@@ -12151,6 +12079,64 @@
 </p:sld>
 </file>
 
+<file path=ppt/slides/slide28.xml><?xml version="1.0" encoding="utf-8"?>
+<p:sld xmlns:a="http://schemas.openxmlformats.org/drawingml/2006/main" xmlns:r="http://schemas.openxmlformats.org/officeDocument/2006/relationships" xmlns:p="http://schemas.openxmlformats.org/presentationml/2006/main">
+  <p:cSld>
+    <p:spTree>
+      <p:nvGrpSpPr>
+        <p:cNvPr id="1" name=""/>
+        <p:cNvGrpSpPr/>
+        <p:nvPr/>
+      </p:nvGrpSpPr>
+      <p:grpSpPr>
+        <a:xfrm>
+          <a:off x="0" y="0"/>
+          <a:ext cx="0" cy="0"/>
+          <a:chOff x="0" y="0"/>
+          <a:chExt cx="0" cy="0"/>
+        </a:xfrm>
+      </p:grpSpPr>
+      <p:sp>
+        <p:nvSpPr>
+          <p:cNvPr id="3" name="Content Placeholder 2"/>
+          <p:cNvSpPr>
+            <a:spLocks noGrp="1"/>
+          </p:cNvSpPr>
+          <p:nvPr>
+            <p:ph idx="1"/>
+          </p:nvPr>
+        </p:nvSpPr>
+        <p:spPr/>
+        <p:txBody>
+          <a:bodyPr/>
+          <a:lstStyle/>
+          <a:p>
+            <a:pPr lvl="0" indent="0" marL="0">
+              <a:buNone/>
+            </a:pPr>
+            <a:r>
+              <a:rPr/>
+              <a:t> </a:t>
+            </a:r>
+          </a:p>
+          <a:p>
+            <a:pPr lvl="0" indent="0" marL="0">
+              <a:buNone/>
+            </a:pPr>
+            <a:r>
+              <a:rPr>
+                <a:hlinkClick r:id="rId3"/>
+              </a:rPr>
+              <a:t>https://carpentries.github.io/instructor-training/04-expertise.html</a:t>
+            </a:r>
+          </a:p>
+        </p:txBody>
+      </p:sp>
+    </p:spTree>
+  </p:cSld>
+</p:sld>
+</file>
+
 <file path=ppt/slides/slide29.xml><?xml version="1.0" encoding="utf-8"?>
 <p:sld xmlns:a="http://schemas.openxmlformats.org/drawingml/2006/main" xmlns:r="http://schemas.openxmlformats.org/officeDocument/2006/relationships" xmlns:p="http://schemas.openxmlformats.org/presentationml/2006/main">
   <p:cSld>
@@ -12170,6 +12156,31 @@
       </p:grpSpPr>
       <p:sp>
         <p:nvSpPr>
+          <p:cNvPr id="2" name="Title 1"/>
+          <p:cNvSpPr>
+            <a:spLocks noGrp="1"/>
+          </p:cNvSpPr>
+          <p:nvPr>
+            <p:ph type="title"/>
+          </p:nvPr>
+        </p:nvSpPr>
+        <p:spPr/>
+        <p:txBody>
+          <a:bodyPr/>
+          <a:lstStyle/>
+          <a:p>
+            <a:pPr lvl="0" indent="0" marL="0">
+              <a:buNone/>
+            </a:pPr>
+            <a:r>
+              <a:rPr/>
+              <a:t>Your turn!</a:t>
+            </a:r>
+          </a:p>
+        </p:txBody>
+      </p:sp>
+      <p:sp>
+        <p:nvSpPr>
           <p:cNvPr id="3" name="Content Placeholder 2"/>
           <p:cNvSpPr>
             <a:spLocks noGrp="1"/>
@@ -12196,10 +12207,24 @@
               <a:buNone/>
             </a:pPr>
             <a:r>
-              <a:rPr>
-                <a:hlinkClick r:id="rId3"/>
-              </a:rPr>
-              <a:t>https://carpentries.github.io/instructor-training/04-expertise.html</a:t>
+              <a:rPr/>
+              <a:t>Pick a topic from open research (different from open access). </a:t>
+            </a:r>
+            <a:r>
+              <a:rPr b="1"/>
+              <a:t>Sketch out</a:t>
+            </a:r>
+            <a:r>
+              <a:rPr/>
+              <a:t> the mental model of a novice in comparison to a competent practitioner and an expert and </a:t>
+            </a:r>
+            <a:r>
+              <a:rPr b="1"/>
+              <a:t>provide concrete examples</a:t>
+            </a:r>
+            <a:r>
+              <a:rPr/>
+              <a:t> of how the organisation of knowledge differs among these three types of learners.</a:t>
             </a:r>
           </a:p>
         </p:txBody>
@@ -12246,7 +12271,7 @@
             </a:pPr>
             <a:r>
               <a:rPr/>
-              <a:t>Licence</a:t>
+              <a:t>Contribution statement</a:t>
             </a:r>
           </a:p>
         </p:txBody>
@@ -12274,43 +12299,69 @@
             <a:pPr lvl="0" indent="0" marL="0">
               <a:buNone/>
             </a:pPr>
-          </a:p>
-          <a:p>
-            <a:pPr lvl="0" indent="0" marL="0">
-              <a:buNone/>
-            </a:pPr>
-            <a:r>
-              <a:rPr/>
-              <a:t>This current work by Sarah von Grebmer zu Wolfsthurn, Sara Lil Middleton and Malika Ihle is licensed under a CC-BY-SA 4.0 </a:t>
+            <a:r>
+              <a:rPr b="1"/>
+              <a:t>Creator</a:t>
+            </a:r>
+            <a:r>
+              <a:rPr/>
+              <a:t>: Von Grebmer zu Wolfsthurn, Sarah ( </a:t>
             </a:r>
             <a:r>
               <a:rPr>
                 <a:hlinkClick r:id="rId3"/>
               </a:rPr>
-              <a:t>Creative Commons Attribution 4.0 International SA License</a:t>
-            </a:r>
-            <a:r>
-              <a:rPr/>
-              <a:t>. It permits unrestricted re-use, distribution, and reproduction in any medium, provided the original work is properly cited. If you remix, transform, or build upon the material, you must distribute your contributions under the same license as the original.</a:t>
-            </a:r>
-          </a:p>
-          <a:p>
-            <a:pPr lvl="0" indent="0" marL="0">
-              <a:buNone/>
-            </a:pPr>
-            <a:r>
-              <a:rPr/>
-              <a:t>Code snippets are dedicated to the public domain and licenced under a CC0 1.0 </a:t>
+              <a:t>0000-0002-6413-3895</a:t>
+            </a:r>
+            <a:r>
+              <a:rPr/>
+              <a:t>)</a:t>
+            </a:r>
+          </a:p>
+          <a:p>
+            <a:pPr lvl="0" indent="0" marL="0">
+              <a:buNone/>
+            </a:pPr>
+            <a:r>
+              <a:rPr b="1"/>
+              <a:t>Reviewer</a:t>
+            </a:r>
+            <a:r>
+              <a:rPr/>
+              <a:t>: Middleton, Sara (</a:t>
             </a:r>
             <a:r>
               <a:rPr>
                 <a:hlinkClick r:id="rId4"/>
               </a:rPr>
-              <a:t>Creative Commons Universal Licence</a:t>
-            </a:r>
-            <a:r>
-              <a:rPr/>
-              <a:t>. You may use, modify, distribute, and sell the code snippets for any purpose, without permission or attribution. The code snippets are provided “as is”, without warranty of any kind.</a:t>
+              <a:t>0000-0001-5307-8029</a:t>
+            </a:r>
+            <a:r>
+              <a:rPr/>
+              <a:t>)</a:t>
+            </a:r>
+          </a:p>
+          <a:p>
+            <a:pPr lvl="0" indent="0" marL="0">
+              <a:buNone/>
+            </a:pPr>
+            <a:r>
+              <a:rPr b="1"/>
+              <a:t>Consultant</a:t>
+            </a:r>
+            <a:r>
+              <a:rPr/>
+              <a:t>: Ihle, Malika ( </a:t>
+            </a:r>
+            <a:r>
+              <a:rPr>
+                <a:hlinkClick r:id="rId5"/>
+              </a:rPr>
+              <a:t>0000-0002-3242-5981</a:t>
+            </a:r>
+            <a:r>
+              <a:rPr/>
+              <a:t>)</a:t>
             </a:r>
           </a:p>
         </p:txBody>
@@ -12357,7 +12408,7 @@
             </a:pPr>
             <a:r>
               <a:rPr/>
-              <a:t>Your turn!</a:t>
+              <a:t>What would help you organize your knowledge?</a:t>
             </a:r>
           </a:p>
         </p:txBody>
@@ -12391,23 +12442,32 @@
             </a:pPr>
             <a:r>
               <a:rPr/>
-              <a:t>Pick a topic from open research (different from open access). </a:t>
+              <a:t>Is there something that you are </a:t>
             </a:r>
             <a:r>
               <a:rPr b="1"/>
-              <a:t>Sketch out</a:t>
-            </a:r>
-            <a:r>
-              <a:rPr/>
-              <a:t> the mental model of a novice in comparison to a competent practitioner and an expert and </a:t>
+              <a:t>currently learning how to do</a:t>
+            </a:r>
+            <a:r>
+              <a:rPr/>
+              <a:t>?</a:t>
+            </a:r>
+          </a:p>
+          <a:p>
+            <a:pPr lvl="0" indent="0" marL="0">
+              <a:buNone/>
+            </a:pPr>
+            <a:r>
+              <a:rPr/>
+              <a:t>Can you identify things that would help you with </a:t>
             </a:r>
             <a:r>
               <a:rPr b="1"/>
-              <a:t>provide concrete examples</a:t>
-            </a:r>
-            <a:r>
-              <a:rPr/>
-              <a:t> of how the organisation of knowledge differs among these three types of learners.</a:t>
+              <a:t>organizing your mental model</a:t>
+            </a:r>
+            <a:r>
+              <a:rPr/>
+              <a:t> in a course or workshop?</a:t>
             </a:r>
           </a:p>
         </p:txBody>
@@ -12418,112 +12478,6 @@
 </file>
 
 <file path=ppt/slides/slide31.xml><?xml version="1.0" encoding="utf-8"?>
-<p:sld xmlns:a="http://schemas.openxmlformats.org/drawingml/2006/main" xmlns:r="http://schemas.openxmlformats.org/officeDocument/2006/relationships" xmlns:p="http://schemas.openxmlformats.org/presentationml/2006/main">
-  <p:cSld>
-    <p:spTree>
-      <p:nvGrpSpPr>
-        <p:cNvPr id="1" name=""/>
-        <p:cNvGrpSpPr/>
-        <p:nvPr/>
-      </p:nvGrpSpPr>
-      <p:grpSpPr>
-        <a:xfrm>
-          <a:off x="0" y="0"/>
-          <a:ext cx="0" cy="0"/>
-          <a:chOff x="0" y="0"/>
-          <a:chExt cx="0" cy="0"/>
-        </a:xfrm>
-      </p:grpSpPr>
-      <p:sp>
-        <p:nvSpPr>
-          <p:cNvPr id="2" name="Title 1"/>
-          <p:cNvSpPr>
-            <a:spLocks noGrp="1"/>
-          </p:cNvSpPr>
-          <p:nvPr>
-            <p:ph type="title"/>
-          </p:nvPr>
-        </p:nvSpPr>
-        <p:spPr/>
-        <p:txBody>
-          <a:bodyPr/>
-          <a:lstStyle/>
-          <a:p>
-            <a:pPr lvl="0" indent="0" marL="0">
-              <a:buNone/>
-            </a:pPr>
-            <a:r>
-              <a:rPr/>
-              <a:t>What would help you organize your knowledge?</a:t>
-            </a:r>
-          </a:p>
-        </p:txBody>
-      </p:sp>
-      <p:sp>
-        <p:nvSpPr>
-          <p:cNvPr id="3" name="Content Placeholder 2"/>
-          <p:cNvSpPr>
-            <a:spLocks noGrp="1"/>
-          </p:cNvSpPr>
-          <p:nvPr>
-            <p:ph idx="1"/>
-          </p:nvPr>
-        </p:nvSpPr>
-        <p:spPr/>
-        <p:txBody>
-          <a:bodyPr/>
-          <a:lstStyle/>
-          <a:p>
-            <a:pPr lvl="0" indent="0" marL="0">
-              <a:buNone/>
-            </a:pPr>
-            <a:r>
-              <a:rPr/>
-              <a:t> </a:t>
-            </a:r>
-          </a:p>
-          <a:p>
-            <a:pPr lvl="0" indent="0" marL="0">
-              <a:buNone/>
-            </a:pPr>
-            <a:r>
-              <a:rPr/>
-              <a:t>Is there something that you are </a:t>
-            </a:r>
-            <a:r>
-              <a:rPr b="1"/>
-              <a:t>currently learning how to do</a:t>
-            </a:r>
-            <a:r>
-              <a:rPr/>
-              <a:t>?</a:t>
-            </a:r>
-          </a:p>
-          <a:p>
-            <a:pPr lvl="0" indent="0" marL="0">
-              <a:buNone/>
-            </a:pPr>
-            <a:r>
-              <a:rPr/>
-              <a:t>Can you identify things that would help you with </a:t>
-            </a:r>
-            <a:r>
-              <a:rPr b="1"/>
-              <a:t>organizing your mental model</a:t>
-            </a:r>
-            <a:r>
-              <a:rPr/>
-              <a:t> in a course or workshop?</a:t>
-            </a:r>
-          </a:p>
-        </p:txBody>
-      </p:sp>
-    </p:spTree>
-  </p:cSld>
-</p:sld>
-</file>
-
-<file path=ppt/slides/slide32.xml><?xml version="1.0" encoding="utf-8"?>
 <p:sld xmlns:a="http://schemas.openxmlformats.org/drawingml/2006/main" xmlns:r="http://schemas.openxmlformats.org/officeDocument/2006/relationships" xmlns:p="http://schemas.openxmlformats.org/presentationml/2006/main">
   <p:cSld>
     <p:spTree>
@@ -13024,7 +12978,7 @@
 </p:sld>
 </file>
 
-<file path=ppt/slides/slide33.xml><?xml version="1.0" encoding="utf-8"?>
+<file path=ppt/slides/slide32.xml><?xml version="1.0" encoding="utf-8"?>
 <p:sld xmlns:a="http://schemas.openxmlformats.org/drawingml/2006/main" xmlns:r="http://schemas.openxmlformats.org/officeDocument/2006/relationships" xmlns:p="http://schemas.openxmlformats.org/presentationml/2006/main">
   <p:cSld>
     <p:spTree>
@@ -13131,6 +13085,53 @@
 </p:sld>
 </file>
 
+<file path=ppt/slides/slide33.xml><?xml version="1.0" encoding="utf-8"?>
+<p:sld xmlns:a="http://schemas.openxmlformats.org/drawingml/2006/main" xmlns:r="http://schemas.openxmlformats.org/officeDocument/2006/relationships" xmlns:p="http://schemas.openxmlformats.org/presentationml/2006/main">
+  <p:cSld>
+    <p:spTree>
+      <p:nvGrpSpPr>
+        <p:cNvPr id="1" name=""/>
+        <p:cNvGrpSpPr/>
+        <p:nvPr/>
+      </p:nvGrpSpPr>
+      <p:grpSpPr>
+        <a:xfrm>
+          <a:off x="0" y="0"/>
+          <a:ext cx="0" cy="0"/>
+          <a:chOff x="0" y="0"/>
+          <a:chExt cx="0" cy="0"/>
+        </a:xfrm>
+      </p:grpSpPr>
+      <p:sp>
+        <p:nvSpPr>
+          <p:cNvPr id="3" name="Content Placeholder 2"/>
+          <p:cNvSpPr>
+            <a:spLocks noGrp="1"/>
+          </p:cNvSpPr>
+          <p:nvPr>
+            <p:ph idx="1"/>
+          </p:nvPr>
+        </p:nvSpPr>
+        <p:spPr/>
+        <p:txBody>
+          <a:bodyPr/>
+          <a:lstStyle/>
+          <a:p>
+            <a:pPr lvl="0" indent="0" marL="0">
+              <a:buNone/>
+            </a:pPr>
+            <a:r>
+              <a:rPr/>
+              <a:t>Biggs, 1996</a:t>
+            </a:r>
+          </a:p>
+        </p:txBody>
+      </p:sp>
+    </p:spTree>
+  </p:cSld>
+</p:sld>
+</file>
+
 <file path=ppt/slides/slide34.xml><?xml version="1.0" encoding="utf-8"?>
 <p:sld xmlns:a="http://schemas.openxmlformats.org/drawingml/2006/main" xmlns:r="http://schemas.openxmlformats.org/officeDocument/2006/relationships" xmlns:p="http://schemas.openxmlformats.org/presentationml/2006/main">
   <p:cSld>
@@ -13150,6 +13151,31 @@
       </p:grpSpPr>
       <p:sp>
         <p:nvSpPr>
+          <p:cNvPr id="2" name="Title 1"/>
+          <p:cNvSpPr>
+            <a:spLocks noGrp="1"/>
+          </p:cNvSpPr>
+          <p:nvPr>
+            <p:ph type="title"/>
+          </p:nvPr>
+        </p:nvSpPr>
+        <p:spPr/>
+        <p:txBody>
+          <a:bodyPr/>
+          <a:lstStyle/>
+          <a:p>
+            <a:pPr lvl="0" indent="0" marL="0">
+              <a:buNone/>
+            </a:pPr>
+            <a:r>
+              <a:rPr/>
+              <a:t>Your turn!</a:t>
+            </a:r>
+          </a:p>
+        </p:txBody>
+      </p:sp>
+      <p:sp>
+        <p:nvSpPr>
           <p:cNvPr id="3" name="Content Placeholder 2"/>
           <p:cNvSpPr>
             <a:spLocks noGrp="1"/>
@@ -13168,7 +13194,46 @@
             </a:pPr>
             <a:r>
               <a:rPr/>
-              <a:t>Biggs, 1996</a:t>
+              <a:t> </a:t>
+            </a:r>
+          </a:p>
+          <a:p>
+            <a:pPr lvl="0" indent="0" marL="0">
+              <a:buNone/>
+            </a:pPr>
+            <a:r>
+              <a:rPr/>
+              <a:t>Match each </a:t>
+            </a:r>
+            <a:r>
+              <a:rPr b="1"/>
+              <a:t>learning goal</a:t>
+            </a:r>
+            <a:r>
+              <a:rPr/>
+              <a:t> with an </a:t>
+            </a:r>
+            <a:r>
+              <a:rPr b="1"/>
+              <a:t>assessment type</a:t>
+            </a:r>
+            <a:r>
+              <a:rPr/>
+              <a:t> and reflect the following:</a:t>
+            </a:r>
+          </a:p>
+          <a:p>
+            <a:pPr lvl="0"/>
+            <a:r>
+              <a:rPr/>
+              <a:t>Why does the assessment type fit the specific learning goal?</a:t>
+            </a:r>
+          </a:p>
+          <a:p>
+            <a:pPr lvl="0"/>
+            <a:r>
+              <a:rPr/>
+              <a:t>What teaching activities can you think of that would align with the learning goal and the corresponding assessment type?</a:t>
             </a:r>
           </a:p>
         </p:txBody>
@@ -13215,71 +13280,7 @@
             </a:pPr>
             <a:r>
               <a:rPr/>
-              <a:t>Your turn!</a:t>
-            </a:r>
-          </a:p>
-        </p:txBody>
-      </p:sp>
-      <p:sp>
-        <p:nvSpPr>
-          <p:cNvPr id="3" name="Content Placeholder 2"/>
-          <p:cNvSpPr>
-            <a:spLocks noGrp="1"/>
-          </p:cNvSpPr>
-          <p:nvPr>
-            <p:ph idx="1"/>
-          </p:nvPr>
-        </p:nvSpPr>
-        <p:spPr/>
-        <p:txBody>
-          <a:bodyPr/>
-          <a:lstStyle/>
-          <a:p>
-            <a:pPr lvl="0" indent="0" marL="0">
-              <a:buNone/>
-            </a:pPr>
-            <a:r>
-              <a:rPr/>
-              <a:t> </a:t>
-            </a:r>
-          </a:p>
-          <a:p>
-            <a:pPr lvl="0" indent="0" marL="0">
-              <a:buNone/>
-            </a:pPr>
-            <a:r>
-              <a:rPr/>
-              <a:t>Match each </a:t>
-            </a:r>
-            <a:r>
-              <a:rPr b="1"/>
-              <a:t>learning goal</a:t>
-            </a:r>
-            <a:r>
-              <a:rPr/>
-              <a:t> with an </a:t>
-            </a:r>
-            <a:r>
-              <a:rPr b="1"/>
-              <a:t>assessment type</a:t>
-            </a:r>
-            <a:r>
-              <a:rPr/>
-              <a:t> and reflect the following:</a:t>
-            </a:r>
-          </a:p>
-          <a:p>
-            <a:pPr lvl="0"/>
-            <a:r>
-              <a:rPr/>
-              <a:t>Why does the assessment type fit the specific learning goal?</a:t>
-            </a:r>
-          </a:p>
-          <a:p>
-            <a:pPr lvl="0"/>
-            <a:r>
-              <a:rPr/>
-              <a:t>What teaching activities can you think of that would align with the learning goal and the corresponding assessment type?</a:t>
+              <a:t>Practical activity</a:t>
             </a:r>
           </a:p>
         </p:txBody>
@@ -13326,7 +13327,7 @@
             </a:pPr>
             <a:r>
               <a:rPr/>
-              <a:t>Practical activity</a:t>
+              <a:t>Setting learning objectives</a:t>
             </a:r>
           </a:p>
         </p:txBody>
@@ -13337,53 +13338,6 @@
 </file>
 
 <file path=ppt/slides/slide37.xml><?xml version="1.0" encoding="utf-8"?>
-<p:sld xmlns:a="http://schemas.openxmlformats.org/drawingml/2006/main" xmlns:r="http://schemas.openxmlformats.org/officeDocument/2006/relationships" xmlns:p="http://schemas.openxmlformats.org/presentationml/2006/main">
-  <p:cSld>
-    <p:spTree>
-      <p:nvGrpSpPr>
-        <p:cNvPr id="1" name=""/>
-        <p:cNvGrpSpPr/>
-        <p:nvPr/>
-      </p:nvGrpSpPr>
-      <p:grpSpPr>
-        <a:xfrm>
-          <a:off x="0" y="0"/>
-          <a:ext cx="0" cy="0"/>
-          <a:chOff x="0" y="0"/>
-          <a:chExt cx="0" cy="0"/>
-        </a:xfrm>
-      </p:grpSpPr>
-      <p:sp>
-        <p:nvSpPr>
-          <p:cNvPr id="2" name="Title 1"/>
-          <p:cNvSpPr>
-            <a:spLocks noGrp="1"/>
-          </p:cNvSpPr>
-          <p:nvPr>
-            <p:ph type="title"/>
-          </p:nvPr>
-        </p:nvSpPr>
-        <p:spPr/>
-        <p:txBody>
-          <a:bodyPr/>
-          <a:lstStyle/>
-          <a:p>
-            <a:pPr lvl="0" indent="0" marL="0">
-              <a:buNone/>
-            </a:pPr>
-            <a:r>
-              <a:rPr/>
-              <a:t>Setting learning objectives</a:t>
-            </a:r>
-          </a:p>
-        </p:txBody>
-      </p:sp>
-    </p:spTree>
-  </p:cSld>
-</p:sld>
-</file>
-
-<file path=ppt/slides/slide38.xml><?xml version="1.0" encoding="utf-8"?>
 <p:sld xmlns:a="http://schemas.openxmlformats.org/drawingml/2006/main" xmlns:r="http://schemas.openxmlformats.org/officeDocument/2006/relationships" xmlns:p="http://schemas.openxmlformats.org/presentationml/2006/main">
   <p:cSld>
     <p:spTree>
@@ -13460,7 +13414,7 @@
 </p:sld>
 </file>
 
-<file path=ppt/slides/slide39.xml><?xml version="1.0" encoding="utf-8"?>
+<file path=ppt/slides/slide38.xml><?xml version="1.0" encoding="utf-8"?>
 <p:sld xmlns:a="http://schemas.openxmlformats.org/drawingml/2006/main" xmlns:r="http://schemas.openxmlformats.org/officeDocument/2006/relationships" xmlns:p="http://schemas.openxmlformats.org/presentationml/2006/main">
   <p:cSld>
     <p:spTree>
@@ -13572,144 +13526,7 @@
 </p:sld>
 </file>
 
-<file path=ppt/slides/slide4.xml><?xml version="1.0" encoding="utf-8"?>
-<p:sld xmlns:a="http://schemas.openxmlformats.org/drawingml/2006/main" xmlns:r="http://schemas.openxmlformats.org/officeDocument/2006/relationships" xmlns:p="http://schemas.openxmlformats.org/presentationml/2006/main">
-  <p:cSld>
-    <p:spTree>
-      <p:nvGrpSpPr>
-        <p:cNvPr id="1" name=""/>
-        <p:cNvGrpSpPr/>
-        <p:nvPr/>
-      </p:nvGrpSpPr>
-      <p:grpSpPr>
-        <a:xfrm>
-          <a:off x="0" y="0"/>
-          <a:ext cx="0" cy="0"/>
-          <a:chOff x="0" y="0"/>
-          <a:chExt cx="0" cy="0"/>
-        </a:xfrm>
-      </p:grpSpPr>
-      <p:sp>
-        <p:nvSpPr>
-          <p:cNvPr id="2" name="Title 1"/>
-          <p:cNvSpPr>
-            <a:spLocks noGrp="1"/>
-          </p:cNvSpPr>
-          <p:nvPr>
-            <p:ph type="title"/>
-          </p:nvPr>
-        </p:nvSpPr>
-        <p:spPr/>
-        <p:txBody>
-          <a:bodyPr/>
-          <a:lstStyle/>
-          <a:p>
-            <a:pPr lvl="0" indent="0" marL="0">
-              <a:buNone/>
-            </a:pPr>
-            <a:r>
-              <a:rPr/>
-              <a:t>Contribution statement</a:t>
-            </a:r>
-          </a:p>
-        </p:txBody>
-      </p:sp>
-      <p:sp>
-        <p:nvSpPr>
-          <p:cNvPr id="3" name="Content Placeholder 2"/>
-          <p:cNvSpPr>
-            <a:spLocks noGrp="1"/>
-          </p:cNvSpPr>
-          <p:nvPr>
-            <p:ph idx="1"/>
-          </p:nvPr>
-        </p:nvSpPr>
-        <p:spPr/>
-        <p:txBody>
-          <a:bodyPr/>
-          <a:lstStyle/>
-          <a:p>
-            <a:pPr lvl="0" indent="0" marL="0">
-              <a:buNone/>
-            </a:pPr>
-          </a:p>
-          <a:p>
-            <a:pPr lvl="0" indent="0" marL="0">
-              <a:buNone/>
-            </a:pPr>
-            <a:r>
-              <a:rPr b="1"/>
-              <a:t>Creator</a:t>
-            </a:r>
-            <a:r>
-              <a:rPr/>
-              <a:t>: Von Grebmer zu Wolfsthurn, Sarah ( </a:t>
-            </a:r>
-            <a:r>
-              <a:rPr>
-                <a:hlinkClick r:id="rId3"/>
-              </a:rPr>
-              <a:t>0000-0002-6413-3895</a:t>
-            </a:r>
-            <a:r>
-              <a:rPr/>
-              <a:t>)</a:t>
-            </a:r>
-          </a:p>
-          <a:p>
-            <a:pPr lvl="0" indent="0" marL="0">
-              <a:buNone/>
-            </a:pPr>
-            <a:r>
-              <a:rPr b="1"/>
-              <a:t>Reviewer</a:t>
-            </a:r>
-            <a:r>
-              <a:rPr/>
-              <a:t>: Middleton, Sara (</a:t>
-            </a:r>
-            <a:r>
-              <a:rPr>
-                <a:hlinkClick r:id="rId4"/>
-              </a:rPr>
-              <a:t>0000-0001-5307-8029</a:t>
-            </a:r>
-            <a:r>
-              <a:rPr/>
-              <a:t>)</a:t>
-            </a:r>
-          </a:p>
-          <a:p>
-            <a:pPr lvl="0" indent="0" marL="0">
-              <a:buNone/>
-            </a:pPr>
-            <a:r>
-              <a:rPr b="1"/>
-              <a:t>Consultant</a:t>
-            </a:r>
-            <a:r>
-              <a:rPr/>
-              <a:t>: Ihle, Malika ( </a:t>
-            </a:r>
-            <a:r>
-              <a:rPr>
-                <a:hlinkClick r:id="rId5"/>
-              </a:rPr>
-              <a:t>0000-0002-3242-5981</a:t>
-            </a:r>
-            <a:r>
-              <a:rPr/>
-              <a:t>)</a:t>
-            </a:r>
-          </a:p>
-        </p:txBody>
-      </p:sp>
-    </p:spTree>
-  </p:cSld>
-</p:sld>
-</file>
-
-<file path=ppt/slides/slide40.xml><?xml version="1.0" encoding="utf-8"?>
+<file path=ppt/slides/slide39.xml><?xml version="1.0" encoding="utf-8"?>
 <p:sld xmlns:a="http://schemas.openxmlformats.org/drawingml/2006/main" xmlns:r="http://schemas.openxmlformats.org/officeDocument/2006/relationships" xmlns:p="http://schemas.openxmlformats.org/presentationml/2006/main">
   <p:cSld>
     <p:spTree>
@@ -14000,7 +13817,88 @@
 </p:sld>
 </file>
 
-<file path=ppt/slides/slide41.xml><?xml version="1.0" encoding="utf-8"?>
+<file path=ppt/slides/slide4.xml><?xml version="1.0" encoding="utf-8"?>
+<p:sld xmlns:a="http://schemas.openxmlformats.org/drawingml/2006/main" xmlns:r="http://schemas.openxmlformats.org/officeDocument/2006/relationships" xmlns:p="http://schemas.openxmlformats.org/presentationml/2006/main">
+  <p:cSld>
+    <p:spTree>
+      <p:nvGrpSpPr>
+        <p:cNvPr id="1" name=""/>
+        <p:cNvGrpSpPr/>
+        <p:nvPr/>
+      </p:nvGrpSpPr>
+      <p:grpSpPr>
+        <a:xfrm>
+          <a:off x="0" y="0"/>
+          <a:ext cx="0" cy="0"/>
+          <a:chOff x="0" y="0"/>
+          <a:chExt cx="0" cy="0"/>
+        </a:xfrm>
+      </p:grpSpPr>
+      <p:sp>
+        <p:nvSpPr>
+          <p:cNvPr id="2" name="Title 1"/>
+          <p:cNvSpPr>
+            <a:spLocks noGrp="1"/>
+          </p:cNvSpPr>
+          <p:nvPr>
+            <p:ph type="title"/>
+          </p:nvPr>
+        </p:nvSpPr>
+        <p:spPr/>
+        <p:txBody>
+          <a:bodyPr/>
+          <a:lstStyle/>
+          <a:p>
+            <a:pPr lvl="0" indent="0" marL="0">
+              <a:buNone/>
+            </a:pPr>
+            <a:r>
+              <a:rPr/>
+              <a:t>Prerequisites</a:t>
+            </a:r>
+          </a:p>
+        </p:txBody>
+      </p:sp>
+      <p:sp>
+        <p:nvSpPr>
+          <p:cNvPr id="3" name="Content Placeholder 2"/>
+          <p:cNvSpPr>
+            <a:spLocks noGrp="1"/>
+          </p:cNvSpPr>
+          <p:nvPr>
+            <p:ph idx="1"/>
+          </p:nvPr>
+        </p:nvSpPr>
+        <p:spPr/>
+        <p:txBody>
+          <a:bodyPr/>
+          <a:lstStyle/>
+          <a:p>
+            <a:pPr lvl="0" indent="0" marL="1270000">
+              <a:buNone/>
+            </a:pPr>
+            <a:r>
+              <a:rPr sz="2000" b="1"/>
+              <a:t>Important</a:t>
+            </a:r>
+          </a:p>
+          <a:p>
+            <a:pPr lvl="0" indent="0" marL="1270000">
+              <a:buNone/>
+            </a:pPr>
+            <a:r>
+              <a:rPr sz="2000"/>
+              <a:t>Before completing this submodule, please carefully read about the prerequisites.</a:t>
+            </a:r>
+          </a:p>
+        </p:txBody>
+      </p:sp>
+    </p:spTree>
+  </p:cSld>
+</p:sld>
+</file>
+
+<file path=ppt/slides/slide40.xml><?xml version="1.0" encoding="utf-8"?>
 <p:sld xmlns:a="http://schemas.openxmlformats.org/drawingml/2006/main" xmlns:r="http://schemas.openxmlformats.org/officeDocument/2006/relationships" xmlns:p="http://schemas.openxmlformats.org/presentationml/2006/main">
   <p:cSld>
     <p:spTree>
@@ -14460,7 +14358,7 @@
 </p:sld>
 </file>
 
-<file path=ppt/slides/slide42.xml><?xml version="1.0" encoding="utf-8"?>
+<file path=ppt/slides/slide41.xml><?xml version="1.0" encoding="utf-8"?>
 <p:sld xmlns:a="http://schemas.openxmlformats.org/drawingml/2006/main" xmlns:r="http://schemas.openxmlformats.org/officeDocument/2006/relationships" xmlns:p="http://schemas.openxmlformats.org/presentationml/2006/main">
   <p:cSld>
     <p:spTree>
@@ -14537,7 +14435,7 @@
 </p:sld>
 </file>
 
-<file path=ppt/slides/slide43.xml><?xml version="1.0" encoding="utf-8"?>
+<file path=ppt/slides/slide42.xml><?xml version="1.0" encoding="utf-8"?>
 <p:sld xmlns:a="http://schemas.openxmlformats.org/drawingml/2006/main" xmlns:r="http://schemas.openxmlformats.org/officeDocument/2006/relationships" xmlns:p="http://schemas.openxmlformats.org/presentationml/2006/main">
   <p:cSld>
     <p:spTree>
@@ -15001,7 +14899,7 @@
 </p:sld>
 </file>
 
-<file path=ppt/slides/slide44.xml><?xml version="1.0" encoding="utf-8"?>
+<file path=ppt/slides/slide43.xml><?xml version="1.0" encoding="utf-8"?>
 <p:sld xmlns:a="http://schemas.openxmlformats.org/drawingml/2006/main" xmlns:r="http://schemas.openxmlformats.org/officeDocument/2006/relationships" xmlns:p="http://schemas.openxmlformats.org/presentationml/2006/main">
   <p:cSld>
     <p:spTree>
@@ -15078,7 +14976,7 @@
 </p:sld>
 </file>
 
-<file path=ppt/slides/slide45.xml><?xml version="1.0" encoding="utf-8"?>
+<file path=ppt/slides/slide44.xml><?xml version="1.0" encoding="utf-8"?>
 <p:sld xmlns:a="http://schemas.openxmlformats.org/drawingml/2006/main" xmlns:r="http://schemas.openxmlformats.org/officeDocument/2006/relationships" xmlns:p="http://schemas.openxmlformats.org/presentationml/2006/main">
   <p:cSld>
     <p:spTree>
@@ -15478,7 +15376,7 @@
 </p:sld>
 </file>
 
-<file path=ppt/slides/slide46.xml><?xml version="1.0" encoding="utf-8"?>
+<file path=ppt/slides/slide45.xml><?xml version="1.0" encoding="utf-8"?>
 <p:sld xmlns:a="http://schemas.openxmlformats.org/drawingml/2006/main" xmlns:r="http://schemas.openxmlformats.org/officeDocument/2006/relationships" xmlns:p="http://schemas.openxmlformats.org/presentationml/2006/main">
   <p:cSld>
     <p:spTree>
@@ -15555,7 +15453,7 @@
 </p:sld>
 </file>
 
-<file path=ppt/slides/slide47.xml><?xml version="1.0" encoding="utf-8"?>
+<file path=ppt/slides/slide46.xml><?xml version="1.0" encoding="utf-8"?>
 <p:sld xmlns:a="http://schemas.openxmlformats.org/drawingml/2006/main" xmlns:r="http://schemas.openxmlformats.org/officeDocument/2006/relationships" xmlns:p="http://schemas.openxmlformats.org/presentationml/2006/main">
   <p:cSld>
     <p:spTree>
@@ -15992,7 +15890,7 @@
 </p:sld>
 </file>
 
-<file path=ppt/slides/slide48.xml><?xml version="1.0" encoding="utf-8"?>
+<file path=ppt/slides/slide47.xml><?xml version="1.0" encoding="utf-8"?>
 <p:sld xmlns:a="http://schemas.openxmlformats.org/drawingml/2006/main" xmlns:r="http://schemas.openxmlformats.org/officeDocument/2006/relationships" xmlns:p="http://schemas.openxmlformats.org/presentationml/2006/main">
   <p:cSld>
     <p:spTree>
@@ -16106,7 +16004,7 @@
 </p:sld>
 </file>
 
-<file path=ppt/slides/slide49.xml><?xml version="1.0" encoding="utf-8"?>
+<file path=ppt/slides/slide48.xml><?xml version="1.0" encoding="utf-8"?>
 <p:sld xmlns:a="http://schemas.openxmlformats.org/drawingml/2006/main" xmlns:r="http://schemas.openxmlformats.org/officeDocument/2006/relationships" xmlns:p="http://schemas.openxmlformats.org/presentationml/2006/main">
   <p:cSld>
     <p:spTree>
@@ -16183,6 +16081,127 @@
 </p:sld>
 </file>
 
+<file path=ppt/slides/slide49.xml><?xml version="1.0" encoding="utf-8"?>
+<p:sld xmlns:a="http://schemas.openxmlformats.org/drawingml/2006/main" xmlns:r="http://schemas.openxmlformats.org/officeDocument/2006/relationships" xmlns:p="http://schemas.openxmlformats.org/presentationml/2006/main">
+  <p:cSld>
+    <p:spTree>
+      <p:nvGrpSpPr>
+        <p:cNvPr id="1" name=""/>
+        <p:cNvGrpSpPr/>
+        <p:nvPr/>
+      </p:nvGrpSpPr>
+      <p:grpSpPr>
+        <a:xfrm>
+          <a:off x="0" y="0"/>
+          <a:ext cx="0" cy="0"/>
+          <a:chOff x="0" y="0"/>
+          <a:chExt cx="0" cy="0"/>
+        </a:xfrm>
+      </p:grpSpPr>
+      <p:sp>
+        <p:nvSpPr>
+          <p:cNvPr id="2" name="Title 1"/>
+          <p:cNvSpPr>
+            <a:spLocks noGrp="1"/>
+          </p:cNvSpPr>
+          <p:nvPr>
+            <p:ph type="title"/>
+          </p:nvPr>
+        </p:nvSpPr>
+        <p:spPr/>
+        <p:txBody>
+          <a:bodyPr/>
+          <a:lstStyle/>
+          <a:p>
+            <a:pPr lvl="0" indent="0" marL="0">
+              <a:buNone/>
+            </a:pPr>
+            <a:r>
+              <a:rPr/>
+              <a:t>Your turn!</a:t>
+            </a:r>
+          </a:p>
+        </p:txBody>
+      </p:sp>
+      <p:sp>
+        <p:nvSpPr>
+          <p:cNvPr id="3" name="Content Placeholder 2"/>
+          <p:cNvSpPr>
+            <a:spLocks noGrp="1"/>
+          </p:cNvSpPr>
+          <p:nvPr>
+            <p:ph idx="1"/>
+          </p:nvPr>
+        </p:nvSpPr>
+        <p:spPr/>
+        <p:txBody>
+          <a:bodyPr/>
+          <a:lstStyle/>
+          <a:p>
+            <a:pPr lvl="0" indent="0" marL="0">
+              <a:buNone/>
+            </a:pPr>
+          </a:p>
+          <a:p>
+            <a:pPr lvl="0" indent="-342900" marL="342900">
+              <a:buAutoNum type="arabicPeriod"/>
+            </a:pPr>
+            <a:r>
+              <a:rPr b="1"/>
+              <a:t>Navigate</a:t>
+            </a:r>
+            <a:r>
+              <a:rPr/>
+              <a:t> to the following online tutorial: </a:t>
+            </a:r>
+            <a:r>
+              <a:rPr>
+                <a:hlinkClick r:id="rId3"/>
+              </a:rPr>
+              <a:t>https://lmu-osc.github.io/introduction-to-zotero/</a:t>
+            </a:r>
+            <a:r>
+              <a:rPr/>
+              <a:t>.</a:t>
+            </a:r>
+          </a:p>
+          <a:p>
+            <a:pPr lvl="0" indent="-342900" marL="342900">
+              <a:buAutoNum type="arabicPeriod"/>
+            </a:pPr>
+            <a:r>
+              <a:rPr b="1"/>
+              <a:t>Skim over</a:t>
+            </a:r>
+            <a:r>
+              <a:rPr/>
+              <a:t> the different sections using the navigation menu or the arrows at the bottom of the page to get an idea of the content of the tutorial.</a:t>
+            </a:r>
+          </a:p>
+          <a:p>
+            <a:pPr lvl="0" indent="-342900" marL="342900">
+              <a:buAutoNum type="arabicPeriod"/>
+            </a:pPr>
+            <a:r>
+              <a:rPr/>
+              <a:t>Using Bloom’s taxonomy, </a:t>
+            </a:r>
+            <a:r>
+              <a:rPr b="1"/>
+              <a:t>formulate</a:t>
+            </a:r>
+            <a:r>
+              <a:rPr/>
+              <a:t> three learning objectives and assessment methods that match the content and the teaching activities of the tutorial. Consider the following: Which level of Bloom’s taxonomy are you at and which domain are you targeting?</a:t>
+            </a:r>
+          </a:p>
+        </p:txBody>
+      </p:sp>
+    </p:spTree>
+  </p:cSld>
+</p:sld>
+</file>
+
 <file path=ppt/slides/slide5.xml><?xml version="1.0" encoding="utf-8"?>
 <p:sld xmlns:a="http://schemas.openxmlformats.org/drawingml/2006/main" xmlns:r="http://schemas.openxmlformats.org/officeDocument/2006/relationships" xmlns:p="http://schemas.openxmlformats.org/presentationml/2006/main">
   <p:cSld>
@@ -16220,41 +16239,7 @@
             </a:pPr>
             <a:r>
               <a:rPr/>
-              <a:t>Prerequisites</a:t>
-            </a:r>
-          </a:p>
-        </p:txBody>
-      </p:sp>
-      <p:sp>
-        <p:nvSpPr>
-          <p:cNvPr id="3" name="Content Placeholder 2"/>
-          <p:cNvSpPr>
-            <a:spLocks noGrp="1"/>
-          </p:cNvSpPr>
-          <p:nvPr>
-            <p:ph idx="1"/>
-          </p:nvPr>
-        </p:nvSpPr>
-        <p:spPr/>
-        <p:txBody>
-          <a:bodyPr/>
-          <a:lstStyle/>
-          <a:p>
-            <a:pPr lvl="0" indent="0" marL="1270000">
-              <a:buNone/>
-            </a:pPr>
-            <a:r>
-              <a:rPr sz="2000" b="1"/>
-              <a:t>Important</a:t>
-            </a:r>
-          </a:p>
-          <a:p>
-            <a:pPr lvl="0" indent="0" marL="1270000">
-              <a:buNone/>
-            </a:pPr>
-            <a:r>
-              <a:rPr sz="2000"/>
-              <a:t>Before completing this submodule, please carefully read about the prerequisites.</a:t>
+              <a:t>Before we start: Survey time!</a:t>
             </a:r>
           </a:p>
         </p:txBody>
@@ -16265,127 +16250,6 @@
 </file>
 
 <file path=ppt/slides/slide50.xml><?xml version="1.0" encoding="utf-8"?>
-<p:sld xmlns:a="http://schemas.openxmlformats.org/drawingml/2006/main" xmlns:r="http://schemas.openxmlformats.org/officeDocument/2006/relationships" xmlns:p="http://schemas.openxmlformats.org/presentationml/2006/main">
-  <p:cSld>
-    <p:spTree>
-      <p:nvGrpSpPr>
-        <p:cNvPr id="1" name=""/>
-        <p:cNvGrpSpPr/>
-        <p:nvPr/>
-      </p:nvGrpSpPr>
-      <p:grpSpPr>
-        <a:xfrm>
-          <a:off x="0" y="0"/>
-          <a:ext cx="0" cy="0"/>
-          <a:chOff x="0" y="0"/>
-          <a:chExt cx="0" cy="0"/>
-        </a:xfrm>
-      </p:grpSpPr>
-      <p:sp>
-        <p:nvSpPr>
-          <p:cNvPr id="2" name="Title 1"/>
-          <p:cNvSpPr>
-            <a:spLocks noGrp="1"/>
-          </p:cNvSpPr>
-          <p:nvPr>
-            <p:ph type="title"/>
-          </p:nvPr>
-        </p:nvSpPr>
-        <p:spPr/>
-        <p:txBody>
-          <a:bodyPr/>
-          <a:lstStyle/>
-          <a:p>
-            <a:pPr lvl="0" indent="0" marL="0">
-              <a:buNone/>
-            </a:pPr>
-            <a:r>
-              <a:rPr/>
-              <a:t>Your turn!</a:t>
-            </a:r>
-          </a:p>
-        </p:txBody>
-      </p:sp>
-      <p:sp>
-        <p:nvSpPr>
-          <p:cNvPr id="3" name="Content Placeholder 2"/>
-          <p:cNvSpPr>
-            <a:spLocks noGrp="1"/>
-          </p:cNvSpPr>
-          <p:nvPr>
-            <p:ph idx="1"/>
-          </p:nvPr>
-        </p:nvSpPr>
-        <p:spPr/>
-        <p:txBody>
-          <a:bodyPr/>
-          <a:lstStyle/>
-          <a:p>
-            <a:pPr lvl="0" indent="0" marL="0">
-              <a:buNone/>
-            </a:pPr>
-          </a:p>
-          <a:p>
-            <a:pPr lvl="0" indent="-342900" marL="342900">
-              <a:buAutoNum type="arabicPeriod"/>
-            </a:pPr>
-            <a:r>
-              <a:rPr b="1"/>
-              <a:t>Navigate</a:t>
-            </a:r>
-            <a:r>
-              <a:rPr/>
-              <a:t> to the following online tutorial: </a:t>
-            </a:r>
-            <a:r>
-              <a:rPr>
-                <a:hlinkClick r:id="rId3"/>
-              </a:rPr>
-              <a:t>https://lmu-osc.github.io/introduction-to-zotero/</a:t>
-            </a:r>
-            <a:r>
-              <a:rPr/>
-              <a:t>.</a:t>
-            </a:r>
-          </a:p>
-          <a:p>
-            <a:pPr lvl="0" indent="-342900" marL="342900">
-              <a:buAutoNum type="arabicPeriod"/>
-            </a:pPr>
-            <a:r>
-              <a:rPr b="1"/>
-              <a:t>Skim over</a:t>
-            </a:r>
-            <a:r>
-              <a:rPr/>
-              <a:t> the different sections using the navigation menu or the arrows at the bottom of the page to get an idea of the content of the tutorial.</a:t>
-            </a:r>
-          </a:p>
-          <a:p>
-            <a:pPr lvl="0" indent="-342900" marL="342900">
-              <a:buAutoNum type="arabicPeriod"/>
-            </a:pPr>
-            <a:r>
-              <a:rPr/>
-              <a:t>Using Bloom’s taxonomy, </a:t>
-            </a:r>
-            <a:r>
-              <a:rPr b="1"/>
-              <a:t>formulate</a:t>
-            </a:r>
-            <a:r>
-              <a:rPr/>
-              <a:t> three learning objectives and assessment methods that match the content and the teaching activities of the tutorial. Consider the following: Which level of Bloom’s taxonomy are you at and which domain are you targeting?</a:t>
-            </a:r>
-          </a:p>
-        </p:txBody>
-      </p:sp>
-    </p:spTree>
-  </p:cSld>
-</p:sld>
-</file>
-
-<file path=ppt/slides/slide51.xml><?xml version="1.0" encoding="utf-8"?>
 <p:sld xmlns:a="http://schemas.openxmlformats.org/drawingml/2006/main" xmlns:r="http://schemas.openxmlformats.org/officeDocument/2006/relationships" xmlns:p="http://schemas.openxmlformats.org/presentationml/2006/main">
   <p:cSld>
     <p:spTree>
@@ -16799,6 +16663,53 @@
 </p:sld>
 </file>
 
+<file path=ppt/slides/slide51.xml><?xml version="1.0" encoding="utf-8"?>
+<p:sld xmlns:a="http://schemas.openxmlformats.org/drawingml/2006/main" xmlns:r="http://schemas.openxmlformats.org/officeDocument/2006/relationships" xmlns:p="http://schemas.openxmlformats.org/presentationml/2006/main">
+  <p:cSld>
+    <p:spTree>
+      <p:nvGrpSpPr>
+        <p:cNvPr id="1" name=""/>
+        <p:cNvGrpSpPr/>
+        <p:nvPr/>
+      </p:nvGrpSpPr>
+      <p:grpSpPr>
+        <a:xfrm>
+          <a:off x="0" y="0"/>
+          <a:ext cx="0" cy="0"/>
+          <a:chOff x="0" y="0"/>
+          <a:chExt cx="0" cy="0"/>
+        </a:xfrm>
+      </p:grpSpPr>
+      <p:sp>
+        <p:nvSpPr>
+          <p:cNvPr id="2" name="Title 1"/>
+          <p:cNvSpPr>
+            <a:spLocks noGrp="1"/>
+          </p:cNvSpPr>
+          <p:nvPr>
+            <p:ph type="title"/>
+          </p:nvPr>
+        </p:nvSpPr>
+        <p:spPr/>
+        <p:txBody>
+          <a:bodyPr/>
+          <a:lstStyle/>
+          <a:p>
+            <a:pPr lvl="0" indent="0" marL="0">
+              <a:buNone/>
+            </a:pPr>
+            <a:r>
+              <a:rPr/>
+              <a:t>Survey time!</a:t>
+            </a:r>
+          </a:p>
+        </p:txBody>
+      </p:sp>
+    </p:spTree>
+  </p:cSld>
+</p:sld>
+</file>
+
 <file path=ppt/slides/slide52.xml><?xml version="1.0" encoding="utf-8"?>
 <p:sld xmlns:a="http://schemas.openxmlformats.org/drawingml/2006/main" xmlns:r="http://schemas.openxmlformats.org/officeDocument/2006/relationships" xmlns:p="http://schemas.openxmlformats.org/presentationml/2006/main">
   <p:cSld>
@@ -16818,25 +16729,61 @@
       </p:grpSpPr>
       <p:sp>
         <p:nvSpPr>
-          <p:cNvPr id="2" name="Title 1"/>
-          <p:cNvSpPr>
-            <a:spLocks noGrp="1"/>
-          </p:cNvSpPr>
-          <p:nvPr>
-            <p:ph type="title"/>
-          </p:nvPr>
-        </p:nvSpPr>
-        <p:spPr/>
-        <p:txBody>
-          <a:bodyPr/>
-          <a:lstStyle/>
-          <a:p>
-            <a:pPr lvl="0" indent="0" marL="0">
-              <a:buNone/>
-            </a:pPr>
-            <a:r>
-              <a:rPr/>
-              <a:t>Survey time!</a:t>
+          <p:cNvPr id="3" name="Content Placeholder 2"/>
+          <p:cNvSpPr>
+            <a:spLocks noGrp="1"/>
+          </p:cNvSpPr>
+          <p:nvPr>
+            <p:ph idx="1"/>
+          </p:nvPr>
+        </p:nvSpPr>
+        <p:spPr/>
+        <p:txBody>
+          <a:bodyPr/>
+          <a:lstStyle/>
+          <a:p>
+            <a:pPr lvl="0" indent="0" marL="0">
+              <a:buNone/>
+            </a:pPr>
+            <a:r>
+              <a:rPr b="1"/>
+              <a:t>Which of the following concepts or skills do you now feel most confident about in relation to didactics and teaching? (Select all that apply)</a:t>
+            </a:r>
+          </a:p>
+          <a:p>
+            <a:pPr lvl="0" indent="-342900" marL="342900">
+              <a:buAutoNum type="alphaLcPeriod"/>
+            </a:pPr>
+            <a:r>
+              <a:rPr/>
+              <a:t>Considering the learner’s prior knowledge in the learning process</a:t>
+            </a:r>
+          </a:p>
+          <a:p>
+            <a:pPr lvl="0" indent="-342900" marL="342900">
+              <a:buAutoNum type="alphaLcPeriod"/>
+            </a:pPr>
+            <a:r>
+              <a:rPr/>
+              <a:t>Constructivism</a:t>
+            </a:r>
+          </a:p>
+          <a:p>
+            <a:pPr lvl="0" indent="-342900" marL="342900">
+              <a:buAutoNum type="alphaLcPeriod"/>
+            </a:pPr>
+            <a:r>
+              <a:rPr/>
+              <a:t>Constructive alignment</a:t>
+            </a:r>
+          </a:p>
+          <a:p>
+            <a:pPr lvl="0" indent="-342900" marL="342900">
+              <a:buAutoNum type="alphaLcPeriod"/>
+            </a:pPr>
+            <a:r>
+              <a:rPr/>
+              <a:t>Formulating clear learning objectives</a:t>
             </a:r>
           </a:p>
         </p:txBody>
@@ -16883,7 +16830,7 @@
             </a:pPr>
             <a:r>
               <a:rPr b="1"/>
-              <a:t>Which of the following concepts or skills do you now feel most confident about in relation to didactics and teaching? (Select all that apply)</a:t>
+              <a:t>What is your level of familiarity with the three learning domains (cogntive, affective and psychomotor)?</a:t>
             </a:r>
           </a:p>
           <a:p>
@@ -16892,7 +16839,7 @@
             </a:pPr>
             <a:r>
               <a:rPr/>
-              <a:t>Considering the learner’s prior knowledge in the learning process</a:t>
+              <a:t>I have never heard of them before.</a:t>
             </a:r>
           </a:p>
           <a:p>
@@ -16901,7 +16848,7 @@
             </a:pPr>
             <a:r>
               <a:rPr/>
-              <a:t>Constructivism</a:t>
+              <a:t>I have heard of them but have never considered them in my teaching.</a:t>
             </a:r>
           </a:p>
           <a:p>
@@ -16910,7 +16857,7 @@
             </a:pPr>
             <a:r>
               <a:rPr/>
-              <a:t>Constructive alignment</a:t>
+              <a:t>I have a basic understanding and sometimes implement them in my teaching.</a:t>
             </a:r>
           </a:p>
           <a:p>
@@ -16919,7 +16866,7 @@
             </a:pPr>
             <a:r>
               <a:rPr/>
-              <a:t>Formulating clear learning objectives</a:t>
+              <a:t>I am very familiar and have routinely applied them in my teaching.</a:t>
             </a:r>
           </a:p>
         </p:txBody>
@@ -16966,7 +16913,7 @@
             </a:pPr>
             <a:r>
               <a:rPr b="1"/>
-              <a:t>What is your level of familiarity with the three learning domains (cogntive, affective and psychomotor)?</a:t>
+              <a:t>What is your level of familiarity with Bloom’s taxonomy?</a:t>
             </a:r>
           </a:p>
           <a:p>
@@ -16975,7 +16922,7 @@
             </a:pPr>
             <a:r>
               <a:rPr/>
-              <a:t>I have never heard of them before.</a:t>
+              <a:t>I have never heard of it before.</a:t>
             </a:r>
           </a:p>
           <a:p>
@@ -16984,7 +16931,7 @@
             </a:pPr>
             <a:r>
               <a:rPr/>
-              <a:t>I have heard of them but have never considered them in my teaching.</a:t>
+              <a:t>I have heard of it but have never implemented it in my teaching.</a:t>
             </a:r>
           </a:p>
           <a:p>
@@ -16993,7 +16940,7 @@
             </a:pPr>
             <a:r>
               <a:rPr/>
-              <a:t>I have a basic understanding and sometimes implement them in my teaching.</a:t>
+              <a:t>I have a basic understanding and sometimes implement it in my teaching.</a:t>
             </a:r>
           </a:p>
           <a:p>
@@ -17002,7 +16949,7 @@
             </a:pPr>
             <a:r>
               <a:rPr/>
-              <a:t>I am very familiar and have routinely applied them in my teaching.</a:t>
+              <a:t>I am very familiar and have routinely applied this in my teaching.</a:t>
             </a:r>
           </a:p>
         </p:txBody>
@@ -17031,6 +16978,31 @@
       </p:grpSpPr>
       <p:sp>
         <p:nvSpPr>
+          <p:cNvPr id="2" name="Title 1"/>
+          <p:cNvSpPr>
+            <a:spLocks noGrp="1"/>
+          </p:cNvSpPr>
+          <p:nvPr>
+            <p:ph type="title"/>
+          </p:nvPr>
+        </p:nvSpPr>
+        <p:spPr/>
+        <p:txBody>
+          <a:bodyPr/>
+          <a:lstStyle/>
+          <a:p>
+            <a:pPr lvl="0" indent="0" marL="0">
+              <a:buNone/>
+            </a:pPr>
+            <a:r>
+              <a:rPr/>
+              <a:t>Discussion of survey results</a:t>
+            </a:r>
+          </a:p>
+        </p:txBody>
+      </p:sp>
+      <p:sp>
+        <p:nvSpPr>
           <p:cNvPr id="3" name="Content Placeholder 2"/>
           <p:cNvSpPr>
             <a:spLocks noGrp="1"/>
@@ -17047,45 +17019,14 @@
             <a:pPr lvl="0" indent="0" marL="0">
               <a:buNone/>
             </a:pPr>
-            <a:r>
-              <a:rPr b="1"/>
-              <a:t>What is your level of familiarity with Bloom’s taxonomy?</a:t>
-            </a:r>
-          </a:p>
-          <a:p>
-            <a:pPr lvl="0" indent="-342900" marL="342900">
-              <a:buAutoNum type="alphaLcPeriod"/>
-            </a:pPr>
-            <a:r>
-              <a:rPr/>
-              <a:t>I have never heard of it before.</a:t>
-            </a:r>
-          </a:p>
-          <a:p>
-            <a:pPr lvl="0" indent="-342900" marL="342900">
-              <a:buAutoNum type="alphaLcPeriod"/>
-            </a:pPr>
-            <a:r>
-              <a:rPr/>
-              <a:t>I have heard of it but have never implemented it in my teaching.</a:t>
-            </a:r>
-          </a:p>
-          <a:p>
-            <a:pPr lvl="0" indent="-342900" marL="342900">
-              <a:buAutoNum type="alphaLcPeriod"/>
-            </a:pPr>
-            <a:r>
-              <a:rPr/>
-              <a:t>I have a basic understanding and sometimes implement it in my teaching.</a:t>
-            </a:r>
-          </a:p>
-          <a:p>
-            <a:pPr lvl="0" indent="-342900" marL="342900">
-              <a:buAutoNum type="alphaLcPeriod"/>
-            </a:pPr>
-            <a:r>
-              <a:rPr/>
-              <a:t>I am very familiar and have routinely applied this in my teaching.</a:t>
+          </a:p>
+          <a:p>
+            <a:pPr lvl="0" indent="0" marL="0">
+              <a:buNone/>
+            </a:pPr>
+            <a:r>
+              <a:rPr/>
+              <a:t>What do we see in the results?</a:t>
             </a:r>
           </a:p>
         </p:txBody>
@@ -17132,7 +17073,7 @@
             </a:pPr>
             <a:r>
               <a:rPr/>
-              <a:t>Discussion of survey results</a:t>
+              <a:t>Learning objectives - recap</a:t>
             </a:r>
           </a:p>
         </p:txBody>
@@ -17155,14 +17096,53 @@
             <a:pPr lvl="0" indent="0" marL="0">
               <a:buNone/>
             </a:pPr>
-          </a:p>
-          <a:p>
-            <a:pPr lvl="0" indent="0" marL="0">
-              <a:buNone/>
-            </a:pPr>
-            <a:r>
-              <a:rPr/>
-              <a:t>What do we see in the results?</a:t>
+            <a:r>
+              <a:rPr/>
+              <a:t>At the end of this session, you will…</a:t>
+            </a:r>
+          </a:p>
+          <a:p>
+            <a:pPr lvl="0"/>
+            <a:r>
+              <a:rPr b="1"/>
+              <a:t>Understand</a:t>
+            </a:r>
+            <a:r>
+              <a:rPr/>
+              <a:t> basic didactic concepts as the basis for learning success ✔</a:t>
+            </a:r>
+          </a:p>
+          <a:p>
+            <a:pPr lvl="0"/>
+            <a:r>
+              <a:rPr b="1"/>
+              <a:t>Analyze</a:t>
+            </a:r>
+            <a:r>
+              <a:rPr/>
+              <a:t> how knowledge can be organized depending on the level of expertise ✔</a:t>
+            </a:r>
+          </a:p>
+          <a:p>
+            <a:pPr lvl="0"/>
+            <a:r>
+              <a:rPr b="1"/>
+              <a:t>Evaluate</a:t>
+            </a:r>
+            <a:r>
+              <a:rPr/>
+              <a:t> the alignment between learning objectives, assessment types and teaching activities ✔</a:t>
+            </a:r>
+          </a:p>
+          <a:p>
+            <a:pPr lvl="0"/>
+            <a:r>
+              <a:rPr b="1"/>
+              <a:t>Formulate</a:t>
+            </a:r>
+            <a:r>
+              <a:rPr/>
+              <a:t> concrete learning objectives according to specific learning domains for real-world content ✔</a:t>
             </a:r>
           </a:p>
         </p:txBody>
@@ -17209,7 +17189,7 @@
             </a:pPr>
             <a:r>
               <a:rPr/>
-              <a:t>Learning objectives - recap</a:t>
+              <a:t>References</a:t>
             </a:r>
           </a:p>
         </p:txBody>
@@ -17234,51 +17214,134 @@
             </a:pPr>
             <a:r>
               <a:rPr/>
-              <a:t>At the end of this session, you will…</a:t>
-            </a:r>
-          </a:p>
-          <a:p>
-            <a:pPr lvl="0"/>
-            <a:r>
-              <a:rPr b="1"/>
-              <a:t>Understand</a:t>
-            </a:r>
-            <a:r>
-              <a:rPr/>
-              <a:t> basic didactic concepts as the basis for learning success ✔</a:t>
-            </a:r>
-          </a:p>
-          <a:p>
-            <a:pPr lvl="0"/>
-            <a:r>
-              <a:rPr b="1"/>
-              <a:t>Analyze</a:t>
-            </a:r>
-            <a:r>
-              <a:rPr/>
-              <a:t> how knowledge can be organized depending on the level of expertise ✔</a:t>
-            </a:r>
-          </a:p>
-          <a:p>
-            <a:pPr lvl="0"/>
-            <a:r>
-              <a:rPr b="1"/>
-              <a:t>Evaluate</a:t>
-            </a:r>
-            <a:r>
-              <a:rPr/>
-              <a:t> the alignment between learning objectives, assessment types and teaching activities ✔</a:t>
-            </a:r>
-          </a:p>
-          <a:p>
-            <a:pPr lvl="0"/>
-            <a:r>
-              <a:rPr b="1"/>
-              <a:t>Formulate</a:t>
-            </a:r>
-            <a:r>
-              <a:rPr/>
-              <a:t> concrete learning objectives according to specific learning domains for real-world content ✔</a:t>
+              <a:t>Anderson, L. W., &amp; Krathwohl, D. R. (Eds.). (2001). </a:t>
+            </a:r>
+            <a:r>
+              <a:rPr i="1"/>
+              <a:t>A taxonomy for learning, teaching, and assessing: A revision of Bloom’s taxonomy of educational objectives</a:t>
+            </a:r>
+            <a:r>
+              <a:rPr/>
+              <a:t>. Addison Wesley Longman.</a:t>
+            </a:r>
+          </a:p>
+          <a:p>
+            <a:pPr lvl="0" indent="0" marL="0">
+              <a:buNone/>
+            </a:pPr>
+            <a:r>
+              <a:rPr/>
+              <a:t>Bloom, B. S. (Ed.). (1973). </a:t>
+            </a:r>
+            <a:r>
+              <a:rPr i="1"/>
+              <a:t>Taxonomie von Lernzielen im kognitiven Bereich</a:t>
+            </a:r>
+            <a:r>
+              <a:rPr/>
+              <a:t> (3. Aufl.). Beltz.</a:t>
+            </a:r>
+          </a:p>
+          <a:p>
+            <a:pPr lvl="0" indent="0" marL="0">
+              <a:buNone/>
+            </a:pPr>
+            <a:r>
+              <a:rPr/>
+              <a:t>Bloom, B. S., Engelhart, M. D., Furst, E. J., Hill, W. H., &amp; Krathwohl, D. R. (Eds.). (1956). </a:t>
+            </a:r>
+            <a:r>
+              <a:rPr i="1"/>
+              <a:t>Taxonomy of educational objectives: The classification of educational goals. Handbook I: Cognitive domain</a:t>
+            </a:r>
+            <a:r>
+              <a:rPr/>
+              <a:t>. David McKay Company.</a:t>
+            </a:r>
+          </a:p>
+          <a:p>
+            <a:pPr lvl="0" indent="0" marL="0">
+              <a:buNone/>
+            </a:pPr>
+            <a:r>
+              <a:rPr/>
+              <a:t>Bruner, J. S. (1960). </a:t>
+            </a:r>
+            <a:r>
+              <a:rPr i="1"/>
+              <a:t>The process of education</a:t>
+            </a:r>
+            <a:r>
+              <a:rPr/>
+              <a:t>. Harvard University Press.</a:t>
+            </a:r>
+          </a:p>
+          <a:p>
+            <a:pPr lvl="0" indent="0" marL="0">
+              <a:buNone/>
+            </a:pPr>
+            <a:r>
+              <a:rPr/>
+              <a:t>Fosnot, C. T. (Ed.). (2013). </a:t>
+            </a:r>
+            <a:r>
+              <a:rPr i="1"/>
+              <a:t>Constructivism: Theory, perspectives, and practice</a:t>
+            </a:r>
+            <a:r>
+              <a:rPr/>
+              <a:t> (2nd ed.). Teachers College Press.</a:t>
+            </a:r>
+          </a:p>
+          <a:p>
+            <a:pPr lvl="0" indent="0" marL="0">
+              <a:buNone/>
+            </a:pPr>
+            <a:r>
+              <a:rPr/>
+              <a:t>Piaget, J. (1950). </a:t>
+            </a:r>
+            <a:r>
+              <a:rPr i="1"/>
+              <a:t>The psychology of intelligence</a:t>
+            </a:r>
+            <a:r>
+              <a:rPr/>
+              <a:t>. Routledge &amp; Kegan Paul.</a:t>
+            </a:r>
+          </a:p>
+          <a:p>
+            <a:pPr lvl="0" indent="0" marL="0">
+              <a:buNone/>
+            </a:pPr>
+            <a:r>
+              <a:rPr/>
+              <a:t>von Glasersfeld, E. (1995). </a:t>
+            </a:r>
+            <a:r>
+              <a:rPr i="1"/>
+              <a:t>Radical constructivism: A way of knowing and learning</a:t>
+            </a:r>
+            <a:r>
+              <a:rPr/>
+              <a:t>. Falmer Press.</a:t>
+            </a:r>
+          </a:p>
+          <a:p>
+            <a:pPr lvl="0" indent="0" marL="0">
+              <a:buNone/>
+            </a:pPr>
+            <a:r>
+              <a:rPr/>
+              <a:t>Vygotsky, L. S. (1978). </a:t>
+            </a:r>
+            <a:r>
+              <a:rPr i="1"/>
+              <a:t>Mind in society: The development of higher psychological processes</a:t>
+            </a:r>
+            <a:r>
+              <a:rPr/>
+              <a:t>. Harvard University Press.</a:t>
             </a:r>
           </a:p>
         </p:txBody>
@@ -17315,169 +17378,22 @@
             <p:ph type="title"/>
           </p:nvPr>
         </p:nvSpPr>
-        <p:spPr/>
-        <p:txBody>
-          <a:bodyPr/>
-          <a:lstStyle/>
-          <a:p>
-            <a:pPr lvl="0" indent="0" marL="0">
-              <a:buNone/>
-            </a:pPr>
-            <a:r>
-              <a:rPr/>
-              <a:t>References</a:t>
-            </a:r>
-          </a:p>
-        </p:txBody>
-      </p:sp>
-      <p:sp>
-        <p:nvSpPr>
-          <p:cNvPr id="3" name="Content Placeholder 2"/>
-          <p:cNvSpPr>
-            <a:spLocks noGrp="1"/>
-          </p:cNvSpPr>
-          <p:nvPr>
-            <p:ph idx="1"/>
-          </p:nvPr>
-        </p:nvSpPr>
-        <p:spPr/>
-        <p:txBody>
-          <a:bodyPr/>
-          <a:lstStyle/>
-          <a:p>
-            <a:pPr lvl="0" indent="0" marL="0">
-              <a:buNone/>
-            </a:pPr>
-            <a:r>
-              <a:rPr/>
-              <a:t>Anderson, L. W., &amp; Krathwohl, D. R. (Eds.). (2001). </a:t>
-            </a:r>
-            <a:r>
-              <a:rPr i="1"/>
-              <a:t>A taxonomy for learning, teaching, and assessing: A revision of Bloom’s taxonomy of educational objectives</a:t>
-            </a:r>
-            <a:r>
-              <a:rPr/>
-              <a:t>. Addison Wesley Longman.</a:t>
-            </a:r>
-          </a:p>
-          <a:p>
-            <a:pPr lvl="0" indent="0" marL="0">
-              <a:buNone/>
-            </a:pPr>
-            <a:r>
-              <a:rPr/>
-              <a:t>Bloom, B. S. (Ed.). (1973). </a:t>
-            </a:r>
-            <a:r>
-              <a:rPr i="1"/>
-              <a:t>Taxonomie von Lernzielen im kognitiven Bereich</a:t>
-            </a:r>
-            <a:r>
-              <a:rPr/>
-              <a:t> (3. Aufl.). Beltz.</a:t>
-            </a:r>
-          </a:p>
-          <a:p>
-            <a:pPr lvl="0" indent="0" marL="0">
-              <a:buNone/>
-            </a:pPr>
-            <a:r>
-              <a:rPr/>
-              <a:t>Bloom, B. S., Engelhart, M. D., Furst, E. J., Hill, W. H., &amp; Krathwohl, D. R. (Eds.). (1956). </a:t>
-            </a:r>
-            <a:r>
-              <a:rPr i="1"/>
-              <a:t>Taxonomy of educational objectives: The classification of educational goals. Handbook I: Cognitive domain</a:t>
-            </a:r>
-            <a:r>
-              <a:rPr/>
-              <a:t>. David McKay Company.</a:t>
-            </a:r>
-          </a:p>
-          <a:p>
-            <a:pPr lvl="0" indent="0" marL="0">
-              <a:buNone/>
-            </a:pPr>
-            <a:r>
-              <a:rPr/>
-              <a:t>Bruner, J. S. (1960). </a:t>
-            </a:r>
-            <a:r>
-              <a:rPr i="1"/>
-              <a:t>The process of education</a:t>
-            </a:r>
-            <a:r>
-              <a:rPr/>
-              <a:t>. Harvard University Press.</a:t>
-            </a:r>
-          </a:p>
-          <a:p>
-            <a:pPr lvl="0" indent="0" marL="0">
-              <a:buNone/>
-            </a:pPr>
-            <a:r>
-              <a:rPr/>
-              <a:t>Fosnot, C. T. (Ed.). (2013). </a:t>
-            </a:r>
-            <a:r>
-              <a:rPr i="1"/>
-              <a:t>Constructivism: Theory, perspectives, and practice</a:t>
-            </a:r>
-            <a:r>
-              <a:rPr/>
-              <a:t> (2nd ed.). Teachers College Press.</a:t>
-            </a:r>
-          </a:p>
-          <a:p>
-            <a:pPr lvl="0" indent="0" marL="0">
-              <a:buNone/>
-            </a:pPr>
-            <a:r>
-              <a:rPr/>
-              <a:t>Piaget, J. (1950). </a:t>
-            </a:r>
-            <a:r>
-              <a:rPr i="1"/>
-              <a:t>The psychology of intelligence</a:t>
-            </a:r>
-            <a:r>
-              <a:rPr/>
-              <a:t>. Routledge &amp; Kegan Paul.</a:t>
-            </a:r>
-          </a:p>
-          <a:p>
-            <a:pPr lvl="0" indent="0" marL="0">
-              <a:buNone/>
-            </a:pPr>
-            <a:r>
-              <a:rPr/>
-              <a:t>von Glasersfeld, E. (1995). </a:t>
-            </a:r>
-            <a:r>
-              <a:rPr i="1"/>
-              <a:t>Radical constructivism: A way of knowing and learning</a:t>
-            </a:r>
-            <a:r>
-              <a:rPr/>
-              <a:t>. Falmer Press.</a:t>
-            </a:r>
-          </a:p>
-          <a:p>
-            <a:pPr lvl="0" indent="0" marL="0">
-              <a:buNone/>
-            </a:pPr>
-            <a:r>
-              <a:rPr/>
-              <a:t>Vygotsky, L. S. (1978). </a:t>
-            </a:r>
-            <a:r>
-              <a:rPr i="1"/>
-              <a:t>Mind in society: The development of higher psychological processes</a:t>
-            </a:r>
-            <a:r>
-              <a:rPr/>
-              <a:t>. Harvard University Press.</a:t>
+        <p:spPr>
+          <a:xfrm>
+            <a:off x="722313" y="3305176"/>
+            <a:ext cx="7772400" cy="1021556"/>
+          </a:xfrm>
+        </p:spPr>
+        <p:txBody>
+          <a:bodyPr/>
+          <a:lstStyle/>
+          <a:p>
+            <a:pPr lvl="0" indent="0" marL="0">
+              <a:buNone/>
+            </a:pPr>
+            <a:r>
+              <a:rPr/>
+              <a:t>Thanks! :)</a:t>
             </a:r>
           </a:p>
         </p:txBody>
@@ -17529,7 +17445,7 @@
             </a:pPr>
             <a:r>
               <a:rPr/>
-              <a:t>Thanks! :)</a:t>
+              <a:t>Additional content slides</a:t>
             </a:r>
           </a:p>
         </p:txBody>
@@ -17558,25 +17474,61 @@
       </p:grpSpPr>
       <p:sp>
         <p:nvSpPr>
-          <p:cNvPr id="2" name="Title 1"/>
-          <p:cNvSpPr>
-            <a:spLocks noGrp="1"/>
-          </p:cNvSpPr>
-          <p:nvPr>
-            <p:ph type="title"/>
-          </p:nvPr>
-        </p:nvSpPr>
-        <p:spPr/>
-        <p:txBody>
-          <a:bodyPr/>
-          <a:lstStyle/>
-          <a:p>
-            <a:pPr lvl="0" indent="0" marL="0">
-              <a:buNone/>
-            </a:pPr>
-            <a:r>
-              <a:rPr/>
-              <a:t>Before we start: Survey time!</a:t>
+          <p:cNvPr id="3" name="Content Placeholder 2"/>
+          <p:cNvSpPr>
+            <a:spLocks noGrp="1"/>
+          </p:cNvSpPr>
+          <p:nvPr>
+            <p:ph idx="1"/>
+          </p:nvPr>
+        </p:nvSpPr>
+        <p:spPr/>
+        <p:txBody>
+          <a:bodyPr/>
+          <a:lstStyle/>
+          <a:p>
+            <a:pPr lvl="0" indent="0" marL="0">
+              <a:buNone/>
+            </a:pPr>
+            <a:r>
+              <a:rPr b="1"/>
+              <a:t>Which of the following concepts or skills do you now feel most confident about in relation to didactics and teaching? (Select all that apply)</a:t>
+            </a:r>
+          </a:p>
+          <a:p>
+            <a:pPr lvl="0" indent="-342900" marL="342900">
+              <a:buAutoNum type="alphaLcPeriod"/>
+            </a:pPr>
+            <a:r>
+              <a:rPr/>
+              <a:t>Considering the learner’s prior knowledge in the learning process</a:t>
+            </a:r>
+          </a:p>
+          <a:p>
+            <a:pPr lvl="0" indent="-342900" marL="342900">
+              <a:buAutoNum type="alphaLcPeriod"/>
+            </a:pPr>
+            <a:r>
+              <a:rPr/>
+              <a:t>Constructivism</a:t>
+            </a:r>
+          </a:p>
+          <a:p>
+            <a:pPr lvl="0" indent="-342900" marL="342900">
+              <a:buAutoNum type="alphaLcPeriod"/>
+            </a:pPr>
+            <a:r>
+              <a:rPr/>
+              <a:t>Constructive alignment</a:t>
+            </a:r>
+          </a:p>
+          <a:p>
+            <a:pPr lvl="0" indent="-342900" marL="342900">
+              <a:buAutoNum type="alphaLcPeriod"/>
+            </a:pPr>
+            <a:r>
+              <a:rPr/>
+              <a:t>Formulating clear learning objectives</a:t>
             </a:r>
           </a:p>
         </p:txBody>
@@ -17587,58 +17539,6 @@
 </file>
 
 <file path=ppt/slides/slide60.xml><?xml version="1.0" encoding="utf-8"?>
-<p:sld xmlns:a="http://schemas.openxmlformats.org/drawingml/2006/main" xmlns:r="http://schemas.openxmlformats.org/officeDocument/2006/relationships" xmlns:p="http://schemas.openxmlformats.org/presentationml/2006/main">
-  <p:cSld>
-    <p:spTree>
-      <p:nvGrpSpPr>
-        <p:cNvPr id="1" name=""/>
-        <p:cNvGrpSpPr/>
-        <p:nvPr/>
-      </p:nvGrpSpPr>
-      <p:grpSpPr>
-        <a:xfrm>
-          <a:off x="0" y="0"/>
-          <a:ext cx="0" cy="0"/>
-          <a:chOff x="0" y="0"/>
-          <a:chExt cx="0" cy="0"/>
-        </a:xfrm>
-      </p:grpSpPr>
-      <p:sp>
-        <p:nvSpPr>
-          <p:cNvPr id="2" name="Title 1"/>
-          <p:cNvSpPr>
-            <a:spLocks noGrp="1"/>
-          </p:cNvSpPr>
-          <p:nvPr>
-            <p:ph type="title"/>
-          </p:nvPr>
-        </p:nvSpPr>
-        <p:spPr>
-          <a:xfrm>
-            <a:off x="722313" y="3305176"/>
-            <a:ext cx="7772400" cy="1021556"/>
-          </a:xfrm>
-        </p:spPr>
-        <p:txBody>
-          <a:bodyPr/>
-          <a:lstStyle/>
-          <a:p>
-            <a:pPr lvl="0" indent="0" marL="0">
-              <a:buNone/>
-            </a:pPr>
-            <a:r>
-              <a:rPr/>
-              <a:t>Additional content slides</a:t>
-            </a:r>
-          </a:p>
-        </p:txBody>
-      </p:sp>
-    </p:spTree>
-  </p:cSld>
-</p:sld>
-</file>
-
-<file path=ppt/slides/slide61.xml><?xml version="1.0" encoding="utf-8"?>
 <p:sld xmlns:a="http://schemas.openxmlformats.org/drawingml/2006/main" xmlns:r="http://schemas.openxmlformats.org/officeDocument/2006/relationships" xmlns:p="http://schemas.openxmlformats.org/presentationml/2006/main">
   <p:cSld>
     <p:spTree>
@@ -18067,7 +17967,7 @@
 </p:sld>
 </file>
 
-<file path=ppt/slides/slide62.xml><?xml version="1.0" encoding="utf-8"?>
+<file path=ppt/slides/slide61.xml><?xml version="1.0" encoding="utf-8"?>
 <p:sld xmlns:a="http://schemas.openxmlformats.org/drawingml/2006/main" xmlns:r="http://schemas.openxmlformats.org/officeDocument/2006/relationships" xmlns:p="http://schemas.openxmlformats.org/presentationml/2006/main">
   <p:cSld>
     <p:spTree>
@@ -18384,7 +18284,7 @@
             </a:pPr>
             <a:r>
               <a:rPr b="1"/>
-              <a:t>Which of the following concepts or skills do you now feel most confident about in relation to didactics and teaching? (Select all that apply)</a:t>
+              <a:t>What is your level of familiarity with the three learning domains (cogntive, affective and psychomotor)?</a:t>
             </a:r>
           </a:p>
           <a:p>
@@ -18393,7 +18293,7 @@
             </a:pPr>
             <a:r>
               <a:rPr/>
-              <a:t>Considering the learner’s prior knowledge in the learning process</a:t>
+              <a:t>I have never heard of them before.</a:t>
             </a:r>
           </a:p>
           <a:p>
@@ -18402,7 +18302,7 @@
             </a:pPr>
             <a:r>
               <a:rPr/>
-              <a:t>Constructivism</a:t>
+              <a:t>I have heard of them but have never considered them in my teaching.</a:t>
             </a:r>
           </a:p>
           <a:p>
@@ -18411,7 +18311,7 @@
             </a:pPr>
             <a:r>
               <a:rPr/>
-              <a:t>Constructive alignment</a:t>
+              <a:t>I have a basic understanding and sometimes implement them in my teaching.</a:t>
             </a:r>
           </a:p>
           <a:p>
@@ -18420,7 +18320,7 @@
             </a:pPr>
             <a:r>
               <a:rPr/>
-              <a:t>Formulating clear learning objectives</a:t>
+              <a:t>I am very familiar and have routinely applied them in my teaching.</a:t>
             </a:r>
           </a:p>
         </p:txBody>
@@ -18467,7 +18367,7 @@
             </a:pPr>
             <a:r>
               <a:rPr b="1"/>
-              <a:t>What is your level of familiarity with the three learning domains (cogntive, affective and psychomotor)?</a:t>
+              <a:t>What is your level of familiarity with Bloom’s taxonomy?</a:t>
             </a:r>
           </a:p>
           <a:p>
@@ -18476,7 +18376,7 @@
             </a:pPr>
             <a:r>
               <a:rPr/>
-              <a:t>I have never heard of them before.</a:t>
+              <a:t>I have never heard of it before.</a:t>
             </a:r>
           </a:p>
           <a:p>
@@ -18485,7 +18385,7 @@
             </a:pPr>
             <a:r>
               <a:rPr/>
-              <a:t>I have heard of them but have never considered them in my teaching.</a:t>
+              <a:t>I have heard of it but have never implemented it in my teaching.</a:t>
             </a:r>
           </a:p>
           <a:p>
@@ -18494,7 +18394,7 @@
             </a:pPr>
             <a:r>
               <a:rPr/>
-              <a:t>I have a basic understanding and sometimes implement them in my teaching.</a:t>
+              <a:t>I have a basic understanding and sometimes implement it in my teaching.</a:t>
             </a:r>
           </a:p>
           <a:p>
@@ -18503,7 +18403,7 @@
             </a:pPr>
             <a:r>
               <a:rPr/>
-              <a:t>I am very familiar and have routinely applied them in my teaching.</a:t>
+              <a:t>I am very familiar and have routinely applied this in my teaching.</a:t>
             </a:r>
           </a:p>
         </p:txBody>
@@ -18532,6 +18432,31 @@
       </p:grpSpPr>
       <p:sp>
         <p:nvSpPr>
+          <p:cNvPr id="2" name="Title 1"/>
+          <p:cNvSpPr>
+            <a:spLocks noGrp="1"/>
+          </p:cNvSpPr>
+          <p:nvPr>
+            <p:ph type="title"/>
+          </p:nvPr>
+        </p:nvSpPr>
+        <p:spPr/>
+        <p:txBody>
+          <a:bodyPr/>
+          <a:lstStyle/>
+          <a:p>
+            <a:pPr lvl="0" indent="0" marL="0">
+              <a:buNone/>
+            </a:pPr>
+            <a:r>
+              <a:rPr/>
+              <a:t>Discussion of survey results</a:t>
+            </a:r>
+          </a:p>
+        </p:txBody>
+      </p:sp>
+      <p:sp>
+        <p:nvSpPr>
           <p:cNvPr id="3" name="Content Placeholder 2"/>
           <p:cNvSpPr>
             <a:spLocks noGrp="1"/>
@@ -18548,45 +18473,14 @@
             <a:pPr lvl="0" indent="0" marL="0">
               <a:buNone/>
             </a:pPr>
-            <a:r>
-              <a:rPr b="1"/>
-              <a:t>What is your level of familiarity with Bloom’s taxonomy?</a:t>
-            </a:r>
-          </a:p>
-          <a:p>
-            <a:pPr lvl="0" indent="-342900" marL="342900">
-              <a:buAutoNum type="alphaLcPeriod"/>
-            </a:pPr>
-            <a:r>
-              <a:rPr/>
-              <a:t>I have never heard of it before.</a:t>
-            </a:r>
-          </a:p>
-          <a:p>
-            <a:pPr lvl="0" indent="-342900" marL="342900">
-              <a:buAutoNum type="alphaLcPeriod"/>
-            </a:pPr>
-            <a:r>
-              <a:rPr/>
-              <a:t>I have heard of it but have never implemented it in my teaching.</a:t>
-            </a:r>
-          </a:p>
-          <a:p>
-            <a:pPr lvl="0" indent="-342900" marL="342900">
-              <a:buAutoNum type="alphaLcPeriod"/>
-            </a:pPr>
-            <a:r>
-              <a:rPr/>
-              <a:t>I have a basic understanding and sometimes implement it in my teaching.</a:t>
-            </a:r>
-          </a:p>
-          <a:p>
-            <a:pPr lvl="0" indent="-342900" marL="342900">
-              <a:buAutoNum type="alphaLcPeriod"/>
-            </a:pPr>
-            <a:r>
-              <a:rPr/>
-              <a:t>I am very familiar and have routinely applied this in my teaching.</a:t>
+          </a:p>
+          <a:p>
+            <a:pPr lvl="0" indent="0" marL="0">
+              <a:buNone/>
+            </a:pPr>
+            <a:r>
+              <a:rPr/>
+              <a:t>What do we see in the results?</a:t>
             </a:r>
           </a:p>
         </p:txBody>

--- a/materials/PMM-M1/PMM-M1-S1-Core-Didactic-Principles/PMM-M1-S1-Core-Didactic-Principles-slides.pptx
+++ b/materials/PMM-M1/PMM-M1-S1-Core-Didactic-Principles/PMM-M1-S1-Core-Didactic-Principles-slides.pptx
@@ -9146,7 +9146,7 @@
             </a:pPr>
             <a:r>
               <a:rPr/>
-              <a:t>15/05/2026</a:t>
+              <a:t>17/05/2026</a:t>
             </a:r>
           </a:p>
         </p:txBody>

--- a/materials/PMM-M1/PMM-M1-S1-Core-Didactic-Principles/PMM-M1-S1-Core-Didactic-Principles-slides.pptx
+++ b/materials/PMM-M1/PMM-M1-S1-Core-Didactic-Principles/PMM-M1-S1-Core-Didactic-Principles-slides.pptx
@@ -9146,7 +9146,7 @@
             </a:pPr>
             <a:r>
               <a:rPr/>
-              <a:t>17/05/2026</a:t>
+              <a:t>25/05/2026</a:t>
             </a:r>
           </a:p>
         </p:txBody>

--- a/materials/PMM-M1/PMM-M1-S1-Core-Didactic-Principles/PMM-M1-S1-Core-Didactic-Principles-slides.pptx
+++ b/materials/PMM-M1/PMM-M1-S1-Core-Didactic-Principles/PMM-M1-S1-Core-Didactic-Principles-slides.pptx
@@ -9146,7 +9146,7 @@
             </a:pPr>
             <a:r>
               <a:rPr/>
-              <a:t>25/05/2026</a:t>
+              <a:t>01/06/2026</a:t>
             </a:r>
           </a:p>
         </p:txBody>

--- a/materials/PMM-M1/PMM-M1-S1-Core-Didactic-Principles/PMM-M1-S1-Core-Didactic-Principles-slides.pptx
+++ b/materials/PMM-M1/PMM-M1-S1-Core-Didactic-Principles/PMM-M1-S1-Core-Didactic-Principles-slides.pptx
@@ -9146,7 +9146,7 @@
             </a:pPr>
             <a:r>
               <a:rPr/>
-              <a:t>01/06/2026</a:t>
+              <a:t>08/06/2026</a:t>
             </a:r>
           </a:p>
         </p:txBody>

--- a/materials/PMM-M1/PMM-M1-S1-Core-Didactic-Principles/PMM-M1-S1-Core-Didactic-Principles-slides.pptx
+++ b/materials/PMM-M1/PMM-M1-S1-Core-Didactic-Principles/PMM-M1-S1-Core-Didactic-Principles-slides.pptx
@@ -9146,7 +9146,7 @@
             </a:pPr>
             <a:r>
               <a:rPr/>
-              <a:t>08/06/2026</a:t>
+              <a:t>22/06/2026</a:t>
             </a:r>
           </a:p>
         </p:txBody>

--- a/materials/PMM-M1/PMM-M1-S1-Core-Didactic-Principles/PMM-M1-S1-Core-Didactic-Principles-slides.pptx
+++ b/materials/PMM-M1/PMM-M1-S1-Core-Didactic-Principles/PMM-M1-S1-Core-Didactic-Principles-slides.pptx
@@ -9146,7 +9146,7 @@
             </a:pPr>
             <a:r>
               <a:rPr/>
-              <a:t>22/06/2026</a:t>
+              <a:t>29/06/2026</a:t>
             </a:r>
           </a:p>
         </p:txBody>

--- a/materials/PMM-M1/PMM-M1-S1-Core-Didactic-Principles/PMM-M1-S1-Core-Didactic-Principles-slides.pptx
+++ b/materials/PMM-M1/PMM-M1-S1-Core-Didactic-Principles/PMM-M1-S1-Core-Didactic-Principles-slides.pptx
@@ -9146,7 +9146,7 @@
             </a:pPr>
             <a:r>
               <a:rPr/>
-              <a:t>29/06/2026</a:t>
+              <a:t>06/07/2026</a:t>
             </a:r>
           </a:p>
         </p:txBody>

--- a/materials/PMM-M1/PMM-M1-S1-Core-Didactic-Principles/PMM-M1-S1-Core-Didactic-Principles-slides.pptx
+++ b/materials/PMM-M1/PMM-M1-S1-Core-Didactic-Principles/PMM-M1-S1-Core-Didactic-Principles-slides.pptx
@@ -9146,7 +9146,7 @@
             </a:pPr>
             <a:r>
               <a:rPr/>
-              <a:t>06/07/2026</a:t>
+              <a:t>12/07/2026</a:t>
             </a:r>
           </a:p>
         </p:txBody>

--- a/materials/PMM-M1/PMM-M1-S1-Core-Didactic-Principles/PMM-M1-S1-Core-Didactic-Principles-slides.pptx
+++ b/materials/PMM-M1/PMM-M1-S1-Core-Didactic-Principles/PMM-M1-S1-Core-Didactic-Principles-slides.pptx
@@ -9146,7 +9146,7 @@
             </a:pPr>
             <a:r>
               <a:rPr/>
-              <a:t>12/07/2026</a:t>
+              <a:t>20/07/2026</a:t>
             </a:r>
           </a:p>
         </p:txBody>

--- a/materials/PMM-M1/PMM-M1-S1-Core-Didactic-Principles/PMM-M1-S1-Core-Didactic-Principles-slides.pptx
+++ b/materials/PMM-M1/PMM-M1-S1-Core-Didactic-Principles/PMM-M1-S1-Core-Didactic-Principles-slides.pptx
@@ -9146,7 +9146,7 @@
             </a:pPr>
             <a:r>
               <a:rPr/>
-              <a:t>20/07/2026</a:t>
+              <a:t>27/07/2026</a:t>
             </a:r>
           </a:p>
         </p:txBody>

--- a/materials/PMM-M1/PMM-M1-S1-Core-Didactic-Principles/PMM-M1-S1-Core-Didactic-Principles-slides.pptx
+++ b/materials/PMM-M1/PMM-M1-S1-Core-Didactic-Principles/PMM-M1-S1-Core-Didactic-Principles-slides.pptx
@@ -5478,6 +5478,24 @@
             <a:r>
               <a:rPr/>
               <a:t>at least one observable criterion that demonstrates successful achievement of the learning objective.</a:t>
+            </a:r>
+          </a:p>
+          <a:p>
+            <a:pPr lvl="0" indent="0" marL="0">
+              <a:buNone/>
+            </a:pPr>
+          </a:p>
+          <a:p>
+            <a:pPr lvl="0" indent="0" marL="0">
+              <a:buNone/>
+            </a:pPr>
+            <a:r>
+              <a:rPr i="1"/>
+              <a:t>Write your ideas into the workbook</a:t>
+            </a:r>
+            <a:r>
+              <a:rPr/>
+              <a:t> to keep track of your thoughts.</a:t>
             </a:r>
           </a:p>
           <a:p>

--- a/materials/PMM-M1/PMM-M1-S1-Core-Didactic-Principles/PMM-M1-S1-Core-Didactic-Principles-slides.pptx
+++ b/materials/PMM-M1/PMM-M1-S1-Core-Didactic-Principles/PMM-M1-S1-Core-Didactic-Principles-slides.pptx
@@ -9907,7 +9907,7 @@
             </a:pPr>
             <a:r>
               <a:rPr/>
-              <a:t>04/08/2026</a:t>
+              <a:t>09/08/2026</a:t>
             </a:r>
           </a:p>
         </p:txBody>

--- a/materials/PMM-M1/PMM-M1-S1-Core-Didactic-Principles/PMM-M1-S1-Core-Didactic-Principles-slides.pptx
+++ b/materials/PMM-M1/PMM-M1-S1-Core-Didactic-Principles/PMM-M1-S1-Core-Didactic-Principles-slides.pptx
@@ -9907,7 +9907,7 @@
             </a:pPr>
             <a:r>
               <a:rPr/>
-              <a:t>09/08/2026</a:t>
+              <a:t>13/08/2026</a:t>
             </a:r>
           </a:p>
         </p:txBody>

--- a/materials/PMM-M1/PMM-M1-S1-Core-Didactic-Principles/PMM-M1-S1-Core-Didactic-Principles-slides.pptx
+++ b/materials/PMM-M1/PMM-M1-S1-Core-Didactic-Principles/PMM-M1-S1-Core-Didactic-Principles-slides.pptx
@@ -9907,7 +9907,7 @@
             </a:pPr>
             <a:r>
               <a:rPr/>
-              <a:t>13/08/2026</a:t>
+              <a:t>14/08/2026</a:t>
             </a:r>
           </a:p>
         </p:txBody>

--- a/materials/PMM-M1/PMM-M1-S1-Core-Didactic-Principles/PMM-M1-S1-Core-Didactic-Principles-slides.pptx
+++ b/materials/PMM-M1/PMM-M1-S1-Core-Didactic-Principles/PMM-M1-S1-Core-Didactic-Principles-slides.pptx
@@ -9882,7 +9882,7 @@
             </a:pPr>
             <a:r>
               <a:rPr/>
-              <a:t>Sarah von Grebmer</a:t>
+              <a:t>Sarah von Grebmer zu Wolfsthurn</a:t>
             </a:r>
           </a:p>
         </p:txBody>

--- a/materials/PMM-M1/PMM-M1-S1-Core-Didactic-Principles/PMM-M1-S1-Core-Didactic-Principles-slides.pptx
+++ b/materials/PMM-M1/PMM-M1-S1-Core-Didactic-Principles/PMM-M1-S1-Core-Didactic-Principles-slides.pptx
@@ -721,7 +721,7 @@
           <a:p>
             <a:fld id="{18BDFEC3-8487-43E8-A154-7C12CBC1FFF2}" type="slidenum">
               <a:rPr lang="en-US"/>
-              <a:t>16</a:t>
+              <a:t>14</a:t>
             </a:fld>
             <a:endParaRPr lang="en-US"/>
           </a:p>
@@ -841,7 +841,7 @@
           <a:p>
             <a:fld id="{18BDFEC3-8487-43E8-A154-7C12CBC1FFF2}" type="slidenum">
               <a:rPr lang="en-US"/>
-              <a:t>17</a:t>
+              <a:t>15</a:t>
             </a:fld>
             <a:endParaRPr lang="en-US"/>
           </a:p>
@@ -961,7 +961,7 @@
           <a:p>
             <a:fld id="{18BDFEC3-8487-43E8-A154-7C12CBC1FFF2}" type="slidenum">
               <a:rPr lang="en-US"/>
-              <a:t>18</a:t>
+              <a:t>16</a:t>
             </a:fld>
             <a:endParaRPr lang="en-US"/>
           </a:p>
@@ -1061,7 +1061,7 @@
           <a:p>
             <a:fld id="{18BDFEC3-8487-43E8-A154-7C12CBC1FFF2}" type="slidenum">
               <a:rPr lang="en-US"/>
-              <a:t>20</a:t>
+              <a:t>18</a:t>
             </a:fld>
             <a:endParaRPr lang="en-US"/>
           </a:p>
@@ -1147,7 +1147,7 @@
           <a:p>
             <a:fld id="{18BDFEC3-8487-43E8-A154-7C12CBC1FFF2}" type="slidenum">
               <a:rPr lang="en-US"/>
-              <a:t>21</a:t>
+              <a:t>19</a:t>
             </a:fld>
             <a:endParaRPr lang="en-US"/>
           </a:p>
@@ -1247,7 +1247,7 @@
           <a:p>
             <a:fld id="{18BDFEC3-8487-43E8-A154-7C12CBC1FFF2}" type="slidenum">
               <a:rPr lang="en-US"/>
-              <a:t>22</a:t>
+              <a:t>20</a:t>
             </a:fld>
             <a:endParaRPr lang="en-US"/>
           </a:p>
@@ -1365,7 +1365,7 @@
           <a:p>
             <a:fld id="{18BDFEC3-8487-43E8-A154-7C12CBC1FFF2}" type="slidenum">
               <a:rPr lang="en-US"/>
-              <a:t>23</a:t>
+              <a:t>21</a:t>
             </a:fld>
             <a:endParaRPr lang="en-US"/>
           </a:p>
@@ -1429,49 +1429,49 @@
             </a:r>
             <a:r>
               <a:rPr/>
-              <a:t>: Pulling together our discussion from before, this definition of learning comes from Ambrose and colleagues. It is useful because it shifts our focus away from learning as something that simply “happens” when information is presented. Instead, learning is described here as a process, something ongoing rather than a single event, that results in change. That change might be in knowledge, skills, attitudes, or even how someone approaches problems.</a:t>
-            </a:r>
-          </a:p>
-          <a:p>
-            <a:pPr lvl="0" indent="0" marL="0">
-              <a:buNone/>
-            </a:pPr>
-          </a:p>
-          <a:p>
-            <a:pPr lvl="0" indent="0" marL="0">
-              <a:buNone/>
-            </a:pPr>
-            <a:r>
-              <a:rPr/>
-              <a:t>A key point in this definition is that change occurs as a result of experience. This highlights that learners need to actively engage with material; simply being exposed to information is not enough for meaningful learning to occur.</a:t>
-            </a:r>
-          </a:p>
-          <a:p>
-            <a:pPr lvl="0" indent="0" marL="0">
-              <a:buNone/>
-            </a:pPr>
-          </a:p>
-          <a:p>
-            <a:pPr lvl="0" indent="0" marL="0">
-              <a:buNone/>
-            </a:pPr>
-            <a:r>
-              <a:rPr/>
-              <a:t>The final part of the definition is important as well: learning increases the potential for improved performance and future learning. So learning is not only about immediate outcomes, but also about building capacity for continued growth over time.</a:t>
-            </a:r>
-          </a:p>
-          <a:p>
-            <a:pPr lvl="0" indent="0" marL="0">
-              <a:buNone/>
-            </a:pPr>
-          </a:p>
-          <a:p>
-            <a:pPr lvl="0" indent="0" marL="0">
-              <a:buNone/>
-            </a:pPr>
-            <a:r>
-              <a:rPr/>
-              <a:t>Overall, this definition aligns well with what in educational sciences is known as constructivism, which emphasizes active engagement, experience, and the development of understanding over time rather than passive reception of information.</a:t>
+              <a:t>: Pulling together our discussion from before, this definition from Lovett et al. (2023) and Ambrose et al. shifts the focus from learning as information being presented to learning as a process that leads to change.</a:t>
+            </a:r>
+          </a:p>
+          <a:p>
+            <a:pPr lvl="0" indent="0" marL="0">
+              <a:buNone/>
+            </a:pPr>
+          </a:p>
+          <a:p>
+            <a:pPr lvl="0" indent="0" marL="0">
+              <a:buNone/>
+            </a:pPr>
+            <a:r>
+              <a:rPr/>
+              <a:t>That change results from experience and may involve knowledge, skills, attitudes, or approaches to problems. Simply being exposed to information is not enough; learners need to actively engage with it.</a:t>
+            </a:r>
+          </a:p>
+          <a:p>
+            <a:pPr lvl="0" indent="0" marL="0">
+              <a:buNone/>
+            </a:pPr>
+          </a:p>
+          <a:p>
+            <a:pPr lvl="0" indent="0" marL="0">
+              <a:buNone/>
+            </a:pPr>
+            <a:r>
+              <a:rPr/>
+              <a:t>Importantly, learning also increases the potential for improved performance and future learning, building capacity for continued growth.</a:t>
+            </a:r>
+          </a:p>
+          <a:p>
+            <a:pPr lvl="0" indent="0" marL="0">
+              <a:buNone/>
+            </a:pPr>
+          </a:p>
+          <a:p>
+            <a:pPr lvl="0" indent="0" marL="0">
+              <a:buNone/>
+            </a:pPr>
+            <a:r>
+              <a:rPr/>
+              <a:t>Overall, this aligns with what in educational sciences is known as constructivism, which emphasizes active engagement, experience, and developing understanding over time rather than passively receiving information.</a:t>
             </a:r>
           </a:p>
           <a:p>
@@ -1511,7 +1511,7 @@
           <a:p>
             <a:fld id="{18BDFEC3-8487-43E8-A154-7C12CBC1FFF2}" type="slidenum">
               <a:rPr lang="en-US"/>
-              <a:t>24</a:t>
+              <a:t>22</a:t>
             </a:fld>
             <a:endParaRPr lang="en-US"/>
           </a:p>
@@ -1597,7 +1597,7 @@
           <a:p>
             <a:fld id="{18BDFEC3-8487-43E8-A154-7C12CBC1FFF2}" type="slidenum">
               <a:rPr lang="en-US"/>
-              <a:t>25</a:t>
+              <a:t>23</a:t>
             </a:fld>
             <a:endParaRPr lang="en-US"/>
           </a:p>
@@ -1675,7 +1675,21 @@
             </a:pPr>
             <a:r>
               <a:rPr/>
-              <a:t>What this means in practice is that learners are not “empty vessels” waiting to be filled with information. Instead, they interpret new ideas through the lens of what they already know. Prior knowledge therefore plays a central role in how new information is understood, and sometimes it can even support learning, or get in the way if existing ideas conflict with new ones. The second important element here is the role of context. Learning does not happen in isolation, it is shaped by the environment, the tasks learners engage with, and the social interactions they experience. The same content can therefore be understood differently depending on how and where it is learned.</a:t>
+              <a:t>What this means in practice is that learners are not “empty vessels” waiting to be filled with information. Instead, they interpret new ideas through the lens of what they already know. Prior knowledge therefore plays a central role in how new information is understood, and sometimes it can even support learning, or get in the way if existing ideas conflict with new ones.</a:t>
+            </a:r>
+          </a:p>
+          <a:p>
+            <a:pPr lvl="0" indent="0" marL="0">
+              <a:buNone/>
+            </a:pPr>
+          </a:p>
+          <a:p>
+            <a:pPr lvl="0" indent="0" marL="0">
+              <a:buNone/>
+            </a:pPr>
+            <a:r>
+              <a:rPr/>
+              <a:t>The second important element here is the role of context. Learning does not happen in isolation, it is shaped by the environment, the tasks learners engage with, and the social interactions they experience. The same content can therefore be understood differently depending on how and where it is learned.</a:t>
             </a:r>
           </a:p>
           <a:p>
@@ -1715,7 +1729,7 @@
           <a:p>
             <a:fld id="{18BDFEC3-8487-43E8-A154-7C12CBC1FFF2}" type="slidenum">
               <a:rPr lang="en-US"/>
-              <a:t>26</a:t>
+              <a:t>24</a:t>
             </a:fld>
             <a:endParaRPr lang="en-US"/>
           </a:p>
@@ -1985,7 +1999,7 @@
           <a:p>
             <a:fld id="{18BDFEC3-8487-43E8-A154-7C12CBC1FFF2}" type="slidenum">
               <a:rPr lang="en-US"/>
-              <a:t>28</a:t>
+              <a:t>26</a:t>
             </a:fld>
             <a:endParaRPr lang="en-US"/>
           </a:p>
@@ -2097,7 +2111,7 @@
           <a:p>
             <a:fld id="{18BDFEC3-8487-43E8-A154-7C12CBC1FFF2}" type="slidenum">
               <a:rPr lang="en-US"/>
-              <a:t>29</a:t>
+              <a:t>27</a:t>
             </a:fld>
             <a:endParaRPr lang="en-US"/>
           </a:p>
@@ -2309,7 +2323,7 @@
           <a:p>
             <a:fld id="{18BDFEC3-8487-43E8-A154-7C12CBC1FFF2}" type="slidenum">
               <a:rPr lang="en-US"/>
-              <a:t>31</a:t>
+              <a:t>29</a:t>
             </a:fld>
             <a:endParaRPr lang="en-US"/>
           </a:p>
@@ -2469,7 +2483,7 @@
           <a:p>
             <a:fld id="{18BDFEC3-8487-43E8-A154-7C12CBC1FFF2}" type="slidenum">
               <a:rPr lang="en-US"/>
-              <a:t>32</a:t>
+              <a:t>30</a:t>
             </a:fld>
             <a:endParaRPr lang="en-US"/>
           </a:p>
@@ -2533,7 +2547,35 @@
             </a:r>
             <a:r>
               <a:rPr/>
-              <a:t>: A novice has a minimal mental model of surface features of the domain. Inaccuracies based on limited or inaccurate prior knowledge may interfere with adding new information. Predictions are likely to borrow heavily from mental models of other domains which seem superficially similar. A competent practitioner has a mental model that is useful for everyday purposes. Most new information they are likely to encounter will fit well with their existing model. Even though many potential elements of their mental model may still be missing or wrong, predictions about their area of work are usually accurate. An expert has a densely populated and connected mental model that is especially good for problem solving. They quickly connect concepts that others may not see as being related. They may have difficulty explaining how they are thinking in ways that do not rely on other features unique to their own mental model.</a:t>
+              <a:t>: A novice has a minimal mental model of surface features of the domain. Inaccuracies based on limited or inaccurate prior knowledge may interfere with adding new information. Predictions are likely to borrow heavily from mental models of other domains which seem superficially similar.</a:t>
+            </a:r>
+          </a:p>
+          <a:p>
+            <a:pPr lvl="0" indent="0" marL="0">
+              <a:buNone/>
+            </a:pPr>
+          </a:p>
+          <a:p>
+            <a:pPr lvl="0" indent="0" marL="0">
+              <a:buNone/>
+            </a:pPr>
+            <a:r>
+              <a:rPr/>
+              <a:t>A competent practitioner has a mental model that is useful for everyday purposes. Most new information they are likely to encounter will fit well with their existing model. Even though many potential elements of their mental model may still be missing or wrong, predictions about their area of work are usually accurate.</a:t>
+            </a:r>
+          </a:p>
+          <a:p>
+            <a:pPr lvl="0" indent="0" marL="0">
+              <a:buNone/>
+            </a:pPr>
+          </a:p>
+          <a:p>
+            <a:pPr lvl="0" indent="0" marL="0">
+              <a:buNone/>
+            </a:pPr>
+            <a:r>
+              <a:rPr/>
+              <a:t>An expert has a densely populated and connected mental model that is especially good for problem solving. They quickly connect concepts that others may not see as being related. They may have difficulty explaining how they are thinking in ways that do not rely on other features unique to their own mental model.</a:t>
             </a:r>
           </a:p>
           <a:p>
@@ -2617,7 +2659,7 @@
           <a:p>
             <a:fld id="{18BDFEC3-8487-43E8-A154-7C12CBC1FFF2}" type="slidenum">
               <a:rPr lang="en-US"/>
-              <a:t>34</a:t>
+              <a:t>32</a:t>
             </a:fld>
             <a:endParaRPr lang="en-US"/>
           </a:p>
@@ -2721,7 +2763,7 @@
           <a:p>
             <a:fld id="{18BDFEC3-8487-43E8-A154-7C12CBC1FFF2}" type="slidenum">
               <a:rPr lang="en-US"/>
-              <a:t>35</a:t>
+              <a:t>33</a:t>
             </a:fld>
             <a:endParaRPr lang="en-US"/>
           </a:p>
@@ -2855,7 +2897,7 @@
           <a:p>
             <a:fld id="{18BDFEC3-8487-43E8-A154-7C12CBC1FFF2}" type="slidenum">
               <a:rPr lang="en-US"/>
-              <a:t>36</a:t>
+              <a:t>34</a:t>
             </a:fld>
             <a:endParaRPr lang="en-US"/>
           </a:p>
@@ -2919,7 +2961,7 @@
             </a:r>
             <a:r>
               <a:rPr/>
-              <a:t>: Now that we have talked about mental models, next we want to talk about things that could help us move from novice learners to experts. Think about something that you are currently learning or learning how to do. What helps you with organizing your knowledge, beliefs, prior skills, etc. in your mental model, for example in the context of a workshop or course? Think back about things that you encountered in workshops or courses, or even things you have seen during this session.</a:t>
+              <a:t>: Now that we have talked about mental models, next we want to talk about things that could help us move from novice learners to experts. Think about something that you are currently learning or learning how to do. What helps you with organizing your knowledge, beliefs, prior skills, etc. in your mental model, for example in the context of a workshop or course? Think back about things that you encountered in workshops or courses, or even things you have seen during this session. Write down thoughts for yourself (2 mins). Then discuss with your neighbor (2 mins). We will then discuss in the larger group.</a:t>
             </a:r>
           </a:p>
           <a:p>
@@ -2937,7 +2979,7 @@
             </a:r>
             <a:r>
               <a:rPr/>
-              <a:t>: Ask for interaction from the audience.</a:t>
+              <a:t>: Ask for interaction from the audience or make it an individual activity. Allow for approx. 6 minutes.</a:t>
             </a:r>
           </a:p>
         </p:txBody>
@@ -2959,7 +3001,7 @@
           <a:p>
             <a:fld id="{18BDFEC3-8487-43E8-A154-7C12CBC1FFF2}" type="slidenum">
               <a:rPr lang="en-US"/>
-              <a:t>37</a:t>
+              <a:t>36</a:t>
             </a:fld>
             <a:endParaRPr lang="en-US"/>
           </a:p>
@@ -3105,7 +3147,7 @@
           <a:p>
             <a:fld id="{18BDFEC3-8487-43E8-A154-7C12CBC1FFF2}" type="slidenum">
               <a:rPr lang="en-US"/>
-              <a:t>38</a:t>
+              <a:t>37</a:t>
             </a:fld>
             <a:endParaRPr lang="en-US"/>
           </a:p>
@@ -3229,7 +3271,7 @@
             </a:r>
             <a:r>
               <a:rPr/>
-              <a:t>: Ask if someone in your audience has already heard about this concept. Ask to provide examples. In constructive alignment, we start with the outcomes we intend students to learn, and align teaching and assessment to those outcomes. The outcome statements contain a learning activity, a verb, [that] verb says what the relevant learning activities are that the students need to undertake in order to attain the intended learning outcome. Learning is constructed by what activities the students carry out; learning is about what they do, not about what we teachers do. Likewise, assessment is about how well they achieve the intended outcomes, not about how well they report back to us what we have told them or what they have read’ (Biggs n.d.).</a:t>
+              <a:t>: Ask if someone in your audience has already heard about this concept. Ask to provide examples. In constructive alignment, we start with the outcomes we intend students to learn, and align teaching and assessment to those outcomes. The outcome statements contain a learning activity, a verb, that verb says what the relevant learning activities are that the students need to undertake in order to attain the intended learning outcome. Learning is constructed by what activities the students carry out; learning is about what they do, not about what we teachers do. Likewise, assessment is about how well they achieve the intended outcomes, not about how well they report back to us what we have told them or what they have read’ (Biggs n.d.).</a:t>
             </a:r>
           </a:p>
         </p:txBody>
@@ -3251,7 +3293,7 @@
           <a:p>
             <a:fld id="{18BDFEC3-8487-43E8-A154-7C12CBC1FFF2}" type="slidenum">
               <a:rPr lang="en-US"/>
-              <a:t>40</a:t>
+              <a:t>39</a:t>
             </a:fld>
             <a:endParaRPr lang="en-US"/>
           </a:p>
@@ -3441,7 +3483,7 @@
           <a:p>
             <a:fld id="{18BDFEC3-8487-43E8-A154-7C12CBC1FFF2}" type="slidenum">
               <a:rPr lang="en-US"/>
-              <a:t>41</a:t>
+              <a:t>40</a:t>
             </a:fld>
             <a:endParaRPr lang="en-US"/>
           </a:p>
@@ -3527,7 +3569,7 @@
           <a:p>
             <a:fld id="{18BDFEC3-8487-43E8-A154-7C12CBC1FFF2}" type="slidenum">
               <a:rPr lang="en-US"/>
-              <a:t>42</a:t>
+              <a:t>41</a:t>
             </a:fld>
             <a:endParaRPr lang="en-US"/>
           </a:p>
@@ -3591,7 +3633,39 @@
             </a:r>
             <a:r>
               <a:rPr/>
-              <a:t>: We are coming to another core didactic principle besides prior knowledge, constructivism, mental models and constructive alignment, namely setting learning objectives.</a:t>
+              <a:t>: We are coming to another core didactic principle besides prior knowledge, constructivism, mental models and constructive alignment, namely setting learning objectives. These quotes here represent the famous conversation between Alice and the Cheshire Cat in Alice in Wonderland. They highlight the importance of having a clear objective before choosing a direction. Just as Alice cannot choose the right path without knowing where she wants to go, instructors cannot teach effectively without clear learning objectives.</a:t>
+            </a:r>
+          </a:p>
+          <a:p>
+            <a:pPr lvl="0" indent="0" marL="0">
+              <a:buNone/>
+            </a:pPr>
+          </a:p>
+          <a:p>
+            <a:pPr lvl="0" indent="0" marL="0">
+              <a:buNone/>
+            </a:pPr>
+            <a:r>
+              <a:rPr/>
+              <a:t>Clear objectives provide direction and intentionality, making them especially important in Open Science, a broad and interdisciplinary field that can sometimes seem abstract or ideological to learners.</a:t>
+            </a:r>
+          </a:p>
+          <a:p>
+            <a:pPr lvl="0" indent="0" marL="0">
+              <a:buNone/>
+            </a:pPr>
+          </a:p>
+          <a:p>
+            <a:pPr lvl="0" indent="0" marL="0">
+              <a:buNone/>
+            </a:pPr>
+            <a:r>
+              <a:rPr b="1"/>
+              <a:t>Instructor Notes</a:t>
+            </a:r>
+            <a:r>
+              <a:rPr/>
+              <a:t>: Emphasize the importance of clear learning objectives in the context of Open Science. Clear learning objectives create the direction that allows open science education to move from awareness toward genuine cultural and practical change in research, which is what is currently needed.</a:t>
             </a:r>
           </a:p>
         </p:txBody>
@@ -3613,7 +3687,7 @@
           <a:p>
             <a:fld id="{18BDFEC3-8487-43E8-A154-7C12CBC1FFF2}" type="slidenum">
               <a:rPr lang="en-US"/>
-              <a:t>43</a:t>
+              <a:t>42</a:t>
             </a:fld>
             <a:endParaRPr lang="en-US"/>
           </a:p>
@@ -3677,25 +3751,7 @@
             </a:r>
             <a:r>
               <a:rPr/>
-              <a:t>: These quotes here represent the famous conversation between Alice and the Cheshire Cat in Alice in Wonderland. The key idea of the scene is decision-making and the importance of having an objective before choosing a direction. If you do not know where you are going, any road could potentially take you there. In this case, before asking how to get somewhere, you first need to know where you want to go. Just like Alice cannot choose the right path without knowing where she wants to go, instructors cannot effectively teach and get progress in return without clear learning objectives. Without clearly defined learning objectives, teaching and learning may lack direction and intentionality. Therefore, formulating and setting suitable learning objectives is a key skill of instructors, particularly in Open Science, which as a broad, interdisciplinary field with many obstacles that can sometimes feel too abstract or ideological to learners.</a:t>
-            </a:r>
-          </a:p>
-          <a:p>
-            <a:pPr lvl="0" indent="0" marL="0">
-              <a:buNone/>
-            </a:pPr>
-          </a:p>
-          <a:p>
-            <a:pPr lvl="0" indent="0" marL="0">
-              <a:buNone/>
-            </a:pPr>
-            <a:r>
-              <a:rPr b="1"/>
-              <a:t>Instructor Notes</a:t>
-            </a:r>
-            <a:r>
-              <a:rPr/>
-              <a:t>: Emphasize the importance of clear learning objectives in the context of Open Science. Clear learning objectives create the direction that allows open science education to move from awareness toward genuine cultural and practical change in research, which is what is currently needed.</a:t>
+              <a:t>: When we talk about learning objectives, we are referring to more than simply describing what a teacher will cover or what content will be presented. A learning objective describes what learners should be able to do after an instructional activity. According to Mager, well-formulated objectives specify three important elements: the intended performance, what learners should demonstrate; the conditions under which this performance takes place; and the criteria for success, how we determine whether the learning goal has been achieved.</a:t>
             </a:r>
           </a:p>
         </p:txBody>
@@ -3717,7 +3773,7 @@
           <a:p>
             <a:fld id="{18BDFEC3-8487-43E8-A154-7C12CBC1FFF2}" type="slidenum">
               <a:rPr lang="en-US"/>
-              <a:t>44</a:t>
+              <a:t>43</a:t>
             </a:fld>
             <a:endParaRPr lang="en-US"/>
           </a:p>
@@ -3781,7 +3837,35 @@
             </a:r>
             <a:r>
               <a:rPr/>
-              <a:t>: When we talk about learning objectives, we are referring to more than simply describing what a teacher will cover or what content will be presented. A learning objective describes what learners should be able to do after an instructional activity. According to Mager, well-formulated objectives specify three important elements: the intended performance, what learners should demonstrate; the conditions under which this performance takes place; and the criteria for success, how we determine whether the learning goal has been achieved.</a:t>
+              <a:t>: Generally speaking, the instructor needs to formulate designated and specific learning objectives.</a:t>
+            </a:r>
+          </a:p>
+          <a:p>
+            <a:pPr lvl="0" indent="0" marL="0">
+              <a:buNone/>
+            </a:pPr>
+          </a:p>
+          <a:p>
+            <a:pPr lvl="0" indent="0" marL="0">
+              <a:buNone/>
+            </a:pPr>
+            <a:r>
+              <a:rPr/>
+              <a:t>When preparing a teaching unit, it is important to gain an overview of the location of the learning objectives within this hierarchy to be pursued. Each learning objective is embedded in preceding and subsequent learning objectives. Previous learning achievements are an essential foundation for the successful acquisition of new knowledge and skills. At the same time, this knowledge prepares learners for the learning steps that follow. The learning objectives are not always on the same logical level. In order to reach the next level, it is necessary for learning success that the foundation of the lower levels has been laid.</a:t>
+            </a:r>
+          </a:p>
+          <a:p>
+            <a:pPr lvl="0" indent="0" marL="0">
+              <a:buNone/>
+            </a:pPr>
+          </a:p>
+          <a:p>
+            <a:pPr lvl="0" indent="0" marL="0">
+              <a:buNone/>
+            </a:pPr>
+            <a:r>
+              <a:rPr/>
+              <a:t>What are the three levels of learning objectives? - General objectives — Course as a whole (e.g. producing transparent and reproducible research) - Designated objectives — Subject area (e.g. use FAIR data principles when organizing and publishing research data) - Specific objectives — Learning unit (Upload a dataset to an open repository with appropriate metadata)</a:t>
             </a:r>
           </a:p>
         </p:txBody>
@@ -3803,7 +3887,7 @@
           <a:p>
             <a:fld id="{18BDFEC3-8487-43E8-A154-7C12CBC1FFF2}" type="slidenum">
               <a:rPr lang="en-US"/>
-              <a:t>45</a:t>
+              <a:t>44</a:t>
             </a:fld>
             <a:endParaRPr lang="en-US"/>
           </a:p>
@@ -3867,35 +3951,21 @@
             </a:r>
             <a:r>
               <a:rPr/>
-              <a:t>: Generally speaking, the instructor needs to formulate designated and specific learning objectives.</a:t>
-            </a:r>
-          </a:p>
-          <a:p>
-            <a:pPr lvl="0" indent="0" marL="0">
-              <a:buNone/>
-            </a:pPr>
-          </a:p>
-          <a:p>
-            <a:pPr lvl="0" indent="0" marL="0">
-              <a:buNone/>
-            </a:pPr>
-            <a:r>
-              <a:rPr/>
-              <a:t>When preparing a teaching unit, it is important to gain an overview of the location of the learning objectives within this hierarchy to be pursued. Each learning objective is embedded in preceding and subsequent learning objectives. Previous learning achievements are an essential foundation for the successful acquisition of new knowledge and skills. At the same time, this knowledge prepares learners for the learning steps that follow. The learning objectives are not always on the same logical level. In order to reach the next level, it is necessary for learning success that the foundation of the lower levels has been laid.</a:t>
-            </a:r>
-          </a:p>
-          <a:p>
-            <a:pPr lvl="0" indent="0" marL="0">
-              <a:buNone/>
-            </a:pPr>
-          </a:p>
-          <a:p>
-            <a:pPr lvl="0" indent="0" marL="0">
-              <a:buNone/>
-            </a:pPr>
-            <a:r>
-              <a:rPr/>
-              <a:t>What are the three levels of learning objectives? - General objectives — Course as a whole (e.g. producing transparent and reproducible research) - Designated objectives — Subject area (e.g. use FAIR data principles when organizing and publishing research data) - Specific objectives — Learning unit (Upload a dataset to an open repository with appropriate metadata)</a:t>
+              <a:t>: Let’s talk about the formulation of learning objectives, which is visualized here. We need to first start with: who are we teaching? Next, the verbs matter! Pick them wisely in an active tense. Third, match the assessment task to your learning objective. Fourth, ensure the learning objective is measurable.</a:t>
+            </a:r>
+          </a:p>
+          <a:p>
+            <a:pPr lvl="0" indent="0" marL="0">
+              <a:buNone/>
+            </a:pPr>
+          </a:p>
+          <a:p>
+            <a:pPr lvl="0" indent="0" marL="0">
+              <a:buNone/>
+            </a:pPr>
+            <a:r>
+              <a:rPr/>
+              <a:t>It is best to practice this, so without any more explanations, let us practice!</a:t>
             </a:r>
           </a:p>
         </p:txBody>
@@ -3917,7 +3987,7 @@
           <a:p>
             <a:fld id="{18BDFEC3-8487-43E8-A154-7C12CBC1FFF2}" type="slidenum">
               <a:rPr lang="en-US"/>
-              <a:t>46</a:t>
+              <a:t>45</a:t>
             </a:fld>
             <a:endParaRPr lang="en-US"/>
           </a:p>
@@ -3981,21 +4051,23 @@
             </a:r>
             <a:r>
               <a:rPr/>
-              <a:t>: Let’s talk about the formulation of learning objectives, which is visualized here. We need to first start with: who are we teaching? Next, the verbs matter! Pick them wisely in an active tense. Third, match the assessment task to your learning objective. Fourth, ensure the learning objective is measurable.</a:t>
-            </a:r>
-          </a:p>
-          <a:p>
-            <a:pPr lvl="0" indent="0" marL="0">
-              <a:buNone/>
-            </a:pPr>
-          </a:p>
-          <a:p>
-            <a:pPr lvl="0" indent="0" marL="0">
-              <a:buNone/>
-            </a:pPr>
-            <a:r>
-              <a:rPr/>
-              <a:t>It is best to practice this, so without any more explanations, let us practice!</a:t>
+              <a:t>: Now, let’s say we want to define our learning objectives, and we know where in the hierarchy we want to begin. We still do not fully know </a:t>
+            </a:r>
+            <a:r>
+              <a:rPr i="1"/>
+              <a:t>where</a:t>
+            </a:r>
+            <a:r>
+              <a:rPr/>
+              <a:t> we are going because we have to better define what we want our learners to take out of the course, the subject or the individual lesson. In other words, we need to be more specific in </a:t>
+            </a:r>
+            <a:r>
+              <a:rPr i="1"/>
+              <a:t>what</a:t>
+            </a:r>
+            <a:r>
+              <a:rPr/>
+              <a:t> we want our learners to learn. A useful framework is to divide learning objectives into three domains. The first domain is the cognitive domain, which focuses on knowledge and thinking. The second domain is the affective domain, which focuses on feelings, attitudes, values, and personal growth. The third domain is the psychomotor domain, which focuses on physical or technical skills and behavioral change. Let us go through each one in more detail.</a:t>
             </a:r>
           </a:p>
         </p:txBody>
@@ -4081,23 +4153,121 @@
             </a:r>
             <a:r>
               <a:rPr/>
-              <a:t>: Now, let’s say we want to define our learning objectives, and we know where in the hierarchy we want to begin. We still do not fully know </a:t>
-            </a:r>
-            <a:r>
-              <a:rPr i="1"/>
-              <a:t>where</a:t>
-            </a:r>
-            <a:r>
-              <a:rPr/>
-              <a:t> we are going because we have to better define what we want our learners to take out of the course, the subject or the individual lesson. In other words, we need to be more specific in </a:t>
-            </a:r>
-            <a:r>
-              <a:rPr i="1"/>
-              <a:t>what</a:t>
-            </a:r>
-            <a:r>
-              <a:rPr/>
-              <a:t> we want our learners to learn. A useful framework is to divide learning objectives into three domains. The first domain is the cognitive domain, which focuses on knowledge and thinking. The second domain is the affective domain, which focuses on feelings, attitudes, values, and personal growth. The third domain is the psychomotor domain, which focuses on physical or technical skills and behavioral change. Let us go through each one in more detail.</a:t>
+              <a:t>: The cognitive domain went through numerous revisions before a finalized version was published (Bloom 1956). Bloom’s taxonomy of learning objectives (Bloom et al., 1964) is a proven model for describing and classifying the cognitive skills that students should have mastered at the end of a course or module. The six levels of cognitive complexity build on each other and can be described using specific verbs.</a:t>
+            </a:r>
+          </a:p>
+          <a:p>
+            <a:pPr lvl="0" indent="0" marL="0">
+              <a:buNone/>
+            </a:pPr>
+          </a:p>
+          <a:p>
+            <a:pPr lvl="0" indent="0" marL="0">
+              <a:buNone/>
+            </a:pPr>
+            <a:r>
+              <a:rPr/>
+              <a:t>The cognitive domain has been the primary focus in education and has become shorthand for Bloom’s taxonomy as a result. The cognitive domain is made up of six levels of objectives. These levels are organized by hierarchy, moving from foundational skills to higher-order thinking skills.</a:t>
+            </a:r>
+          </a:p>
+          <a:p>
+            <a:pPr lvl="0" indent="0" marL="0">
+              <a:buNone/>
+            </a:pPr>
+          </a:p>
+          <a:p>
+            <a:pPr lvl="0" indent="0" marL="0">
+              <a:buNone/>
+            </a:pPr>
+            <a:r>
+              <a:rPr/>
+              <a:t>In 2001, Anderson and Krathwohl revised Bloom’s levels from nouns to verbs, and this is the version of the taxonomy used today (Anderson &amp; Krathwohl, 2001).</a:t>
+            </a:r>
+          </a:p>
+          <a:p>
+            <a:pPr lvl="0" indent="0" marL="0">
+              <a:buNone/>
+            </a:pPr>
+          </a:p>
+          <a:p>
+            <a:pPr lvl="0"/>
+            <a:r>
+              <a:rPr/>
+              <a:t>Remember: retrieve relevant knowledge from memory.</a:t>
+            </a:r>
+          </a:p>
+          <a:p>
+            <a:pPr lvl="0" indent="0" marL="0">
+              <a:buNone/>
+            </a:pPr>
+          </a:p>
+          <a:p>
+            <a:pPr lvl="0"/>
+            <a:r>
+              <a:rPr/>
+              <a:t>Understand: determine the meaning of instructional messages.</a:t>
+            </a:r>
+          </a:p>
+          <a:p>
+            <a:pPr lvl="0" indent="0" marL="0">
+              <a:buNone/>
+            </a:pPr>
+          </a:p>
+          <a:p>
+            <a:pPr lvl="0"/>
+            <a:r>
+              <a:rPr/>
+              <a:t>Apply: use a procedure in a given situation.</a:t>
+            </a:r>
+          </a:p>
+          <a:p>
+            <a:pPr lvl="0" indent="0" marL="0">
+              <a:buNone/>
+            </a:pPr>
+          </a:p>
+          <a:p>
+            <a:pPr lvl="0"/>
+            <a:r>
+              <a:rPr/>
+              <a:t>Analyze: break materials into components and determine how they work together.</a:t>
+            </a:r>
+          </a:p>
+          <a:p>
+            <a:pPr lvl="0" indent="0" marL="0">
+              <a:buNone/>
+            </a:pPr>
+          </a:p>
+          <a:p>
+            <a:pPr lvl="0"/>
+            <a:r>
+              <a:rPr/>
+              <a:t>Evaluate: make judgments based on criteria and standards.</a:t>
+            </a:r>
+          </a:p>
+          <a:p>
+            <a:pPr lvl="0" indent="0" marL="0">
+              <a:buNone/>
+            </a:pPr>
+          </a:p>
+          <a:p>
+            <a:pPr lvl="0"/>
+            <a:r>
+              <a:rPr/>
+              <a:t>Create: create a new or original work.</a:t>
+            </a:r>
+          </a:p>
+          <a:p>
+            <a:pPr lvl="0" indent="0" marL="0">
+              <a:buNone/>
+            </a:pPr>
+          </a:p>
+          <a:p>
+            <a:pPr lvl="0" indent="0" marL="0">
+              <a:buNone/>
+            </a:pPr>
+            <a:r>
+              <a:rPr/>
+              <a:t>Example from Open Science: The learning objective focuses on analysis. Learners are expected to critically examine how open science practices contribute to transparency and reproducibility in research. This moves beyond memorization and requires higher-order thinking, such as comparing, evaluating, and interpreting research processes. The teaching activity supports this objective by engaging learners in the evaluation and comparison of real or simulated research workflows. For example, they might look at a traditional analysis pipeline versus one that uses version control, preregistration, or shared data. The emphasis here is on identifying differences in structure, transparency, and reproducibility. Finally, the assessment task asks learners to demonstrate their understanding through a group presentation. This allows them to articulate strengths and limitations of different research practices and justify their evaluation using evidence. It also encourages discussion and collaborative reasoning, which is important when dealing with complex methodological topics such as Open Science.</a:t>
             </a:r>
           </a:p>
         </p:txBody>
@@ -4119,7 +4289,7 @@
           <a:p>
             <a:fld id="{18BDFEC3-8487-43E8-A154-7C12CBC1FFF2}" type="slidenum">
               <a:rPr lang="en-US"/>
-              <a:t>49</a:t>
+              <a:t>48</a:t>
             </a:fld>
             <a:endParaRPr lang="en-US"/>
           </a:p>
@@ -4183,121 +4353,153 @@
             </a:r>
             <a:r>
               <a:rPr/>
-              <a:t>: The cognitive domain went through numerous revisions before a finalized version was published (Bloom 1956). Bloom’s taxonomy of learning objectives (1973; Bloom et al., 1956) is a proven model for describing and classifying the cognitive skills that students should have mastered at the end of a course or module. The six levels of cognitive complexity build on each other and can be described using specific verbs.</a:t>
-            </a:r>
-          </a:p>
-          <a:p>
-            <a:pPr lvl="0" indent="0" marL="0">
-              <a:buNone/>
-            </a:pPr>
-          </a:p>
-          <a:p>
-            <a:pPr lvl="0" indent="0" marL="0">
-              <a:buNone/>
-            </a:pPr>
-            <a:r>
-              <a:rPr/>
-              <a:t>The cognitive domain has been the primary focus in education and has become shorthand for Bloom’s taxonomy as a result. The cognitive domain is made up of six levels of objectives. These levels are organized by hierarchy, moving from foundational skills to higher-order thinking skills.</a:t>
-            </a:r>
-          </a:p>
-          <a:p>
-            <a:pPr lvl="0" indent="0" marL="0">
-              <a:buNone/>
-            </a:pPr>
-          </a:p>
-          <a:p>
-            <a:pPr lvl="0" indent="0" marL="0">
-              <a:buNone/>
-            </a:pPr>
-            <a:r>
-              <a:rPr/>
-              <a:t>In 2001, Anderson and Krathwohl revised Bloom’s levels from nouns to verbs, and this is the version of the taxonomy used today.</a:t>
-            </a:r>
-          </a:p>
-          <a:p>
-            <a:pPr lvl="0" indent="0" marL="0">
-              <a:buNone/>
-            </a:pPr>
-          </a:p>
-          <a:p>
-            <a:pPr lvl="0"/>
-            <a:r>
-              <a:rPr/>
-              <a:t>Remember: retrieve relevant knowledge from memory.</a:t>
-            </a:r>
-          </a:p>
-          <a:p>
-            <a:pPr lvl="0" indent="0" marL="0">
-              <a:buNone/>
-            </a:pPr>
-          </a:p>
-          <a:p>
-            <a:pPr lvl="0"/>
-            <a:r>
-              <a:rPr/>
-              <a:t>Understand: determine the meaning of instructional messages.</a:t>
-            </a:r>
-          </a:p>
-          <a:p>
-            <a:pPr lvl="0" indent="0" marL="0">
-              <a:buNone/>
-            </a:pPr>
-          </a:p>
-          <a:p>
-            <a:pPr lvl="0"/>
-            <a:r>
-              <a:rPr/>
-              <a:t>Apply: use a procedure in a given situation.</a:t>
-            </a:r>
-          </a:p>
-          <a:p>
-            <a:pPr lvl="0" indent="0" marL="0">
-              <a:buNone/>
-            </a:pPr>
-          </a:p>
-          <a:p>
-            <a:pPr lvl="0"/>
-            <a:r>
-              <a:rPr/>
-              <a:t>Analyze: break materials into components and determine how they work together.</a:t>
-            </a:r>
-          </a:p>
-          <a:p>
-            <a:pPr lvl="0" indent="0" marL="0">
-              <a:buNone/>
-            </a:pPr>
-          </a:p>
-          <a:p>
-            <a:pPr lvl="0"/>
-            <a:r>
-              <a:rPr/>
-              <a:t>Evaluate: make judgments based on criteria and standards.</a:t>
-            </a:r>
-          </a:p>
-          <a:p>
-            <a:pPr lvl="0" indent="0" marL="0">
-              <a:buNone/>
-            </a:pPr>
-          </a:p>
-          <a:p>
-            <a:pPr lvl="0"/>
-            <a:r>
-              <a:rPr/>
-              <a:t>Create: create a new or original work.</a:t>
-            </a:r>
-          </a:p>
-          <a:p>
-            <a:pPr lvl="0" indent="0" marL="0">
-              <a:buNone/>
-            </a:pPr>
-          </a:p>
-          <a:p>
-            <a:pPr lvl="0" indent="0" marL="0">
-              <a:buNone/>
-            </a:pPr>
-            <a:r>
-              <a:rPr/>
-              <a:t>Example from Open Science: The learning objective focuses on analysis. Learners are expected to critically examine how open science practices contribute to transparency and reproducibility in research. This moves beyond memorization and requires higher-order thinking, such as comparing, evaluating, and interpreting research processes. The teaching activity supports this objective by engaging learners in the evaluation and comparison of real or simulated research workflows. For example, they might look at a traditional analysis pipeline versus one that uses version control, preregistration, or shared data. The emphasis here is on identifying differences in structure, transparency, and reproducibility. Finally, the assessment task asks learners to demonstrate their understanding through a group presentation. This allows them to articulate strengths and limitations of different research practices and justify their evaluation using evidence. It also encourages discussion and collaborative reasoning, which is important when dealing with complex methodological topics such as Open Science.</a:t>
+              <a:t>: This figure visualizes the learning objectives associated with the cognitive learning domain. What you see is the pyramid of learning objective verbs by Anderson and Krathwohl. This is a revised version of Bloom’s taxonomy and organizes learning objectives into a hierarchy of cognitive processes. It is often shown as a pyramid because it moves from simpler thinking skills at the base to more complex, higher-order thinking at the top.</a:t>
+            </a:r>
+          </a:p>
+          <a:p>
+            <a:pPr lvl="0" indent="0" marL="0">
+              <a:buNone/>
+            </a:pPr>
+          </a:p>
+          <a:p>
+            <a:pPr lvl="0" indent="0" marL="0">
+              <a:buNone/>
+            </a:pPr>
+            <a:r>
+              <a:rPr/>
+              <a:t>At the </a:t>
+            </a:r>
+            <a:r>
+              <a:rPr b="1"/>
+              <a:t>Remember</a:t>
+            </a:r>
+            <a:r>
+              <a:rPr/>
+              <a:t> level, learners recall basic facts and definitions. For example, they might remember what open science, preregistration, or FAIR data principles stand for without yet applying them.</a:t>
+            </a:r>
+          </a:p>
+          <a:p>
+            <a:pPr lvl="0" indent="0" marL="0">
+              <a:buNone/>
+            </a:pPr>
+          </a:p>
+          <a:p>
+            <a:pPr lvl="0" indent="0" marL="0">
+              <a:buNone/>
+            </a:pPr>
+            <a:r>
+              <a:rPr/>
+              <a:t>At the </a:t>
+            </a:r>
+            <a:r>
+              <a:rPr b="1"/>
+              <a:t>Understand</a:t>
+            </a:r>
+            <a:r>
+              <a:rPr/>
+              <a:t> level, learners explain concepts in their own words. For instance, they might describe why open science improves transparency and reproducibility, or summarize what problems in research the reproducibility crisis highlights.</a:t>
+            </a:r>
+          </a:p>
+          <a:p>
+            <a:pPr lvl="0" indent="0" marL="0">
+              <a:buNone/>
+            </a:pPr>
+          </a:p>
+          <a:p>
+            <a:pPr lvl="0" indent="0" marL="0">
+              <a:buNone/>
+            </a:pPr>
+            <a:r>
+              <a:rPr/>
+              <a:t>At the </a:t>
+            </a:r>
+            <a:r>
+              <a:rPr b="1"/>
+              <a:t>Apply</a:t>
+            </a:r>
+            <a:r>
+              <a:rPr/>
+              <a:t> level, learners use knowledge in a concrete situation. An example would be a student implementing open science practices in a small study, such as uploading data and code to an open repository or preregistering a simple experiment.</a:t>
+            </a:r>
+          </a:p>
+          <a:p>
+            <a:pPr lvl="0" indent="0" marL="0">
+              <a:buNone/>
+            </a:pPr>
+          </a:p>
+          <a:p>
+            <a:pPr lvl="0" indent="0" marL="0">
+              <a:buNone/>
+            </a:pPr>
+            <a:r>
+              <a:rPr/>
+              <a:t>At the </a:t>
+            </a:r>
+            <a:r>
+              <a:rPr b="1"/>
+              <a:t>Analyze</a:t>
+            </a:r>
+            <a:r>
+              <a:rPr/>
+              <a:t> level, learners break information into parts and examine relationships. For example, they might compare an open dataset with a traditionally published study to identify potential sources of bias, missing information, or differences in reproducibility.</a:t>
+            </a:r>
+          </a:p>
+          <a:p>
+            <a:pPr lvl="0" indent="0" marL="0">
+              <a:buNone/>
+            </a:pPr>
+          </a:p>
+          <a:p>
+            <a:pPr lvl="0" indent="0" marL="0">
+              <a:buNone/>
+            </a:pPr>
+            <a:r>
+              <a:rPr/>
+              <a:t>At the </a:t>
+            </a:r>
+            <a:r>
+              <a:rPr b="1"/>
+              <a:t>Evaluate</a:t>
+            </a:r>
+            <a:r>
+              <a:rPr/>
+              <a:t> level, learners make judgments based on criteria. In open science, this could involve critically assessing whether a published study’s open data and materials are sufficient for replication, or evaluating the quality and transparency of an open peer review process.</a:t>
+            </a:r>
+          </a:p>
+          <a:p>
+            <a:pPr lvl="0" indent="0" marL="0">
+              <a:buNone/>
+            </a:pPr>
+          </a:p>
+          <a:p>
+            <a:pPr lvl="0" indent="0" marL="0">
+              <a:buNone/>
+            </a:pPr>
+            <a:r>
+              <a:rPr/>
+              <a:t>At the </a:t>
+            </a:r>
+            <a:r>
+              <a:rPr b="1"/>
+              <a:t>Create</a:t>
+            </a:r>
+            <a:r>
+              <a:rPr/>
+              <a:t> level, learners produce new work by combining knowledge in original ways. For example, they might design a fully open research project with preregistration, open materials, reproducible code, and a public dataset, or extend an existing open dataset to ask a new research question.</a:t>
+            </a:r>
+          </a:p>
+          <a:p>
+            <a:pPr lvl="0" indent="0" marL="0">
+              <a:buNone/>
+            </a:pPr>
+          </a:p>
+          <a:p>
+            <a:pPr lvl="0" indent="0" marL="0">
+              <a:buNone/>
+            </a:pPr>
+            <a:r>
+              <a:rPr/>
+              <a:t>With respect to the example we just discussed, which level or levels do you think are we at when we think of the learning objective that was formulated?</a:t>
             </a:r>
           </a:p>
         </p:txBody>
@@ -4383,153 +4585,49 @@
             </a:r>
             <a:r>
               <a:rPr/>
-              <a:t>: This figure visualizes the learning objectives associated with the cognitive learning domain. What you see is the pyramid of learning objective verbs by Anderson and Krathwohl. This is a revised version of Bloom’s taxonomy and organizes learning objectives into a hierarchy of cognitive processes. It is often shown as a pyramid because it moves from simpler thinking skills at the base to more complex, higher-order thinking at the top.</a:t>
-            </a:r>
-          </a:p>
-          <a:p>
-            <a:pPr lvl="0" indent="0" marL="0">
-              <a:buNone/>
-            </a:pPr>
-          </a:p>
-          <a:p>
-            <a:pPr lvl="0" indent="0" marL="0">
-              <a:buNone/>
-            </a:pPr>
-            <a:r>
-              <a:rPr/>
-              <a:t>At the </a:t>
-            </a:r>
-            <a:r>
-              <a:rPr b="1"/>
-              <a:t>Remember</a:t>
-            </a:r>
-            <a:r>
-              <a:rPr/>
-              <a:t> level, learners recall basic facts and definitions. For example, they might remember what open science, preregistration, or FAIR data principles stand for without yet applying them.</a:t>
-            </a:r>
-          </a:p>
-          <a:p>
-            <a:pPr lvl="0" indent="0" marL="0">
-              <a:buNone/>
-            </a:pPr>
-          </a:p>
-          <a:p>
-            <a:pPr lvl="0" indent="0" marL="0">
-              <a:buNone/>
-            </a:pPr>
-            <a:r>
-              <a:rPr/>
-              <a:t>At the </a:t>
-            </a:r>
-            <a:r>
-              <a:rPr b="1"/>
-              <a:t>Understand</a:t>
-            </a:r>
-            <a:r>
-              <a:rPr/>
-              <a:t> level, learners explain concepts in their own words. For instance, they might describe why open science improves transparency and reproducibility, or summarize what problems in research the reproducibility crisis highlights.</a:t>
-            </a:r>
-          </a:p>
-          <a:p>
-            <a:pPr lvl="0" indent="0" marL="0">
-              <a:buNone/>
-            </a:pPr>
-          </a:p>
-          <a:p>
-            <a:pPr lvl="0" indent="0" marL="0">
-              <a:buNone/>
-            </a:pPr>
-            <a:r>
-              <a:rPr/>
-              <a:t>At the </a:t>
-            </a:r>
-            <a:r>
-              <a:rPr b="1"/>
-              <a:t>Apply</a:t>
-            </a:r>
-            <a:r>
-              <a:rPr/>
-              <a:t> level, learners use knowledge in a concrete situation. An example would be a student implementing open science practices in a small study, such as uploading data and code to an open repository or preregistering a simple experiment.</a:t>
-            </a:r>
-          </a:p>
-          <a:p>
-            <a:pPr lvl="0" indent="0" marL="0">
-              <a:buNone/>
-            </a:pPr>
-          </a:p>
-          <a:p>
-            <a:pPr lvl="0" indent="0" marL="0">
-              <a:buNone/>
-            </a:pPr>
-            <a:r>
-              <a:rPr/>
-              <a:t>At the </a:t>
-            </a:r>
-            <a:r>
-              <a:rPr b="1"/>
-              <a:t>Analyze</a:t>
-            </a:r>
-            <a:r>
-              <a:rPr/>
-              <a:t> level, learners break information into parts and examine relationships. For example, they might compare an open dataset with a traditionally published study to identify potential sources of bias, missing information, or differences in reproducibility.</a:t>
-            </a:r>
-          </a:p>
-          <a:p>
-            <a:pPr lvl="0" indent="0" marL="0">
-              <a:buNone/>
-            </a:pPr>
-          </a:p>
-          <a:p>
-            <a:pPr lvl="0" indent="0" marL="0">
-              <a:buNone/>
-            </a:pPr>
-            <a:r>
-              <a:rPr/>
-              <a:t>At the </a:t>
-            </a:r>
-            <a:r>
-              <a:rPr b="1"/>
-              <a:t>Evaluate</a:t>
-            </a:r>
-            <a:r>
-              <a:rPr/>
-              <a:t> level, learners make judgments based on criteria. In open science, this could involve critically assessing whether a published study’s open data and materials are sufficient for replication, or evaluating the quality and transparency of an open peer review process.</a:t>
-            </a:r>
-          </a:p>
-          <a:p>
-            <a:pPr lvl="0" indent="0" marL="0">
-              <a:buNone/>
-            </a:pPr>
-          </a:p>
-          <a:p>
-            <a:pPr lvl="0" indent="0" marL="0">
-              <a:buNone/>
-            </a:pPr>
-            <a:r>
-              <a:rPr/>
-              <a:t>At the </a:t>
-            </a:r>
-            <a:r>
-              <a:rPr b="1"/>
-              <a:t>Create</a:t>
-            </a:r>
-            <a:r>
-              <a:rPr/>
-              <a:t> level, learners produce new work by combining knowledge in original ways. For example, they might design a fully open research project with preregistration, open materials, reproducible code, and a public dataset, or extend an existing open dataset to ask a new research question.</a:t>
-            </a:r>
-          </a:p>
-          <a:p>
-            <a:pPr lvl="0" indent="0" marL="0">
-              <a:buNone/>
-            </a:pPr>
-          </a:p>
-          <a:p>
-            <a:pPr lvl="0" indent="0" marL="0">
-              <a:buNone/>
-            </a:pPr>
-            <a:r>
-              <a:rPr/>
-              <a:t>With respect to the example we just discussed, which level or levels do you think are we at when we think of the learning objective that was formulated?</a:t>
+              <a:t>: The affective domain was first published in 1964 by Krathwohl et al. (1964). It focuses on attitudes and values, with learners becoming increasingly self-reliant and internally motivated as they progress through its levels. Affective objectives can be difficult to articulate and assess, but they can be observed through behaviors such as appreciating alternative perspectives, engaging thoughtfully in discussion, asking questions, and recognizing complexity. These outcomes are often closely linked to deeper thinking and lifelong learning.</a:t>
+            </a:r>
+          </a:p>
+          <a:p>
+            <a:pPr lvl="0" indent="0" marL="0">
+              <a:buNone/>
+            </a:pPr>
+          </a:p>
+          <a:p>
+            <a:pPr lvl="0" indent="0" marL="0">
+              <a:buNone/>
+            </a:pPr>
+            <a:r>
+              <a:rPr/>
+              <a:t>In this example, the learning objective is not simply for learners to know what preregistration is, but for them to actively engage with differing viewpoints about its advantages and disadvantages. Learners are expected to ask clarifying questions and incorporate alternative perspectives into their own arguments, demonstrating openness and reflective thinking.</a:t>
+            </a:r>
+          </a:p>
+          <a:p>
+            <a:pPr lvl="0" indent="0" marL="0">
+              <a:buNone/>
+            </a:pPr>
+          </a:p>
+          <a:p>
+            <a:pPr lvl="0" indent="0" marL="0">
+              <a:buNone/>
+            </a:pPr>
+            <a:r>
+              <a:rPr/>
+              <a:t>The teaching activity supports this objective through a panel discussion where learners argue either the benefits or the limitations of preregistration in scientific research. This encourages perspective-taking and respectful engagement with viewpoints they may or may not personally agree with.</a:t>
+            </a:r>
+          </a:p>
+          <a:p>
+            <a:pPr lvl="0" indent="0" marL="0">
+              <a:buNone/>
+            </a:pPr>
+          </a:p>
+          <a:p>
+            <a:pPr lvl="0" indent="0" marL="0">
+              <a:buNone/>
+            </a:pPr>
+            <a:r>
+              <a:rPr/>
+              <a:t>Finally, the assessment task is a reflection essay. Here, learners summarize the different arguments discussed in class and reflect on how engaging with both sides of the debate influenced their own perspective on preregistration and open science practices. This reflective component is central to assessing affective learning because it reveals how learners process, evaluate, and potentially revise their own attitudes and values.</a:t>
             </a:r>
           </a:p>
         </p:txBody>
@@ -4633,22 +4731,6 @@
             </a:r>
             <a:r>
               <a:rPr/>
-              <a:t>:</a:t>
-            </a:r>
-          </a:p>
-          <a:p>
-            <a:pPr lvl="0" indent="0" marL="0">
-              <a:buNone/>
-            </a:pPr>
-          </a:p>
-          <a:p>
-            <a:pPr lvl="0"/>
-            <a:r>
-              <a:rPr b="1"/>
-              <a:t>Aim</a:t>
-            </a:r>
-            <a:r>
-              <a:rPr/>
               <a:t>: Briefly examine the answers given to each question interactively with the group. Use visuals from the survey to highlight specific answers.</a:t>
             </a:r>
           </a:p>
@@ -4689,7 +4771,7 @@
           <a:p>
             <a:fld id="{18BDFEC3-8487-43E8-A154-7C12CBC1FFF2}" type="slidenum">
               <a:rPr lang="en-US"/>
-              <a:t>9</a:t>
+              <a:t>7</a:t>
             </a:fld>
             <a:endParaRPr lang="en-US"/>
           </a:p>
@@ -4753,49 +4835,77 @@
             </a:r>
             <a:r>
               <a:rPr/>
-              <a:t>: The affective domain was first published in 1964 (Krathwohl et al, 1964). The affective domain outlines skills and behaviors that correspond to attitudes and values and as the learner progresses through the levels of the affective domain, they become self-reliant and internally motivated. Learning objectives aligned to the affective domain tend to be the hardest to articulate initially and often appear difficult to assess at first glance. However, affective outcomes often represent the outcomes most closely related to deeper thinking and lifelong learning. They can still be assessed through observable behaviors, such as showing appreciation for alternative perspectives, demonstrating commitment to a discussion, asking thoughtful questions, or recognizing the nuances and complexities of an issue.</a:t>
-            </a:r>
-          </a:p>
-          <a:p>
-            <a:pPr lvl="0" indent="0" marL="0">
-              <a:buNone/>
-            </a:pPr>
-          </a:p>
-          <a:p>
-            <a:pPr lvl="0" indent="0" marL="0">
-              <a:buNone/>
-            </a:pPr>
-            <a:r>
-              <a:rPr/>
-              <a:t>In this example, the learning objective is not simply for learners to know what preregistration is, but for them to actively engage with differing viewpoints about its advantages and disadvantages. Learners are expected to ask clarifying questions and incorporate alternative perspectives into their own arguments, demonstrating openness and reflective thinking.</a:t>
-            </a:r>
-          </a:p>
-          <a:p>
-            <a:pPr lvl="0" indent="0" marL="0">
-              <a:buNone/>
-            </a:pPr>
-          </a:p>
-          <a:p>
-            <a:pPr lvl="0" indent="0" marL="0">
-              <a:buNone/>
-            </a:pPr>
-            <a:r>
-              <a:rPr/>
-              <a:t>The teaching activity supports this objective through a panel discussion where learners argue either the benefits or the limitations of preregistration in scientific research. This encourages perspective-taking and respectful engagement with viewpoints they may or may not personally agree with.</a:t>
-            </a:r>
-          </a:p>
-          <a:p>
-            <a:pPr lvl="0" indent="0" marL="0">
-              <a:buNone/>
-            </a:pPr>
-          </a:p>
-          <a:p>
-            <a:pPr lvl="0" indent="0" marL="0">
-              <a:buNone/>
-            </a:pPr>
-            <a:r>
-              <a:rPr/>
-              <a:t>Finally, the assessment task is a reflection essay. Here, learners summarize the different arguments discussed in class and reflect on how engaging with both sides of the debate influenced their own perspective on preregistration and open science practices. This reflective component is central to assessing affective learning because it reveals how learners process, evaluate, and potentially revise their own attitudes and values.</a:t>
+              <a:t>: The affective domain contains five levels, from lowest to highest:</a:t>
+            </a:r>
+          </a:p>
+          <a:p>
+            <a:pPr lvl="0" indent="0" marL="0">
+              <a:buNone/>
+            </a:pPr>
+          </a:p>
+          <a:p>
+            <a:pPr lvl="0" indent="0" marL="0">
+              <a:buNone/>
+            </a:pPr>
+            <a:r>
+              <a:rPr/>
+              <a:t>Receiving: Willing to listen and receive knowledge. Responding: Actively participates and engages in knowledge transfer.</a:t>
+            </a:r>
+          </a:p>
+          <a:p>
+            <a:pPr lvl="0" indent="0" marL="0">
+              <a:buNone/>
+            </a:pPr>
+          </a:p>
+          <a:p>
+            <a:pPr lvl="0" indent="0" marL="0">
+              <a:buNone/>
+            </a:pPr>
+            <a:r>
+              <a:rPr/>
+              <a:t>Valuing: Finds value and worth in one’s learning with motivation to continue.</a:t>
+            </a:r>
+          </a:p>
+          <a:p>
+            <a:pPr lvl="0" indent="0" marL="0">
+              <a:buNone/>
+            </a:pPr>
+          </a:p>
+          <a:p>
+            <a:pPr lvl="0" indent="0" marL="0">
+              <a:buNone/>
+            </a:pPr>
+            <a:r>
+              <a:rPr/>
+              <a:t>Organizing: Integrates and compares values, resolves conflict between these values, and orders them according to priorities.</a:t>
+            </a:r>
+          </a:p>
+          <a:p>
+            <a:pPr lvl="0" indent="0" marL="0">
+              <a:buNone/>
+            </a:pPr>
+          </a:p>
+          <a:p>
+            <a:pPr lvl="0" indent="0" marL="0">
+              <a:buNone/>
+            </a:pPr>
+            <a:r>
+              <a:rPr/>
+              <a:t>Characterizing: Creates a value system that controls behavior. The behavior is pervasive, consistent, predictable, and characteristic of the learner.</a:t>
+            </a:r>
+          </a:p>
+          <a:p>
+            <a:pPr lvl="0" indent="0" marL="0">
+              <a:buNone/>
+            </a:pPr>
+          </a:p>
+          <a:p>
+            <a:pPr lvl="0" indent="0" marL="0">
+              <a:buNone/>
+            </a:pPr>
+            <a:r>
+              <a:rPr/>
+              <a:t>With respect to the example we just discussed, which level or levels do you think are we at when we think of the learning objective that was formulated?</a:t>
             </a:r>
           </a:p>
         </p:txBody>
@@ -4817,7 +4927,7 @@
           <a:p>
             <a:fld id="{18BDFEC3-8487-43E8-A154-7C12CBC1FFF2}" type="slidenum">
               <a:rPr lang="en-US"/>
-              <a:t>52</a:t>
+              <a:t>53</a:t>
             </a:fld>
             <a:endParaRPr lang="en-US"/>
           </a:p>
@@ -4881,35 +4991,81 @@
             </a:r>
             <a:r>
               <a:rPr/>
-              <a:t>: The affective domain contains five levels, from lowest to highest:</a:t>
-            </a:r>
-          </a:p>
-          <a:p>
-            <a:pPr lvl="0" indent="0" marL="0">
-              <a:buNone/>
-            </a:pPr>
-          </a:p>
-          <a:p>
-            <a:pPr lvl="0" indent="0" marL="0">
-              <a:buNone/>
-            </a:pPr>
-            <a:r>
-              <a:rPr/>
-              <a:t>Receiving: Willing to listen and receive knowledge. Responding: Actively participates and engages in knowledge transfer. Valuing: Finds value and worth in one’s learning with motivation to continue. Organizing: Integrates and compares values, resolves conflict between these values, and orders them according to priorities. Characterizing: Creates a value system that controls behavior. The behavior is pervasive, consistent, predictable, and characteristic of the learner.</a:t>
-            </a:r>
-          </a:p>
-          <a:p>
-            <a:pPr lvl="0" indent="0" marL="0">
-              <a:buNone/>
-            </a:pPr>
-          </a:p>
-          <a:p>
-            <a:pPr lvl="0" indent="0" marL="0">
-              <a:buNone/>
-            </a:pPr>
-            <a:r>
-              <a:rPr/>
-              <a:t>With respect to the example we just discussed, which level or levels do you think are we at when we think of the learning objective that was formulated?</a:t>
+              <a:t>: Bloom and his colleagues did not create subcategories for skills in the psychomotor domain, but other educators did, see Dave (1970), Harrow (1972) and Simpson (1985) and other (Simpson 1966, 1972). The psychomotor domain includes physical movement, coordination, and motor skills. Development of these skills requires practice and is measured in terms of speed, precision, distance, procedures, or technical execution.</a:t>
+            </a:r>
+          </a:p>
+          <a:p>
+            <a:pPr lvl="0" indent="0" marL="0">
+              <a:buNone/>
+            </a:pPr>
+          </a:p>
+          <a:p>
+            <a:pPr lvl="0" indent="0" marL="0">
+              <a:buNone/>
+            </a:pPr>
+            <a:r>
+              <a:rPr/>
+              <a:t>A straightforward example could be the following: </a:t>
+            </a:r>
+            <a:r>
+              <a:rPr i="1"/>
+              <a:t>The learning objective is for learners to accurately perform CPR using correct hand placement and rhythm. This emphasizes not only knowing the steps of CPR cognitively, but being able to physically carry them out correctly in a practical situation.</a:t>
+            </a:r>
+          </a:p>
+          <a:p>
+            <a:pPr lvl="0" indent="0" marL="0">
+              <a:buNone/>
+            </a:pPr>
+          </a:p>
+          <a:p>
+            <a:pPr lvl="0" indent="0" marL="0">
+              <a:buNone/>
+            </a:pPr>
+            <a:r>
+              <a:rPr/>
+              <a:t>The teaching activity involves learners practicing CPR on mannequins while receiving immediate feedback. This hands-on practice is essential in the psychomotor domain because physical skills improve through repeated performance, correction, and refinement of technique.</a:t>
+            </a:r>
+          </a:p>
+          <a:p>
+            <a:pPr lvl="0" indent="0" marL="0">
+              <a:buNone/>
+            </a:pPr>
+          </a:p>
+          <a:p>
+            <a:pPr lvl="0" indent="0" marL="0">
+              <a:buNone/>
+            </a:pPr>
+            <a:r>
+              <a:rPr/>
+              <a:t>The assessment task places learners in a simulated emergency scenario where they must independently perform CPR for one to two minutes. This allows instructors to evaluate whether learners can execute the skill accurately and consistently under realistic conditions. The focus of assessment is therefore on observable performance and technical competence rather than only theoretical knowledge.</a:t>
+            </a:r>
+          </a:p>
+          <a:p>
+            <a:pPr lvl="0" indent="0" marL="0">
+              <a:buNone/>
+            </a:pPr>
+          </a:p>
+          <a:p>
+            <a:pPr lvl="0" indent="0" marL="0">
+              <a:buNone/>
+            </a:pPr>
+            <a:r>
+              <a:rPr/>
+              <a:t>For Open Science, it is a little harder to find a good example. Let’s take correcly uploading and documenting a dataset using appropriate metadata and licensing.</a:t>
+            </a:r>
+          </a:p>
+          <a:p>
+            <a:pPr lvl="0" indent="0" marL="0">
+              <a:buNone/>
+            </a:pPr>
+          </a:p>
+          <a:p>
+            <a:pPr lvl="0" indent="0" marL="0">
+              <a:buNone/>
+            </a:pPr>
+            <a:r>
+              <a:rPr/>
+              <a:t>The teaching activity provides guided, practical experience with preparing datasets and using an open repository. The assessment then evaluates learners’ ability to independently carry out these technical tasks accurately and correctly.</a:t>
             </a:r>
           </a:p>
         </p:txBody>
@@ -4931,7 +5087,7 @@
           <a:p>
             <a:fld id="{18BDFEC3-8487-43E8-A154-7C12CBC1FFF2}" type="slidenum">
               <a:rPr lang="en-US"/>
-              <a:t>53</a:t>
+              <a:t>54</a:t>
             </a:fld>
             <a:endParaRPr lang="en-US"/>
           </a:p>
@@ -4995,81 +5151,105 @@
             </a:r>
             <a:r>
               <a:rPr/>
-              <a:t>: Bloom and his colleagues did not create subcategories for skills in the psychomotor domain, but other educators did (Simpson 1966, 1972; Dave, 1970; Harrow, 1972). The psychomotor domain includes physical movement, coordination, and motor skills. Development of these skills requires practice and is measured in terms of speed, precision, distance, procedures, or technical execution.</a:t>
-            </a:r>
-          </a:p>
-          <a:p>
-            <a:pPr lvl="0" indent="0" marL="0">
-              <a:buNone/>
-            </a:pPr>
-          </a:p>
-          <a:p>
-            <a:pPr lvl="0" indent="0" marL="0">
-              <a:buNone/>
-            </a:pPr>
-            <a:r>
-              <a:rPr/>
-              <a:t>A straightforward example could be the following: </a:t>
-            </a:r>
-            <a:r>
-              <a:rPr i="1"/>
-              <a:t>The learning objective is for learners to accurately perform CPR using correct hand placement and rhythm. This emphasizes not only knowing the steps of CPR cognitively, but being able to physically carry them out correctly in a practical situation.</a:t>
-            </a:r>
-          </a:p>
-          <a:p>
-            <a:pPr lvl="0" indent="0" marL="0">
-              <a:buNone/>
-            </a:pPr>
-          </a:p>
-          <a:p>
-            <a:pPr lvl="0" indent="0" marL="0">
-              <a:buNone/>
-            </a:pPr>
-            <a:r>
-              <a:rPr/>
-              <a:t>The teaching activity involves learners practicing CPR on mannequins while receiving immediate feedback. This hands-on practice is essential in the psychomotor domain because physical skills improve through repeated performance, correction, and refinement of technique.</a:t>
-            </a:r>
-          </a:p>
-          <a:p>
-            <a:pPr lvl="0" indent="0" marL="0">
-              <a:buNone/>
-            </a:pPr>
-          </a:p>
-          <a:p>
-            <a:pPr lvl="0" indent="0" marL="0">
-              <a:buNone/>
-            </a:pPr>
-            <a:r>
-              <a:rPr/>
-              <a:t>The assessment task places learners in a simulated emergency scenario where they must independently perform CPR for one to two minutes. This allows instructors to evaluate whether learners can execute the skill accurately and consistently under realistic conditions. The focus of assessment is therefore on observable performance and technical competence rather than only theoretical knowledge.</a:t>
-            </a:r>
-          </a:p>
-          <a:p>
-            <a:pPr lvl="0" indent="0" marL="0">
-              <a:buNone/>
-            </a:pPr>
-          </a:p>
-          <a:p>
-            <a:pPr lvl="0" indent="0" marL="0">
-              <a:buNone/>
-            </a:pPr>
-            <a:r>
-              <a:rPr/>
-              <a:t>For Open Science, it is a little harder to find a good example. Let’s take correcly uploading and documenting a dataset using appropriate metadata and licensing.</a:t>
-            </a:r>
-          </a:p>
-          <a:p>
-            <a:pPr lvl="0" indent="0" marL="0">
-              <a:buNone/>
-            </a:pPr>
-          </a:p>
-          <a:p>
-            <a:pPr lvl="0" indent="0" marL="0">
-              <a:buNone/>
-            </a:pPr>
-            <a:r>
-              <a:rPr/>
-              <a:t>The teaching activity provides guided, practical experience with preparing datasets and using an open repository. The assessment then evaluates learners’ ability to independently carry out these technical tasks accurately and correctly.</a:t>
+              <a:t>: For the purpose of this teaching guide, we will explore Simpson’s version of the psychomotor domain, which has the following seven levels:</a:t>
+            </a:r>
+          </a:p>
+          <a:p>
+            <a:pPr lvl="0" indent="0" marL="0">
+              <a:buNone/>
+            </a:pPr>
+          </a:p>
+          <a:p>
+            <a:pPr lvl="0"/>
+            <a:r>
+              <a:rPr/>
+              <a:t>Perception: Use sensory cues to guide actions or movements.</a:t>
+            </a:r>
+          </a:p>
+          <a:p>
+            <a:pPr lvl="0" indent="0" marL="0">
+              <a:buNone/>
+            </a:pPr>
+          </a:p>
+          <a:p>
+            <a:pPr lvl="0"/>
+            <a:r>
+              <a:rPr/>
+              <a:t>Set: Demonstrates a readiness (physically, mentally, emotionally, and spiritually) to take action to perform the task or objective. (NOTE: This level of the Psychomotor domain is closely related to the “Responding to phenomena” level of the Affective domain).</a:t>
+            </a:r>
+          </a:p>
+          <a:p>
+            <a:pPr lvl="0" indent="0" marL="0">
+              <a:buNone/>
+            </a:pPr>
+          </a:p>
+          <a:p>
+            <a:pPr lvl="0"/>
+            <a:r>
+              <a:rPr/>
+              <a:t>Guided response: Knows steps required to complete the task or objective and learns through trial and error by practicing.</a:t>
+            </a:r>
+          </a:p>
+          <a:p>
+            <a:pPr lvl="0" indent="0" marL="0">
+              <a:buNone/>
+            </a:pPr>
+          </a:p>
+          <a:p>
+            <a:pPr lvl="0"/>
+            <a:r>
+              <a:rPr/>
+              <a:t>Mechanism: Performs task or objective in a somewhat confident, proficient, and habitual manner.</a:t>
+            </a:r>
+          </a:p>
+          <a:p>
+            <a:pPr lvl="0" indent="0" marL="0">
+              <a:buNone/>
+            </a:pPr>
+          </a:p>
+          <a:p>
+            <a:pPr lvl="0"/>
+            <a:r>
+              <a:rPr/>
+              <a:t>Complex overt response: Performs task or objective in a confident, proficient, and habitual manner. Expert level, high proficiency and performs with accuracy.</a:t>
+            </a:r>
+          </a:p>
+          <a:p>
+            <a:pPr lvl="0" indent="0" marL="0">
+              <a:buNone/>
+            </a:pPr>
+          </a:p>
+          <a:p>
+            <a:pPr lvl="0"/>
+            <a:r>
+              <a:rPr/>
+              <a:t>Adaptation: Performs task or objective and can modify actions to account for new or problematic situations.</a:t>
+            </a:r>
+          </a:p>
+          <a:p>
+            <a:pPr lvl="0" indent="0" marL="0">
+              <a:buNone/>
+            </a:pPr>
+          </a:p>
+          <a:p>
+            <a:pPr lvl="0"/>
+            <a:r>
+              <a:rPr/>
+              <a:t>Origination: Create new procedures and solutions to approach various situations.</a:t>
+            </a:r>
+          </a:p>
+          <a:p>
+            <a:pPr lvl="0" indent="0" marL="0">
+              <a:buNone/>
+            </a:pPr>
+          </a:p>
+          <a:p>
+            <a:pPr lvl="0" indent="0" marL="0">
+              <a:buNone/>
+            </a:pPr>
+            <a:r>
+              <a:rPr/>
+              <a:t>With respect to the example we just discussed, which level or levels do you think are we at when we think of the learning objective that was formulated?</a:t>
             </a:r>
           </a:p>
         </p:txBody>
@@ -5091,7 +5271,7 @@
           <a:p>
             <a:fld id="{18BDFEC3-8487-43E8-A154-7C12CBC1FFF2}" type="slidenum">
               <a:rPr lang="en-US"/>
-              <a:t>54</a:t>
+              <a:t>56</a:t>
             </a:fld>
             <a:endParaRPr lang="en-US"/>
           </a:p>
@@ -5155,105 +5335,35 @@
             </a:r>
             <a:r>
               <a:rPr/>
-              <a:t>: For the purpose of this teaching guide, we will explore Simpson’s version of the psychomotor domain, which has the following seven levels:</a:t>
-            </a:r>
-          </a:p>
-          <a:p>
-            <a:pPr lvl="0" indent="0" marL="0">
-              <a:buNone/>
-            </a:pPr>
-          </a:p>
-          <a:p>
-            <a:pPr lvl="0"/>
-            <a:r>
-              <a:rPr/>
-              <a:t>Perception: Use sensory cues to guide actions or movements.</a:t>
-            </a:r>
-          </a:p>
-          <a:p>
-            <a:pPr lvl="0" indent="0" marL="0">
-              <a:buNone/>
-            </a:pPr>
-          </a:p>
-          <a:p>
-            <a:pPr lvl="0"/>
-            <a:r>
-              <a:rPr/>
-              <a:t>Set: Demonstrates a readiness (physically, mentally, emotionally, and spiritually) to take action to perform the task or objective. (NOTE: This level of the Psychomotor domain is closely related to the “Responding to phenomena” level of the Affective domain).</a:t>
-            </a:r>
-          </a:p>
-          <a:p>
-            <a:pPr lvl="0" indent="0" marL="0">
-              <a:buNone/>
-            </a:pPr>
-          </a:p>
-          <a:p>
-            <a:pPr lvl="0"/>
-            <a:r>
-              <a:rPr/>
-              <a:t>Guided response: Knows steps required to complete the task or objective and learns through trial and error by practicing.</a:t>
-            </a:r>
-          </a:p>
-          <a:p>
-            <a:pPr lvl="0" indent="0" marL="0">
-              <a:buNone/>
-            </a:pPr>
-          </a:p>
-          <a:p>
-            <a:pPr lvl="0"/>
-            <a:r>
-              <a:rPr/>
-              <a:t>Mechanism: Performs task or objective in a somewhat confident, proficient, and habitual manner.</a:t>
-            </a:r>
-          </a:p>
-          <a:p>
-            <a:pPr lvl="0" indent="0" marL="0">
-              <a:buNone/>
-            </a:pPr>
-          </a:p>
-          <a:p>
-            <a:pPr lvl="0"/>
-            <a:r>
-              <a:rPr/>
-              <a:t>Complex overt response: Performs task or objective in a confident, proficient, and habitual manner. Expert level, high proficiency and performs with accuracy.</a:t>
-            </a:r>
-          </a:p>
-          <a:p>
-            <a:pPr lvl="0" indent="0" marL="0">
-              <a:buNone/>
-            </a:pPr>
-          </a:p>
-          <a:p>
-            <a:pPr lvl="0"/>
-            <a:r>
-              <a:rPr/>
-              <a:t>Adaptation: Performs task or objective and can modify actions to account for new or problematic situations.</a:t>
-            </a:r>
-          </a:p>
-          <a:p>
-            <a:pPr lvl="0" indent="0" marL="0">
-              <a:buNone/>
-            </a:pPr>
-          </a:p>
-          <a:p>
-            <a:pPr lvl="0"/>
-            <a:r>
-              <a:rPr/>
-              <a:t>Origination: Create new procedures and solutions to approach various situations.</a:t>
-            </a:r>
-          </a:p>
-          <a:p>
-            <a:pPr lvl="0" indent="0" marL="0">
-              <a:buNone/>
-            </a:pPr>
-          </a:p>
-          <a:p>
-            <a:pPr lvl="0" indent="0" marL="0">
-              <a:buNone/>
-            </a:pPr>
-            <a:r>
-              <a:rPr/>
-              <a:t>With respect to the example we just discussed, which level or levels do you think are we at when we think of the learning objective that was formulated?</a:t>
+              <a:t>: Let’s recap: Bloom’s taxonomy is a hierarchical model used for classifying learning objectives by levels of complexity and specificity. Bloom’s taxonomy was created to outline and clarify how learners acquire new knowledge and skills. Though the original intention of the taxonomy was to serve as an assessment tool, Bloom’s taxonomy is effective in helping instructors identify clear learning objectives as well as create purposeful learning activities and instructional materials.</a:t>
+            </a:r>
+          </a:p>
+          <a:p>
+            <a:pPr lvl="0" indent="0" marL="0">
+              <a:buNone/>
+            </a:pPr>
+          </a:p>
+          <a:p>
+            <a:pPr lvl="0" indent="0" marL="0">
+              <a:buNone/>
+            </a:pPr>
+            <a:r>
+              <a:rPr/>
+              <a:t>There are three learning domains: - Cognitive: knowledge or thinking - Affective: growth in feelings or emotional areas (attitude or self) - Psychomotor: manual or physical skills</a:t>
+            </a:r>
+          </a:p>
+          <a:p>
+            <a:pPr lvl="0" indent="0" marL="0">
+              <a:buNone/>
+            </a:pPr>
+          </a:p>
+          <a:p>
+            <a:pPr lvl="0" indent="0" marL="0">
+              <a:buNone/>
+            </a:pPr>
+            <a:r>
+              <a:rPr/>
+              <a:t>Learning objectives can be assigned to different taxonomy levels. Taxonomies serve to organize learning objectives. The most-used taxonomy is the one for the cognitive learning domain.</a:t>
             </a:r>
           </a:p>
         </p:txBody>
@@ -5275,7 +5385,7 @@
           <a:p>
             <a:fld id="{18BDFEC3-8487-43E8-A154-7C12CBC1FFF2}" type="slidenum">
               <a:rPr lang="en-US"/>
-              <a:t>55</a:t>
+              <a:t>57</a:t>
             </a:fld>
             <a:endParaRPr lang="en-US"/>
           </a:p>
@@ -5339,35 +5449,103 @@
             </a:r>
             <a:r>
               <a:rPr/>
-              <a:t>: Let’s recap: Bloom’s taxonomy is a hierarchical model used for classifying learning objectives by levels of complexity and specificity. Bloom’s taxonomy was created to outline and clarify how learners acquire new knowledge and skills. Though the original intention of the taxonomy was to serve as an assessment tool, Bloom’s taxonomy is effective in helping instructors identify clear learning objectives as well as create purposeful learning activities and instructional materials.</a:t>
-            </a:r>
-          </a:p>
-          <a:p>
-            <a:pPr lvl="0" indent="0" marL="0">
-              <a:buNone/>
-            </a:pPr>
-          </a:p>
-          <a:p>
-            <a:pPr lvl="0" indent="0" marL="0">
-              <a:buNone/>
-            </a:pPr>
-            <a:r>
-              <a:rPr/>
-              <a:t>There are three learning domains: - Cognitive: knowledge or thinking - Affective: growth in feelings or emotional areas (attitude or self) - Psychomotor: manual or physical skills</a:t>
-            </a:r>
-          </a:p>
-          <a:p>
-            <a:pPr lvl="0" indent="0" marL="0">
-              <a:buNone/>
-            </a:pPr>
-          </a:p>
-          <a:p>
-            <a:pPr lvl="0" indent="0" marL="0">
-              <a:buNone/>
-            </a:pPr>
-            <a:r>
-              <a:rPr/>
-              <a:t>Learning objectives can be assigned to different taxonomy levels. Taxonomies serve to organize learning objectives. The most-used taxonomy is the one for the cognitive learning domain.</a:t>
+              <a:t>: Time to practice! In pairs, design one assessment task for each learning objective (cognitive, affective, psychomotor). For each assessment, specify:</a:t>
+            </a:r>
+          </a:p>
+          <a:p>
+            <a:pPr lvl="0" indent="0" marL="0">
+              <a:buNone/>
+            </a:pPr>
+          </a:p>
+          <a:p>
+            <a:pPr lvl="0"/>
+            <a:r>
+              <a:rPr/>
+              <a:t>an appropriate assessment method (e.g., checklist, rubric)</a:t>
+            </a:r>
+          </a:p>
+          <a:p>
+            <a:pPr lvl="0" indent="0" marL="0">
+              <a:buNone/>
+            </a:pPr>
+          </a:p>
+          <a:p>
+            <a:pPr lvl="0"/>
+            <a:r>
+              <a:rPr/>
+              <a:t>at least one observable criterion that demonstrates successful achievement of the learning objective.</a:t>
+            </a:r>
+          </a:p>
+          <a:p>
+            <a:pPr lvl="0" indent="0" marL="0">
+              <a:buNone/>
+            </a:pPr>
+          </a:p>
+          <a:p>
+            <a:pPr lvl="0" indent="0" marL="0">
+              <a:buNone/>
+            </a:pPr>
+            <a:r>
+              <a:rPr i="1"/>
+              <a:t>Write your ideas into the workbook</a:t>
+            </a:r>
+            <a:r>
+              <a:rPr/>
+              <a:t> to keep track of your thoughts.</a:t>
+            </a:r>
+          </a:p>
+          <a:p>
+            <a:pPr lvl="0" indent="0" marL="0">
+              <a:buNone/>
+            </a:pPr>
+          </a:p>
+          <a:p>
+            <a:pPr lvl="0" indent="0" marL="0">
+              <a:buNone/>
+            </a:pPr>
+            <a:r>
+              <a:rPr b="1"/>
+              <a:t>Instructor Notes</a:t>
+            </a:r>
+            <a:r>
+              <a:rPr/>
+              <a:t>: Example answers:</a:t>
+            </a:r>
+          </a:p>
+          <a:p>
+            <a:pPr lvl="0" indent="0" marL="0">
+              <a:buNone/>
+            </a:pPr>
+          </a:p>
+          <a:p>
+            <a:pPr lvl="0"/>
+            <a:r>
+              <a:rPr/>
+              <a:t>Cognitive: Students create a comparison brief analyzing at least two open access models (e.g., gold vs. green open access), including costs, accessibility, and author rights (assessment task). Use of examples and supporting arguments (metric). Scoring rubric with comparison depth, number or argument, quality (assessment tool)</a:t>
+            </a:r>
+          </a:p>
+          <a:p>
+            <a:pPr lvl="0" indent="0" marL="0">
+              <a:buNone/>
+            </a:pPr>
+          </a:p>
+          <a:p>
+            <a:pPr lvl="0"/>
+            <a:r>
+              <a:rPr/>
+              <a:t>Affective:</a:t>
+            </a:r>
+          </a:p>
+          <a:p>
+            <a:pPr lvl="0" indent="0" marL="0">
+              <a:buNone/>
+            </a:pPr>
+          </a:p>
+          <a:p>
+            <a:pPr lvl="0"/>
+            <a:r>
+              <a:rPr/>
+              <a:t>Psychomotor:</a:t>
             </a:r>
           </a:p>
         </p:txBody>
@@ -5389,7 +5567,7 @@
           <a:p>
             <a:fld id="{18BDFEC3-8487-43E8-A154-7C12CBC1FFF2}" type="slidenum">
               <a:rPr lang="en-US"/>
-              <a:t>56</a:t>
+              <a:t>58</a:t>
             </a:fld>
             <a:endParaRPr lang="en-US"/>
           </a:p>
@@ -5453,7 +5631,63 @@
             </a:r>
             <a:r>
               <a:rPr/>
-              <a:t>: Time to practice! In pairs, design one assessment task for each learning objective (cognitive, affective, psychomotor). For each assessment, specify:</a:t>
+              <a:t>: Your task is the following: </a:t>
+            </a:r>
+            <a:r>
+              <a:rPr b="1"/>
+              <a:t>Navigate</a:t>
+            </a:r>
+            <a:r>
+              <a:rPr/>
+              <a:t> to the following online tutorial: https://lmu-osc.github.io/introduction-to-zotero/. Then, </a:t>
+            </a:r>
+            <a:r>
+              <a:rPr b="1"/>
+              <a:t>skim over</a:t>
+            </a:r>
+            <a:r>
+              <a:rPr/>
+              <a:t> the different sections using the navigation menu or the arrows at the bottom of the page to get an idea of the content of the tutorial. Finally, using Bloom’s taxonomy, </a:t>
+            </a:r>
+            <a:r>
+              <a:rPr b="1"/>
+              <a:t>formulate</a:t>
+            </a:r>
+            <a:r>
+              <a:rPr/>
+              <a:t> three learning objectives and assessment methods that match the content and the teaching activities of the tutorial. Consider the following: Which level of Bloom’s taxonomy are you at and which domain are you targeting?</a:t>
+            </a:r>
+          </a:p>
+          <a:p>
+            <a:pPr lvl="0" indent="0" marL="0">
+              <a:buNone/>
+            </a:pPr>
+          </a:p>
+          <a:p>
+            <a:pPr lvl="0" indent="0" marL="0">
+              <a:buNone/>
+            </a:pPr>
+            <a:r>
+              <a:rPr/>
+              <a:t>This is individual work, take 10 minutes.</a:t>
+            </a:r>
+          </a:p>
+          <a:p>
+            <a:pPr lvl="0" indent="0" marL="0">
+              <a:buNone/>
+            </a:pPr>
+          </a:p>
+          <a:p>
+            <a:pPr lvl="0" indent="0" marL="0">
+              <a:buNone/>
+            </a:pPr>
+            <a:r>
+              <a:rPr b="1"/>
+              <a:t>Instructor Notes</a:t>
+            </a:r>
+            <a:r>
+              <a:rPr/>
+              <a:t>: Possible solutions:</a:t>
             </a:r>
           </a:p>
           <a:p>
@@ -5465,7 +5699,15 @@
             <a:pPr lvl="0"/>
             <a:r>
               <a:rPr/>
-              <a:t>an appropriate assessment method (e.g., checklist, rubric)</a:t>
+              <a:t>Learners can </a:t>
+            </a:r>
+            <a:r>
+              <a:rPr b="1"/>
+              <a:t>describe</a:t>
+            </a:r>
+            <a:r>
+              <a:rPr/>
+              <a:t> the purpose and key features of Zotero (e.g., organizing references, generating citations). Bloom’s level: Remember / Understand. Domain: Cognitive (knowledge &amp; comprehension). Assessment method: survey or multiple choice quiz.</a:t>
             </a:r>
           </a:p>
           <a:p>
@@ -5477,43 +5719,23 @@
             <a:pPr lvl="0"/>
             <a:r>
               <a:rPr/>
-              <a:t>at least one observable criterion that demonstrates successful achievement of the learning objective.</a:t>
-            </a:r>
-          </a:p>
-          <a:p>
-            <a:pPr lvl="0" indent="0" marL="0">
-              <a:buNone/>
-            </a:pPr>
-          </a:p>
-          <a:p>
-            <a:pPr lvl="0" indent="0" marL="0">
-              <a:buNone/>
-            </a:pPr>
-            <a:r>
-              <a:rPr i="1"/>
-              <a:t>Write your ideas into the workbook</a:t>
-            </a:r>
-            <a:r>
-              <a:rPr/>
-              <a:t> to keep track of your thoughts.</a:t>
-            </a:r>
-          </a:p>
-          <a:p>
-            <a:pPr lvl="0" indent="0" marL="0">
-              <a:buNone/>
-            </a:pPr>
-          </a:p>
-          <a:p>
-            <a:pPr lvl="0" indent="0" marL="0">
-              <a:buNone/>
-            </a:pPr>
-            <a:r>
-              <a:rPr b="1"/>
-              <a:t>Instructor Notes</a:t>
-            </a:r>
-            <a:r>
-              <a:rPr/>
-              <a:t>: Example answers:</a:t>
+              <a:t>Learners can </a:t>
+            </a:r>
+            <a:r>
+              <a:rPr b="1"/>
+              <a:t>apply</a:t>
+            </a:r>
+            <a:r>
+              <a:rPr/>
+              <a:t> Zotero to </a:t>
+            </a:r>
+            <a:r>
+              <a:rPr b="1"/>
+              <a:t>add and organize</a:t>
+            </a:r>
+            <a:r>
+              <a:rPr/>
+              <a:t> references in a library using tools like the Zotero Connector or manual entry. Bloom’s level: Apply Domain: Cognitive (procedural knowledge). Assessment method: Create a Zotero collection and add minimum three references via manual entry, submit screenshot.</a:t>
             </a:r>
           </a:p>
           <a:p>
@@ -5525,31 +5747,15 @@
             <a:pPr lvl="0"/>
             <a:r>
               <a:rPr/>
-              <a:t>Cognitive: Students create a comparison brief analyzing at least two open access models (e.g., gold vs. green open access), including costs, accessibility, and author rights (assessment task). Use of examples and supporting arguments (metric). Scoring rubric with comparison depth, number or argument, quality (assessment tool)</a:t>
-            </a:r>
-          </a:p>
-          <a:p>
-            <a:pPr lvl="0" indent="0" marL="0">
-              <a:buNone/>
-            </a:pPr>
-          </a:p>
-          <a:p>
-            <a:pPr lvl="0"/>
-            <a:r>
-              <a:rPr/>
-              <a:t>Affective:</a:t>
-            </a:r>
-          </a:p>
-          <a:p>
-            <a:pPr lvl="0" indent="0" marL="0">
-              <a:buNone/>
-            </a:pPr>
-          </a:p>
-          <a:p>
-            <a:pPr lvl="0"/>
-            <a:r>
-              <a:rPr/>
-              <a:t>Psychomotor:</a:t>
+              <a:t>Learners can </a:t>
+            </a:r>
+            <a:r>
+              <a:rPr b="1"/>
+              <a:t>create and evaluate</a:t>
+            </a:r>
+            <a:r>
+              <a:rPr/>
+              <a:t> a properly formatted bibliography using Zotero in a document. Bloom’s level: Analyze / Evaluate. Domain: Cognitive (higher-order thinking). Assessment method: Insert citations into a word document and create a bibliography. Hand in file.</a:t>
             </a:r>
           </a:p>
         </p:txBody>
@@ -5571,7 +5777,7 @@
           <a:p>
             <a:fld id="{18BDFEC3-8487-43E8-A154-7C12CBC1FFF2}" type="slidenum">
               <a:rPr lang="en-US"/>
-              <a:t>57</a:t>
+              <a:t>59</a:t>
             </a:fld>
             <a:endParaRPr lang="en-US"/>
           </a:p>
@@ -5635,45 +5841,55 @@
             </a:r>
             <a:r>
               <a:rPr/>
-              <a:t>: Your task is the following: </a:t>
-            </a:r>
-            <a:r>
-              <a:rPr b="1"/>
-              <a:t>Navigate</a:t>
-            </a:r>
-            <a:r>
-              <a:rPr/>
-              <a:t> to the following online tutorial: https://lmu-osc.github.io/introduction-to-zotero/. Then, </a:t>
-            </a:r>
-            <a:r>
-              <a:rPr b="1"/>
-              <a:t>skim over</a:t>
-            </a:r>
-            <a:r>
-              <a:rPr/>
-              <a:t> the different sections using the navigation menu or the arrows at the bottom of the page to get an idea of the content of the tutorial. Finally, using Bloom’s taxonomy, </a:t>
-            </a:r>
-            <a:r>
-              <a:rPr b="1"/>
-              <a:t>formulate</a:t>
-            </a:r>
-            <a:r>
-              <a:rPr/>
-              <a:t> three learning objectives and assessment methods that match the content and the teaching activities of the tutorial. Consider the following: Which level of Bloom’s taxonomy are you at and which domain are you targeting?</a:t>
-            </a:r>
-          </a:p>
-          <a:p>
-            <a:pPr lvl="0" indent="0" marL="0">
-              <a:buNone/>
-            </a:pPr>
-          </a:p>
-          <a:p>
-            <a:pPr lvl="0" indent="0" marL="0">
-              <a:buNone/>
-            </a:pPr>
-            <a:r>
-              <a:rPr/>
-              <a:t>This is individual work, take 10 minutes.</a:t>
+              <a:t>: What are you main take-home messages from today?</a:t>
+            </a:r>
+          </a:p>
+          <a:p>
+            <a:pPr lvl="0" indent="0" marL="0">
+              <a:buNone/>
+            </a:pPr>
+          </a:p>
+          <a:p>
+            <a:pPr lvl="0"/>
+            <a:r>
+              <a:rPr/>
+              <a:t>Learning is an active process shaped by context, prior knowledge, and beliefs—a core idea of constructivism.</a:t>
+            </a:r>
+          </a:p>
+          <a:p>
+            <a:pPr lvl="0" indent="0" marL="0">
+              <a:buNone/>
+            </a:pPr>
+          </a:p>
+          <a:p>
+            <a:pPr lvl="0"/>
+            <a:r>
+              <a:rPr/>
+              <a:t>Learners differ in how they organize prior knowledge. Experts typically have more connections between concepts, allowing them to recognize patterns and make connections more efficiently.</a:t>
+            </a:r>
+          </a:p>
+          <a:p>
+            <a:pPr lvl="0" indent="0" marL="0">
+              <a:buNone/>
+            </a:pPr>
+          </a:p>
+          <a:p>
+            <a:pPr lvl="0"/>
+            <a:r>
+              <a:rPr/>
+              <a:t>Effective learning depends on alignment between learning objectives, assessment, and teaching activities—known as constructive alignment.</a:t>
+            </a:r>
+          </a:p>
+          <a:p>
+            <a:pPr lvl="0" indent="0" marL="0">
+              <a:buNone/>
+            </a:pPr>
+          </a:p>
+          <a:p>
+            <a:pPr lvl="0"/>
+            <a:r>
+              <a:rPr/>
+              <a:t>Before teaching, we need to know where we are going. This means defining appropriate learning objectives across the relevant domains: cognitive, affective, and psychomotor.</a:t>
             </a:r>
           </a:p>
           <a:p>
@@ -5691,75 +5907,7 @@
             </a:r>
             <a:r>
               <a:rPr/>
-              <a:t>: Possible solutions:</a:t>
-            </a:r>
-          </a:p>
-          <a:p>
-            <a:pPr lvl="0" indent="0" marL="0">
-              <a:buNone/>
-            </a:pPr>
-          </a:p>
-          <a:p>
-            <a:pPr lvl="0"/>
-            <a:r>
-              <a:rPr/>
-              <a:t>Learners can </a:t>
-            </a:r>
-            <a:r>
-              <a:rPr b="1"/>
-              <a:t>describe</a:t>
-            </a:r>
-            <a:r>
-              <a:rPr/>
-              <a:t> the purpose and key features of Zotero (e.g., organizing references, generating citations). Bloom’s level: Remember / Understand. Domain: Cognitive (knowledge &amp; comprehension). Assessment method: survey or multiple choice quiz.</a:t>
-            </a:r>
-          </a:p>
-          <a:p>
-            <a:pPr lvl="0" indent="0" marL="0">
-              <a:buNone/>
-            </a:pPr>
-          </a:p>
-          <a:p>
-            <a:pPr lvl="0"/>
-            <a:r>
-              <a:rPr/>
-              <a:t>Learners can </a:t>
-            </a:r>
-            <a:r>
-              <a:rPr b="1"/>
-              <a:t>apply</a:t>
-            </a:r>
-            <a:r>
-              <a:rPr/>
-              <a:t> Zotero to </a:t>
-            </a:r>
-            <a:r>
-              <a:rPr b="1"/>
-              <a:t>add and organize</a:t>
-            </a:r>
-            <a:r>
-              <a:rPr/>
-              <a:t> references in a library using tools like the Zotero Connector or manual entry. Bloom’s level: Apply Domain: Cognitive (procedural knowledge). Assessment method: Create a Zotero collection and add minimum three references via manual entry, submit screenshot.</a:t>
-            </a:r>
-          </a:p>
-          <a:p>
-            <a:pPr lvl="0" indent="0" marL="0">
-              <a:buNone/>
-            </a:pPr>
-          </a:p>
-          <a:p>
-            <a:pPr lvl="0"/>
-            <a:r>
-              <a:rPr/>
-              <a:t>Learners can </a:t>
-            </a:r>
-            <a:r>
-              <a:rPr b="1"/>
-              <a:t>create and evaluate</a:t>
-            </a:r>
-            <a:r>
-              <a:rPr/>
-              <a:t> a properly formatted bibliography using Zotero in a document. Bloom’s level: Analyze / Evaluate. Domain: Cognitive (higher-order thinking). Assessment method: Insert citations into a word document and create a bibliography. Hand in file.</a:t>
+              <a:t>: End lesson on clear take-home message that are interactively compiled by learners.</a:t>
             </a:r>
           </a:p>
         </p:txBody>
@@ -5781,7 +5929,7 @@
           <a:p>
             <a:fld id="{18BDFEC3-8487-43E8-A154-7C12CBC1FFF2}" type="slidenum">
               <a:rPr lang="en-US"/>
-              <a:t>58</a:t>
+              <a:t>60</a:t>
             </a:fld>
             <a:endParaRPr lang="en-US"/>
           </a:p>
@@ -5845,7 +5993,7 @@
             </a:r>
             <a:r>
               <a:rPr/>
-              <a:t>: Script for the slide here.</a:t>
+              <a:t>: Let us have a look at these results.</a:t>
             </a:r>
           </a:p>
           <a:p>
@@ -5863,23 +6011,25 @@
             </a:r>
             <a:r>
               <a:rPr/>
-              <a:t>:</a:t>
-            </a:r>
-          </a:p>
-          <a:p>
-            <a:pPr lvl="0" indent="0" marL="0">
-              <a:buNone/>
-            </a:pPr>
-          </a:p>
-          <a:p>
-            <a:pPr lvl="0"/>
-            <a:r>
-              <a:rPr b="1"/>
-              <a:t>Aim</a:t>
-            </a:r>
-            <a:r>
-              <a:rPr/>
-              <a:t>: End lesson on clear take-home message that are interactively compiled by learners.</a:t>
+              <a:t>: Briefly examine the answers given to each question interactively with the group. Use visuals from the survey to highlight specific answers.</a:t>
+            </a:r>
+          </a:p>
+          <a:p>
+            <a:pPr lvl="0" indent="0" marL="0">
+              <a:buNone/>
+            </a:pPr>
+          </a:p>
+          <a:p>
+            <a:pPr lvl="0" indent="0" marL="0">
+              <a:buNone/>
+            </a:pPr>
+            <a:r>
+              <a:rPr b="1"/>
+              <a:t>Accessibility Tip</a:t>
+            </a:r>
+            <a:r>
+              <a:rPr/>
+              <a:t>: Have people work in pairs if someone did not bring their phone/does not have a phone. This survey also cannot be completed in an asynchronous setting.</a:t>
             </a:r>
           </a:p>
         </p:txBody>
@@ -5901,7 +6051,7 @@
           <a:p>
             <a:fld id="{18BDFEC3-8487-43E8-A154-7C12CBC1FFF2}" type="slidenum">
               <a:rPr lang="en-US"/>
-              <a:t>59</a:t>
+              <a:t>63</a:t>
             </a:fld>
             <a:endParaRPr lang="en-US"/>
           </a:p>
@@ -5965,59 +6115,7 @@
             </a:r>
             <a:r>
               <a:rPr/>
-              <a:t>: Let us have a look at these results.</a:t>
-            </a:r>
-          </a:p>
-          <a:p>
-            <a:pPr lvl="0" indent="0" marL="0">
-              <a:buNone/>
-            </a:pPr>
-          </a:p>
-          <a:p>
-            <a:pPr lvl="0" indent="0" marL="0">
-              <a:buNone/>
-            </a:pPr>
-            <a:r>
-              <a:rPr b="1"/>
-              <a:t>Instructor Notes</a:t>
-            </a:r>
-            <a:r>
-              <a:rPr/>
-              <a:t>:</a:t>
-            </a:r>
-          </a:p>
-          <a:p>
-            <a:pPr lvl="0" indent="0" marL="0">
-              <a:buNone/>
-            </a:pPr>
-          </a:p>
-          <a:p>
-            <a:pPr lvl="0"/>
-            <a:r>
-              <a:rPr b="1"/>
-              <a:t>Aim</a:t>
-            </a:r>
-            <a:r>
-              <a:rPr/>
-              <a:t>: Briefly examine the answers given to each question interactively with the group. Use visuals from the survey to highlight specific answers.</a:t>
-            </a:r>
-          </a:p>
-          <a:p>
-            <a:pPr lvl="0" indent="0" marL="0">
-              <a:buNone/>
-            </a:pPr>
-          </a:p>
-          <a:p>
-            <a:pPr lvl="0" indent="0" marL="0">
-              <a:buNone/>
-            </a:pPr>
-            <a:r>
-              <a:rPr b="1"/>
-              <a:t>Accessibility Tip</a:t>
-            </a:r>
-            <a:r>
-              <a:rPr/>
-              <a:t>: Have people work in pairs if someone did not bring their phone/does not have a phone. This survey also cannot be completed in an asynchronous setting.</a:t>
+              <a:t>: Looking back at the learning objectives, this is what we achieved today. Great work! What are your questions?</a:t>
             </a:r>
           </a:p>
         </p:txBody>
@@ -6103,7 +6201,21 @@
             </a:r>
             <a:r>
               <a:rPr/>
-              <a:t>: Looking back at the learning objectives, this is what we achieved today. Great work! What are your questions?</a:t>
+              <a:t>: This is where constructivism provides us with a solid theoretical framework that frames learning as this active process whereby knowledge is constructed. Within this framework, learning occurs when existing ideas are at odds with new information that is being presented. Therefore, existing ideas and knowledge need to be incorporated into the teaching process in order for learning to take place.</a:t>
+            </a:r>
+          </a:p>
+          <a:p>
+            <a:pPr lvl="0" indent="0" marL="0">
+              <a:buNone/>
+            </a:pPr>
+          </a:p>
+          <a:p>
+            <a:pPr lvl="0" indent="0" marL="0">
+              <a:buNone/>
+            </a:pPr>
+            <a:r>
+              <a:rPr/>
+              <a:t>Following from this notion, it means that a core component of learning is the integration of new information with prior schemas. The question here is now: how exactly are old and new information integrated with each other? This is where the interaction with the physical world in a specific social setting, constraint by cultural and linguistic norms is crucial, therefore making the learning environment and the interaction with it another core component of the learning process in the constructivist framework.</a:t>
             </a:r>
           </a:p>
         </p:txBody>
@@ -6125,7 +6237,7 @@
           <a:p>
             <a:fld id="{18BDFEC3-8487-43E8-A154-7C12CBC1FFF2}" type="slidenum">
               <a:rPr lang="en-US"/>
-              <a:t>65</a:t>
+              <a:t>68</a:t>
             </a:fld>
             <a:endParaRPr lang="en-US"/>
           </a:p>
@@ -6229,7 +6341,7 @@
           <a:p>
             <a:fld id="{18BDFEC3-8487-43E8-A154-7C12CBC1FFF2}" type="slidenum">
               <a:rPr lang="en-US"/>
-              <a:t>10</a:t>
+              <a:t>8</a:t>
             </a:fld>
             <a:endParaRPr lang="en-US"/>
           </a:p>
@@ -6293,21 +6405,35 @@
             </a:r>
             <a:r>
               <a:rPr/>
-              <a:t>: This is where constructivism provides us with a solid theoretical framework that frames learning as this active process whereby knowledge is constructed. Within this framework, learning occurs when existing ideas are at odds with new information that is being presented. Therefore, existing ideas and knowledge need to be incorporated into the teaching process in order for learning to take place.</a:t>
-            </a:r>
-          </a:p>
-          <a:p>
-            <a:pPr lvl="0" indent="0" marL="0">
-              <a:buNone/>
-            </a:pPr>
-          </a:p>
-          <a:p>
-            <a:pPr lvl="0" indent="0" marL="0">
-              <a:buNone/>
-            </a:pPr>
-            <a:r>
-              <a:rPr/>
-              <a:t>Following from this notion, it means that a core component of learning is the integration of new information with prior schemas. The question here is now: how exactly are old and new information integrated with each other? This is where the interaction with the physical world in a specific social setting, constraint by cultural and linguistic norms is crucial, therefore making the learning environment and the interaction with it another core component of the learning process in the constructivist framework.</a:t>
+              <a:t>: Bloom’s taxonomy can help instructors appropriately align instruction to the learning objectives, including the planning of learning activities and the delivery of instructional materials (Raths 2002).</a:t>
+            </a:r>
+          </a:p>
+          <a:p>
+            <a:pPr lvl="0" indent="0" marL="0">
+              <a:buNone/>
+            </a:pPr>
+          </a:p>
+          <a:p>
+            <a:pPr lvl="0" indent="0" marL="0">
+              <a:buNone/>
+            </a:pPr>
+            <a:r>
+              <a:rPr/>
+              <a:t>Bloom’s taxonomy helps instructors create valid and reliable assessments by aligning course learning objectives to any given level of student understanding or proficiency. Crooks (1988) suggests that much of college assessment involves recalling memorized facts, which only addresses the first level of learning. However, Bloom’s taxonomy aids instructors in creating assessments that address all six levels of the cognitive domain.</a:t>
+            </a:r>
+          </a:p>
+          <a:p>
+            <a:pPr lvl="0" indent="0" marL="0">
+              <a:buNone/>
+            </a:pPr>
+          </a:p>
+          <a:p>
+            <a:pPr lvl="0" indent="0" marL="0">
+              <a:buNone/>
+            </a:pPr>
+            <a:r>
+              <a:rPr/>
+              <a:t>Bloom’s taxonomy has been shown to enhance students’ higher-order thinking skills, such as critical thinking. Bissell &amp; Lemons (2006) used Bloom’s taxonomy to assess critical-thinking skills in an introductory biology course. They developed a process by which they prepared questions with both content and critical-thinking skills in mind, and prepared grading rubrics that specified how to evaluate both the content and critical-thinking aspects of an answer. Using this methodology helped Bissell and Lemons clarify the course objectives (for instructors and students), improve student metacognition, and expose student misconceptions about the course content.</a:t>
             </a:r>
           </a:p>
         </p:txBody>
@@ -6330,106 +6456,6 @@
             <a:fld id="{18BDFEC3-8487-43E8-A154-7C12CBC1FFF2}" type="slidenum">
               <a:rPr lang="en-US"/>
               <a:t>69</a:t>
-            </a:fld>
-            <a:endParaRPr lang="en-US"/>
-          </a:p>
-        </p:txBody>
-      </p:sp>
-    </p:spTree>
-  </p:cSld>
-</p:notes>
-</file>
-
-<file path=ppt/notesSlides/notesSlide51.xml><?xml version="1.0" encoding="utf-8"?>
-<p:notes xmlns:a="http://schemas.openxmlformats.org/drawingml/2006/main" xmlns:r="http://schemas.openxmlformats.org/officeDocument/2006/relationships" xmlns:p="http://schemas.openxmlformats.org/presentationml/2006/main">
-  <p:cSld>
-    <p:spTree>
-      <p:nvGrpSpPr>
-        <p:cNvPr id="1" name=""/>
-        <p:cNvGrpSpPr/>
-        <p:nvPr/>
-      </p:nvGrpSpPr>
-      <p:grpSpPr>
-        <a:xfrm>
-          <a:off x="0" y="0"/>
-          <a:ext cx="0" cy="0"/>
-          <a:chOff x="0" y="0"/>
-          <a:chExt cx="0" cy="0"/>
-        </a:xfrm>
-      </p:grpSpPr>
-      <p:sp>
-        <p:nvSpPr>
-          <p:cNvPr id="2" name="Slide Image Placeholder 1"/>
-          <p:cNvSpPr>
-            <a:spLocks noGrp="1" noRot="1" noChangeAspect="1"/>
-          </p:cNvSpPr>
-          <p:nvPr>
-            <p:ph type="sldImg"/>
-          </p:nvPr>
-        </p:nvSpPr>
-        <p:spPr/>
-      </p:sp>
-      <p:sp>
-        <p:nvSpPr>
-          <p:cNvPr id="3" name="Notes Placeholder 2"/>
-          <p:cNvSpPr>
-            <a:spLocks noGrp="1"/>
-          </p:cNvSpPr>
-          <p:nvPr>
-            <p:ph type="body" idx="1"/>
-          </p:nvPr>
-        </p:nvSpPr>
-        <p:spPr/>
-        <p:txBody>
-          <a:bodyPr/>
-          <a:lstStyle/>
-          <a:p>
-            <a:pPr lvl="0" indent="0" marL="0">
-              <a:buNone/>
-            </a:pPr>
-            <a:r>
-              <a:rPr b="1"/>
-              <a:t>Presenter Notes</a:t>
-            </a:r>
-            <a:r>
-              <a:rPr/>
-              <a:t>: Bloom’s taxonomy can help instructors appropriately align instruction to the learning objectives, including the planning of learning activities and the delivery of instructional materials (Raths 2002). Bloom’s taxonomy helps instructors create valid and reliable assessments by aligning course learning objectives to any given level of student understanding or proficiency. Crooks (1998) suggests that much of college assessment involves recalling memorized facts, which only addresses the first level of learning. However, Bloom’s taxonomy aids instructors in creating assessments that address all six levels of the cognitive domain.</a:t>
-            </a:r>
-          </a:p>
-          <a:p>
-            <a:pPr lvl="0" indent="0" marL="0">
-              <a:buNone/>
-            </a:pPr>
-          </a:p>
-          <a:p>
-            <a:pPr lvl="0" indent="0" marL="0">
-              <a:buNone/>
-            </a:pPr>
-            <a:r>
-              <a:rPr/>
-              <a:t>Bloom’s taxonomy has been shown to enhance students’ higher-order thinking skills, such as critical thinking. Bissell and Lemons (2006) used Bloom’s taxonomy to assess critical-thinking skills in an introductory biology course. They developed a process by which they prepared questions with both content and critical-thinking skills in mind, and prepared grading rubrics that specified how to evaluate both the content and critical-thinking aspects of an answer. Using this methodology helped Bissell and Lemons clarify the course objectives (for instructors and students), improve student metacognition, and expose student misconceptions about the course content.</a:t>
-            </a:r>
-          </a:p>
-        </p:txBody>
-      </p:sp>
-      <p:sp>
-        <p:nvSpPr>
-          <p:cNvPr id="4" name="Slide Number Placeholder 3"/>
-          <p:cNvSpPr>
-            <a:spLocks noGrp="1"/>
-          </p:cNvSpPr>
-          <p:nvPr>
-            <p:ph type="sldNum" sz="quarter" idx="10"/>
-          </p:nvPr>
-        </p:nvSpPr>
-        <p:spPr/>
-        <p:txBody>
-          <a:bodyPr/>
-          <a:lstStyle/>
-          <a:p>
-            <a:fld id="{18BDFEC3-8487-43E8-A154-7C12CBC1FFF2}" type="slidenum">
-              <a:rPr lang="en-US"/>
-              <a:t>70</a:t>
             </a:fld>
             <a:endParaRPr lang="en-US"/>
           </a:p>
@@ -6541,7 +6567,7 @@
           <a:p>
             <a:fld id="{18BDFEC3-8487-43E8-A154-7C12CBC1FFF2}" type="slidenum">
               <a:rPr lang="en-US"/>
-              <a:t>11</a:t>
+              <a:t>9</a:t>
             </a:fld>
             <a:endParaRPr lang="en-US"/>
           </a:p>
@@ -6645,7 +6671,7 @@
           <a:p>
             <a:fld id="{18BDFEC3-8487-43E8-A154-7C12CBC1FFF2}" type="slidenum">
               <a:rPr lang="en-US"/>
-              <a:t>12</a:t>
+              <a:t>10</a:t>
             </a:fld>
             <a:endParaRPr lang="en-US"/>
           </a:p>
@@ -6749,7 +6775,7 @@
           <a:p>
             <a:fld id="{18BDFEC3-8487-43E8-A154-7C12CBC1FFF2}" type="slidenum">
               <a:rPr lang="en-US"/>
-              <a:t>13</a:t>
+              <a:t>11</a:t>
             </a:fld>
             <a:endParaRPr lang="en-US"/>
           </a:p>
@@ -6813,7 +6839,35 @@
             </a:r>
             <a:r>
               <a:rPr/>
-              <a:t>: These are the main learning objectives for today’s session. First, you should be able to understand some basic didactic concepts that support effective learning and teaching. This gives us the theoretical foundation for the rest of the session. Second, you will analyze how knowledge can be structured differently depending on the learner’s level of expertise, for example, how novices and experts organize information in different ways. Third, you will evaluate whether learning objectives and assessment methods are actually aligned and why this is important. In other words, does the assessment really measure the kind of learning we want students to achieve? Finally, you will formulate your own learning objectives using authentic examples and applying the principle of constructive alignment.</a:t>
+              <a:t>: These are the main learning objectives for today’s session. First, you should be able to understand some basic didactic concepts that support effective learning and teaching. This gives us the theoretical foundation for the rest of the session.</a:t>
+            </a:r>
+          </a:p>
+          <a:p>
+            <a:pPr lvl="0" indent="0" marL="0">
+              <a:buNone/>
+            </a:pPr>
+          </a:p>
+          <a:p>
+            <a:pPr lvl="0" indent="0" marL="0">
+              <a:buNone/>
+            </a:pPr>
+            <a:r>
+              <a:rPr/>
+              <a:t>Second, you will analyze how knowledge can be structured differently depending on the learner’s level of expertise, for example, how novices and experts organize information in different ways.</a:t>
+            </a:r>
+          </a:p>
+          <a:p>
+            <a:pPr lvl="0" indent="0" marL="0">
+              <a:buNone/>
+            </a:pPr>
+          </a:p>
+          <a:p>
+            <a:pPr lvl="0" indent="0" marL="0">
+              <a:buNone/>
+            </a:pPr>
+            <a:r>
+              <a:rPr/>
+              <a:t>Third, you will evaluate whether learning objectives and assessment methods are actually aligned and why this is important. In other words, does the assessment really measure the kind of learning we want students to achieve? Finally, you will formulate your own learning objectives using authentic examples and applying the principle of constructive alignment.</a:t>
             </a:r>
           </a:p>
           <a:p>
@@ -6849,7 +6903,7 @@
           <a:p>
             <a:fld id="{18BDFEC3-8487-43E8-A154-7C12CBC1FFF2}" type="slidenum">
               <a:rPr lang="en-US"/>
-              <a:t>14</a:t>
+              <a:t>12</a:t>
             </a:fld>
             <a:endParaRPr lang="en-US"/>
           </a:p>
@@ -9954,7 +10008,7 @@
             </a:pPr>
             <a:r>
               <a:rPr/>
-              <a:t>Today’s session journey</a:t>
+              <a:t>Key terms and definitions</a:t>
             </a:r>
           </a:p>
         </p:txBody>
@@ -9977,47 +10031,288 @@
             <a:pPr lvl="0" indent="0" marL="0">
               <a:buNone/>
             </a:pPr>
-          </a:p>
-          <a:p>
-            <a:pPr lvl="0" indent="0" marL="0">
-              <a:buNone/>
-            </a:pPr>
-            <a:r>
-              <a:rPr/>
-              <a:t>From</a:t>
-            </a:r>
-          </a:p>
-          <a:p>
-            <a:pPr lvl="0" indent="0" marL="0">
-              <a:buNone/>
-            </a:pPr>
-            <a:r>
-              <a:rPr b="1"/>
-              <a:t>I am not sure what good teaching in open research involves</a:t>
-            </a:r>
-          </a:p>
-          <a:p>
-            <a:pPr lvl="0" indent="0" marL="0">
-              <a:buNone/>
-            </a:pPr>
-            <a:r>
-              <a:rPr/>
-              <a:t>to</a:t>
-            </a:r>
-          </a:p>
-          <a:p>
-            <a:pPr lvl="0" indent="0" marL="0">
-              <a:buNone/>
-            </a:pPr>
-            <a:r>
-              <a:rPr b="1"/>
-              <a:t>I feel more confident that I can pass on my knowledge of open research to my learners using evidence-based didactic methods.</a:t>
+            <a:r>
+              <a:rPr/>
+              <a:t>Some terms we will come across today…</a:t>
+            </a:r>
+          </a:p>
+          <a:p>
+            <a:pPr lvl="0"/>
+            <a:r>
+              <a:rPr b="1"/>
+              <a:t>Constructivism</a:t>
+            </a:r>
+            <a:r>
+              <a:rPr/>
+              <a:t>:</a:t>
+            </a:r>
+          </a:p>
+          <a:p>
+            <a:pPr lvl="0"/>
+            <a:r>
+              <a:rPr b="1"/>
+              <a:t>Constructive alignment</a:t>
+            </a:r>
+            <a:r>
+              <a:rPr/>
+              <a:t>:</a:t>
+            </a:r>
+          </a:p>
+          <a:p>
+            <a:pPr lvl="0"/>
+            <a:r>
+              <a:rPr b="1"/>
+              <a:t>Learning objectives</a:t>
+            </a:r>
+            <a:r>
+              <a:rPr/>
+              <a:t>:</a:t>
+            </a:r>
+          </a:p>
+          <a:p>
+            <a:pPr lvl="0"/>
+            <a:r>
+              <a:rPr b="1"/>
+              <a:t>Bloom’s taxonomy</a:t>
+            </a:r>
+            <a:r>
+              <a:rPr/>
+              <a:t>:</a:t>
             </a:r>
           </a:p>
         </p:txBody>
       </p:sp>
     </p:spTree>
   </p:cSld>
+  <p:timing>
+    <p:tnLst>
+      <p:par>
+        <p:cTn id="1" dur="indefinite" restart="never" nodeType="tmRoot">
+          <p:childTnLst>
+            <p:seq concurrent="1" nextAc="seek">
+              <p:cTn id="2" dur="indefinite" nodeType="mainSeq">
+                <p:childTnLst>
+                  <p:par>
+                    <p:cTn id="3" fill="hold">
+                      <p:stCondLst>
+                        <p:cond delay="indefinite"/>
+                      </p:stCondLst>
+                      <p:childTnLst>
+                        <p:par>
+                          <p:cTn id="4" fill="hold">
+                            <p:stCondLst>
+                              <p:cond delay="0"/>
+                            </p:stCondLst>
+                            <p:childTnLst>
+                              <p:par>
+                                <p:cTn id="5" presetID="1" presetClass="entr" presetSubtype="0" fill="hold" grpId="0" nodeType="clickEffect">
+                                  <p:stCondLst>
+                                    <p:cond delay="0"/>
+                                  </p:stCondLst>
+                                  <p:childTnLst>
+                                    <p:set>
+                                      <p:cBhvr>
+                                        <p:cTn id="6" dur="1" fill="hold">
+                                          <p:stCondLst>
+                                            <p:cond delay="0"/>
+                                          </p:stCondLst>
+                                        </p:cTn>
+                                        <p:tgtEl>
+                                          <p:spTgt spid="3">
+                                            <p:txEl>
+                                              <p:pRg st="1" end="1"/>
+                                            </p:txEl>
+                                          </p:spTgt>
+                                        </p:tgtEl>
+                                        <p:attrNameLst>
+                                          <p:attrName>style.visibility</p:attrName>
+                                        </p:attrNameLst>
+                                      </p:cBhvr>
+                                      <p:to>
+                                        <p:strVal val="visible"/>
+                                      </p:to>
+                                    </p:set>
+                                  </p:childTnLst>
+                                </p:cTn>
+                              </p:par>
+                            </p:childTnLst>
+                          </p:cTn>
+                        </p:par>
+                      </p:childTnLst>
+                    </p:cTn>
+                  </p:par>
+                  <p:par>
+                    <p:cTn id="7" fill="hold">
+                      <p:stCondLst>
+                        <p:cond delay="indefinite"/>
+                      </p:stCondLst>
+                      <p:childTnLst>
+                        <p:par>
+                          <p:cTn id="8" fill="hold">
+                            <p:stCondLst>
+                              <p:cond delay="0"/>
+                            </p:stCondLst>
+                            <p:childTnLst>
+                              <p:par>
+                                <p:cTn id="9" presetID="1" presetClass="entr" presetSubtype="0" fill="hold" grpId="0" nodeType="clickEffect">
+                                  <p:stCondLst>
+                                    <p:cond delay="0"/>
+                                  </p:stCondLst>
+                                  <p:childTnLst>
+                                    <p:set>
+                                      <p:cBhvr>
+                                        <p:cTn id="10" dur="1" fill="hold">
+                                          <p:stCondLst>
+                                            <p:cond delay="0"/>
+                                          </p:stCondLst>
+                                        </p:cTn>
+                                        <p:tgtEl>
+                                          <p:spTgt spid="3">
+                                            <p:txEl>
+                                              <p:pRg st="2" end="2"/>
+                                            </p:txEl>
+                                          </p:spTgt>
+                                        </p:tgtEl>
+                                        <p:attrNameLst>
+                                          <p:attrName>style.visibility</p:attrName>
+                                        </p:attrNameLst>
+                                      </p:cBhvr>
+                                      <p:to>
+                                        <p:strVal val="visible"/>
+                                      </p:to>
+                                    </p:set>
+                                  </p:childTnLst>
+                                </p:cTn>
+                              </p:par>
+                            </p:childTnLst>
+                          </p:cTn>
+                        </p:par>
+                      </p:childTnLst>
+                    </p:cTn>
+                  </p:par>
+                  <p:par>
+                    <p:cTn id="11" fill="hold">
+                      <p:stCondLst>
+                        <p:cond delay="indefinite"/>
+                      </p:stCondLst>
+                      <p:childTnLst>
+                        <p:par>
+                          <p:cTn id="12" fill="hold">
+                            <p:stCondLst>
+                              <p:cond delay="0"/>
+                            </p:stCondLst>
+                            <p:childTnLst>
+                              <p:par>
+                                <p:cTn id="13" presetID="1" presetClass="entr" presetSubtype="0" fill="hold" grpId="0" nodeType="clickEffect">
+                                  <p:stCondLst>
+                                    <p:cond delay="0"/>
+                                  </p:stCondLst>
+                                  <p:childTnLst>
+                                    <p:set>
+                                      <p:cBhvr>
+                                        <p:cTn id="14" dur="1" fill="hold">
+                                          <p:stCondLst>
+                                            <p:cond delay="0"/>
+                                          </p:stCondLst>
+                                        </p:cTn>
+                                        <p:tgtEl>
+                                          <p:spTgt spid="3">
+                                            <p:txEl>
+                                              <p:pRg st="3" end="3"/>
+                                            </p:txEl>
+                                          </p:spTgt>
+                                        </p:tgtEl>
+                                        <p:attrNameLst>
+                                          <p:attrName>style.visibility</p:attrName>
+                                        </p:attrNameLst>
+                                      </p:cBhvr>
+                                      <p:to>
+                                        <p:strVal val="visible"/>
+                                      </p:to>
+                                    </p:set>
+                                  </p:childTnLst>
+                                </p:cTn>
+                              </p:par>
+                            </p:childTnLst>
+                          </p:cTn>
+                        </p:par>
+                      </p:childTnLst>
+                    </p:cTn>
+                  </p:par>
+                  <p:par>
+                    <p:cTn id="15" fill="hold">
+                      <p:stCondLst>
+                        <p:cond delay="indefinite"/>
+                      </p:stCondLst>
+                      <p:childTnLst>
+                        <p:par>
+                          <p:cTn id="16" fill="hold">
+                            <p:stCondLst>
+                              <p:cond delay="0"/>
+                            </p:stCondLst>
+                            <p:childTnLst>
+                              <p:par>
+                                <p:cTn id="17" presetID="1" presetClass="entr" presetSubtype="0" fill="hold" grpId="0" nodeType="clickEffect">
+                                  <p:stCondLst>
+                                    <p:cond delay="0"/>
+                                  </p:stCondLst>
+                                  <p:childTnLst>
+                                    <p:set>
+                                      <p:cBhvr>
+                                        <p:cTn id="18" dur="1" fill="hold">
+                                          <p:stCondLst>
+                                            <p:cond delay="0"/>
+                                          </p:stCondLst>
+                                        </p:cTn>
+                                        <p:tgtEl>
+                                          <p:spTgt spid="3">
+                                            <p:txEl>
+                                              <p:pRg st="4" end="4"/>
+                                            </p:txEl>
+                                          </p:spTgt>
+                                        </p:tgtEl>
+                                        <p:attrNameLst>
+                                          <p:attrName>style.visibility</p:attrName>
+                                        </p:attrNameLst>
+                                      </p:cBhvr>
+                                      <p:to>
+                                        <p:strVal val="visible"/>
+                                      </p:to>
+                                    </p:set>
+                                  </p:childTnLst>
+                                </p:cTn>
+                              </p:par>
+                            </p:childTnLst>
+                          </p:cTn>
+                        </p:par>
+                      </p:childTnLst>
+                    </p:cTn>
+                  </p:par>
+                </p:childTnLst>
+              </p:cTn>
+              <p:prevCondLst>
+                <p:cond evt="onPrev" delay="0">
+                  <p:tgtEl>
+                    <p:sldTgt/>
+                  </p:tgtEl>
+                </p:cond>
+              </p:prevCondLst>
+              <p:nextCondLst>
+                <p:cond evt="onNext" delay="0">
+                  <p:tgtEl>
+                    <p:sldTgt/>
+                  </p:tgtEl>
+                </p:cond>
+              </p:nextCondLst>
+            </p:seq>
+          </p:childTnLst>
+        </p:cTn>
+      </p:par>
+    </p:tnLst>
+    <p:bldLst>
+      <p:bldP spid="3" grpId="0" uiExpand="1" build="p"/>
+    </p:bldLst>
+  </p:timing>
 </p:sld>
 </file>
 
@@ -10058,7 +10353,7 @@
             </a:pPr>
             <a:r>
               <a:rPr/>
-              <a:t>Where are we at?</a:t>
+              <a:t>Key terms and definitions</a:t>
             </a:r>
           </a:p>
         </p:txBody>
@@ -10082,74 +10377,52 @@
               <a:buNone/>
             </a:pPr>
             <a:r>
-              <a:rPr b="1"/>
-              <a:t>Previously</a:t>
-            </a:r>
-            <a:r>
-              <a:rPr/>
-              <a:t>:</a:t>
+              <a:rPr/>
+              <a:t>Some terms we will come across today…</a:t>
             </a:r>
           </a:p>
           <a:p>
             <a:pPr lvl="0"/>
             <a:r>
-              <a:rPr/>
-              <a:t>Getting to know the group</a:t>
-            </a:r>
-          </a:p>
-          <a:p>
-            <a:pPr lvl="0" indent="0" marL="0">
-              <a:buNone/>
-            </a:pPr>
-            <a:r>
-              <a:rPr b="1"/>
-              <a:t>Up next</a:t>
-            </a:r>
-            <a:r>
-              <a:rPr/>
-              <a:t>:</a:t>
+              <a:rPr b="1"/>
+              <a:t>Constructivism</a:t>
+            </a:r>
+            <a:r>
+              <a:rPr/>
+              <a:t>: The notion that learners actively build their own understanding of the world rather than absorbing information passively (Sjøberg, 2010).</a:t>
             </a:r>
           </a:p>
           <a:p>
             <a:pPr lvl="0"/>
             <a:r>
-              <a:rPr/>
-              <a:t>What is learning?</a:t>
+              <a:rPr b="1"/>
+              <a:t>Constructive alignment</a:t>
+            </a:r>
+            <a:r>
+              <a:rPr/>
+              <a:t>: A teaching approach in which learning objectives, teaching activities, and assessment tasks are aligned so that learners actively construct knowledge and skills (Biggs, 1996).</a:t>
             </a:r>
           </a:p>
           <a:p>
             <a:pPr lvl="0"/>
             <a:r>
-              <a:rPr/>
-              <a:t>Constructivism</a:t>
+              <a:rPr b="1"/>
+              <a:t>Learning objectives</a:t>
+            </a:r>
+            <a:r>
+              <a:rPr/>
+              <a:t>: Describe what learners should be able to do after instruction and should specify the intended performance, conditions, and criteria for success.</a:t>
             </a:r>
           </a:p>
           <a:p>
             <a:pPr lvl="0"/>
             <a:r>
-              <a:rPr/>
-              <a:t>Constructive alignment</a:t>
-            </a:r>
-          </a:p>
-          <a:p>
-            <a:pPr lvl="0"/>
-            <a:r>
-              <a:rPr/>
-              <a:t>Learning domains</a:t>
-            </a:r>
-          </a:p>
-          <a:p>
-            <a:pPr lvl="0"/>
-            <a:r>
-              <a:rPr/>
-              <a:t>Levels of knowledge: Bloom’s taxonomy</a:t>
-            </a:r>
-          </a:p>
-          <a:p>
-            <a:pPr lvl="0"/>
-            <a:r>
-              <a:rPr/>
-              <a:t>Formulating learning objectives</a:t>
+              <a:rPr b="1"/>
+              <a:t>Bloom’s taxonomy</a:t>
+            </a:r>
+            <a:r>
+              <a:rPr/>
+              <a:t>: A framework for classifying levels of learning and cognitive skills (Bloom et al., 1964), organized from lower-order thinking skills (e.g., remembering and understanding to higher-order skills (analyzing, evaluating).</a:t>
             </a:r>
           </a:p>
         </p:txBody>
@@ -10196,7 +10469,7 @@
             </a:pPr>
             <a:r>
               <a:rPr/>
-              <a:t>Key terms and definitions</a:t>
+              <a:t>Learning objectives</a:t>
             </a:r>
           </a:p>
         </p:txBody>
@@ -10221,51 +10494,59 @@
             </a:pPr>
             <a:r>
               <a:rPr/>
-              <a:t>Some terms we will come across today…</a:t>
+              <a:t>At the end of this session, you will…</a:t>
             </a:r>
           </a:p>
           <a:p>
             <a:pPr lvl="0"/>
             <a:r>
               <a:rPr b="1"/>
-              <a:t>Constructivism</a:t>
-            </a:r>
-            <a:r>
-              <a:rPr/>
-              <a:t>:</a:t>
+              <a:t>Remember</a:t>
+            </a:r>
+            <a:r>
+              <a:rPr/>
+              <a:t> basic didactic concepts as the foundation for learning success</a:t>
             </a:r>
           </a:p>
           <a:p>
             <a:pPr lvl="0"/>
             <a:r>
               <a:rPr b="1"/>
-              <a:t>Constructive alignment</a:t>
-            </a:r>
-            <a:r>
-              <a:rPr/>
-              <a:t>:</a:t>
+              <a:t>Explain</a:t>
+            </a:r>
+            <a:r>
+              <a:rPr/>
+              <a:t> and </a:t>
+            </a:r>
+            <a:r>
+              <a:rPr b="1"/>
+              <a:t>compare</a:t>
+            </a:r>
+            <a:r>
+              <a:rPr/>
+              <a:t> how knowledge can be organized depending on the level of expertise</a:t>
             </a:r>
           </a:p>
           <a:p>
             <a:pPr lvl="0"/>
             <a:r>
               <a:rPr b="1"/>
-              <a:t>Learning objectives</a:t>
-            </a:r>
-            <a:r>
-              <a:rPr/>
-              <a:t>:</a:t>
+              <a:t>Evaluate</a:t>
+            </a:r>
+            <a:r>
+              <a:rPr/>
+              <a:t> the alignment between learning objectives, assessment types and teaching activities</a:t>
             </a:r>
           </a:p>
           <a:p>
             <a:pPr lvl="0"/>
             <a:r>
               <a:rPr b="1"/>
-              <a:t>Bloom’s taxonomy</a:t>
-            </a:r>
-            <a:r>
-              <a:rPr/>
-              <a:t>:</a:t>
+              <a:t>Formulate</a:t>
+            </a:r>
+            <a:r>
+              <a:rPr/>
+              <a:t> concrete learning objectives according to specific learning domains for real-world content</a:t>
             </a:r>
           </a:p>
         </p:txBody>
@@ -10541,76 +10822,7 @@
             </a:pPr>
             <a:r>
               <a:rPr/>
-              <a:t>Key terms and definitions</a:t>
-            </a:r>
-          </a:p>
-        </p:txBody>
-      </p:sp>
-      <p:sp>
-        <p:nvSpPr>
-          <p:cNvPr id="3" name="Content Placeholder 2"/>
-          <p:cNvSpPr>
-            <a:spLocks noGrp="1"/>
-          </p:cNvSpPr>
-          <p:nvPr>
-            <p:ph idx="1"/>
-          </p:nvPr>
-        </p:nvSpPr>
-        <p:spPr/>
-        <p:txBody>
-          <a:bodyPr/>
-          <a:lstStyle/>
-          <a:p>
-            <a:pPr lvl="0" indent="0" marL="0">
-              <a:buNone/>
-            </a:pPr>
-            <a:r>
-              <a:rPr/>
-              <a:t>Some terms we will come across today…</a:t>
-            </a:r>
-          </a:p>
-          <a:p>
-            <a:pPr lvl="0"/>
-            <a:r>
-              <a:rPr b="1"/>
-              <a:t>Constructivism</a:t>
-            </a:r>
-            <a:r>
-              <a:rPr/>
-              <a:t>: The notion that learners actively build their own understanding of the world rather than absorbing information passively.</a:t>
-            </a:r>
-          </a:p>
-          <a:p>
-            <a:pPr lvl="0"/>
-            <a:r>
-              <a:rPr b="1"/>
-              <a:t>Constructive alignment</a:t>
-            </a:r>
-            <a:r>
-              <a:rPr/>
-              <a:t>: A teaching approach in which learning objectives, teaching activities, and assessment tasks are aligned so that learners actively construct knowledge and skills.</a:t>
-            </a:r>
-          </a:p>
-          <a:p>
-            <a:pPr lvl="0"/>
-            <a:r>
-              <a:rPr b="1"/>
-              <a:t>Learning objectives</a:t>
-            </a:r>
-            <a:r>
-              <a:rPr/>
-              <a:t>: Describe what learners should be able to do after instruction and should specify the intended performance, conditions, and criteria for success.</a:t>
-            </a:r>
-          </a:p>
-          <a:p>
-            <a:pPr lvl="0"/>
-            <a:r>
-              <a:rPr b="1"/>
-              <a:t>Bloom’s taxonomy</a:t>
-            </a:r>
-            <a:r>
-              <a:rPr/>
-              <a:t>: A framework for classifying levels of learning and cognitive skills, organized from lower-order thinking skills (e.g., remembering and understanding to higher-order skills (analyzing, evaluating).</a:t>
+              <a:t>Getting started!</a:t>
             </a:r>
           </a:p>
         </p:txBody>
@@ -10639,453 +10851,30 @@
       </p:grpSpPr>
       <p:sp>
         <p:nvSpPr>
-          <p:cNvPr id="2" name="Title 1"/>
-          <p:cNvSpPr>
-            <a:spLocks noGrp="1"/>
-          </p:cNvSpPr>
-          <p:nvPr>
-            <p:ph type="title"/>
-          </p:nvPr>
-        </p:nvSpPr>
-        <p:spPr/>
-        <p:txBody>
-          <a:bodyPr/>
-          <a:lstStyle/>
-          <a:p>
-            <a:pPr lvl="0" indent="0" marL="0">
-              <a:buNone/>
-            </a:pPr>
-            <a:r>
-              <a:rPr/>
-              <a:t>Learning objectives</a:t>
-            </a:r>
-          </a:p>
-        </p:txBody>
-      </p:sp>
-      <p:sp>
-        <p:nvSpPr>
-          <p:cNvPr id="3" name="Content Placeholder 2"/>
-          <p:cNvSpPr>
-            <a:spLocks noGrp="1"/>
-          </p:cNvSpPr>
-          <p:nvPr>
-            <p:ph idx="1"/>
-          </p:nvPr>
-        </p:nvSpPr>
-        <p:spPr/>
-        <p:txBody>
-          <a:bodyPr/>
-          <a:lstStyle/>
-          <a:p>
-            <a:pPr lvl="0" indent="0" marL="0">
-              <a:buNone/>
-            </a:pPr>
-            <a:r>
-              <a:rPr/>
-              <a:t>At the end of this session, you will…</a:t>
-            </a:r>
-          </a:p>
-          <a:p>
-            <a:pPr lvl="0"/>
-            <a:r>
-              <a:rPr b="1"/>
-              <a:t>Remember</a:t>
-            </a:r>
-            <a:r>
-              <a:rPr/>
-              <a:t> basic didactic concepts as the foundation for learning success</a:t>
-            </a:r>
-          </a:p>
-          <a:p>
-            <a:pPr lvl="0"/>
-            <a:r>
-              <a:rPr b="1"/>
-              <a:t>Explain</a:t>
-            </a:r>
-            <a:r>
-              <a:rPr/>
-              <a:t> and </a:t>
-            </a:r>
-            <a:r>
-              <a:rPr b="1"/>
-              <a:t>compare</a:t>
-            </a:r>
-            <a:r>
-              <a:rPr/>
-              <a:t> how knowledge can be organized depending on the level of expertise</a:t>
-            </a:r>
-          </a:p>
-          <a:p>
-            <a:pPr lvl="0"/>
-            <a:r>
-              <a:rPr b="1"/>
-              <a:t>Evaluate</a:t>
-            </a:r>
-            <a:r>
-              <a:rPr/>
-              <a:t> the alignment between learning objectives, assessment types and teaching activities</a:t>
-            </a:r>
-          </a:p>
-          <a:p>
-            <a:pPr lvl="0"/>
-            <a:r>
-              <a:rPr b="1"/>
-              <a:t>Formulate</a:t>
-            </a:r>
-            <a:r>
-              <a:rPr/>
-              <a:t> concrete learning objectives according to specific learning domains for real-world content</a:t>
-            </a:r>
-          </a:p>
-        </p:txBody>
-      </p:sp>
-    </p:spTree>
-  </p:cSld>
-  <p:timing>
-    <p:tnLst>
-      <p:par>
-        <p:cTn id="1" dur="indefinite" restart="never" nodeType="tmRoot">
-          <p:childTnLst>
-            <p:seq concurrent="1" nextAc="seek">
-              <p:cTn id="2" dur="indefinite" nodeType="mainSeq">
-                <p:childTnLst>
-                  <p:par>
-                    <p:cTn id="3" fill="hold">
-                      <p:stCondLst>
-                        <p:cond delay="indefinite"/>
-                      </p:stCondLst>
-                      <p:childTnLst>
-                        <p:par>
-                          <p:cTn id="4" fill="hold">
-                            <p:stCondLst>
-                              <p:cond delay="0"/>
-                            </p:stCondLst>
-                            <p:childTnLst>
-                              <p:par>
-                                <p:cTn id="5" presetID="1" presetClass="entr" presetSubtype="0" fill="hold" grpId="0" nodeType="clickEffect">
-                                  <p:stCondLst>
-                                    <p:cond delay="0"/>
-                                  </p:stCondLst>
-                                  <p:childTnLst>
-                                    <p:set>
-                                      <p:cBhvr>
-                                        <p:cTn id="6" dur="1" fill="hold">
-                                          <p:stCondLst>
-                                            <p:cond delay="0"/>
-                                          </p:stCondLst>
-                                        </p:cTn>
-                                        <p:tgtEl>
-                                          <p:spTgt spid="3">
-                                            <p:txEl>
-                                              <p:pRg st="1" end="1"/>
-                                            </p:txEl>
-                                          </p:spTgt>
-                                        </p:tgtEl>
-                                        <p:attrNameLst>
-                                          <p:attrName>style.visibility</p:attrName>
-                                        </p:attrNameLst>
-                                      </p:cBhvr>
-                                      <p:to>
-                                        <p:strVal val="visible"/>
-                                      </p:to>
-                                    </p:set>
-                                  </p:childTnLst>
-                                </p:cTn>
-                              </p:par>
-                            </p:childTnLst>
-                          </p:cTn>
-                        </p:par>
-                      </p:childTnLst>
-                    </p:cTn>
-                  </p:par>
-                  <p:par>
-                    <p:cTn id="7" fill="hold">
-                      <p:stCondLst>
-                        <p:cond delay="indefinite"/>
-                      </p:stCondLst>
-                      <p:childTnLst>
-                        <p:par>
-                          <p:cTn id="8" fill="hold">
-                            <p:stCondLst>
-                              <p:cond delay="0"/>
-                            </p:stCondLst>
-                            <p:childTnLst>
-                              <p:par>
-                                <p:cTn id="9" presetID="1" presetClass="entr" presetSubtype="0" fill="hold" grpId="0" nodeType="clickEffect">
-                                  <p:stCondLst>
-                                    <p:cond delay="0"/>
-                                  </p:stCondLst>
-                                  <p:childTnLst>
-                                    <p:set>
-                                      <p:cBhvr>
-                                        <p:cTn id="10" dur="1" fill="hold">
-                                          <p:stCondLst>
-                                            <p:cond delay="0"/>
-                                          </p:stCondLst>
-                                        </p:cTn>
-                                        <p:tgtEl>
-                                          <p:spTgt spid="3">
-                                            <p:txEl>
-                                              <p:pRg st="2" end="2"/>
-                                            </p:txEl>
-                                          </p:spTgt>
-                                        </p:tgtEl>
-                                        <p:attrNameLst>
-                                          <p:attrName>style.visibility</p:attrName>
-                                        </p:attrNameLst>
-                                      </p:cBhvr>
-                                      <p:to>
-                                        <p:strVal val="visible"/>
-                                      </p:to>
-                                    </p:set>
-                                  </p:childTnLst>
-                                </p:cTn>
-                              </p:par>
-                            </p:childTnLst>
-                          </p:cTn>
-                        </p:par>
-                      </p:childTnLst>
-                    </p:cTn>
-                  </p:par>
-                  <p:par>
-                    <p:cTn id="11" fill="hold">
-                      <p:stCondLst>
-                        <p:cond delay="indefinite"/>
-                      </p:stCondLst>
-                      <p:childTnLst>
-                        <p:par>
-                          <p:cTn id="12" fill="hold">
-                            <p:stCondLst>
-                              <p:cond delay="0"/>
-                            </p:stCondLst>
-                            <p:childTnLst>
-                              <p:par>
-                                <p:cTn id="13" presetID="1" presetClass="entr" presetSubtype="0" fill="hold" grpId="0" nodeType="clickEffect">
-                                  <p:stCondLst>
-                                    <p:cond delay="0"/>
-                                  </p:stCondLst>
-                                  <p:childTnLst>
-                                    <p:set>
-                                      <p:cBhvr>
-                                        <p:cTn id="14" dur="1" fill="hold">
-                                          <p:stCondLst>
-                                            <p:cond delay="0"/>
-                                          </p:stCondLst>
-                                        </p:cTn>
-                                        <p:tgtEl>
-                                          <p:spTgt spid="3">
-                                            <p:txEl>
-                                              <p:pRg st="3" end="3"/>
-                                            </p:txEl>
-                                          </p:spTgt>
-                                        </p:tgtEl>
-                                        <p:attrNameLst>
-                                          <p:attrName>style.visibility</p:attrName>
-                                        </p:attrNameLst>
-                                      </p:cBhvr>
-                                      <p:to>
-                                        <p:strVal val="visible"/>
-                                      </p:to>
-                                    </p:set>
-                                  </p:childTnLst>
-                                </p:cTn>
-                              </p:par>
-                            </p:childTnLst>
-                          </p:cTn>
-                        </p:par>
-                      </p:childTnLst>
-                    </p:cTn>
-                  </p:par>
-                  <p:par>
-                    <p:cTn id="15" fill="hold">
-                      <p:stCondLst>
-                        <p:cond delay="indefinite"/>
-                      </p:stCondLst>
-                      <p:childTnLst>
-                        <p:par>
-                          <p:cTn id="16" fill="hold">
-                            <p:stCondLst>
-                              <p:cond delay="0"/>
-                            </p:stCondLst>
-                            <p:childTnLst>
-                              <p:par>
-                                <p:cTn id="17" presetID="1" presetClass="entr" presetSubtype="0" fill="hold" grpId="0" nodeType="clickEffect">
-                                  <p:stCondLst>
-                                    <p:cond delay="0"/>
-                                  </p:stCondLst>
-                                  <p:childTnLst>
-                                    <p:set>
-                                      <p:cBhvr>
-                                        <p:cTn id="18" dur="1" fill="hold">
-                                          <p:stCondLst>
-                                            <p:cond delay="0"/>
-                                          </p:stCondLst>
-                                        </p:cTn>
-                                        <p:tgtEl>
-                                          <p:spTgt spid="3">
-                                            <p:txEl>
-                                              <p:pRg st="4" end="4"/>
-                                            </p:txEl>
-                                          </p:spTgt>
-                                        </p:tgtEl>
-                                        <p:attrNameLst>
-                                          <p:attrName>style.visibility</p:attrName>
-                                        </p:attrNameLst>
-                                      </p:cBhvr>
-                                      <p:to>
-                                        <p:strVal val="visible"/>
-                                      </p:to>
-                                    </p:set>
-                                  </p:childTnLst>
-                                </p:cTn>
-                              </p:par>
-                            </p:childTnLst>
-                          </p:cTn>
-                        </p:par>
-                      </p:childTnLst>
-                    </p:cTn>
-                  </p:par>
-                </p:childTnLst>
-              </p:cTn>
-              <p:prevCondLst>
-                <p:cond evt="onPrev" delay="0">
-                  <p:tgtEl>
-                    <p:sldTgt/>
-                  </p:tgtEl>
-                </p:cond>
-              </p:prevCondLst>
-              <p:nextCondLst>
-                <p:cond evt="onNext" delay="0">
-                  <p:tgtEl>
-                    <p:sldTgt/>
-                  </p:tgtEl>
-                </p:cond>
-              </p:nextCondLst>
-            </p:seq>
-          </p:childTnLst>
-        </p:cTn>
-      </p:par>
-    </p:tnLst>
-    <p:bldLst>
-      <p:bldP spid="3" grpId="0" uiExpand="1" build="p"/>
-    </p:bldLst>
-  </p:timing>
-</p:sld>
-</file>
-
-<file path=ppt/slides/slide15.xml><?xml version="1.0" encoding="utf-8"?>
-<p:sld xmlns:a="http://schemas.openxmlformats.org/drawingml/2006/main" xmlns:r="http://schemas.openxmlformats.org/officeDocument/2006/relationships" xmlns:p="http://schemas.openxmlformats.org/presentationml/2006/main">
-  <p:cSld>
-    <p:spTree>
-      <p:nvGrpSpPr>
-        <p:cNvPr id="1" name=""/>
-        <p:cNvGrpSpPr/>
-        <p:nvPr/>
-      </p:nvGrpSpPr>
-      <p:grpSpPr>
-        <a:xfrm>
-          <a:off x="0" y="0"/>
-          <a:ext cx="0" cy="0"/>
-          <a:chOff x="0" y="0"/>
-          <a:chExt cx="0" cy="0"/>
-        </a:xfrm>
-      </p:grpSpPr>
-      <p:sp>
-        <p:nvSpPr>
-          <p:cNvPr id="2" name="Title 1"/>
-          <p:cNvSpPr>
-            <a:spLocks noGrp="1"/>
-          </p:cNvSpPr>
-          <p:nvPr>
-            <p:ph type="title"/>
-          </p:nvPr>
-        </p:nvSpPr>
-        <p:spPr>
-          <a:xfrm>
-            <a:off x="722313" y="3305176"/>
-            <a:ext cx="7772400" cy="1021556"/>
-          </a:xfrm>
-        </p:spPr>
-        <p:txBody>
-          <a:bodyPr/>
-          <a:lstStyle/>
-          <a:p>
-            <a:pPr lvl="0" indent="0" marL="0">
-              <a:buNone/>
-            </a:pPr>
-            <a:r>
-              <a:rPr/>
-              <a:t>Getting started!</a:t>
-            </a:r>
-          </a:p>
-        </p:txBody>
-      </p:sp>
-    </p:spTree>
-  </p:cSld>
-</p:sld>
-</file>
-
-<file path=ppt/slides/slide16.xml><?xml version="1.0" encoding="utf-8"?>
-<p:sld xmlns:a="http://schemas.openxmlformats.org/drawingml/2006/main" xmlns:r="http://schemas.openxmlformats.org/officeDocument/2006/relationships" xmlns:p="http://schemas.openxmlformats.org/presentationml/2006/main">
-  <p:cSld>
-    <p:spTree>
-      <p:nvGrpSpPr>
-        <p:cNvPr id="1" name=""/>
-        <p:cNvGrpSpPr/>
-        <p:nvPr/>
-      </p:nvGrpSpPr>
-      <p:grpSpPr>
-        <a:xfrm>
-          <a:off x="0" y="0"/>
-          <a:ext cx="0" cy="0"/>
-          <a:chOff x="0" y="0"/>
-          <a:chExt cx="0" cy="0"/>
-        </a:xfrm>
-      </p:grpSpPr>
-      <p:sp>
-        <p:nvSpPr>
-          <p:cNvPr id="2" name="Title 1"/>
-          <p:cNvSpPr>
-            <a:spLocks noGrp="1"/>
-          </p:cNvSpPr>
-          <p:nvPr>
-            <p:ph type="title"/>
-          </p:nvPr>
-        </p:nvSpPr>
-        <p:spPr>
-          <a:xfrm>
-            <a:off x="457201" y="204787"/>
-            <a:ext cx="3008313" cy="871538"/>
-          </a:xfrm>
-        </p:spPr>
-        <p:txBody>
-          <a:bodyPr/>
-          <a:lstStyle/>
-          <a:p>
-            <a:pPr lvl="0" indent="0" marL="0">
-              <a:buNone/>
-            </a:pPr>
-            <a:r>
-              <a:rPr/>
+          <p:cNvPr id="4" name="Text Placeholder 3"/>
+          <p:cNvSpPr>
+            <a:spLocks noGrp="1"/>
+          </p:cNvSpPr>
+          <p:nvPr>
+            <p:ph idx="2" sz="half" type="body"/>
+          </p:nvPr>
+        </p:nvSpPr>
+        <p:spPr/>
+        <p:txBody>
+          <a:bodyPr/>
+          <a:lstStyle/>
+          <a:p>
+            <a:pPr lvl="0" indent="0" marL="0">
+              <a:spcBef>
+                <a:spcPts val="3000"/>
+              </a:spcBef>
+              <a:buNone/>
+            </a:pPr>
+            <a:r>
+              <a:rPr b="1"/>
               <a:t>How much teaching experience do you have?</a:t>
             </a:r>
           </a:p>
-        </p:txBody>
-      </p:sp>
-      <p:sp>
-        <p:nvSpPr>
-          <p:cNvPr id="4" name="Text Placeholder 3"/>
-          <p:cNvSpPr>
-            <a:spLocks noGrp="1"/>
-          </p:cNvSpPr>
-          <p:nvPr>
-            <p:ph idx="2" sz="half" type="body"/>
-          </p:nvPr>
-        </p:nvSpPr>
-        <p:spPr/>
-        <p:txBody>
-          <a:bodyPr/>
-          <a:lstStyle/>
           <a:p>
             <a:pPr lvl="0"/>
             <a:r>
@@ -11147,7 +10936,7 @@
 </p:sld>
 </file>
 
-<file path=ppt/slides/slide17.xml><?xml version="1.0" encoding="utf-8"?>
+<file path=ppt/slides/slide15.xml><?xml version="1.0" encoding="utf-8"?>
 <p:sld xmlns:a="http://schemas.openxmlformats.org/drawingml/2006/main" xmlns:r="http://schemas.openxmlformats.org/officeDocument/2006/relationships" xmlns:p="http://schemas.openxmlformats.org/presentationml/2006/main">
   <p:cSld>
     <p:spTree>
@@ -11166,48 +10955,30 @@
       </p:grpSpPr>
       <p:sp>
         <p:nvSpPr>
-          <p:cNvPr id="2" name="Title 1"/>
-          <p:cNvSpPr>
-            <a:spLocks noGrp="1"/>
-          </p:cNvSpPr>
-          <p:nvPr>
-            <p:ph type="title"/>
-          </p:nvPr>
-        </p:nvSpPr>
-        <p:spPr>
-          <a:xfrm>
-            <a:off x="457201" y="204787"/>
-            <a:ext cx="3008313" cy="871538"/>
-          </a:xfrm>
-        </p:spPr>
-        <p:txBody>
-          <a:bodyPr/>
-          <a:lstStyle/>
-          <a:p>
-            <a:pPr lvl="0" indent="0" marL="0">
-              <a:buNone/>
-            </a:pPr>
-            <a:r>
-              <a:rPr/>
+          <p:cNvPr id="4" name="Text Placeholder 3"/>
+          <p:cNvSpPr>
+            <a:spLocks noGrp="1"/>
+          </p:cNvSpPr>
+          <p:nvPr>
+            <p:ph idx="2" sz="half" type="body"/>
+          </p:nvPr>
+        </p:nvSpPr>
+        <p:spPr/>
+        <p:txBody>
+          <a:bodyPr/>
+          <a:lstStyle/>
+          <a:p>
+            <a:pPr lvl="0" indent="0" marL="0">
+              <a:spcBef>
+                <a:spcPts val="3000"/>
+              </a:spcBef>
+              <a:buNone/>
+            </a:pPr>
+            <a:r>
+              <a:rPr b="1"/>
               <a:t>How much have you already thought about didactics?</a:t>
             </a:r>
           </a:p>
-        </p:txBody>
-      </p:sp>
-      <p:sp>
-        <p:nvSpPr>
-          <p:cNvPr id="4" name="Text Placeholder 3"/>
-          <p:cNvSpPr>
-            <a:spLocks noGrp="1"/>
-          </p:cNvSpPr>
-          <p:nvPr>
-            <p:ph idx="2" sz="half" type="body"/>
-          </p:nvPr>
-        </p:nvSpPr>
-        <p:spPr/>
-        <p:txBody>
-          <a:bodyPr/>
-          <a:lstStyle/>
           <a:p>
             <a:pPr lvl="0"/>
             <a:r>
@@ -11269,7 +11040,7 @@
 </p:sld>
 </file>
 
-<file path=ppt/slides/slide18.xml><?xml version="1.0" encoding="utf-8"?>
+<file path=ppt/slides/slide16.xml><?xml version="1.0" encoding="utf-8"?>
 <p:sld xmlns:a="http://schemas.openxmlformats.org/drawingml/2006/main" xmlns:r="http://schemas.openxmlformats.org/officeDocument/2006/relationships" xmlns:p="http://schemas.openxmlformats.org/presentationml/2006/main">
   <p:cSld>
     <p:spTree>
@@ -11288,48 +11059,30 @@
       </p:grpSpPr>
       <p:sp>
         <p:nvSpPr>
-          <p:cNvPr id="2" name="Title 1"/>
-          <p:cNvSpPr>
-            <a:spLocks noGrp="1"/>
-          </p:cNvSpPr>
-          <p:nvPr>
-            <p:ph type="title"/>
-          </p:nvPr>
-        </p:nvSpPr>
-        <p:spPr>
-          <a:xfrm>
-            <a:off x="457201" y="204787"/>
-            <a:ext cx="3008313" cy="871538"/>
-          </a:xfrm>
-        </p:spPr>
-        <p:txBody>
-          <a:bodyPr/>
-          <a:lstStyle/>
-          <a:p>
-            <a:pPr lvl="0" indent="0" marL="0">
-              <a:buNone/>
-            </a:pPr>
-            <a:r>
-              <a:rPr/>
+          <p:cNvPr id="4" name="Text Placeholder 3"/>
+          <p:cNvSpPr>
+            <a:spLocks noGrp="1"/>
+          </p:cNvSpPr>
+          <p:nvPr>
+            <p:ph idx="2" sz="half" type="body"/>
+          </p:nvPr>
+        </p:nvSpPr>
+        <p:spPr/>
+        <p:txBody>
+          <a:bodyPr/>
+          <a:lstStyle/>
+          <a:p>
+            <a:pPr lvl="0" indent="0" marL="0">
+              <a:spcBef>
+                <a:spcPts val="3000"/>
+              </a:spcBef>
+              <a:buNone/>
+            </a:pPr>
+            <a:r>
+              <a:rPr b="1"/>
               <a:t>How big are your teaching/training audiences?</a:t>
             </a:r>
           </a:p>
-        </p:txBody>
-      </p:sp>
-      <p:sp>
-        <p:nvSpPr>
-          <p:cNvPr id="4" name="Text Placeholder 3"/>
-          <p:cNvSpPr>
-            <a:spLocks noGrp="1"/>
-          </p:cNvSpPr>
-          <p:nvPr>
-            <p:ph idx="2" sz="half" type="body"/>
-          </p:nvPr>
-        </p:nvSpPr>
-        <p:spPr/>
-        <p:txBody>
-          <a:bodyPr/>
-          <a:lstStyle/>
           <a:p>
             <a:pPr lvl="0"/>
             <a:r>
@@ -11383,7 +11136,7 @@
 </p:sld>
 </file>
 
-<file path=ppt/slides/slide19.xml><?xml version="1.0" encoding="utf-8"?>
+<file path=ppt/slides/slide17.xml><?xml version="1.0" encoding="utf-8"?>
 <p:sld xmlns:a="http://schemas.openxmlformats.org/drawingml/2006/main" xmlns:r="http://schemas.openxmlformats.org/officeDocument/2006/relationships" xmlns:p="http://schemas.openxmlformats.org/presentationml/2006/main">
   <p:cSld>
     <p:spTree>
@@ -11688,6 +11441,187 @@
 </p:sld>
 </file>
 
+<file path=ppt/slides/slide18.xml><?xml version="1.0" encoding="utf-8"?>
+<p:sld xmlns:a="http://schemas.openxmlformats.org/drawingml/2006/main" xmlns:r="http://schemas.openxmlformats.org/officeDocument/2006/relationships" xmlns:p="http://schemas.openxmlformats.org/presentationml/2006/main">
+  <p:cSld>
+    <p:spTree>
+      <p:nvGrpSpPr>
+        <p:cNvPr id="1" name=""/>
+        <p:cNvGrpSpPr/>
+        <p:nvPr/>
+      </p:nvGrpSpPr>
+      <p:grpSpPr>
+        <a:xfrm>
+          <a:off x="0" y="0"/>
+          <a:ext cx="0" cy="0"/>
+          <a:chOff x="0" y="0"/>
+          <a:chExt cx="0" cy="0"/>
+        </a:xfrm>
+      </p:grpSpPr>
+      <p:sp>
+        <p:nvSpPr>
+          <p:cNvPr id="3" name="Content Placeholder 2"/>
+          <p:cNvSpPr>
+            <a:spLocks noGrp="1"/>
+          </p:cNvSpPr>
+          <p:nvPr>
+            <p:ph idx="1"/>
+          </p:nvPr>
+        </p:nvSpPr>
+        <p:spPr/>
+        <p:txBody>
+          <a:bodyPr/>
+          <a:lstStyle/>
+          <a:p>
+            <a:pPr lvl="0" indent="0" marL="0">
+              <a:buNone/>
+            </a:pPr>
+            <a:r>
+              <a:rPr/>
+              <a:t>Liddell et al. (1996). </a:t>
+            </a:r>
+            <a:r>
+              <a:rPr i="1"/>
+              <a:t>A Greek–English Lexicon</a:t>
+            </a:r>
+            <a:r>
+              <a:rPr/>
+              <a:t>. Oxford University Press.</a:t>
+            </a:r>
+          </a:p>
+        </p:txBody>
+      </p:sp>
+    </p:spTree>
+  </p:cSld>
+</p:sld>
+</file>
+
+<file path=ppt/slides/slide19.xml><?xml version="1.0" encoding="utf-8"?>
+<p:sld xmlns:a="http://schemas.openxmlformats.org/drawingml/2006/main" xmlns:r="http://schemas.openxmlformats.org/officeDocument/2006/relationships" xmlns:p="http://schemas.openxmlformats.org/presentationml/2006/main">
+  <p:cSld>
+    <p:spTree>
+      <p:nvGrpSpPr>
+        <p:cNvPr id="1" name=""/>
+        <p:cNvGrpSpPr/>
+        <p:nvPr/>
+      </p:nvGrpSpPr>
+      <p:grpSpPr>
+        <a:xfrm>
+          <a:off x="0" y="0"/>
+          <a:ext cx="0" cy="0"/>
+          <a:chOff x="0" y="0"/>
+          <a:chExt cx="0" cy="0"/>
+        </a:xfrm>
+      </p:grpSpPr>
+      <p:sp>
+        <p:nvSpPr>
+          <p:cNvPr id="2" name="Title 1"/>
+          <p:cNvSpPr>
+            <a:spLocks noGrp="1"/>
+          </p:cNvSpPr>
+          <p:nvPr>
+            <p:ph type="title"/>
+          </p:nvPr>
+        </p:nvSpPr>
+        <p:spPr/>
+        <p:txBody>
+          <a:bodyPr/>
+          <a:lstStyle/>
+          <a:p>
+            <a:pPr lvl="0" indent="0" marL="0">
+              <a:buNone/>
+            </a:pPr>
+            <a:r>
+              <a:rPr/>
+              <a:t>Didactics …</a:t>
+            </a:r>
+          </a:p>
+        </p:txBody>
+      </p:sp>
+      <p:sp>
+        <p:nvSpPr>
+          <p:cNvPr id="3" name="Content Placeholder 2"/>
+          <p:cNvSpPr>
+            <a:spLocks noGrp="1"/>
+          </p:cNvSpPr>
+          <p:nvPr>
+            <p:ph idx="1"/>
+          </p:nvPr>
+        </p:nvSpPr>
+        <p:spPr/>
+        <p:txBody>
+          <a:bodyPr/>
+          <a:lstStyle/>
+          <a:p>
+            <a:pPr lvl="0" indent="0" marL="0">
+              <a:buNone/>
+            </a:pPr>
+          </a:p>
+          <a:p>
+            <a:pPr lvl="0" indent="0" marL="0">
+              <a:buNone/>
+            </a:pPr>
+            <a:r>
+              <a:rPr/>
+              <a:t>“…is the </a:t>
+            </a:r>
+            <a:r>
+              <a:rPr b="1"/>
+              <a:t>science of learning and teaching in general</a:t>
+            </a:r>
+            <a:r>
+              <a:rPr/>
+              <a:t>”  (Dolch, 1967)  “…includes </a:t>
+            </a:r>
+            <a:r>
+              <a:rPr b="1"/>
+              <a:t>teaching and learning strategies</a:t>
+            </a:r>
+            <a:r>
+              <a:rPr/>
+              <a:t> […] referring to the </a:t>
+            </a:r>
+            <a:r>
+              <a:rPr b="1"/>
+              <a:t>design</a:t>
+            </a:r>
+            <a:r>
+              <a:rPr/>
+              <a:t>, programming, elaboration and </a:t>
+            </a:r>
+            <a:r>
+              <a:rPr b="1"/>
+              <a:t>formulation</a:t>
+            </a:r>
+            <a:r>
+              <a:rPr/>
+              <a:t> of </a:t>
+            </a:r>
+            <a:r>
+              <a:rPr b="1"/>
+              <a:t>learning contents</a:t>
+            </a:r>
+            <a:r>
+              <a:rPr/>
+              <a:t> in verbal or written form.”  (Casasola Rivera, 2020)</a:t>
+            </a:r>
+          </a:p>
+          <a:p>
+            <a:pPr lvl="0" indent="0" marL="0">
+              <a:buNone/>
+            </a:pPr>
+            <a:r>
+              <a:rPr/>
+              <a:t>Casasola Rivera (2020); Duit (2015); Riskulova et al. (2020)</a:t>
+            </a:r>
+          </a:p>
+        </p:txBody>
+      </p:sp>
+    </p:spTree>
+  </p:cSld>
+</p:sld>
+</file>
+
 <file path=ppt/slides/slide2.xml><?xml version="1.0" encoding="utf-8"?>
 <p:sld xmlns:a="http://schemas.openxmlformats.org/drawingml/2006/main" xmlns:r="http://schemas.openxmlformats.org/officeDocument/2006/relationships" xmlns:p="http://schemas.openxmlformats.org/presentationml/2006/main">
   <p:cSld>
@@ -11818,6 +11752,31 @@
       </p:grpSpPr>
       <p:sp>
         <p:nvSpPr>
+          <p:cNvPr id="2" name="Title 1"/>
+          <p:cNvSpPr>
+            <a:spLocks noGrp="1"/>
+          </p:cNvSpPr>
+          <p:nvPr>
+            <p:ph type="title"/>
+          </p:nvPr>
+        </p:nvSpPr>
+        <p:spPr/>
+        <p:txBody>
+          <a:bodyPr/>
+          <a:lstStyle/>
+          <a:p>
+            <a:pPr lvl="0" indent="0" marL="0">
+              <a:buNone/>
+            </a:pPr>
+            <a:r>
+              <a:rPr/>
+              <a:t>Didactics …</a:t>
+            </a:r>
+          </a:p>
+        </p:txBody>
+      </p:sp>
+      <p:sp>
+        <p:nvSpPr>
           <p:cNvPr id="3" name="Content Placeholder 2"/>
           <p:cNvSpPr>
             <a:spLocks noGrp="1"/>
@@ -11834,17 +11793,61 @@
             <a:pPr lvl="0" indent="0" marL="0">
               <a:buNone/>
             </a:pPr>
-            <a:r>
-              <a:rPr/>
-              <a:t>Liddell et al. (1996). </a:t>
-            </a:r>
-            <a:r>
-              <a:rPr i="1"/>
-              <a:t>A Greek–English Lexicon</a:t>
-            </a:r>
-            <a:r>
-              <a:rPr/>
-              <a:t>. Oxford University Press.</a:t>
+          </a:p>
+          <a:p>
+            <a:pPr lvl="0" indent="0" marL="0">
+              <a:buNone/>
+            </a:pPr>
+            <a:r>
+              <a:rPr/>
+              <a:t>“… encompasses questions about the </a:t>
+            </a:r>
+            <a:r>
+              <a:rPr b="1"/>
+              <a:t>selection of knowledge, teaching methods</a:t>
+            </a:r>
+            <a:r>
+              <a:rPr/>
+              <a:t>, and how learning takes place in different </a:t>
+            </a:r>
+            <a:r>
+              <a:rPr b="1"/>
+              <a:t>contexts</a:t>
+            </a:r>
+            <a:r>
+              <a:rPr/>
+              <a:t>. It can be seen as the </a:t>
+            </a:r>
+            <a:r>
+              <a:rPr b="1"/>
+              <a:t>planning, implementation, and analysis of teaching</a:t>
+            </a:r>
+            <a:r>
+              <a:rPr/>
+              <a:t>, with a particular focus on </a:t>
+            </a:r>
+            <a:r>
+              <a:rPr b="1"/>
+              <a:t>why certain objectives, content, and methods are chosen</a:t>
+            </a:r>
+            <a:r>
+              <a:rPr/>
+              <a:t>.”</a:t>
+            </a:r>
+          </a:p>
+          <a:p>
+            <a:pPr lvl="0" indent="0" marL="0">
+              <a:buNone/>
+            </a:pPr>
+            <a:r>
+              <a:rPr/>
+              <a:t>@ 2026 </a:t>
+            </a:r>
+            <a:r>
+              <a:rPr>
+                <a:hlinkClick r:id="rId3"/>
+              </a:rPr>
+              <a:t>Stockholm University</a:t>
             </a:r>
           </a:p>
         </p:txBody>
@@ -11891,7 +11894,15 @@
             </a:pPr>
             <a:r>
               <a:rPr/>
-              <a:t>Didactics …</a:t>
+              <a:t>Your turn: What </a:t>
+            </a:r>
+            <a:r>
+              <a:rPr i="1"/>
+              <a:t>is</a:t>
+            </a:r>
+            <a:r>
+              <a:rPr/>
+              <a:t> learning?</a:t>
             </a:r>
           </a:p>
         </p:txBody>
@@ -11914,79 +11925,26 @@
             <a:pPr lvl="0" indent="0" marL="0">
               <a:buNone/>
             </a:pPr>
-          </a:p>
-          <a:p>
-            <a:pPr lvl="0" indent="0" marL="0">
-              <a:buNone/>
-            </a:pPr>
-            <a:r>
-              <a:rPr/>
-              <a:t>“…is the </a:t>
-            </a:r>
-            <a:r>
-              <a:rPr b="1"/>
-              <a:t>science of learning and teaching in general</a:t>
-            </a:r>
-            <a:r>
-              <a:rPr/>
-              <a:t>” (</a:t>
-            </a:r>
-            <a:r>
-              <a:rPr i="1"/>
-              <a:t>Dolch, 1967</a:t>
-            </a:r>
-            <a:r>
-              <a:rPr/>
-              <a:t>) “…includes </a:t>
-            </a:r>
-            <a:r>
-              <a:rPr b="1"/>
-              <a:t>teaching and learning strategies</a:t>
-            </a:r>
-            <a:r>
-              <a:rPr/>
-              <a:t> […] referring to the </a:t>
-            </a:r>
-            <a:r>
-              <a:rPr b="1"/>
-              <a:t>design</a:t>
-            </a:r>
-            <a:r>
-              <a:rPr/>
-              <a:t>, programming, elaboration and </a:t>
-            </a:r>
-            <a:r>
-              <a:rPr b="1"/>
-              <a:t>formulation</a:t>
-            </a:r>
-            <a:r>
-              <a:rPr/>
-              <a:t> of </a:t>
-            </a:r>
-            <a:r>
-              <a:rPr b="1"/>
-              <a:t>learning contents</a:t>
-            </a:r>
-            <a:r>
-              <a:rPr/>
-              <a:t> in verbal or written form.” (</a:t>
-            </a:r>
-            <a:r>
-              <a:rPr i="1"/>
-              <a:t>Casasola, 2020</a:t>
-            </a:r>
-            <a:r>
-              <a:rPr/>
-              <a:t>)</a:t>
-            </a:r>
-          </a:p>
-          <a:p>
-            <a:pPr lvl="0" indent="0" marL="0">
-              <a:buNone/>
-            </a:pPr>
-            <a:r>
-              <a:rPr/>
-              <a:t>[@casasolariveraPapelDidacticaProcesos2020] [@duitDidaktik2015] [@riskulovaTheRoleofDidactics2020]</a:t>
+            <a:r>
+              <a:rPr/>
+              <a:t>What do you </a:t>
+            </a:r>
+            <a:r>
+              <a:rPr b="1"/>
+              <a:t>connect</a:t>
+            </a:r>
+            <a:r>
+              <a:rPr/>
+              <a:t> with this concept? First thoughts? Assumptions? Expectations?</a:t>
+            </a:r>
+          </a:p>
+          <a:p>
+            <a:pPr lvl="0" indent="0" marL="0">
+              <a:buNone/>
+            </a:pPr>
+            <a:r>
+              <a:rPr/>
+              <a:t>ADD WORDCLOUD</a:t>
             </a:r>
           </a:p>
         </p:txBody>
@@ -12033,7 +11991,15 @@
             </a:pPr>
             <a:r>
               <a:rPr/>
-              <a:t>Didactics …</a:t>
+              <a:t>What </a:t>
+            </a:r>
+            <a:r>
+              <a:rPr i="1"/>
+              <a:t>is</a:t>
+            </a:r>
+            <a:r>
+              <a:rPr/>
+              <a:t> learning?</a:t>
             </a:r>
           </a:p>
         </p:txBody>
@@ -12056,61 +12022,75 @@
             <a:pPr lvl="0" indent="0" marL="0">
               <a:buNone/>
             </a:pPr>
-          </a:p>
-          <a:p>
-            <a:pPr lvl="0" indent="0" marL="0">
-              <a:buNone/>
-            </a:pPr>
-            <a:r>
-              <a:rPr/>
-              <a:t>“… encompasses questions about the </a:t>
-            </a:r>
-            <a:r>
-              <a:rPr b="1"/>
-              <a:t>selection of knowledge, teaching methods</a:t>
-            </a:r>
-            <a:r>
-              <a:rPr/>
-              <a:t>, and how learning takes place in different </a:t>
-            </a:r>
-            <a:r>
-              <a:rPr b="1"/>
-              <a:t>contexts</a:t>
-            </a:r>
-            <a:r>
-              <a:rPr/>
-              <a:t>. It can be seen as the </a:t>
-            </a:r>
-            <a:r>
-              <a:rPr b="1"/>
-              <a:t>planning, implementation, and analysis of teaching</a:t>
-            </a:r>
-            <a:r>
-              <a:rPr/>
-              <a:t>, with a particular focus on </a:t>
-            </a:r>
-            <a:r>
-              <a:rPr b="1"/>
-              <a:t>why certain objectives, content, and methods are chosen</a:t>
-            </a:r>
-            <a:r>
-              <a:rPr/>
-              <a:t>.”</a:t>
-            </a:r>
-          </a:p>
-          <a:p>
-            <a:pPr lvl="0" indent="0" marL="0">
-              <a:buNone/>
-            </a:pPr>
-            <a:r>
-              <a:rPr/>
-              <a:t>@ 2026 </a:t>
+            <a:r>
+              <a:rPr/>
+              <a:t> </a:t>
+            </a:r>
+          </a:p>
+          <a:p>
+            <a:pPr lvl="0" indent="0" marL="0">
+              <a:buNone/>
+            </a:pPr>
+            <a:r>
+              <a:rPr/>
+              <a:t>“…a </a:t>
+            </a:r>
+            <a:r>
+              <a:rPr b="1"/>
+              <a:t>process</a:t>
+            </a:r>
+            <a:r>
+              <a:rPr/>
+              <a:t> that leads to </a:t>
+            </a:r>
+            <a:r>
+              <a:rPr b="1"/>
+              <a:t>change</a:t>
+            </a:r>
+            <a:r>
+              <a:rPr/>
+              <a:t>, which occurs as a result of </a:t>
+            </a:r>
+            <a:r>
+              <a:rPr b="1"/>
+              <a:t>experience</a:t>
+            </a:r>
+            <a:r>
+              <a:rPr/>
+              <a:t> and increases the potential for improved performance and </a:t>
+            </a:r>
+            <a:r>
+              <a:rPr b="1"/>
+              <a:t>future learning</a:t>
+            </a:r>
+            <a:r>
+              <a:rPr/>
+              <a:t>”</a:t>
+            </a:r>
+          </a:p>
+          <a:p>
+            <a:pPr lvl="0" indent="0" marL="0">
+              <a:buNone/>
+            </a:pPr>
+            <a:r>
+              <a:rPr/>
+              <a:t>See Lovett et al. (2023). Slide adapted from Laura Carter: “Evidence-based Training” </a:t>
             </a:r>
             <a:r>
               <a:rPr>
                 <a:hlinkClick r:id="rId3"/>
               </a:rPr>
-              <a:t>Stockholm University</a:t>
+              <a:t>https://zenodo.org/records/18905547</a:t>
+            </a:r>
+            <a:r>
+              <a:rPr/>
+              <a:t>. Slide originally licensed under CC BY 4.0: </a:t>
+            </a:r>
+            <a:r>
+              <a:rPr>
+                <a:hlinkClick r:id="rId4"/>
+              </a:rPr>
+              <a:t>https://creativecommons.org/licenses/by/4.0/</a:t>
             </a:r>
           </a:p>
         </p:txBody>
@@ -12157,7 +12137,7 @@
             </a:pPr>
             <a:r>
               <a:rPr/>
-              <a:t>Your turn: What </a:t>
+              <a:t>What </a:t>
             </a:r>
             <a:r>
               <a:rPr i="1"/>
@@ -12185,249 +12165,6 @@
           <a:bodyPr/>
           <a:lstStyle/>
           <a:p>
-            <a:pPr lvl="0" indent="0" marL="0">
-              <a:buNone/>
-            </a:pPr>
-            <a:r>
-              <a:rPr/>
-              <a:t>What do you </a:t>
-            </a:r>
-            <a:r>
-              <a:rPr b="1"/>
-              <a:t>connect</a:t>
-            </a:r>
-            <a:r>
-              <a:rPr/>
-              <a:t> with this concept? First thoughts? Assumptions? Expectations?</a:t>
-            </a:r>
-          </a:p>
-          <a:p>
-            <a:pPr lvl="0" indent="0" marL="0">
-              <a:buNone/>
-            </a:pPr>
-            <a:r>
-              <a:rPr/>
-              <a:t>WORDCLOUD</a:t>
-            </a:r>
-          </a:p>
-        </p:txBody>
-      </p:sp>
-    </p:spTree>
-  </p:cSld>
-</p:sld>
-</file>
-
-<file path=ppt/slides/slide24.xml><?xml version="1.0" encoding="utf-8"?>
-<p:sld xmlns:a="http://schemas.openxmlformats.org/drawingml/2006/main" xmlns:r="http://schemas.openxmlformats.org/officeDocument/2006/relationships" xmlns:p="http://schemas.openxmlformats.org/presentationml/2006/main">
-  <p:cSld>
-    <p:spTree>
-      <p:nvGrpSpPr>
-        <p:cNvPr id="1" name=""/>
-        <p:cNvGrpSpPr/>
-        <p:nvPr/>
-      </p:nvGrpSpPr>
-      <p:grpSpPr>
-        <a:xfrm>
-          <a:off x="0" y="0"/>
-          <a:ext cx="0" cy="0"/>
-          <a:chOff x="0" y="0"/>
-          <a:chExt cx="0" cy="0"/>
-        </a:xfrm>
-      </p:grpSpPr>
-      <p:sp>
-        <p:nvSpPr>
-          <p:cNvPr id="2" name="Title 1"/>
-          <p:cNvSpPr>
-            <a:spLocks noGrp="1"/>
-          </p:cNvSpPr>
-          <p:nvPr>
-            <p:ph type="title"/>
-          </p:nvPr>
-        </p:nvSpPr>
-        <p:spPr/>
-        <p:txBody>
-          <a:bodyPr/>
-          <a:lstStyle/>
-          <a:p>
-            <a:pPr lvl="0" indent="0" marL="0">
-              <a:buNone/>
-            </a:pPr>
-            <a:r>
-              <a:rPr/>
-              <a:t>What </a:t>
-            </a:r>
-            <a:r>
-              <a:rPr i="1"/>
-              <a:t>is</a:t>
-            </a:r>
-            <a:r>
-              <a:rPr/>
-              <a:t> learning?</a:t>
-            </a:r>
-          </a:p>
-        </p:txBody>
-      </p:sp>
-      <p:sp>
-        <p:nvSpPr>
-          <p:cNvPr id="3" name="Content Placeholder 2"/>
-          <p:cNvSpPr>
-            <a:spLocks noGrp="1"/>
-          </p:cNvSpPr>
-          <p:nvPr>
-            <p:ph idx="1"/>
-          </p:nvPr>
-        </p:nvSpPr>
-        <p:spPr/>
-        <p:txBody>
-          <a:bodyPr/>
-          <a:lstStyle/>
-          <a:p>
-            <a:pPr lvl="0" indent="0" marL="0">
-              <a:buNone/>
-            </a:pPr>
-            <a:r>
-              <a:rPr/>
-              <a:t> </a:t>
-            </a:r>
-          </a:p>
-          <a:p>
-            <a:pPr lvl="0" indent="0" marL="0">
-              <a:buNone/>
-            </a:pPr>
-            <a:r>
-              <a:rPr/>
-              <a:t>“…a </a:t>
-            </a:r>
-            <a:r>
-              <a:rPr b="1"/>
-              <a:t>process</a:t>
-            </a:r>
-            <a:r>
-              <a:rPr/>
-              <a:t> that leads to </a:t>
-            </a:r>
-            <a:r>
-              <a:rPr b="1"/>
-              <a:t>change</a:t>
-            </a:r>
-            <a:r>
-              <a:rPr/>
-              <a:t>, which occurs as a result of </a:t>
-            </a:r>
-            <a:r>
-              <a:rPr b="1"/>
-              <a:t>experience</a:t>
-            </a:r>
-            <a:r>
-              <a:rPr/>
-              <a:t> and increases the potential for improved performance and </a:t>
-            </a:r>
-            <a:r>
-              <a:rPr b="1"/>
-              <a:t>future learning</a:t>
-            </a:r>
-            <a:r>
-              <a:rPr/>
-              <a:t>”</a:t>
-            </a:r>
-          </a:p>
-          <a:p>
-            <a:pPr lvl="0" indent="0" marL="0">
-              <a:buNone/>
-            </a:pPr>
-            <a:r>
-              <a:rPr/>
-              <a:t>Ambrose, S. A., Bridges, M. W., DiPietro, M., Lovett, M. C., Norman, M. K., &amp; Mayer, R. E. (2023), page 2-3. Slide adapted from Laura Carter: “Evidence-based Training” </a:t>
-            </a:r>
-            <a:r>
-              <a:rPr>
-                <a:hlinkClick r:id="rId3"/>
-              </a:rPr>
-              <a:t>https://zenodo.org/records/18905547</a:t>
-            </a:r>
-            <a:r>
-              <a:rPr/>
-              <a:t>. Slide originally licensed under CC BY 4.0: </a:t>
-            </a:r>
-            <a:r>
-              <a:rPr>
-                <a:hlinkClick r:id="rId4"/>
-              </a:rPr>
-              <a:t>https://creativecommons.org/licenses/by/4.0/</a:t>
-            </a:r>
-          </a:p>
-        </p:txBody>
-      </p:sp>
-    </p:spTree>
-  </p:cSld>
-</p:sld>
-</file>
-
-<file path=ppt/slides/slide25.xml><?xml version="1.0" encoding="utf-8"?>
-<p:sld xmlns:a="http://schemas.openxmlformats.org/drawingml/2006/main" xmlns:r="http://schemas.openxmlformats.org/officeDocument/2006/relationships" xmlns:p="http://schemas.openxmlformats.org/presentationml/2006/main">
-  <p:cSld>
-    <p:spTree>
-      <p:nvGrpSpPr>
-        <p:cNvPr id="1" name=""/>
-        <p:cNvGrpSpPr/>
-        <p:nvPr/>
-      </p:nvGrpSpPr>
-      <p:grpSpPr>
-        <a:xfrm>
-          <a:off x="0" y="0"/>
-          <a:ext cx="0" cy="0"/>
-          <a:chOff x="0" y="0"/>
-          <a:chExt cx="0" cy="0"/>
-        </a:xfrm>
-      </p:grpSpPr>
-      <p:sp>
-        <p:nvSpPr>
-          <p:cNvPr id="2" name="Title 1"/>
-          <p:cNvSpPr>
-            <a:spLocks noGrp="1"/>
-          </p:cNvSpPr>
-          <p:nvPr>
-            <p:ph type="title"/>
-          </p:nvPr>
-        </p:nvSpPr>
-        <p:spPr/>
-        <p:txBody>
-          <a:bodyPr/>
-          <a:lstStyle/>
-          <a:p>
-            <a:pPr lvl="0" indent="0" marL="0">
-              <a:buNone/>
-            </a:pPr>
-            <a:r>
-              <a:rPr/>
-              <a:t>What </a:t>
-            </a:r>
-            <a:r>
-              <a:rPr i="1"/>
-              <a:t>is</a:t>
-            </a:r>
-            <a:r>
-              <a:rPr/>
-              <a:t> learning?</a:t>
-            </a:r>
-          </a:p>
-        </p:txBody>
-      </p:sp>
-      <p:sp>
-        <p:nvSpPr>
-          <p:cNvPr id="3" name="Content Placeholder 2"/>
-          <p:cNvSpPr>
-            <a:spLocks noGrp="1"/>
-          </p:cNvSpPr>
-          <p:nvPr>
-            <p:ph idx="1"/>
-          </p:nvPr>
-        </p:nvSpPr>
-        <p:spPr/>
-        <p:txBody>
-          <a:bodyPr/>
-          <a:lstStyle/>
-          <a:p>
             <a:pPr lvl="0" indent="0" marL="1270000">
               <a:buNone/>
             </a:pPr>
@@ -12533,7 +12270,7 @@
             </a:pPr>
             <a:r>
               <a:rPr/>
-              <a:t>Ambrose, S. A., Bridges, M. W., DiPietro, M., Lovett, M. C., Norman, M. K., &amp; Mayer, R. E. (2023), page 2-3. Efgivia et al. (2023) Slide adapted from Laura Carter: “Evidence-based Training” </a:t>
+              <a:t>Efgivia et al. (2021), Lovett et al. (2023). Slide adapted from Laura Carter: “Evidence-based Training” </a:t>
             </a:r>
             <a:r>
               <a:rPr>
@@ -12837,7 +12574,7 @@
 </p:sld>
 </file>
 
-<file path=ppt/slides/slide26.xml><?xml version="1.0" encoding="utf-8"?>
+<file path=ppt/slides/slide24.xml><?xml version="1.0" encoding="utf-8"?>
 <p:sld xmlns:a="http://schemas.openxmlformats.org/drawingml/2006/main" xmlns:r="http://schemas.openxmlformats.org/officeDocument/2006/relationships" xmlns:p="http://schemas.openxmlformats.org/presentationml/2006/main">
   <p:cSld>
     <p:spTree>
@@ -13006,7 +12743,7 @@
             </a:pPr>
             <a:r>
               <a:rPr/>
-              <a:t>[@fosnotConstructivismTheoryPerspectives2013]</a:t>
+              <a:t>(Fosnot, 2013)</a:t>
             </a:r>
           </a:p>
         </p:txBody>
@@ -13245,7 +12982,7 @@
 </p:sld>
 </file>
 
-<file path=ppt/slides/slide27.xml><?xml version="1.0" encoding="utf-8"?>
+<file path=ppt/slides/slide25.xml><?xml version="1.0" encoding="utf-8"?>
 <p:sld xmlns:a="http://schemas.openxmlformats.org/drawingml/2006/main" xmlns:r="http://schemas.openxmlformats.org/officeDocument/2006/relationships" xmlns:p="http://schemas.openxmlformats.org/presentationml/2006/main">
   <p:cSld>
     <p:spTree>
@@ -13353,7 +13090,7 @@
 </p:sld>
 </file>
 
-<file path=ppt/slides/slide28.xml><?xml version="1.0" encoding="utf-8"?>
+<file path=ppt/slides/slide26.xml><?xml version="1.0" encoding="utf-8"?>
 <p:sld xmlns:a="http://schemas.openxmlformats.org/drawingml/2006/main" xmlns:r="http://schemas.openxmlformats.org/officeDocument/2006/relationships" xmlns:p="http://schemas.openxmlformats.org/presentationml/2006/main">
   <p:cSld>
     <p:spTree>
@@ -13497,7 +13234,7 @@
 </p:sld>
 </file>
 
-<file path=ppt/slides/slide29.xml><?xml version="1.0" encoding="utf-8"?>
+<file path=ppt/slides/slide27.xml><?xml version="1.0" encoding="utf-8"?>
 <p:sld xmlns:a="http://schemas.openxmlformats.org/drawingml/2006/main" xmlns:r="http://schemas.openxmlformats.org/officeDocument/2006/relationships" xmlns:p="http://schemas.openxmlformats.org/presentationml/2006/main">
   <p:cSld>
     <p:spTree>
@@ -13632,144 +13369,7 @@
 </p:sld>
 </file>
 
-<file path=ppt/slides/slide3.xml><?xml version="1.0" encoding="utf-8"?>
-<p:sld xmlns:a="http://schemas.openxmlformats.org/drawingml/2006/main" xmlns:r="http://schemas.openxmlformats.org/officeDocument/2006/relationships" xmlns:p="http://schemas.openxmlformats.org/presentationml/2006/main">
-  <p:cSld>
-    <p:spTree>
-      <p:nvGrpSpPr>
-        <p:cNvPr id="1" name=""/>
-        <p:cNvGrpSpPr/>
-        <p:nvPr/>
-      </p:nvGrpSpPr>
-      <p:grpSpPr>
-        <a:xfrm>
-          <a:off x="0" y="0"/>
-          <a:ext cx="0" cy="0"/>
-          <a:chOff x="0" y="0"/>
-          <a:chExt cx="0" cy="0"/>
-        </a:xfrm>
-      </p:grpSpPr>
-      <p:sp>
-        <p:nvSpPr>
-          <p:cNvPr id="2" name="Title 1"/>
-          <p:cNvSpPr>
-            <a:spLocks noGrp="1"/>
-          </p:cNvSpPr>
-          <p:nvPr>
-            <p:ph type="title"/>
-          </p:nvPr>
-        </p:nvSpPr>
-        <p:spPr/>
-        <p:txBody>
-          <a:bodyPr/>
-          <a:lstStyle/>
-          <a:p>
-            <a:pPr lvl="0" indent="0" marL="0">
-              <a:buNone/>
-            </a:pPr>
-            <a:r>
-              <a:rPr/>
-              <a:t>Contribution statement</a:t>
-            </a:r>
-          </a:p>
-        </p:txBody>
-      </p:sp>
-      <p:sp>
-        <p:nvSpPr>
-          <p:cNvPr id="3" name="Content Placeholder 2"/>
-          <p:cNvSpPr>
-            <a:spLocks noGrp="1"/>
-          </p:cNvSpPr>
-          <p:nvPr>
-            <p:ph idx="1"/>
-          </p:nvPr>
-        </p:nvSpPr>
-        <p:spPr/>
-        <p:txBody>
-          <a:bodyPr/>
-          <a:lstStyle/>
-          <a:p>
-            <a:pPr lvl="0" indent="0" marL="0">
-              <a:buNone/>
-            </a:pPr>
-          </a:p>
-          <a:p>
-            <a:pPr lvl="0" indent="0" marL="0">
-              <a:buNone/>
-            </a:pPr>
-            <a:r>
-              <a:rPr b="1"/>
-              <a:t>Creator</a:t>
-            </a:r>
-            <a:r>
-              <a:rPr/>
-              <a:t>: Von Grebmer zu Wolfsthurn, Sarah ( </a:t>
-            </a:r>
-            <a:r>
-              <a:rPr>
-                <a:hlinkClick r:id="rId3"/>
-              </a:rPr>
-              <a:t>0000-0002-6413-3895</a:t>
-            </a:r>
-            <a:r>
-              <a:rPr/>
-              <a:t>)</a:t>
-            </a:r>
-          </a:p>
-          <a:p>
-            <a:pPr lvl="0" indent="0" marL="0">
-              <a:buNone/>
-            </a:pPr>
-            <a:r>
-              <a:rPr b="1"/>
-              <a:t>Reviewer</a:t>
-            </a:r>
-            <a:r>
-              <a:rPr/>
-              <a:t>: Middleton, Sara (</a:t>
-            </a:r>
-            <a:r>
-              <a:rPr>
-                <a:hlinkClick r:id="rId4"/>
-              </a:rPr>
-              <a:t>0000-0001-5307-8029</a:t>
-            </a:r>
-            <a:r>
-              <a:rPr/>
-              <a:t>)</a:t>
-            </a:r>
-          </a:p>
-          <a:p>
-            <a:pPr lvl="0" indent="0" marL="0">
-              <a:buNone/>
-            </a:pPr>
-            <a:r>
-              <a:rPr b="1"/>
-              <a:t>Consultant</a:t>
-            </a:r>
-            <a:r>
-              <a:rPr/>
-              <a:t>: Ihle, Malika ( </a:t>
-            </a:r>
-            <a:r>
-              <a:rPr>
-                <a:hlinkClick r:id="rId5"/>
-              </a:rPr>
-              <a:t>0000-0002-3242-5981</a:t>
-            </a:r>
-            <a:r>
-              <a:rPr/>
-              <a:t>)</a:t>
-            </a:r>
-          </a:p>
-        </p:txBody>
-      </p:sp>
-    </p:spTree>
-  </p:cSld>
-</p:sld>
-</file>
-
-<file path=ppt/slides/slide30.xml><?xml version="1.0" encoding="utf-8"?>
+<file path=ppt/slides/slide28.xml><?xml version="1.0" encoding="utf-8"?>
 <p:sld xmlns:a="http://schemas.openxmlformats.org/drawingml/2006/main" xmlns:r="http://schemas.openxmlformats.org/officeDocument/2006/relationships" xmlns:p="http://schemas.openxmlformats.org/presentationml/2006/main">
   <p:cSld>
     <p:spTree>
@@ -13846,7 +13446,7 @@
 </p:sld>
 </file>
 
-<file path=ppt/slides/slide31.xml><?xml version="1.0" encoding="utf-8"?>
+<file path=ppt/slides/slide29.xml><?xml version="1.0" encoding="utf-8"?>
 <p:sld xmlns:a="http://schemas.openxmlformats.org/drawingml/2006/main" xmlns:r="http://schemas.openxmlformats.org/officeDocument/2006/relationships" xmlns:p="http://schemas.openxmlformats.org/presentationml/2006/main">
   <p:cSld>
     <p:spTree>
@@ -13904,7 +13504,7 @@
 </p:sld>
 </file>
 
-<file path=ppt/slides/slide32.xml><?xml version="1.0" encoding="utf-8"?>
+<file path=ppt/slides/slide3.xml><?xml version="1.0" encoding="utf-8"?>
 <p:sld xmlns:a="http://schemas.openxmlformats.org/drawingml/2006/main" xmlns:r="http://schemas.openxmlformats.org/officeDocument/2006/relationships" xmlns:p="http://schemas.openxmlformats.org/presentationml/2006/main">
   <p:cSld>
     <p:spTree>
@@ -13941,7 +13541,7 @@
             </a:pPr>
             <a:r>
               <a:rPr/>
-              <a:t>Example: A model of acquiring Open Access skills</a:t>
+              <a:t>Contribution statement</a:t>
             </a:r>
           </a:p>
         </p:txBody>
@@ -13964,108 +13564,74 @@
             <a:pPr lvl="0" indent="0" marL="0">
               <a:buNone/>
             </a:pPr>
-            <a:r>
-              <a:rPr/>
-              <a:t>Level</a:t>
-            </a:r>
-          </a:p>
-          <a:p>
-            <a:pPr lvl="0" indent="0" marL="0">
-              <a:buNone/>
-            </a:pPr>
-            <a:r>
-              <a:rPr/>
-              <a:t>Can do✅</a:t>
-            </a:r>
-          </a:p>
-          <a:p>
-            <a:pPr lvl="0" indent="0" marL="0">
-              <a:buNone/>
-            </a:pPr>
-            <a:r>
-              <a:rPr/>
-              <a:t>Cannot (yet) do❌</a:t>
-            </a:r>
-          </a:p>
-          <a:p>
-            <a:pPr lvl="0" indent="0" marL="0">
-              <a:buNone/>
-            </a:pPr>
-            <a:r>
-              <a:rPr/>
-              <a:t>Novice learner</a:t>
-            </a:r>
-          </a:p>
-          <a:p>
-            <a:pPr lvl="0" indent="0" marL="0">
-              <a:buNone/>
-            </a:pPr>
-            <a:r>
-              <a:rPr/>
-              <a:t>Recognize that Open Access and publishing licenses exist</a:t>
-            </a:r>
-          </a:p>
-          <a:p>
-            <a:pPr lvl="0" indent="0" marL="0">
-              <a:buNone/>
-            </a:pPr>
-            <a:r>
-              <a:rPr/>
-              <a:t>Identify different publishing licenses or explain their effects on authors and readers</a:t>
-            </a:r>
-          </a:p>
-          <a:p>
-            <a:pPr lvl="0" indent="0" marL="0">
-              <a:buNone/>
-            </a:pPr>
-            <a:r>
-              <a:rPr/>
-              <a:t>Competent practitioner</a:t>
-            </a:r>
-          </a:p>
-          <a:p>
-            <a:pPr lvl="0" indent="0" marL="0">
-              <a:buNone/>
-            </a:pPr>
-            <a:r>
-              <a:rPr/>
-              <a:t>Publish papers Open Access and apply open licenses (e.g., Creative Commons)</a:t>
-            </a:r>
-          </a:p>
-          <a:p>
-            <a:pPr lvl="0" indent="0" marL="0">
-              <a:buNone/>
-            </a:pPr>
-            <a:r>
-              <a:rPr/>
-              <a:t>Explain in-depth differences between Gold, Green, and Diamond OA or navigate complex copyright and licensing issues</a:t>
-            </a:r>
-          </a:p>
-          <a:p>
-            <a:pPr lvl="0" indent="0" marL="0">
-              <a:buNone/>
-            </a:pPr>
-            <a:r>
-              <a:rPr/>
-              <a:t>Expert</a:t>
-            </a:r>
-          </a:p>
-          <a:p>
-            <a:pPr lvl="0" indent="0" marL="0">
-              <a:buNone/>
-            </a:pPr>
-            <a:r>
-              <a:rPr/>
-              <a:t>Strategically select and apply Open Access routes (Gold, Green, Diamond); choose Creative Commons licenses based on reuse goals; support and train others</a:t>
-            </a:r>
-          </a:p>
-          <a:p>
-            <a:pPr lvl="0" indent="0" marL="0">
-              <a:buNone/>
-            </a:pPr>
-            <a:r>
-              <a:rPr/>
-              <a:t>—</a:t>
+          </a:p>
+          <a:p>
+            <a:pPr lvl="0" indent="0" marL="0">
+              <a:buNone/>
+            </a:pPr>
+            <a:r>
+              <a:rPr b="1"/>
+              <a:t>Creator</a:t>
+            </a:r>
+            <a:r>
+              <a:rPr/>
+              <a:t>: Von Grebmer zu Wolfsthurn, Sarah ( </a:t>
+            </a:r>
+            <a:r>
+              <a:rPr>
+                <a:hlinkClick r:id="rId3"/>
+              </a:rPr>
+              <a:t>0000-0002-6413-3895</a:t>
+            </a:r>
+            <a:r>
+              <a:rPr/>
+              <a:t>)</a:t>
+            </a:r>
+          </a:p>
+          <a:p>
+            <a:pPr lvl="0" indent="0" marL="0">
+              <a:buNone/>
+            </a:pPr>
+            <a:r>
+              <a:rPr b="1"/>
+              <a:t>Reviewer</a:t>
+            </a:r>
+            <a:r>
+              <a:rPr/>
+              <a:t>: Middleton, Sara (</a:t>
+            </a:r>
+            <a:r>
+              <a:rPr>
+                <a:hlinkClick r:id="rId4"/>
+              </a:rPr>
+              <a:t>0000-0001-5307-8029</a:t>
+            </a:r>
+            <a:r>
+              <a:rPr/>
+              <a:t>)</a:t>
+            </a:r>
+          </a:p>
+          <a:p>
+            <a:pPr lvl="0" indent="0" marL="0">
+              <a:buNone/>
+            </a:pPr>
+            <a:r>
+              <a:rPr b="1"/>
+              <a:t>Consultant</a:t>
+            </a:r>
+            <a:r>
+              <a:rPr/>
+              <a:t>: Ihle, Malika ( </a:t>
+            </a:r>
+            <a:r>
+              <a:rPr>
+                <a:hlinkClick r:id="rId5"/>
+              </a:rPr>
+              <a:t>0000-0002-3242-5981</a:t>
+            </a:r>
+            <a:r>
+              <a:rPr/>
+              <a:t>)</a:t>
             </a:r>
           </a:p>
         </p:txBody>
@@ -14075,7 +13641,165 @@
 </p:sld>
 </file>
 
-<file path=ppt/slides/slide33.xml><?xml version="1.0" encoding="utf-8"?>
+<file path=ppt/slides/slide30.xml><?xml version="1.0" encoding="utf-8"?>
+<p:sld xmlns:a="http://schemas.openxmlformats.org/drawingml/2006/main" xmlns:r="http://schemas.openxmlformats.org/officeDocument/2006/relationships" xmlns:p="http://schemas.openxmlformats.org/presentationml/2006/main">
+  <p:cSld>
+    <p:spTree>
+      <p:nvGrpSpPr>
+        <p:cNvPr id="1" name=""/>
+        <p:cNvGrpSpPr/>
+        <p:nvPr/>
+      </p:nvGrpSpPr>
+      <p:grpSpPr>
+        <a:xfrm>
+          <a:off x="0" y="0"/>
+          <a:ext cx="0" cy="0"/>
+          <a:chOff x="0" y="0"/>
+          <a:chExt cx="0" cy="0"/>
+        </a:xfrm>
+      </p:grpSpPr>
+      <p:sp>
+        <p:nvSpPr>
+          <p:cNvPr id="3" name="Content Placeholder 2"/>
+          <p:cNvSpPr>
+            <a:spLocks noGrp="1"/>
+          </p:cNvSpPr>
+          <p:nvPr>
+            <p:ph idx="1"/>
+          </p:nvPr>
+        </p:nvSpPr>
+        <p:spPr/>
+        <p:txBody>
+          <a:bodyPr/>
+          <a:lstStyle/>
+          <a:p>
+            <a:pPr lvl="0" indent="0" marL="0">
+              <a:spcBef>
+                <a:spcPts val="3000"/>
+              </a:spcBef>
+              <a:buNone/>
+            </a:pPr>
+            <a:r>
+              <a:rPr b="1"/>
+              <a:t>Example: A model of acquiring Open Access skills</a:t>
+            </a:r>
+          </a:p>
+          <a:p>
+            <a:pPr lvl="0" indent="0" marL="0">
+              <a:buNone/>
+            </a:pPr>
+            <a:r>
+              <a:rPr/>
+              <a:t>Level</a:t>
+            </a:r>
+          </a:p>
+          <a:p>
+            <a:pPr lvl="0" indent="0" marL="0">
+              <a:buNone/>
+            </a:pPr>
+            <a:r>
+              <a:rPr/>
+              <a:t>Can do✅</a:t>
+            </a:r>
+          </a:p>
+          <a:p>
+            <a:pPr lvl="0" indent="0" marL="0">
+              <a:buNone/>
+            </a:pPr>
+            <a:r>
+              <a:rPr/>
+              <a:t>Cannot (yet) do❌</a:t>
+            </a:r>
+          </a:p>
+          <a:p>
+            <a:pPr lvl="0" indent="0" marL="0">
+              <a:buNone/>
+            </a:pPr>
+            <a:r>
+              <a:rPr/>
+              <a:t>Novice learner</a:t>
+            </a:r>
+          </a:p>
+          <a:p>
+            <a:pPr lvl="0" indent="0" marL="0">
+              <a:buNone/>
+            </a:pPr>
+            <a:r>
+              <a:rPr/>
+              <a:t>Recognize that Open Access and publishing licenses exist</a:t>
+            </a:r>
+          </a:p>
+          <a:p>
+            <a:pPr lvl="0" indent="0" marL="0">
+              <a:buNone/>
+            </a:pPr>
+            <a:r>
+              <a:rPr/>
+              <a:t>Identify different publishing licenses or explain their effects on authors and readers</a:t>
+            </a:r>
+          </a:p>
+          <a:p>
+            <a:pPr lvl="0" indent="0" marL="0">
+              <a:buNone/>
+            </a:pPr>
+            <a:r>
+              <a:rPr/>
+              <a:t>Competent practitioner</a:t>
+            </a:r>
+          </a:p>
+          <a:p>
+            <a:pPr lvl="0" indent="0" marL="0">
+              <a:buNone/>
+            </a:pPr>
+            <a:r>
+              <a:rPr/>
+              <a:t>Publish papers Open Access and apply open licenses (e.g., Creative Commons)</a:t>
+            </a:r>
+          </a:p>
+          <a:p>
+            <a:pPr lvl="0" indent="0" marL="0">
+              <a:buNone/>
+            </a:pPr>
+            <a:r>
+              <a:rPr/>
+              <a:t>Explain in-depth differences between Gold, Green, and Diamond OA or navigate complex copyright and licensing issues</a:t>
+            </a:r>
+          </a:p>
+          <a:p>
+            <a:pPr lvl="0" indent="0" marL="0">
+              <a:buNone/>
+            </a:pPr>
+            <a:r>
+              <a:rPr/>
+              <a:t>Expert</a:t>
+            </a:r>
+          </a:p>
+          <a:p>
+            <a:pPr lvl="0" indent="0" marL="0">
+              <a:buNone/>
+            </a:pPr>
+            <a:r>
+              <a:rPr/>
+              <a:t>Strategically select and apply Open Access routes (Gold, Green, Diamond); choose Creative Commons licenses based on reuse goals; support and train others</a:t>
+            </a:r>
+          </a:p>
+          <a:p>
+            <a:pPr lvl="0" indent="0" marL="0">
+              <a:buNone/>
+            </a:pPr>
+            <a:r>
+              <a:rPr/>
+              <a:t>—</a:t>
+            </a:r>
+          </a:p>
+        </p:txBody>
+      </p:sp>
+    </p:spTree>
+  </p:cSld>
+</p:sld>
+</file>
+
+<file path=ppt/slides/slide31.xml><?xml version="1.0" encoding="utf-8"?>
 <p:sld xmlns:a="http://schemas.openxmlformats.org/drawingml/2006/main" xmlns:r="http://schemas.openxmlformats.org/officeDocument/2006/relationships" xmlns:p="http://schemas.openxmlformats.org/presentationml/2006/main">
   <p:cSld>
     <p:spTree>
@@ -14152,7 +13876,7 @@
 </p:sld>
 </file>
 
-<file path=ppt/slides/slide34.xml><?xml version="1.0" encoding="utf-8"?>
+<file path=ppt/slides/slide32.xml><?xml version="1.0" encoding="utf-8"?>
 <p:sld xmlns:a="http://schemas.openxmlformats.org/drawingml/2006/main" xmlns:r="http://schemas.openxmlformats.org/officeDocument/2006/relationships" xmlns:p="http://schemas.openxmlformats.org/presentationml/2006/main">
   <p:cSld>
     <p:spTree>
@@ -14210,7 +13934,7 @@
 </p:sld>
 </file>
 
-<file path=ppt/slides/slide35.xml><?xml version="1.0" encoding="utf-8"?>
+<file path=ppt/slides/slide33.xml><?xml version="1.0" encoding="utf-8"?>
 <p:sld xmlns:a="http://schemas.openxmlformats.org/drawingml/2006/main" xmlns:r="http://schemas.openxmlformats.org/officeDocument/2006/relationships" xmlns:p="http://schemas.openxmlformats.org/presentationml/2006/main">
   <p:cSld>
     <p:spTree>
@@ -14281,7 +14005,15 @@
             </a:r>
             <a:r>
               <a:rPr/>
-              <a:t> from open research (different from open access).</a:t>
+              <a:t> from open research (</a:t>
+            </a:r>
+            <a:r>
+              <a:rPr i="1"/>
+              <a:t>different from open access</a:t>
+            </a:r>
+            <a:r>
+              <a:rPr/>
+              <a:t>).</a:t>
             </a:r>
           </a:p>
           <a:p>
@@ -14317,7 +14049,7 @@
 </p:sld>
 </file>
 
-<file path=ppt/slides/slide36.xml><?xml version="1.0" encoding="utf-8"?>
+<file path=ppt/slides/slide34.xml><?xml version="1.0" encoding="utf-8"?>
 <p:sld xmlns:a="http://schemas.openxmlformats.org/drawingml/2006/main" xmlns:r="http://schemas.openxmlformats.org/officeDocument/2006/relationships" xmlns:p="http://schemas.openxmlformats.org/presentationml/2006/main">
   <p:cSld>
     <p:spTree>
@@ -14685,6 +14417,195 @@
 </p:sld>
 </file>
 
+<file path=ppt/slides/slide35.xml><?xml version="1.0" encoding="utf-8"?>
+<p:sld xmlns:a="http://schemas.openxmlformats.org/drawingml/2006/main" xmlns:r="http://schemas.openxmlformats.org/officeDocument/2006/relationships" xmlns:p="http://schemas.openxmlformats.org/presentationml/2006/main">
+  <p:cSld>
+    <p:spTree>
+      <p:nvGrpSpPr>
+        <p:cNvPr id="1" name=""/>
+        <p:cNvGrpSpPr/>
+        <p:nvPr/>
+      </p:nvGrpSpPr>
+      <p:grpSpPr>
+        <a:xfrm>
+          <a:off x="0" y="0"/>
+          <a:ext cx="0" cy="0"/>
+          <a:chOff x="0" y="0"/>
+          <a:chExt cx="0" cy="0"/>
+        </a:xfrm>
+      </p:grpSpPr>
+      <p:sp>
+        <p:nvSpPr>
+          <p:cNvPr id="2" name="Title 1"/>
+          <p:cNvSpPr>
+            <a:spLocks noGrp="1"/>
+          </p:cNvSpPr>
+          <p:nvPr>
+            <p:ph type="title"/>
+          </p:nvPr>
+        </p:nvSpPr>
+        <p:spPr/>
+        <p:txBody>
+          <a:bodyPr/>
+          <a:lstStyle/>
+          <a:p>
+            <a:pPr lvl="0" indent="0" marL="0">
+              <a:buNone/>
+            </a:pPr>
+            <a:r>
+              <a:rPr/>
+              <a:t>What would help you organize your knowledge?</a:t>
+            </a:r>
+          </a:p>
+        </p:txBody>
+      </p:sp>
+      <p:sp>
+        <p:nvSpPr>
+          <p:cNvPr id="3" name="Content Placeholder 2"/>
+          <p:cNvSpPr>
+            <a:spLocks noGrp="1"/>
+          </p:cNvSpPr>
+          <p:nvPr>
+            <p:ph idx="1"/>
+          </p:nvPr>
+        </p:nvSpPr>
+        <p:spPr/>
+        <p:txBody>
+          <a:bodyPr/>
+          <a:lstStyle/>
+          <a:p>
+            <a:pPr lvl="0" indent="0" marL="0">
+              <a:buNone/>
+            </a:pPr>
+            <a:r>
+              <a:rPr/>
+              <a:t>Is there something that you are </a:t>
+            </a:r>
+            <a:r>
+              <a:rPr b="1"/>
+              <a:t>currently learning how to do</a:t>
+            </a:r>
+            <a:r>
+              <a:rPr/>
+              <a:t>?</a:t>
+            </a:r>
+          </a:p>
+          <a:p>
+            <a:pPr lvl="0" indent="0" marL="0">
+              <a:buNone/>
+            </a:pPr>
+            <a:r>
+              <a:rPr/>
+              <a:t>Can you identify things that would help you with </a:t>
+            </a:r>
+            <a:r>
+              <a:rPr b="1"/>
+              <a:t>organizing your mental model</a:t>
+            </a:r>
+            <a:r>
+              <a:rPr/>
+              <a:t> in a course or workshop?</a:t>
+            </a:r>
+          </a:p>
+        </p:txBody>
+      </p:sp>
+    </p:spTree>
+  </p:cSld>
+</p:sld>
+</file>
+
+<file path=ppt/slides/slide36.xml><?xml version="1.0" encoding="utf-8"?>
+<p:sld xmlns:a="http://schemas.openxmlformats.org/drawingml/2006/main" xmlns:r="http://schemas.openxmlformats.org/officeDocument/2006/relationships" xmlns:p="http://schemas.openxmlformats.org/presentationml/2006/main">
+  <p:cSld>
+    <p:spTree>
+      <p:nvGrpSpPr>
+        <p:cNvPr id="1" name=""/>
+        <p:cNvGrpSpPr/>
+        <p:nvPr/>
+      </p:nvGrpSpPr>
+      <p:grpSpPr>
+        <a:xfrm>
+          <a:off x="0" y="0"/>
+          <a:ext cx="0" cy="0"/>
+          <a:chOff x="0" y="0"/>
+          <a:chExt cx="0" cy="0"/>
+        </a:xfrm>
+      </p:grpSpPr>
+      <p:sp>
+        <p:nvSpPr>
+          <p:cNvPr id="3" name="Content Placeholder 2"/>
+          <p:cNvSpPr>
+            <a:spLocks noGrp="1"/>
+          </p:cNvSpPr>
+          <p:nvPr>
+            <p:ph idx="1" sz="half"/>
+          </p:nvPr>
+        </p:nvSpPr>
+        <p:spPr/>
+        <p:txBody>
+          <a:bodyPr/>
+          <a:lstStyle/>
+          <a:p>
+            <a:pPr lvl="0" indent="0" marL="0">
+              <a:spcBef>
+                <a:spcPts val="3000"/>
+              </a:spcBef>
+              <a:buNone/>
+            </a:pPr>
+            <a:r>
+              <a:rPr b="1"/>
+              <a:t>Think (2 min)</a:t>
+            </a:r>
+          </a:p>
+          <a:p>
+            <a:pPr lvl="0"/>
+            <a:r>
+              <a:rPr/>
+              <a:t>For yourself: Collect some thoughts for yourself.</a:t>
+            </a:r>
+          </a:p>
+        </p:txBody>
+      </p:sp>
+      <p:sp>
+        <p:nvSpPr>
+          <p:cNvPr id="4" name="Content Placeholder 3"/>
+          <p:cNvSpPr>
+            <a:spLocks noGrp="1"/>
+          </p:cNvSpPr>
+          <p:nvPr>
+            <p:ph idx="2" sz="half"/>
+          </p:nvPr>
+        </p:nvSpPr>
+        <p:spPr/>
+        <p:txBody>
+          <a:bodyPr/>
+          <a:lstStyle/>
+          <a:p>
+            <a:pPr lvl="0" indent="0" marL="0">
+              <a:spcBef>
+                <a:spcPts val="3000"/>
+              </a:spcBef>
+              <a:buNone/>
+            </a:pPr>
+            <a:r>
+              <a:rPr b="1"/>
+              <a:t>Pair (2 min)</a:t>
+            </a:r>
+          </a:p>
+          <a:p>
+            <a:pPr lvl="0"/>
+            <a:r>
+              <a:rPr/>
+              <a:t>Discuss your  thoughts with your neighbor.</a:t>
+            </a:r>
+          </a:p>
+        </p:txBody>
+      </p:sp>
+    </p:spTree>
+  </p:cSld>
+</p:sld>
+</file>
+
 <file path=ppt/slides/slide37.xml><?xml version="1.0" encoding="utf-8"?>
 <p:sld xmlns:a="http://schemas.openxmlformats.org/drawingml/2006/main" xmlns:r="http://schemas.openxmlformats.org/officeDocument/2006/relationships" xmlns:p="http://schemas.openxmlformats.org/presentationml/2006/main">
   <p:cSld>
@@ -14704,154 +14625,30 @@
       </p:grpSpPr>
       <p:sp>
         <p:nvSpPr>
-          <p:cNvPr id="2" name="Title 1"/>
-          <p:cNvSpPr>
-            <a:spLocks noGrp="1"/>
-          </p:cNvSpPr>
-          <p:nvPr>
-            <p:ph type="title"/>
-          </p:nvPr>
-        </p:nvSpPr>
-        <p:spPr/>
-        <p:txBody>
-          <a:bodyPr/>
-          <a:lstStyle/>
-          <a:p>
-            <a:pPr lvl="0" indent="0" marL="0">
-              <a:buNone/>
-            </a:pPr>
-            <a:r>
-              <a:rPr/>
-              <a:t>What would help you organize your knowledge?</a:t>
-            </a:r>
-          </a:p>
-        </p:txBody>
-      </p:sp>
-      <p:sp>
-        <p:nvSpPr>
-          <p:cNvPr id="3" name="Content Placeholder 2"/>
-          <p:cNvSpPr>
-            <a:spLocks noGrp="1"/>
-          </p:cNvSpPr>
-          <p:nvPr>
-            <p:ph idx="1"/>
-          </p:nvPr>
-        </p:nvSpPr>
-        <p:spPr/>
-        <p:txBody>
-          <a:bodyPr/>
-          <a:lstStyle/>
-          <a:p>
-            <a:pPr lvl="0" indent="0" marL="0">
-              <a:buNone/>
-            </a:pPr>
-            <a:r>
-              <a:rPr/>
-              <a:t> </a:t>
-            </a:r>
-          </a:p>
-          <a:p>
-            <a:pPr lvl="0" indent="0" marL="0">
-              <a:buNone/>
-            </a:pPr>
-            <a:r>
-              <a:rPr/>
-              <a:t>Is there something that you are </a:t>
-            </a:r>
-            <a:r>
-              <a:rPr b="1"/>
-              <a:t>currently learning how to do</a:t>
-            </a:r>
-            <a:r>
-              <a:rPr/>
-              <a:t>?</a:t>
-            </a:r>
-          </a:p>
-          <a:p>
-            <a:pPr lvl="0" indent="0" marL="0">
-              <a:buNone/>
-            </a:pPr>
-            <a:r>
-              <a:rPr/>
-              <a:t>Can you identify things that would help you with </a:t>
-            </a:r>
-            <a:r>
-              <a:rPr b="1"/>
-              <a:t>organizing your mental model</a:t>
-            </a:r>
-            <a:r>
-              <a:rPr/>
-              <a:t> in a course or workshop?</a:t>
-            </a:r>
-          </a:p>
-        </p:txBody>
-      </p:sp>
-    </p:spTree>
-  </p:cSld>
-</p:sld>
-</file>
-
-<file path=ppt/slides/slide38.xml><?xml version="1.0" encoding="utf-8"?>
-<p:sld xmlns:a="http://schemas.openxmlformats.org/drawingml/2006/main" xmlns:r="http://schemas.openxmlformats.org/officeDocument/2006/relationships" xmlns:p="http://schemas.openxmlformats.org/presentationml/2006/main">
-  <p:cSld>
-    <p:spTree>
-      <p:nvGrpSpPr>
-        <p:cNvPr id="1" name=""/>
-        <p:cNvGrpSpPr/>
-        <p:nvPr/>
-      </p:nvGrpSpPr>
-      <p:grpSpPr>
-        <a:xfrm>
-          <a:off x="0" y="0"/>
-          <a:ext cx="0" cy="0"/>
-          <a:chOff x="0" y="0"/>
-          <a:chExt cx="0" cy="0"/>
-        </a:xfrm>
-      </p:grpSpPr>
-      <p:sp>
-        <p:nvSpPr>
-          <p:cNvPr id="2" name="Title 1"/>
-          <p:cNvSpPr>
-            <a:spLocks noGrp="1"/>
-          </p:cNvSpPr>
-          <p:nvPr>
-            <p:ph type="title"/>
-          </p:nvPr>
-        </p:nvSpPr>
-        <p:spPr>
-          <a:xfrm>
-            <a:off x="457201" y="204787"/>
-            <a:ext cx="3008313" cy="871538"/>
-          </a:xfrm>
-        </p:spPr>
-        <p:txBody>
-          <a:bodyPr/>
-          <a:lstStyle/>
-          <a:p>
-            <a:pPr lvl="0" indent="0" marL="0">
-              <a:buNone/>
-            </a:pPr>
-            <a:r>
-              <a:rPr/>
+          <p:cNvPr id="4" name="Text Placeholder 3"/>
+          <p:cNvSpPr>
+            <a:spLocks noGrp="1"/>
+          </p:cNvSpPr>
+          <p:nvPr>
+            <p:ph idx="2" sz="half" type="body"/>
+          </p:nvPr>
+        </p:nvSpPr>
+        <p:spPr/>
+        <p:txBody>
+          <a:bodyPr/>
+          <a:lstStyle/>
+          <a:p>
+            <a:pPr lvl="0" indent="0" marL="0">
+              <a:spcBef>
+                <a:spcPts val="3000"/>
+              </a:spcBef>
+              <a:buNone/>
+            </a:pPr>
+            <a:r>
+              <a:rPr b="1"/>
               <a:t>Enhancing the organization of knowledge</a:t>
             </a:r>
           </a:p>
-        </p:txBody>
-      </p:sp>
-      <p:sp>
-        <p:nvSpPr>
-          <p:cNvPr id="4" name="Text Placeholder 3"/>
-          <p:cNvSpPr>
-            <a:spLocks noGrp="1"/>
-          </p:cNvSpPr>
-          <p:nvPr>
-            <p:ph idx="2" sz="half" type="body"/>
-          </p:nvPr>
-        </p:nvSpPr>
-        <p:spPr/>
-        <p:txBody>
-          <a:bodyPr/>
-          <a:lstStyle/>
           <a:p>
             <a:pPr lvl="0" indent="0" marL="0">
               <a:buNone/>
@@ -15044,7 +14841,7 @@
                                         <p:tgtEl>
                                           <p:spTgt spid="4">
                                             <p:txEl>
-                                              <p:pRg st="1" end="1"/>
+                                              <p:pRg st="2" end="2"/>
                                             </p:txEl>
                                           </p:spTgt>
                                         </p:tgtEl>
@@ -15093,7 +14890,7 @@
                                         <p:tgtEl>
                                           <p:spTgt spid="4">
                                             <p:txEl>
-                                              <p:pRg st="2" end="2"/>
+                                              <p:pRg st="3" end="3"/>
                                             </p:txEl>
                                           </p:spTgt>
                                         </p:tgtEl>
@@ -15142,7 +14939,7 @@
                                         <p:tgtEl>
                                           <p:spTgt spid="4">
                                             <p:txEl>
-                                              <p:pRg st="3" end="3"/>
+                                              <p:pRg st="4" end="4"/>
                                             </p:txEl>
                                           </p:spTgt>
                                         </p:tgtEl>
@@ -15191,7 +14988,7 @@
                                         <p:tgtEl>
                                           <p:spTgt spid="4">
                                             <p:txEl>
-                                              <p:pRg st="4" end="4"/>
+                                              <p:pRg st="5" end="5"/>
                                             </p:txEl>
                                           </p:spTgt>
                                         </p:tgtEl>
@@ -15240,7 +15037,7 @@
                                         <p:tgtEl>
                                           <p:spTgt spid="4">
                                             <p:txEl>
-                                              <p:pRg st="5" end="5"/>
+                                              <p:pRg st="6" end="6"/>
                                             </p:txEl>
                                           </p:spTgt>
                                         </p:tgtEl>
@@ -15289,7 +15086,7 @@
                                         <p:tgtEl>
                                           <p:spTgt spid="4">
                                             <p:txEl>
-                                              <p:pRg st="6" end="6"/>
+                                              <p:pRg st="7" end="7"/>
                                             </p:txEl>
                                           </p:spTgt>
                                         </p:tgtEl>
@@ -15338,7 +15135,7 @@
                                         <p:tgtEl>
                                           <p:spTgt spid="4">
                                             <p:txEl>
-                                              <p:pRg st="7" end="7"/>
+                                              <p:pRg st="8" end="8"/>
                                             </p:txEl>
                                           </p:spTgt>
                                         </p:tgtEl>
@@ -15387,7 +15184,7 @@
 </p:sld>
 </file>
 
-<file path=ppt/slides/slide39.xml><?xml version="1.0" encoding="utf-8"?>
+<file path=ppt/slides/slide38.xml><?xml version="1.0" encoding="utf-8"?>
 <p:sld xmlns:a="http://schemas.openxmlformats.org/drawingml/2006/main" xmlns:r="http://schemas.openxmlformats.org/officeDocument/2006/relationships" xmlns:p="http://schemas.openxmlformats.org/presentationml/2006/main">
   <p:cSld>
     <p:spTree>
@@ -15510,6 +15307,53 @@
 </p:sld>
 </file>
 
+<file path=ppt/slides/slide39.xml><?xml version="1.0" encoding="utf-8"?>
+<p:sld xmlns:a="http://schemas.openxmlformats.org/drawingml/2006/main" xmlns:r="http://schemas.openxmlformats.org/officeDocument/2006/relationships" xmlns:p="http://schemas.openxmlformats.org/presentationml/2006/main">
+  <p:cSld>
+    <p:spTree>
+      <p:nvGrpSpPr>
+        <p:cNvPr id="1" name=""/>
+        <p:cNvGrpSpPr/>
+        <p:nvPr/>
+      </p:nvGrpSpPr>
+      <p:grpSpPr>
+        <a:xfrm>
+          <a:off x="0" y="0"/>
+          <a:ext cx="0" cy="0"/>
+          <a:chOff x="0" y="0"/>
+          <a:chExt cx="0" cy="0"/>
+        </a:xfrm>
+      </p:grpSpPr>
+      <p:sp>
+        <p:nvSpPr>
+          <p:cNvPr id="3" name="Content Placeholder 2"/>
+          <p:cNvSpPr>
+            <a:spLocks noGrp="1"/>
+          </p:cNvSpPr>
+          <p:nvPr>
+            <p:ph idx="1"/>
+          </p:nvPr>
+        </p:nvSpPr>
+        <p:spPr/>
+        <p:txBody>
+          <a:bodyPr/>
+          <a:lstStyle/>
+          <a:p>
+            <a:pPr lvl="0" indent="0" marL="0">
+              <a:buNone/>
+            </a:pPr>
+            <a:r>
+              <a:rPr/>
+              <a:t>Biggs (1996)</a:t>
+            </a:r>
+          </a:p>
+        </p:txBody>
+      </p:sp>
+    </p:spTree>
+  </p:cSld>
+</p:sld>
+</file>
+
 <file path=ppt/slides/slide4.xml><?xml version="1.0" encoding="utf-8"?>
 <p:sld xmlns:a="http://schemas.openxmlformats.org/drawingml/2006/main" xmlns:r="http://schemas.openxmlformats.org/officeDocument/2006/relationships" xmlns:p="http://schemas.openxmlformats.org/presentationml/2006/main">
   <p:cSld>
@@ -15610,6 +15454,31 @@
       </p:grpSpPr>
       <p:sp>
         <p:nvSpPr>
+          <p:cNvPr id="2" name="Title 1"/>
+          <p:cNvSpPr>
+            <a:spLocks noGrp="1"/>
+          </p:cNvSpPr>
+          <p:nvPr>
+            <p:ph type="title"/>
+          </p:nvPr>
+        </p:nvSpPr>
+        <p:spPr/>
+        <p:txBody>
+          <a:bodyPr/>
+          <a:lstStyle/>
+          <a:p>
+            <a:pPr lvl="0" indent="0" marL="0">
+              <a:buNone/>
+            </a:pPr>
+            <a:r>
+              <a:rPr/>
+              <a:t>Your turn! 5 minutes</a:t>
+            </a:r>
+          </a:p>
+        </p:txBody>
+      </p:sp>
+      <p:sp>
+        <p:nvSpPr>
           <p:cNvPr id="3" name="Content Placeholder 2"/>
           <p:cNvSpPr>
             <a:spLocks noGrp="1"/>
@@ -15626,9 +15495,44 @@
             <a:pPr lvl="0" indent="0" marL="0">
               <a:buNone/>
             </a:pPr>
-            <a:r>
-              <a:rPr/>
-              <a:t>Biggs, 1996</a:t>
+          </a:p>
+          <a:p>
+            <a:pPr lvl="0" indent="0" marL="0">
+              <a:buNone/>
+            </a:pPr>
+            <a:r>
+              <a:rPr/>
+              <a:t>Match each </a:t>
+            </a:r>
+            <a:r>
+              <a:rPr b="1"/>
+              <a:t>learning objective</a:t>
+            </a:r>
+            <a:r>
+              <a:rPr/>
+              <a:t> with an </a:t>
+            </a:r>
+            <a:r>
+              <a:rPr b="1"/>
+              <a:t>assessment type</a:t>
+            </a:r>
+            <a:r>
+              <a:rPr/>
+              <a:t> and reflect the following:</a:t>
+            </a:r>
+          </a:p>
+          <a:p>
+            <a:pPr lvl="0"/>
+            <a:r>
+              <a:rPr/>
+              <a:t>Why does the assessment type fit the specific learning objective?</a:t>
+            </a:r>
+          </a:p>
+          <a:p>
+            <a:pPr lvl="0"/>
+            <a:r>
+              <a:rPr/>
+              <a:t>What teaching activities can you think of that would align with the learning objective and the corresponding assessment type?</a:t>
             </a:r>
           </a:p>
         </p:txBody>
@@ -15675,67 +15579,7 @@
             </a:pPr>
             <a:r>
               <a:rPr/>
-              <a:t>Your turn! 5 minutes</a:t>
-            </a:r>
-          </a:p>
-        </p:txBody>
-      </p:sp>
-      <p:sp>
-        <p:nvSpPr>
-          <p:cNvPr id="3" name="Content Placeholder 2"/>
-          <p:cNvSpPr>
-            <a:spLocks noGrp="1"/>
-          </p:cNvSpPr>
-          <p:nvPr>
-            <p:ph idx="1"/>
-          </p:nvPr>
-        </p:nvSpPr>
-        <p:spPr/>
-        <p:txBody>
-          <a:bodyPr/>
-          <a:lstStyle/>
-          <a:p>
-            <a:pPr lvl="0" indent="0" marL="0">
-              <a:buNone/>
-            </a:pPr>
-          </a:p>
-          <a:p>
-            <a:pPr lvl="0" indent="0" marL="0">
-              <a:buNone/>
-            </a:pPr>
-            <a:r>
-              <a:rPr/>
-              <a:t>Match each </a:t>
-            </a:r>
-            <a:r>
-              <a:rPr b="1"/>
-              <a:t>learning objective</a:t>
-            </a:r>
-            <a:r>
-              <a:rPr/>
-              <a:t> with an </a:t>
-            </a:r>
-            <a:r>
-              <a:rPr b="1"/>
-              <a:t>assessment type</a:t>
-            </a:r>
-            <a:r>
-              <a:rPr/>
-              <a:t> and reflect the following:</a:t>
-            </a:r>
-          </a:p>
-          <a:p>
-            <a:pPr lvl="0"/>
-            <a:r>
-              <a:rPr/>
-              <a:t>Why does the assessment type fit the specific learning objective?</a:t>
-            </a:r>
-          </a:p>
-          <a:p>
-            <a:pPr lvl="0"/>
-            <a:r>
-              <a:rPr/>
-              <a:t>What teaching activities can you think of that would align with the learning objective and the corresponding assessment type?</a:t>
+              <a:t>Practical activity</a:t>
             </a:r>
           </a:p>
         </p:txBody>
@@ -15746,100 +15590,6 @@
 </file>
 
 <file path=ppt/slides/slide42.xml><?xml version="1.0" encoding="utf-8"?>
-<p:sld xmlns:a="http://schemas.openxmlformats.org/drawingml/2006/main" xmlns:r="http://schemas.openxmlformats.org/officeDocument/2006/relationships" xmlns:p="http://schemas.openxmlformats.org/presentationml/2006/main">
-  <p:cSld>
-    <p:spTree>
-      <p:nvGrpSpPr>
-        <p:cNvPr id="1" name=""/>
-        <p:cNvGrpSpPr/>
-        <p:nvPr/>
-      </p:nvGrpSpPr>
-      <p:grpSpPr>
-        <a:xfrm>
-          <a:off x="0" y="0"/>
-          <a:ext cx="0" cy="0"/>
-          <a:chOff x="0" y="0"/>
-          <a:chExt cx="0" cy="0"/>
-        </a:xfrm>
-      </p:grpSpPr>
-      <p:sp>
-        <p:nvSpPr>
-          <p:cNvPr id="2" name="Title 1"/>
-          <p:cNvSpPr>
-            <a:spLocks noGrp="1"/>
-          </p:cNvSpPr>
-          <p:nvPr>
-            <p:ph type="title"/>
-          </p:nvPr>
-        </p:nvSpPr>
-        <p:spPr/>
-        <p:txBody>
-          <a:bodyPr/>
-          <a:lstStyle/>
-          <a:p>
-            <a:pPr lvl="0" indent="0" marL="0">
-              <a:buNone/>
-            </a:pPr>
-            <a:r>
-              <a:rPr/>
-              <a:t>Practical activity</a:t>
-            </a:r>
-          </a:p>
-        </p:txBody>
-      </p:sp>
-    </p:spTree>
-  </p:cSld>
-</p:sld>
-</file>
-
-<file path=ppt/slides/slide43.xml><?xml version="1.0" encoding="utf-8"?>
-<p:sld xmlns:a="http://schemas.openxmlformats.org/drawingml/2006/main" xmlns:r="http://schemas.openxmlformats.org/officeDocument/2006/relationships" xmlns:p="http://schemas.openxmlformats.org/presentationml/2006/main">
-  <p:cSld>
-    <p:spTree>
-      <p:nvGrpSpPr>
-        <p:cNvPr id="1" name=""/>
-        <p:cNvGrpSpPr/>
-        <p:nvPr/>
-      </p:nvGrpSpPr>
-      <p:grpSpPr>
-        <a:xfrm>
-          <a:off x="0" y="0"/>
-          <a:ext cx="0" cy="0"/>
-          <a:chOff x="0" y="0"/>
-          <a:chExt cx="0" cy="0"/>
-        </a:xfrm>
-      </p:grpSpPr>
-      <p:sp>
-        <p:nvSpPr>
-          <p:cNvPr id="2" name="Title 1"/>
-          <p:cNvSpPr>
-            <a:spLocks noGrp="1"/>
-          </p:cNvSpPr>
-          <p:nvPr>
-            <p:ph type="title"/>
-          </p:nvPr>
-        </p:nvSpPr>
-        <p:spPr/>
-        <p:txBody>
-          <a:bodyPr/>
-          <a:lstStyle/>
-          <a:p>
-            <a:pPr lvl="0" indent="0" marL="0">
-              <a:buNone/>
-            </a:pPr>
-            <a:r>
-              <a:rPr/>
-              <a:t>Setting learning objectives</a:t>
-            </a:r>
-          </a:p>
-        </p:txBody>
-      </p:sp>
-    </p:spTree>
-  </p:cSld>
-</p:sld>
-</file>
-
-<file path=ppt/slides/slide44.xml><?xml version="1.0" encoding="utf-8"?>
 <p:sld xmlns:a="http://schemas.openxmlformats.org/drawingml/2006/main" xmlns:r="http://schemas.openxmlformats.org/officeDocument/2006/relationships" xmlns:p="http://schemas.openxmlformats.org/presentationml/2006/main">
   <p:cSld>
     <p:spTree>
@@ -15916,7 +15666,7 @@
 </p:sld>
 </file>
 
-<file path=ppt/slides/slide45.xml><?xml version="1.0" encoding="utf-8"?>
+<file path=ppt/slides/slide43.xml><?xml version="1.0" encoding="utf-8"?>
 <p:sld xmlns:a="http://schemas.openxmlformats.org/drawingml/2006/main" xmlns:r="http://schemas.openxmlformats.org/officeDocument/2006/relationships" xmlns:p="http://schemas.openxmlformats.org/presentationml/2006/main">
   <p:cSld>
     <p:spTree>
@@ -16024,7 +15774,7 @@
             </a:pPr>
             <a:r>
               <a:rPr/>
-              <a:t>Mager, R. F. (1997). Preparing instructional objectives: A critical tool in the development of effective instruction (3rd ed.). Atlanta, GA: Center for Effective Performance.</a:t>
+              <a:t>Mager &amp; Peatt (1962)</a:t>
             </a:r>
           </a:p>
         </p:txBody>
@@ -16034,7 +15784,7 @@
 </p:sld>
 </file>
 
-<file path=ppt/slides/slide46.xml><?xml version="1.0" encoding="utf-8"?>
+<file path=ppt/slides/slide44.xml><?xml version="1.0" encoding="utf-8"?>
 <p:sld xmlns:a="http://schemas.openxmlformats.org/drawingml/2006/main" xmlns:r="http://schemas.openxmlformats.org/officeDocument/2006/relationships" xmlns:p="http://schemas.openxmlformats.org/presentationml/2006/main">
   <p:cSld>
     <p:spTree>
@@ -16161,7 +15911,7 @@
 </p:sld>
 </file>
 
-<file path=ppt/slides/slide47.xml><?xml version="1.0" encoding="utf-8"?>
+<file path=ppt/slides/slide45.xml><?xml version="1.0" encoding="utf-8"?>
 <p:sld xmlns:a="http://schemas.openxmlformats.org/drawingml/2006/main" xmlns:r="http://schemas.openxmlformats.org/officeDocument/2006/relationships" xmlns:p="http://schemas.openxmlformats.org/presentationml/2006/main">
   <p:cSld>
     <p:spTree>
@@ -16238,7 +15988,7 @@
 </p:sld>
 </file>
 
-<file path=ppt/slides/slide48.xml><?xml version="1.0" encoding="utf-8"?>
+<file path=ppt/slides/slide46.xml><?xml version="1.0" encoding="utf-8"?>
 <p:sld xmlns:a="http://schemas.openxmlformats.org/drawingml/2006/main" xmlns:r="http://schemas.openxmlformats.org/officeDocument/2006/relationships" xmlns:p="http://schemas.openxmlformats.org/presentationml/2006/main">
   <p:cSld>
     <p:spTree>
@@ -16443,7 +16193,7 @@
 </p:sld>
 </file>
 
-<file path=ppt/slides/slide49.xml><?xml version="1.0" encoding="utf-8"?>
+<file path=ppt/slides/slide47.xml><?xml version="1.0" encoding="utf-8"?>
 <p:sld xmlns:a="http://schemas.openxmlformats.org/drawingml/2006/main" xmlns:r="http://schemas.openxmlformats.org/officeDocument/2006/relationships" xmlns:p="http://schemas.openxmlformats.org/presentationml/2006/main">
   <p:cSld>
     <p:spTree>
@@ -16480,13 +16230,7 @@
             </a:pPr>
             <a:r>
               <a:rPr/>
-              <a:t>Stapleton-Corcoran, E. (2023). “Bloom’s Taxonomy of Educational Objectives.” Center for the Advancement of Teaching Excellence at the University of Illinois Chicago. Retrieved 10. Augut 2026 from </a:t>
-            </a:r>
-            <a:r>
-              <a:rPr>
-                <a:hlinkClick r:id="rId3"/>
-              </a:rPr>
-              <a:t>https://teaching.uic.edu/blooms-taxonomy-of-educational-objectives/</a:t>
+              <a:t>Stapleton-Corcoran (2023)</a:t>
             </a:r>
           </a:p>
         </p:txBody>
@@ -16496,7 +16240,7 @@
 </p:sld>
 </file>
 
-<file path=ppt/slides/slide5.xml><?xml version="1.0" encoding="utf-8"?>
+<file path=ppt/slides/slide48.xml><?xml version="1.0" encoding="utf-8"?>
 <p:sld xmlns:a="http://schemas.openxmlformats.org/drawingml/2006/main" xmlns:r="http://schemas.openxmlformats.org/officeDocument/2006/relationships" xmlns:p="http://schemas.openxmlformats.org/presentationml/2006/main">
   <p:cSld>
     <p:spTree>
@@ -16515,90 +16259,30 @@
       </p:grpSpPr>
       <p:sp>
         <p:nvSpPr>
-          <p:cNvPr id="2" name="Title 1"/>
-          <p:cNvSpPr>
-            <a:spLocks noGrp="1"/>
-          </p:cNvSpPr>
-          <p:nvPr>
-            <p:ph type="title"/>
-          </p:nvPr>
-        </p:nvSpPr>
-        <p:spPr/>
-        <p:txBody>
-          <a:bodyPr/>
-          <a:lstStyle/>
-          <a:p>
-            <a:pPr lvl="0" indent="0" marL="0">
-              <a:buNone/>
-            </a:pPr>
-            <a:r>
-              <a:rPr/>
-              <a:t>Before we start: Survey time!</a:t>
-            </a:r>
-          </a:p>
-        </p:txBody>
-      </p:sp>
-    </p:spTree>
-  </p:cSld>
-</p:sld>
-</file>
-
-<file path=ppt/slides/slide50.xml><?xml version="1.0" encoding="utf-8"?>
-<p:sld xmlns:a="http://schemas.openxmlformats.org/drawingml/2006/main" xmlns:r="http://schemas.openxmlformats.org/officeDocument/2006/relationships" xmlns:p="http://schemas.openxmlformats.org/presentationml/2006/main">
-  <p:cSld>
-    <p:spTree>
-      <p:nvGrpSpPr>
-        <p:cNvPr id="1" name=""/>
-        <p:cNvGrpSpPr/>
-        <p:nvPr/>
-      </p:nvGrpSpPr>
-      <p:grpSpPr>
-        <a:xfrm>
-          <a:off x="0" y="0"/>
-          <a:ext cx="0" cy="0"/>
-          <a:chOff x="0" y="0"/>
-          <a:chExt cx="0" cy="0"/>
-        </a:xfrm>
-      </p:grpSpPr>
-      <p:sp>
-        <p:nvSpPr>
-          <p:cNvPr id="2" name="Title 1"/>
-          <p:cNvSpPr>
-            <a:spLocks noGrp="1"/>
-          </p:cNvSpPr>
-          <p:nvPr>
-            <p:ph type="title"/>
-          </p:nvPr>
-        </p:nvSpPr>
-        <p:spPr/>
-        <p:txBody>
-          <a:bodyPr/>
-          <a:lstStyle/>
-          <a:p>
-            <a:pPr lvl="0" indent="0" marL="0">
-              <a:buNone/>
-            </a:pPr>
-            <a:r>
-              <a:rPr/>
+          <p:cNvPr id="3" name="Content Placeholder 2"/>
+          <p:cNvSpPr>
+            <a:spLocks noGrp="1"/>
+          </p:cNvSpPr>
+          <p:nvPr>
+            <p:ph idx="1"/>
+          </p:nvPr>
+        </p:nvSpPr>
+        <p:spPr/>
+        <p:txBody>
+          <a:bodyPr/>
+          <a:lstStyle/>
+          <a:p>
+            <a:pPr lvl="0" indent="0" marL="0">
+              <a:spcBef>
+                <a:spcPts val="3000"/>
+              </a:spcBef>
+              <a:buNone/>
+            </a:pPr>
+            <a:r>
+              <a:rPr b="1"/>
               <a:t>Cognitive domain</a:t>
             </a:r>
           </a:p>
-        </p:txBody>
-      </p:sp>
-      <p:sp>
-        <p:nvSpPr>
-          <p:cNvPr id="3" name="Content Placeholder 2"/>
-          <p:cNvSpPr>
-            <a:spLocks noGrp="1"/>
-          </p:cNvSpPr>
-          <p:nvPr>
-            <p:ph idx="1"/>
-          </p:nvPr>
-        </p:nvSpPr>
-        <p:spPr/>
-        <p:txBody>
-          <a:bodyPr/>
-          <a:lstStyle/>
           <a:p>
             <a:pPr lvl="0"/>
             <a:r>
@@ -16709,7 +16393,7 @@
                                         <p:tgtEl>
                                           <p:spTgt spid="3">
                                             <p:txEl>
-                                              <p:pRg st="0" end="0"/>
+                                              <p:pRg st="1" end="1"/>
                                             </p:txEl>
                                           </p:spTgt>
                                         </p:tgtEl>
@@ -16758,7 +16442,7 @@
                                         <p:tgtEl>
                                           <p:spTgt spid="3">
                                             <p:txEl>
-                                              <p:pRg st="1" end="1"/>
+                                              <p:pRg st="2" end="2"/>
                                             </p:txEl>
                                           </p:spTgt>
                                         </p:tgtEl>
@@ -16807,7 +16491,7 @@
                                         <p:tgtEl>
                                           <p:spTgt spid="3">
                                             <p:txEl>
-                                              <p:pRg st="2" end="2"/>
+                                              <p:pRg st="3" end="3"/>
                                             </p:txEl>
                                           </p:spTgt>
                                         </p:tgtEl>
@@ -16856,7 +16540,7 @@
                                         <p:tgtEl>
                                           <p:spTgt spid="3">
                                             <p:txEl>
-                                              <p:pRg st="3" end="3"/>
+                                              <p:pRg st="4" end="4"/>
                                             </p:txEl>
                                           </p:spTgt>
                                         </p:tgtEl>
@@ -16905,7 +16589,7 @@
                                         <p:tgtEl>
                                           <p:spTgt spid="3">
                                             <p:txEl>
-                                              <p:pRg st="4" end="4"/>
+                                              <p:pRg st="5" end="5"/>
                                             </p:txEl>
                                           </p:spTgt>
                                         </p:tgtEl>
@@ -16954,7 +16638,7 @@
                                         <p:tgtEl>
                                           <p:spTgt spid="3">
                                             <p:txEl>
-                                              <p:pRg st="5" end="5"/>
+                                              <p:pRg st="6" end="6"/>
                                             </p:txEl>
                                           </p:spTgt>
                                         </p:tgtEl>
@@ -17003,6 +16687,205 @@
 </p:sld>
 </file>
 
+<file path=ppt/slides/slide49.xml><?xml version="1.0" encoding="utf-8"?>
+<p:sld xmlns:a="http://schemas.openxmlformats.org/drawingml/2006/main" xmlns:r="http://schemas.openxmlformats.org/officeDocument/2006/relationships" xmlns:p="http://schemas.openxmlformats.org/presentationml/2006/main">
+  <p:cSld>
+    <p:spTree>
+      <p:nvGrpSpPr>
+        <p:cNvPr id="1" name=""/>
+        <p:cNvGrpSpPr/>
+        <p:nvPr/>
+      </p:nvGrpSpPr>
+      <p:grpSpPr>
+        <a:xfrm>
+          <a:off x="0" y="0"/>
+          <a:ext cx="0" cy="0"/>
+          <a:chOff x="0" y="0"/>
+          <a:chExt cx="0" cy="0"/>
+        </a:xfrm>
+      </p:grpSpPr>
+      <p:sp>
+        <p:nvSpPr>
+          <p:cNvPr id="4" name="Text Placeholder 3"/>
+          <p:cNvSpPr>
+            <a:spLocks noGrp="1"/>
+          </p:cNvSpPr>
+          <p:nvPr>
+            <p:ph idx="2" sz="half" type="body"/>
+          </p:nvPr>
+        </p:nvSpPr>
+        <p:spPr/>
+        <p:txBody>
+          <a:bodyPr/>
+          <a:lstStyle/>
+          <a:p>
+            <a:pPr lvl="0" indent="0" marL="0">
+              <a:spcBef>
+                <a:spcPts val="3000"/>
+              </a:spcBef>
+              <a:buNone/>
+            </a:pPr>
+            <a:r>
+              <a:rPr b="1"/>
+              <a:t>Cognitive domain</a:t>
+            </a:r>
+          </a:p>
+        </p:txBody>
+      </p:sp>
+      <p:pic>
+        <p:nvPicPr>
+          <p:cNvPr descr="images/cognitive-domain.png" id="0" name="Picture 1"/>
+          <p:cNvPicPr>
+            <a:picLocks noGrp="1" noChangeAspect="1"/>
+          </p:cNvPicPr>
+          <p:nvPr/>
+        </p:nvPicPr>
+        <p:blipFill>
+          <a:blip r:embed="rId2"/>
+          <a:stretch>
+            <a:fillRect/>
+          </a:stretch>
+        </p:blipFill>
+        <p:spPr bwMode="auto">
+          <a:xfrm>
+            <a:off x="3568700" y="558800"/>
+            <a:ext cx="5105400" cy="3670300"/>
+          </a:xfrm>
+          <a:prstGeom prst="rect">
+            <a:avLst/>
+          </a:prstGeom>
+          <a:noFill/>
+          <a:ln w="9525">
+            <a:noFill/>
+            <a:headEnd/>
+            <a:tailEnd/>
+          </a:ln>
+        </p:spPr>
+      </p:pic>
+    </p:spTree>
+  </p:cSld>
+</p:sld>
+</file>
+
+<file path=ppt/slides/slide5.xml><?xml version="1.0" encoding="utf-8"?>
+<p:sld xmlns:a="http://schemas.openxmlformats.org/drawingml/2006/main" xmlns:r="http://schemas.openxmlformats.org/officeDocument/2006/relationships" xmlns:p="http://schemas.openxmlformats.org/presentationml/2006/main">
+  <p:cSld>
+    <p:spTree>
+      <p:nvGrpSpPr>
+        <p:cNvPr id="1" name=""/>
+        <p:cNvGrpSpPr/>
+        <p:nvPr/>
+      </p:nvGrpSpPr>
+      <p:grpSpPr>
+        <a:xfrm>
+          <a:off x="0" y="0"/>
+          <a:ext cx="0" cy="0"/>
+          <a:chOff x="0" y="0"/>
+          <a:chExt cx="0" cy="0"/>
+        </a:xfrm>
+      </p:grpSpPr>
+      <p:sp>
+        <p:nvSpPr>
+          <p:cNvPr id="2" name="Title 1"/>
+          <p:cNvSpPr>
+            <a:spLocks noGrp="1"/>
+          </p:cNvSpPr>
+          <p:nvPr>
+            <p:ph type="title"/>
+          </p:nvPr>
+        </p:nvSpPr>
+        <p:spPr/>
+        <p:txBody>
+          <a:bodyPr/>
+          <a:lstStyle/>
+          <a:p>
+            <a:pPr lvl="0" indent="0" marL="0">
+              <a:buNone/>
+            </a:pPr>
+            <a:r>
+              <a:rPr/>
+              <a:t>Before we start: Survey time!</a:t>
+            </a:r>
+          </a:p>
+        </p:txBody>
+      </p:sp>
+      <p:sp>
+        <p:nvSpPr>
+          <p:cNvPr id="3" name="Content Placeholder 2"/>
+          <p:cNvSpPr>
+            <a:spLocks noGrp="1"/>
+          </p:cNvSpPr>
+          <p:nvPr>
+            <p:ph idx="1"/>
+          </p:nvPr>
+        </p:nvSpPr>
+        <p:spPr/>
+        <p:txBody>
+          <a:bodyPr/>
+          <a:lstStyle/>
+          <a:p>
+            <a:pPr lvl="0" indent="0" marL="0">
+              <a:buNone/>
+            </a:pPr>
+            <a:r>
+              <a:rPr/>
+              <a:t>ADD QR code</a:t>
+            </a:r>
+          </a:p>
+        </p:txBody>
+      </p:sp>
+    </p:spTree>
+  </p:cSld>
+</p:sld>
+</file>
+
+<file path=ppt/slides/slide50.xml><?xml version="1.0" encoding="utf-8"?>
+<p:sld xmlns:a="http://schemas.openxmlformats.org/drawingml/2006/main" xmlns:r="http://schemas.openxmlformats.org/officeDocument/2006/relationships" xmlns:p="http://schemas.openxmlformats.org/presentationml/2006/main">
+  <p:cSld>
+    <p:spTree>
+      <p:nvGrpSpPr>
+        <p:cNvPr id="1" name=""/>
+        <p:cNvGrpSpPr/>
+        <p:nvPr/>
+      </p:nvGrpSpPr>
+      <p:grpSpPr>
+        <a:xfrm>
+          <a:off x="0" y="0"/>
+          <a:ext cx="0" cy="0"/>
+          <a:chOff x="0" y="0"/>
+          <a:chExt cx="0" cy="0"/>
+        </a:xfrm>
+      </p:grpSpPr>
+      <p:sp>
+        <p:nvSpPr>
+          <p:cNvPr id="3" name="Content Placeholder 2"/>
+          <p:cNvSpPr>
+            <a:spLocks noGrp="1"/>
+          </p:cNvSpPr>
+          <p:nvPr>
+            <p:ph idx="1"/>
+          </p:nvPr>
+        </p:nvSpPr>
+        <p:spPr/>
+        <p:txBody>
+          <a:bodyPr/>
+          <a:lstStyle/>
+          <a:p>
+            <a:pPr lvl="0" indent="0" marL="0">
+              <a:buNone/>
+            </a:pPr>
+            <a:r>
+              <a:rPr/>
+              <a:t>Anderson &amp; Krathwohl (2001)</a:t>
+            </a:r>
+          </a:p>
+        </p:txBody>
+      </p:sp>
+    </p:spTree>
+  </p:cSld>
+</p:sld>
+</file>
+
 <file path=ppt/slides/slide51.xml><?xml version="1.0" encoding="utf-8"?>
 <p:sld xmlns:a="http://schemas.openxmlformats.org/drawingml/2006/main" xmlns:r="http://schemas.openxmlformats.org/officeDocument/2006/relationships" xmlns:p="http://schemas.openxmlformats.org/presentationml/2006/main">
   <p:cSld>
@@ -17022,120 +16905,30 @@
       </p:grpSpPr>
       <p:sp>
         <p:nvSpPr>
-          <p:cNvPr id="2" name="Title 1"/>
-          <p:cNvSpPr>
-            <a:spLocks noGrp="1"/>
-          </p:cNvSpPr>
-          <p:nvPr>
-            <p:ph type="title"/>
-          </p:nvPr>
-        </p:nvSpPr>
-        <p:spPr/>
-        <p:txBody>
-          <a:bodyPr/>
-          <a:lstStyle/>
-          <a:p>
-            <a:pPr lvl="0" indent="0" marL="0">
-              <a:buNone/>
-            </a:pPr>
-            <a:r>
-              <a:rPr/>
-              <a:t>Cognitive domain</a:t>
-            </a:r>
-          </a:p>
-        </p:txBody>
-      </p:sp>
-      <p:pic>
-        <p:nvPicPr>
-          <p:cNvPr descr="images/cognitive-domain.png" id="0" name="Picture 1"/>
-          <p:cNvPicPr>
-            <a:picLocks noGrp="1" noChangeAspect="1"/>
-          </p:cNvPicPr>
-          <p:nvPr/>
-        </p:nvPicPr>
-        <p:blipFill>
-          <a:blip r:embed="rId3"/>
-          <a:stretch>
-            <a:fillRect/>
-          </a:stretch>
-        </p:blipFill>
-        <p:spPr bwMode="auto">
-          <a:xfrm>
-            <a:off x="2209800" y="1193800"/>
-            <a:ext cx="4711700" cy="3390900"/>
-          </a:xfrm>
-          <a:prstGeom prst="rect">
-            <a:avLst/>
-          </a:prstGeom>
-          <a:noFill/>
-          <a:ln w="9525">
-            <a:noFill/>
-            <a:headEnd/>
-            <a:tailEnd/>
-          </a:ln>
-        </p:spPr>
-      </p:pic>
-    </p:spTree>
-  </p:cSld>
-</p:sld>
-</file>
-
-<file path=ppt/slides/slide52.xml><?xml version="1.0" encoding="utf-8"?>
-<p:sld xmlns:a="http://schemas.openxmlformats.org/drawingml/2006/main" xmlns:r="http://schemas.openxmlformats.org/officeDocument/2006/relationships" xmlns:p="http://schemas.openxmlformats.org/presentationml/2006/main">
-  <p:cSld>
-    <p:spTree>
-      <p:nvGrpSpPr>
-        <p:cNvPr id="1" name=""/>
-        <p:cNvGrpSpPr/>
-        <p:nvPr/>
-      </p:nvGrpSpPr>
-      <p:grpSpPr>
-        <a:xfrm>
-          <a:off x="0" y="0"/>
-          <a:ext cx="0" cy="0"/>
-          <a:chOff x="0" y="0"/>
-          <a:chExt cx="0" cy="0"/>
-        </a:xfrm>
-      </p:grpSpPr>
-      <p:sp>
-        <p:nvSpPr>
-          <p:cNvPr id="2" name="Title 1"/>
-          <p:cNvSpPr>
-            <a:spLocks noGrp="1"/>
-          </p:cNvSpPr>
-          <p:nvPr>
-            <p:ph type="title"/>
-          </p:nvPr>
-        </p:nvSpPr>
-        <p:spPr/>
-        <p:txBody>
-          <a:bodyPr/>
-          <a:lstStyle/>
-          <a:p>
-            <a:pPr lvl="0" indent="0" marL="0">
-              <a:buNone/>
-            </a:pPr>
-            <a:r>
-              <a:rPr/>
+          <p:cNvPr id="3" name="Content Placeholder 2"/>
+          <p:cNvSpPr>
+            <a:spLocks noGrp="1"/>
+          </p:cNvSpPr>
+          <p:nvPr>
+            <p:ph idx="1"/>
+          </p:nvPr>
+        </p:nvSpPr>
+        <p:spPr/>
+        <p:txBody>
+          <a:bodyPr/>
+          <a:lstStyle/>
+          <a:p>
+            <a:pPr lvl="0" indent="0" marL="0">
+              <a:spcBef>
+                <a:spcPts val="3000"/>
+              </a:spcBef>
+              <a:buNone/>
+            </a:pPr>
+            <a:r>
+              <a:rPr b="1"/>
               <a:t>Affective domain</a:t>
             </a:r>
           </a:p>
-        </p:txBody>
-      </p:sp>
-      <p:sp>
-        <p:nvSpPr>
-          <p:cNvPr id="3" name="Content Placeholder 2"/>
-          <p:cNvSpPr>
-            <a:spLocks noGrp="1"/>
-          </p:cNvSpPr>
-          <p:nvPr>
-            <p:ph idx="1"/>
-          </p:nvPr>
-        </p:nvSpPr>
-        <p:spPr/>
-        <p:txBody>
-          <a:bodyPr/>
-          <a:lstStyle/>
           <a:p>
             <a:pPr lvl="0"/>
             <a:r>
@@ -17208,6 +17001,15 @@
             <a:r>
               <a:rPr/>
               <a:t>: Learners write a reflection essay in which they summarize the arguments presented during the discussion and reflect on how considering both the advantages and disadvantages of preregistration influenced their own perspective on open science practices.</a:t>
+            </a:r>
+          </a:p>
+          <a:p>
+            <a:pPr lvl="0" indent="0" marL="0">
+              <a:buNone/>
+            </a:pPr>
+            <a:r>
+              <a:rPr/>
+              <a:t>Krathwohl et al. (1964)</a:t>
             </a:r>
           </a:p>
         </p:txBody>
@@ -17250,7 +17052,7 @@
                                         <p:tgtEl>
                                           <p:spTgt spid="3">
                                             <p:txEl>
-                                              <p:pRg st="0" end="0"/>
+                                              <p:pRg st="1" end="1"/>
                                             </p:txEl>
                                           </p:spTgt>
                                         </p:tgtEl>
@@ -17299,7 +17101,7 @@
                                         <p:tgtEl>
                                           <p:spTgt spid="3">
                                             <p:txEl>
-                                              <p:pRg st="1" end="1"/>
+                                              <p:pRg st="2" end="2"/>
                                             </p:txEl>
                                           </p:spTgt>
                                         </p:tgtEl>
@@ -17348,7 +17150,7 @@
                                         <p:tgtEl>
                                           <p:spTgt spid="3">
                                             <p:txEl>
-                                              <p:pRg st="2" end="2"/>
+                                              <p:pRg st="3" end="3"/>
                                             </p:txEl>
                                           </p:spTgt>
                                         </p:tgtEl>
@@ -17397,7 +17199,7 @@
                                         <p:tgtEl>
                                           <p:spTgt spid="3">
                                             <p:txEl>
-                                              <p:pRg st="3" end="3"/>
+                                              <p:pRg st="4" end="4"/>
                                             </p:txEl>
                                           </p:spTgt>
                                         </p:tgtEl>
@@ -17446,7 +17248,7 @@
                                         <p:tgtEl>
                                           <p:spTgt spid="3">
                                             <p:txEl>
-                                              <p:pRg st="4" end="4"/>
+                                              <p:pRg st="5" end="5"/>
                                             </p:txEl>
                                           </p:spTgt>
                                         </p:tgtEl>
@@ -17495,7 +17297,7 @@
                                         <p:tgtEl>
                                           <p:spTgt spid="3">
                                             <p:txEl>
-                                              <p:pRg st="5" end="5"/>
+                                              <p:pRg st="6" end="6"/>
                                             </p:txEl>
                                           </p:spTgt>
                                         </p:tgtEl>
@@ -17544,6 +17346,86 @@
 </p:sld>
 </file>
 
+<file path=ppt/slides/slide52.xml><?xml version="1.0" encoding="utf-8"?>
+<p:sld xmlns:a="http://schemas.openxmlformats.org/drawingml/2006/main" xmlns:r="http://schemas.openxmlformats.org/officeDocument/2006/relationships" xmlns:p="http://schemas.openxmlformats.org/presentationml/2006/main">
+  <p:cSld>
+    <p:spTree>
+      <p:nvGrpSpPr>
+        <p:cNvPr id="1" name=""/>
+        <p:cNvGrpSpPr/>
+        <p:nvPr/>
+      </p:nvGrpSpPr>
+      <p:grpSpPr>
+        <a:xfrm>
+          <a:off x="0" y="0"/>
+          <a:ext cx="0" cy="0"/>
+          <a:chOff x="0" y="0"/>
+          <a:chExt cx="0" cy="0"/>
+        </a:xfrm>
+      </p:grpSpPr>
+      <p:sp>
+        <p:nvSpPr>
+          <p:cNvPr id="4" name="Text Placeholder 3"/>
+          <p:cNvSpPr>
+            <a:spLocks noGrp="1"/>
+          </p:cNvSpPr>
+          <p:nvPr>
+            <p:ph idx="2" sz="half" type="body"/>
+          </p:nvPr>
+        </p:nvSpPr>
+        <p:spPr/>
+        <p:txBody>
+          <a:bodyPr/>
+          <a:lstStyle/>
+          <a:p>
+            <a:pPr lvl="0" indent="0" marL="0">
+              <a:spcBef>
+                <a:spcPts val="3000"/>
+              </a:spcBef>
+              <a:buNone/>
+            </a:pPr>
+            <a:r>
+              <a:rPr b="1"/>
+              <a:t>Affective domain</a:t>
+            </a:r>
+          </a:p>
+        </p:txBody>
+      </p:sp>
+      <p:pic>
+        <p:nvPicPr>
+          <p:cNvPr descr="images/affective-domain.png" id="0" name="Picture 1"/>
+          <p:cNvPicPr>
+            <a:picLocks noGrp="1" noChangeAspect="1"/>
+          </p:cNvPicPr>
+          <p:nvPr/>
+        </p:nvPicPr>
+        <p:blipFill>
+          <a:blip r:embed="rId2"/>
+          <a:stretch>
+            <a:fillRect/>
+          </a:stretch>
+        </p:blipFill>
+        <p:spPr bwMode="auto">
+          <a:xfrm>
+            <a:off x="3568700" y="482600"/>
+            <a:ext cx="5105400" cy="3822700"/>
+          </a:xfrm>
+          <a:prstGeom prst="rect">
+            <a:avLst/>
+          </a:prstGeom>
+          <a:noFill/>
+          <a:ln w="9525">
+            <a:noFill/>
+            <a:headEnd/>
+            <a:tailEnd/>
+          </a:ln>
+        </p:spPr>
+      </p:pic>
+    </p:spTree>
+  </p:cSld>
+</p:sld>
+</file>
+
 <file path=ppt/slides/slide53.xml><?xml version="1.0" encoding="utf-8"?>
 <p:sld xmlns:a="http://schemas.openxmlformats.org/drawingml/2006/main" xmlns:r="http://schemas.openxmlformats.org/officeDocument/2006/relationships" xmlns:p="http://schemas.openxmlformats.org/presentationml/2006/main">
   <p:cSld>
@@ -17563,59 +17445,29 @@
       </p:grpSpPr>
       <p:sp>
         <p:nvSpPr>
-          <p:cNvPr id="2" name="Title 1"/>
-          <p:cNvSpPr>
-            <a:spLocks noGrp="1"/>
-          </p:cNvSpPr>
-          <p:nvPr>
-            <p:ph type="title"/>
-          </p:nvPr>
-        </p:nvSpPr>
-        <p:spPr/>
-        <p:txBody>
-          <a:bodyPr/>
-          <a:lstStyle/>
-          <a:p>
-            <a:pPr lvl="0" indent="0" marL="0">
-              <a:buNone/>
-            </a:pPr>
-            <a:r>
-              <a:rPr/>
-              <a:t>Affective domain</a:t>
-            </a:r>
-          </a:p>
-        </p:txBody>
-      </p:sp>
-      <p:pic>
-        <p:nvPicPr>
-          <p:cNvPr descr="images/affective-domain.png" id="0" name="Picture 1"/>
-          <p:cNvPicPr>
-            <a:picLocks noGrp="1" noChangeAspect="1"/>
-          </p:cNvPicPr>
-          <p:nvPr/>
-        </p:nvPicPr>
-        <p:blipFill>
-          <a:blip r:embed="rId3"/>
-          <a:stretch>
-            <a:fillRect/>
-          </a:stretch>
-        </p:blipFill>
-        <p:spPr bwMode="auto">
-          <a:xfrm>
-            <a:off x="2298700" y="1193800"/>
-            <a:ext cx="4533900" cy="3390900"/>
-          </a:xfrm>
-          <a:prstGeom prst="rect">
-            <a:avLst/>
-          </a:prstGeom>
-          <a:noFill/>
-          <a:ln w="9525">
-            <a:noFill/>
-            <a:headEnd/>
-            <a:tailEnd/>
-          </a:ln>
-        </p:spPr>
-      </p:pic>
+          <p:cNvPr id="3" name="Content Placeholder 2"/>
+          <p:cNvSpPr>
+            <a:spLocks noGrp="1"/>
+          </p:cNvSpPr>
+          <p:nvPr>
+            <p:ph idx="1"/>
+          </p:nvPr>
+        </p:nvSpPr>
+        <p:spPr/>
+        <p:txBody>
+          <a:bodyPr/>
+          <a:lstStyle/>
+          <a:p>
+            <a:pPr lvl="0" indent="0" marL="0">
+              <a:buNone/>
+            </a:pPr>
+            <a:r>
+              <a:rPr/>
+              <a:t>Krathwohl et al. (1964)</a:t>
+            </a:r>
+          </a:p>
+        </p:txBody>
+      </p:sp>
     </p:spTree>
   </p:cSld>
 </p:sld>
@@ -17640,43 +17492,30 @@
       </p:grpSpPr>
       <p:sp>
         <p:nvSpPr>
-          <p:cNvPr id="2" name="Title 1"/>
-          <p:cNvSpPr>
-            <a:spLocks noGrp="1"/>
-          </p:cNvSpPr>
-          <p:nvPr>
-            <p:ph type="title"/>
-          </p:nvPr>
-        </p:nvSpPr>
-        <p:spPr/>
-        <p:txBody>
-          <a:bodyPr/>
-          <a:lstStyle/>
-          <a:p>
-            <a:pPr lvl="0" indent="0" marL="0">
-              <a:buNone/>
-            </a:pPr>
-            <a:r>
-              <a:rPr/>
+          <p:cNvPr id="3" name="Content Placeholder 2"/>
+          <p:cNvSpPr>
+            <a:spLocks noGrp="1"/>
+          </p:cNvSpPr>
+          <p:nvPr>
+            <p:ph idx="1"/>
+          </p:nvPr>
+        </p:nvSpPr>
+        <p:spPr/>
+        <p:txBody>
+          <a:bodyPr/>
+          <a:lstStyle/>
+          <a:p>
+            <a:pPr lvl="0" indent="0" marL="0">
+              <a:spcBef>
+                <a:spcPts val="3000"/>
+              </a:spcBef>
+              <a:buNone/>
+            </a:pPr>
+            <a:r>
+              <a:rPr b="1"/>
               <a:t>Psychomotor domain</a:t>
             </a:r>
           </a:p>
-        </p:txBody>
-      </p:sp>
-      <p:sp>
-        <p:nvSpPr>
-          <p:cNvPr id="3" name="Content Placeholder 2"/>
-          <p:cNvSpPr>
-            <a:spLocks noGrp="1"/>
-          </p:cNvSpPr>
-          <p:nvPr>
-            <p:ph idx="1"/>
-          </p:nvPr>
-        </p:nvSpPr>
-        <p:spPr/>
-        <p:txBody>
-          <a:bodyPr/>
-          <a:lstStyle/>
           <a:p>
             <a:pPr lvl="0"/>
             <a:r>
@@ -17734,6 +17573,15 @@
             <a:r>
               <a:rPr/>
               <a:t>: Each learner independently uploads a dataset and accompanying documentation to a repository with a suitable license.</a:t>
+            </a:r>
+          </a:p>
+          <a:p>
+            <a:pPr lvl="0" indent="0" marL="0">
+              <a:buNone/>
+            </a:pPr>
+            <a:r>
+              <a:rPr/>
+              <a:t>Harrow (1972)</a:t>
             </a:r>
           </a:p>
         </p:txBody>
@@ -17776,7 +17624,7 @@
                                         <p:tgtEl>
                                           <p:spTgt spid="3">
                                             <p:txEl>
-                                              <p:pRg st="0" end="0"/>
+                                              <p:pRg st="1" end="1"/>
                                             </p:txEl>
                                           </p:spTgt>
                                         </p:tgtEl>
@@ -17825,7 +17673,7 @@
                                         <p:tgtEl>
                                           <p:spTgt spid="3">
                                             <p:txEl>
-                                              <p:pRg st="1" end="1"/>
+                                              <p:pRg st="2" end="2"/>
                                             </p:txEl>
                                           </p:spTgt>
                                         </p:tgtEl>
@@ -17874,7 +17722,7 @@
                                         <p:tgtEl>
                                           <p:spTgt spid="3">
                                             <p:txEl>
-                                              <p:pRg st="2" end="2"/>
+                                              <p:pRg st="3" end="3"/>
                                             </p:txEl>
                                           </p:spTgt>
                                         </p:tgtEl>
@@ -17923,7 +17771,7 @@
                                         <p:tgtEl>
                                           <p:spTgt spid="3">
                                             <p:txEl>
-                                              <p:pRg st="3" end="3"/>
+                                              <p:pRg st="4" end="4"/>
                                             </p:txEl>
                                           </p:spTgt>
                                         </p:tgtEl>
@@ -17972,7 +17820,7 @@
                                         <p:tgtEl>
                                           <p:spTgt spid="3">
                                             <p:txEl>
-                                              <p:pRg st="4" end="4"/>
+                                              <p:pRg st="5" end="5"/>
                                             </p:txEl>
                                           </p:spTgt>
                                         </p:tgtEl>
@@ -18040,24 +17888,27 @@
       </p:grpSpPr>
       <p:sp>
         <p:nvSpPr>
-          <p:cNvPr id="2" name="Title 1"/>
-          <p:cNvSpPr>
-            <a:spLocks noGrp="1"/>
-          </p:cNvSpPr>
-          <p:nvPr>
-            <p:ph type="title"/>
-          </p:nvPr>
-        </p:nvSpPr>
-        <p:spPr/>
-        <p:txBody>
-          <a:bodyPr/>
-          <a:lstStyle/>
-          <a:p>
-            <a:pPr lvl="0" indent="0" marL="0">
-              <a:buNone/>
-            </a:pPr>
-            <a:r>
-              <a:rPr/>
+          <p:cNvPr id="4" name="Text Placeholder 3"/>
+          <p:cNvSpPr>
+            <a:spLocks noGrp="1"/>
+          </p:cNvSpPr>
+          <p:nvPr>
+            <p:ph idx="2" sz="half" type="body"/>
+          </p:nvPr>
+        </p:nvSpPr>
+        <p:spPr/>
+        <p:txBody>
+          <a:bodyPr/>
+          <a:lstStyle/>
+          <a:p>
+            <a:pPr lvl="0" indent="0" marL="0">
+              <a:spcBef>
+                <a:spcPts val="3000"/>
+              </a:spcBef>
+              <a:buNone/>
+            </a:pPr>
+            <a:r>
+              <a:rPr b="1"/>
               <a:t>Psychomotor domain</a:t>
             </a:r>
           </a:p>
@@ -18072,15 +17923,15 @@
           <p:nvPr/>
         </p:nvPicPr>
         <p:blipFill>
-          <a:blip r:embed="rId3"/>
+          <a:blip r:embed="rId2"/>
           <a:stretch>
             <a:fillRect/>
           </a:stretch>
         </p:blipFill>
         <p:spPr bwMode="auto">
           <a:xfrm>
-            <a:off x="2362200" y="1193800"/>
-            <a:ext cx="4432300" cy="3390900"/>
+            <a:off x="3568700" y="444500"/>
+            <a:ext cx="5105400" cy="3911600"/>
           </a:xfrm>
           <a:prstGeom prst="rect">
             <a:avLst/>
@@ -18099,6 +17950,53 @@
 </file>
 
 <file path=ppt/slides/slide56.xml><?xml version="1.0" encoding="utf-8"?>
+<p:sld xmlns:a="http://schemas.openxmlformats.org/drawingml/2006/main" xmlns:r="http://schemas.openxmlformats.org/officeDocument/2006/relationships" xmlns:p="http://schemas.openxmlformats.org/presentationml/2006/main">
+  <p:cSld>
+    <p:spTree>
+      <p:nvGrpSpPr>
+        <p:cNvPr id="1" name=""/>
+        <p:cNvGrpSpPr/>
+        <p:nvPr/>
+      </p:nvGrpSpPr>
+      <p:grpSpPr>
+        <a:xfrm>
+          <a:off x="0" y="0"/>
+          <a:ext cx="0" cy="0"/>
+          <a:chOff x="0" y="0"/>
+          <a:chExt cx="0" cy="0"/>
+        </a:xfrm>
+      </p:grpSpPr>
+      <p:sp>
+        <p:nvSpPr>
+          <p:cNvPr id="3" name="Content Placeholder 2"/>
+          <p:cNvSpPr>
+            <a:spLocks noGrp="1"/>
+          </p:cNvSpPr>
+          <p:nvPr>
+            <p:ph idx="1"/>
+          </p:nvPr>
+        </p:nvSpPr>
+        <p:spPr/>
+        <p:txBody>
+          <a:bodyPr/>
+          <a:lstStyle/>
+          <a:p>
+            <a:pPr lvl="0" indent="0" marL="0">
+              <a:buNone/>
+            </a:pPr>
+            <a:r>
+              <a:rPr/>
+              <a:t>Simpson (1985)</a:t>
+            </a:r>
+          </a:p>
+        </p:txBody>
+      </p:sp>
+    </p:spTree>
+  </p:cSld>
+</p:sld>
+</file>
+
+<file path=ppt/slides/slide57.xml><?xml version="1.0" encoding="utf-8"?>
 <p:sld xmlns:a="http://schemas.openxmlformats.org/drawingml/2006/main" xmlns:r="http://schemas.openxmlformats.org/officeDocument/2006/relationships" xmlns:p="http://schemas.openxmlformats.org/presentationml/2006/main">
   <p:cSld>
     <p:spTree>
@@ -18535,135 +18433,6 @@
 </p:sld>
 </file>
 
-<file path=ppt/slides/slide57.xml><?xml version="1.0" encoding="utf-8"?>
-<p:sld xmlns:a="http://schemas.openxmlformats.org/drawingml/2006/main" xmlns:r="http://schemas.openxmlformats.org/officeDocument/2006/relationships" xmlns:p="http://schemas.openxmlformats.org/presentationml/2006/main">
-  <p:cSld>
-    <p:spTree>
-      <p:nvGrpSpPr>
-        <p:cNvPr id="1" name=""/>
-        <p:cNvGrpSpPr/>
-        <p:nvPr/>
-      </p:nvGrpSpPr>
-      <p:grpSpPr>
-        <a:xfrm>
-          <a:off x="0" y="0"/>
-          <a:ext cx="0" cy="0"/>
-          <a:chOff x="0" y="0"/>
-          <a:chExt cx="0" cy="0"/>
-        </a:xfrm>
-      </p:grpSpPr>
-      <p:sp>
-        <p:nvSpPr>
-          <p:cNvPr id="2" name="Title 1"/>
-          <p:cNvSpPr>
-            <a:spLocks noGrp="1"/>
-          </p:cNvSpPr>
-          <p:nvPr>
-            <p:ph type="title"/>
-          </p:nvPr>
-        </p:nvSpPr>
-        <p:spPr/>
-        <p:txBody>
-          <a:bodyPr/>
-          <a:lstStyle/>
-          <a:p>
-            <a:pPr lvl="0" indent="0" marL="0">
-              <a:buNone/>
-            </a:pPr>
-            <a:r>
-              <a:rPr/>
-              <a:t>Your turn! 10 minutes</a:t>
-            </a:r>
-          </a:p>
-        </p:txBody>
-      </p:sp>
-      <p:sp>
-        <p:nvSpPr>
-          <p:cNvPr id="3" name="Content Placeholder 2"/>
-          <p:cNvSpPr>
-            <a:spLocks noGrp="1"/>
-          </p:cNvSpPr>
-          <p:nvPr>
-            <p:ph idx="1"/>
-          </p:nvPr>
-        </p:nvSpPr>
-        <p:spPr/>
-        <p:txBody>
-          <a:bodyPr/>
-          <a:lstStyle/>
-          <a:p>
-            <a:pPr lvl="0" indent="0" marL="0">
-              <a:buNone/>
-            </a:pPr>
-            <a:r>
-              <a:rPr i="1"/>
-              <a:t>You are tasked to design a course module on Open Research practices and would like to include a lesson on open access publishing. In pairs, </a:t>
-            </a:r>
-            <a:r>
-              <a:rPr b="1" i="1"/>
-              <a:t>design one assessment task</a:t>
-            </a:r>
-            <a:r>
-              <a:rPr i="1"/>
-              <a:t> and </a:t>
-            </a:r>
-            <a:r>
-              <a:rPr b="1" i="1"/>
-              <a:t>define one observable metric</a:t>
-            </a:r>
-            <a:r>
-              <a:rPr i="1"/>
-              <a:t> of successfully achieving the learning objective for each </a:t>
-            </a:r>
-            <a:r>
-              <a:rPr b="1" i="1"/>
-              <a:t>learning objective</a:t>
-            </a:r>
-            <a:r>
-              <a:rPr i="1"/>
-              <a:t> below.</a:t>
-            </a:r>
-          </a:p>
-          <a:p>
-            <a:pPr lvl="0"/>
-            <a:r>
-              <a:rPr b="1"/>
-              <a:t>Cognitive domain</a:t>
-            </a:r>
-            <a:r>
-              <a:rPr/>
-              <a:t>: Learners will be able to compare different open access publishing models, e.g., Gold, Green and Diamond Open Access and critically assess their advantages and limitations.</a:t>
-            </a:r>
-          </a:p>
-          <a:p>
-            <a:pPr lvl="0"/>
-            <a:r>
-              <a:rPr b="1"/>
-              <a:t>Affective domain</a:t>
-            </a:r>
-            <a:r>
-              <a:rPr/>
-              <a:t>: Learners will critically reflect on the benefits and challenges of open access publishing and demonstrate openness toward differing perspectives on accessibility and publication costs.</a:t>
-            </a:r>
-          </a:p>
-          <a:p>
-            <a:pPr lvl="0"/>
-            <a:r>
-              <a:rPr b="1"/>
-              <a:t>Psychomotor domain</a:t>
-            </a:r>
-            <a:r>
-              <a:rPr/>
-              <a:t>: Learners will accurately upload a manuscript to an open access repository and correctly apply metadata and an appropriate license.</a:t>
-            </a:r>
-          </a:p>
-        </p:txBody>
-      </p:sp>
-    </p:spTree>
-  </p:cSld>
-</p:sld>
-</file>
-
 <file path=ppt/slides/slide58.xml><?xml version="1.0" encoding="utf-8"?>
 <p:sld xmlns:a="http://schemas.openxmlformats.org/drawingml/2006/main" xmlns:r="http://schemas.openxmlformats.org/officeDocument/2006/relationships" xmlns:p="http://schemas.openxmlformats.org/presentationml/2006/main">
   <p:cSld>
@@ -18724,58 +18493,66 @@
             <a:pPr lvl="0" indent="0" marL="0">
               <a:buNone/>
             </a:pPr>
-          </a:p>
-          <a:p>
-            <a:pPr lvl="0" indent="-342900" marL="342900">
-              <a:buAutoNum type="arabicPeriod"/>
-            </a:pPr>
-            <a:r>
-              <a:rPr b="1"/>
-              <a:t>Navigate</a:t>
-            </a:r>
-            <a:r>
-              <a:rPr/>
-              <a:t> to the following online tutorial: </a:t>
-            </a:r>
-            <a:r>
-              <a:rPr>
-                <a:hlinkClick r:id="rId3"/>
-              </a:rPr>
-              <a:t>https://lmu-osc.github.io/introduction-to-zotero/</a:t>
-            </a:r>
-            <a:r>
-              <a:rPr/>
-              <a:t>.</a:t>
-            </a:r>
-          </a:p>
-          <a:p>
-            <a:pPr lvl="0" indent="-342900" marL="342900">
-              <a:buAutoNum type="arabicPeriod"/>
-            </a:pPr>
-            <a:r>
-              <a:rPr b="1"/>
-              <a:t>Skim over</a:t>
-            </a:r>
-            <a:r>
-              <a:rPr/>
-              <a:t> the different sections using the navigation menu or the arrows at the bottom of the page to get an idea of the content of the tutorial.</a:t>
-            </a:r>
-          </a:p>
-          <a:p>
-            <a:pPr lvl="0" indent="-342900" marL="342900">
-              <a:buAutoNum type="arabicPeriod"/>
-            </a:pPr>
-            <a:r>
-              <a:rPr/>
-              <a:t>Using Bloom’s taxonomy, </a:t>
-            </a:r>
-            <a:r>
-              <a:rPr b="1"/>
-              <a:t>formulate</a:t>
-            </a:r>
-            <a:r>
-              <a:rPr/>
-              <a:t> three learning objectives and assessment methods that match the content and the teaching activities of the tutorial. Consider the following: Which level of Bloom’s taxonomy are you at and which domain are you targeting?</a:t>
+            <a:r>
+              <a:rPr i="1"/>
+              <a:t>You are tasked to design a course module on Open Research practices and would like to include a lesson on open access publishing. In pairs, </a:t>
+            </a:r>
+            <a:r>
+              <a:rPr b="1" i="1"/>
+              <a:t>design one assessment task</a:t>
+            </a:r>
+            <a:r>
+              <a:rPr i="1"/>
+              <a:t> and </a:t>
+            </a:r>
+            <a:r>
+              <a:rPr b="1" i="1"/>
+              <a:t>define one observable metric</a:t>
+            </a:r>
+            <a:r>
+              <a:rPr i="1"/>
+              <a:t> of successfully achieving the learning objective for each </a:t>
+            </a:r>
+            <a:r>
+              <a:rPr b="1" i="1"/>
+              <a:t>learning objective</a:t>
+            </a:r>
+            <a:r>
+              <a:rPr i="1"/>
+              <a:t> below.</a:t>
+            </a:r>
+          </a:p>
+          <a:p>
+            <a:pPr lvl="0"/>
+            <a:r>
+              <a:rPr b="1"/>
+              <a:t>Cognitive domain</a:t>
+            </a:r>
+            <a:r>
+              <a:rPr/>
+              <a:t>: Learners will be able to compare different open access publishing models, e.g., Gold, Green and Diamond Open Access and critically assess their advantages and limitations.</a:t>
+            </a:r>
+          </a:p>
+          <a:p>
+            <a:pPr lvl="0"/>
+            <a:r>
+              <a:rPr b="1"/>
+              <a:t>Affective domain</a:t>
+            </a:r>
+            <a:r>
+              <a:rPr/>
+              <a:t>: Learners will critically reflect on the benefits and challenges of open access publishing and demonstrate openness toward differing perspectives on accessibility and publication costs.</a:t>
+            </a:r>
+          </a:p>
+          <a:p>
+            <a:pPr lvl="0"/>
+            <a:r>
+              <a:rPr b="1"/>
+              <a:t>Psychomotor domain</a:t>
+            </a:r>
+            <a:r>
+              <a:rPr/>
+              <a:t>: Learners will accurately upload a manuscript to an open access repository and correctly apply metadata and an appropriate license.</a:t>
             </a:r>
           </a:p>
         </p:txBody>
@@ -18786,6 +18563,361 @@
 </file>
 
 <file path=ppt/slides/slide59.xml><?xml version="1.0" encoding="utf-8"?>
+<p:sld xmlns:a="http://schemas.openxmlformats.org/drawingml/2006/main" xmlns:r="http://schemas.openxmlformats.org/officeDocument/2006/relationships" xmlns:p="http://schemas.openxmlformats.org/presentationml/2006/main">
+  <p:cSld>
+    <p:spTree>
+      <p:nvGrpSpPr>
+        <p:cNvPr id="1" name=""/>
+        <p:cNvGrpSpPr/>
+        <p:nvPr/>
+      </p:nvGrpSpPr>
+      <p:grpSpPr>
+        <a:xfrm>
+          <a:off x="0" y="0"/>
+          <a:ext cx="0" cy="0"/>
+          <a:chOff x="0" y="0"/>
+          <a:chExt cx="0" cy="0"/>
+        </a:xfrm>
+      </p:grpSpPr>
+      <p:sp>
+        <p:nvSpPr>
+          <p:cNvPr id="2" name="Title 1"/>
+          <p:cNvSpPr>
+            <a:spLocks noGrp="1"/>
+          </p:cNvSpPr>
+          <p:nvPr>
+            <p:ph type="title"/>
+          </p:nvPr>
+        </p:nvSpPr>
+        <p:spPr/>
+        <p:txBody>
+          <a:bodyPr/>
+          <a:lstStyle/>
+          <a:p>
+            <a:pPr lvl="0" indent="0" marL="0">
+              <a:buNone/>
+            </a:pPr>
+            <a:r>
+              <a:rPr/>
+              <a:t>Your turn! 10 minutes</a:t>
+            </a:r>
+          </a:p>
+        </p:txBody>
+      </p:sp>
+      <p:sp>
+        <p:nvSpPr>
+          <p:cNvPr id="3" name="Content Placeholder 2"/>
+          <p:cNvSpPr>
+            <a:spLocks noGrp="1"/>
+          </p:cNvSpPr>
+          <p:nvPr>
+            <p:ph idx="1"/>
+          </p:nvPr>
+        </p:nvSpPr>
+        <p:spPr/>
+        <p:txBody>
+          <a:bodyPr/>
+          <a:lstStyle/>
+          <a:p>
+            <a:pPr lvl="0" indent="0" marL="0">
+              <a:buNone/>
+            </a:pPr>
+          </a:p>
+          <a:p>
+            <a:pPr lvl="0" indent="-342900" marL="342900">
+              <a:buAutoNum type="arabicPeriod"/>
+            </a:pPr>
+            <a:r>
+              <a:rPr b="1"/>
+              <a:t>Navigate</a:t>
+            </a:r>
+            <a:r>
+              <a:rPr/>
+              <a:t> to the following online tutorial: </a:t>
+            </a:r>
+            <a:r>
+              <a:rPr>
+                <a:hlinkClick r:id="rId3"/>
+              </a:rPr>
+              <a:t>https://lmu-osc.github.io/introduction-to-zotero/</a:t>
+            </a:r>
+            <a:r>
+              <a:rPr/>
+              <a:t>.</a:t>
+            </a:r>
+          </a:p>
+          <a:p>
+            <a:pPr lvl="0" indent="-342900" marL="342900">
+              <a:buAutoNum type="arabicPeriod"/>
+            </a:pPr>
+            <a:r>
+              <a:rPr b="1"/>
+              <a:t>Skim over</a:t>
+            </a:r>
+            <a:r>
+              <a:rPr/>
+              <a:t> the different sections using the navigation menu or the arrows at the bottom of the page to get an idea of the content of the tutorial.</a:t>
+            </a:r>
+          </a:p>
+          <a:p>
+            <a:pPr lvl="0" indent="-342900" marL="342900">
+              <a:buAutoNum type="arabicPeriod"/>
+            </a:pPr>
+            <a:r>
+              <a:rPr/>
+              <a:t>Using Bloom’s taxonomy, </a:t>
+            </a:r>
+            <a:r>
+              <a:rPr b="1"/>
+              <a:t>formulate</a:t>
+            </a:r>
+            <a:r>
+              <a:rPr/>
+              <a:t> three learning objectives and assessment methods that match the content and the teaching activities of the tutorial. Consider the following: Which level of Bloom’s taxonomy are you at and which domain are you targeting?</a:t>
+            </a:r>
+          </a:p>
+        </p:txBody>
+      </p:sp>
+    </p:spTree>
+  </p:cSld>
+</p:sld>
+</file>
+
+<file path=ppt/slides/slide6.xml><?xml version="1.0" encoding="utf-8"?>
+<p:sld xmlns:a="http://schemas.openxmlformats.org/drawingml/2006/main" xmlns:r="http://schemas.openxmlformats.org/officeDocument/2006/relationships" xmlns:p="http://schemas.openxmlformats.org/presentationml/2006/main">
+  <p:cSld>
+    <p:spTree>
+      <p:nvGrpSpPr>
+        <p:cNvPr id="1" name=""/>
+        <p:cNvGrpSpPr/>
+        <p:nvPr/>
+      </p:nvGrpSpPr>
+      <p:grpSpPr>
+        <a:xfrm>
+          <a:off x="0" y="0"/>
+          <a:ext cx="0" cy="0"/>
+          <a:chOff x="0" y="0"/>
+          <a:chExt cx="0" cy="0"/>
+        </a:xfrm>
+      </p:grpSpPr>
+      <p:sp>
+        <p:nvSpPr>
+          <p:cNvPr id="2" name="Title 1"/>
+          <p:cNvSpPr>
+            <a:spLocks noGrp="1"/>
+          </p:cNvSpPr>
+          <p:nvPr>
+            <p:ph type="title"/>
+          </p:nvPr>
+        </p:nvSpPr>
+        <p:spPr/>
+        <p:txBody>
+          <a:bodyPr/>
+          <a:lstStyle/>
+          <a:p>
+            <a:pPr lvl="0" indent="0" marL="0">
+              <a:buNone/>
+            </a:pPr>
+            <a:r>
+              <a:rPr/>
+              <a:t>Before we start: Survey time!</a:t>
+            </a:r>
+          </a:p>
+        </p:txBody>
+      </p:sp>
+      <p:sp>
+        <p:nvSpPr>
+          <p:cNvPr id="3" name="Content Placeholder 2"/>
+          <p:cNvSpPr>
+            <a:spLocks noGrp="1"/>
+          </p:cNvSpPr>
+          <p:nvPr>
+            <p:ph idx="1"/>
+          </p:nvPr>
+        </p:nvSpPr>
+        <p:spPr/>
+        <p:txBody>
+          <a:bodyPr/>
+          <a:lstStyle/>
+          <a:p>
+            <a:pPr lvl="0" indent="0" marL="0">
+              <a:spcBef>
+                <a:spcPts val="3000"/>
+              </a:spcBef>
+              <a:buNone/>
+            </a:pPr>
+            <a:r>
+              <a:rPr b="1"/>
+              <a:t>Question 1</a:t>
+            </a:r>
+          </a:p>
+          <a:p>
+            <a:pPr lvl="0" indent="0" marL="0">
+              <a:buNone/>
+            </a:pPr>
+            <a:r>
+              <a:rPr b="1"/>
+              <a:t>Which of the following concepts or skills do you now feel most confident about in relation to didactics and teaching? (Select all that apply)</a:t>
+            </a:r>
+          </a:p>
+          <a:p>
+            <a:pPr lvl="0" indent="-342900" marL="342900">
+              <a:buAutoNum type="alphaLcPeriod"/>
+            </a:pPr>
+            <a:r>
+              <a:rPr/>
+              <a:t>Considering the learner’s prior knowledge in the learning process</a:t>
+            </a:r>
+          </a:p>
+          <a:p>
+            <a:pPr lvl="0" indent="-342900" marL="342900">
+              <a:buAutoNum type="alphaLcPeriod"/>
+            </a:pPr>
+            <a:r>
+              <a:rPr/>
+              <a:t>Constructivism</a:t>
+            </a:r>
+          </a:p>
+          <a:p>
+            <a:pPr lvl="0" indent="-342900" marL="342900">
+              <a:buAutoNum type="alphaLcPeriod"/>
+            </a:pPr>
+            <a:r>
+              <a:rPr/>
+              <a:t>Constructive alignment</a:t>
+            </a:r>
+          </a:p>
+          <a:p>
+            <a:pPr lvl="0" indent="-342900" marL="342900">
+              <a:buAutoNum type="alphaLcPeriod"/>
+            </a:pPr>
+            <a:r>
+              <a:rPr/>
+              <a:t>Formulating clear learning objectives</a:t>
+            </a:r>
+          </a:p>
+          <a:p>
+            <a:pPr lvl="0" indent="0" marL="0">
+              <a:spcBef>
+                <a:spcPts val="3000"/>
+              </a:spcBef>
+              <a:buNone/>
+            </a:pPr>
+            <a:r>
+              <a:rPr b="1"/>
+              <a:t>Question 2</a:t>
+            </a:r>
+          </a:p>
+          <a:p>
+            <a:pPr lvl="0" indent="0" marL="0">
+              <a:buNone/>
+            </a:pPr>
+            <a:r>
+              <a:rPr b="1"/>
+              <a:t>What is your level of familiarity with the three learning domains (cogntive, affective and psychomotor)?</a:t>
+            </a:r>
+          </a:p>
+          <a:p>
+            <a:pPr lvl="0" indent="-342900" marL="342900">
+              <a:buAutoNum type="alphaLcPeriod"/>
+            </a:pPr>
+            <a:r>
+              <a:rPr/>
+              <a:t>I have never heard of them before.</a:t>
+            </a:r>
+          </a:p>
+          <a:p>
+            <a:pPr lvl="0" indent="-342900" marL="342900">
+              <a:buAutoNum type="alphaLcPeriod"/>
+            </a:pPr>
+            <a:r>
+              <a:rPr/>
+              <a:t>I have heard of them but have never considered them in my teaching.</a:t>
+            </a:r>
+          </a:p>
+          <a:p>
+            <a:pPr lvl="0" indent="-342900" marL="342900">
+              <a:buAutoNum type="alphaLcPeriod"/>
+            </a:pPr>
+            <a:r>
+              <a:rPr/>
+              <a:t>I have a basic understanding and sometimes implement them in my teaching.</a:t>
+            </a:r>
+          </a:p>
+          <a:p>
+            <a:pPr lvl="0" indent="-342900" marL="342900">
+              <a:buAutoNum type="alphaLcPeriod"/>
+            </a:pPr>
+            <a:r>
+              <a:rPr/>
+              <a:t>I am very familiar and have routinely applied them in my teaching.</a:t>
+            </a:r>
+          </a:p>
+          <a:p>
+            <a:pPr lvl="0" indent="0" marL="0">
+              <a:spcBef>
+                <a:spcPts val="3000"/>
+              </a:spcBef>
+              <a:buNone/>
+            </a:pPr>
+            <a:r>
+              <a:rPr b="1"/>
+              <a:t>Question 3</a:t>
+            </a:r>
+          </a:p>
+          <a:p>
+            <a:pPr lvl="0" indent="0" marL="0">
+              <a:buNone/>
+            </a:pPr>
+            <a:r>
+              <a:rPr b="1"/>
+              <a:t>What is your level of familiarity with Bloom’s taxonomy?</a:t>
+            </a:r>
+          </a:p>
+          <a:p>
+            <a:pPr lvl="0" indent="-342900" marL="342900">
+              <a:buAutoNum type="alphaLcPeriod"/>
+            </a:pPr>
+            <a:r>
+              <a:rPr/>
+              <a:t>I have never heard of it before.</a:t>
+            </a:r>
+          </a:p>
+          <a:p>
+            <a:pPr lvl="0" indent="-342900" marL="342900">
+              <a:buAutoNum type="alphaLcPeriod"/>
+            </a:pPr>
+            <a:r>
+              <a:rPr/>
+              <a:t>I have heard of it but have never implemented it in my teaching.</a:t>
+            </a:r>
+          </a:p>
+          <a:p>
+            <a:pPr lvl="0" indent="-342900" marL="342900">
+              <a:buAutoNum type="alphaLcPeriod"/>
+            </a:pPr>
+            <a:r>
+              <a:rPr/>
+              <a:t>I have a basic working definition in mind and sometimes implement it in my teaching.</a:t>
+            </a:r>
+          </a:p>
+          <a:p>
+            <a:pPr lvl="0" indent="-342900" marL="342900">
+              <a:buAutoNum type="alphaLcPeriod"/>
+            </a:pPr>
+            <a:r>
+              <a:rPr/>
+              <a:t>I am very familiar and have routinely applied this in my teaching.</a:t>
+            </a:r>
+          </a:p>
+        </p:txBody>
+      </p:sp>
+    </p:spTree>
+  </p:cSld>
+</p:sld>
+</file>
+
+<file path=ppt/slides/slide60.xml><?xml version="1.0" encoding="utf-8"?>
 <p:sld xmlns:a="http://schemas.openxmlformats.org/drawingml/2006/main" xmlns:r="http://schemas.openxmlformats.org/officeDocument/2006/relationships" xmlns:p="http://schemas.openxmlformats.org/presentationml/2006/main">
   <p:cSld>
     <p:spTree>
@@ -19223,136 +19355,6 @@
 </p:sld>
 </file>
 
-<file path=ppt/slides/slide6.xml><?xml version="1.0" encoding="utf-8"?>
-<p:sld xmlns:a="http://schemas.openxmlformats.org/drawingml/2006/main" xmlns:r="http://schemas.openxmlformats.org/officeDocument/2006/relationships" xmlns:p="http://schemas.openxmlformats.org/presentationml/2006/main">
-  <p:cSld>
-    <p:spTree>
-      <p:nvGrpSpPr>
-        <p:cNvPr id="1" name=""/>
-        <p:cNvGrpSpPr/>
-        <p:nvPr/>
-      </p:nvGrpSpPr>
-      <p:grpSpPr>
-        <a:xfrm>
-          <a:off x="0" y="0"/>
-          <a:ext cx="0" cy="0"/>
-          <a:chOff x="0" y="0"/>
-          <a:chExt cx="0" cy="0"/>
-        </a:xfrm>
-      </p:grpSpPr>
-      <p:sp>
-        <p:nvSpPr>
-          <p:cNvPr id="3" name="Content Placeholder 2"/>
-          <p:cNvSpPr>
-            <a:spLocks noGrp="1"/>
-          </p:cNvSpPr>
-          <p:nvPr>
-            <p:ph idx="1"/>
-          </p:nvPr>
-        </p:nvSpPr>
-        <p:spPr/>
-        <p:txBody>
-          <a:bodyPr/>
-          <a:lstStyle/>
-          <a:p>
-            <a:pPr lvl="0" indent="0" marL="0">
-              <a:buNone/>
-            </a:pPr>
-            <a:r>
-              <a:rPr b="1"/>
-              <a:t>Which of the following concepts or skills do you now feel most confident about in relation to didactics and teaching? (Select all that apply)</a:t>
-            </a:r>
-          </a:p>
-          <a:p>
-            <a:pPr lvl="0" indent="-342900" marL="342900">
-              <a:buAutoNum type="alphaLcPeriod"/>
-            </a:pPr>
-            <a:r>
-              <a:rPr/>
-              <a:t>Considering the learner’s prior knowledge in the learning process</a:t>
-            </a:r>
-          </a:p>
-          <a:p>
-            <a:pPr lvl="0" indent="-342900" marL="342900">
-              <a:buAutoNum type="alphaLcPeriod"/>
-            </a:pPr>
-            <a:r>
-              <a:rPr/>
-              <a:t>Constructivism</a:t>
-            </a:r>
-          </a:p>
-          <a:p>
-            <a:pPr lvl="0" indent="-342900" marL="342900">
-              <a:buAutoNum type="alphaLcPeriod"/>
-            </a:pPr>
-            <a:r>
-              <a:rPr/>
-              <a:t>Constructive alignment</a:t>
-            </a:r>
-          </a:p>
-          <a:p>
-            <a:pPr lvl="0" indent="-342900" marL="342900">
-              <a:buAutoNum type="alphaLcPeriod"/>
-            </a:pPr>
-            <a:r>
-              <a:rPr/>
-              <a:t>Formulating clear learning objectives</a:t>
-            </a:r>
-          </a:p>
-        </p:txBody>
-      </p:sp>
-    </p:spTree>
-  </p:cSld>
-</p:sld>
-</file>
-
-<file path=ppt/slides/slide60.xml><?xml version="1.0" encoding="utf-8"?>
-<p:sld xmlns:a="http://schemas.openxmlformats.org/drawingml/2006/main" xmlns:r="http://schemas.openxmlformats.org/officeDocument/2006/relationships" xmlns:p="http://schemas.openxmlformats.org/presentationml/2006/main">
-  <p:cSld>
-    <p:spTree>
-      <p:nvGrpSpPr>
-        <p:cNvPr id="1" name=""/>
-        <p:cNvGrpSpPr/>
-        <p:nvPr/>
-      </p:nvGrpSpPr>
-      <p:grpSpPr>
-        <a:xfrm>
-          <a:off x="0" y="0"/>
-          <a:ext cx="0" cy="0"/>
-          <a:chOff x="0" y="0"/>
-          <a:chExt cx="0" cy="0"/>
-        </a:xfrm>
-      </p:grpSpPr>
-      <p:sp>
-        <p:nvSpPr>
-          <p:cNvPr id="2" name="Title 1"/>
-          <p:cNvSpPr>
-            <a:spLocks noGrp="1"/>
-          </p:cNvSpPr>
-          <p:nvPr>
-            <p:ph type="title"/>
-          </p:nvPr>
-        </p:nvSpPr>
-        <p:spPr/>
-        <p:txBody>
-          <a:bodyPr/>
-          <a:lstStyle/>
-          <a:p>
-            <a:pPr lvl="0" indent="0" marL="0">
-              <a:buNone/>
-            </a:pPr>
-            <a:r>
-              <a:rPr/>
-              <a:t>Survey time!</a:t>
-            </a:r>
-          </a:p>
-        </p:txBody>
-      </p:sp>
-    </p:spTree>
-  </p:cSld>
-</p:sld>
-</file>
-
 <file path=ppt/slides/slide61.xml><?xml version="1.0" encoding="utf-8"?>
 <p:sld xmlns:a="http://schemas.openxmlformats.org/drawingml/2006/main" xmlns:r="http://schemas.openxmlformats.org/officeDocument/2006/relationships" xmlns:p="http://schemas.openxmlformats.org/presentationml/2006/main">
   <p:cSld>
@@ -19372,6 +19374,31 @@
       </p:grpSpPr>
       <p:sp>
         <p:nvSpPr>
+          <p:cNvPr id="2" name="Title 1"/>
+          <p:cNvSpPr>
+            <a:spLocks noGrp="1"/>
+          </p:cNvSpPr>
+          <p:nvPr>
+            <p:ph type="title"/>
+          </p:nvPr>
+        </p:nvSpPr>
+        <p:spPr/>
+        <p:txBody>
+          <a:bodyPr/>
+          <a:lstStyle/>
+          <a:p>
+            <a:pPr lvl="0" indent="0" marL="0">
+              <a:buNone/>
+            </a:pPr>
+            <a:r>
+              <a:rPr/>
+              <a:t>Survey time!</a:t>
+            </a:r>
+          </a:p>
+        </p:txBody>
+      </p:sp>
+      <p:sp>
+        <p:nvSpPr>
           <p:cNvPr id="3" name="Content Placeholder 2"/>
           <p:cNvSpPr>
             <a:spLocks noGrp="1"/>
@@ -19389,44 +19416,8 @@
               <a:buNone/>
             </a:pPr>
             <a:r>
-              <a:rPr b="1"/>
-              <a:t>Which of the following concepts or skills do you now feel most confident about in relation to didactics and teaching? (Select all that apply)</a:t>
-            </a:r>
-          </a:p>
-          <a:p>
-            <a:pPr lvl="0" indent="-342900" marL="342900">
-              <a:buAutoNum type="alphaLcPeriod"/>
-            </a:pPr>
-            <a:r>
-              <a:rPr/>
-              <a:t>Considering the learner’s prior knowledge in the learning process</a:t>
-            </a:r>
-          </a:p>
-          <a:p>
-            <a:pPr lvl="0" indent="-342900" marL="342900">
-              <a:buAutoNum type="alphaLcPeriod"/>
-            </a:pPr>
-            <a:r>
-              <a:rPr/>
-              <a:t>Constructivism</a:t>
-            </a:r>
-          </a:p>
-          <a:p>
-            <a:pPr lvl="0" indent="-342900" marL="342900">
-              <a:buAutoNum type="alphaLcPeriod"/>
-            </a:pPr>
-            <a:r>
-              <a:rPr/>
-              <a:t>Constructive alignment</a:t>
-            </a:r>
-          </a:p>
-          <a:p>
-            <a:pPr lvl="0" indent="-342900" marL="342900">
-              <a:buAutoNum type="alphaLcPeriod"/>
-            </a:pPr>
-            <a:r>
-              <a:rPr/>
-              <a:t>Formulating clear learning objectives</a:t>
+              <a:rPr/>
+              <a:t>ADD QR code</a:t>
             </a:r>
           </a:p>
         </p:txBody>
@@ -19455,6 +19446,31 @@
       </p:grpSpPr>
       <p:sp>
         <p:nvSpPr>
+          <p:cNvPr id="2" name="Title 1"/>
+          <p:cNvSpPr>
+            <a:spLocks noGrp="1"/>
+          </p:cNvSpPr>
+          <p:nvPr>
+            <p:ph type="title"/>
+          </p:nvPr>
+        </p:nvSpPr>
+        <p:spPr/>
+        <p:txBody>
+          <a:bodyPr/>
+          <a:lstStyle/>
+          <a:p>
+            <a:pPr lvl="0" indent="0" marL="0">
+              <a:buNone/>
+            </a:pPr>
+            <a:r>
+              <a:rPr/>
+              <a:t>Survey time!</a:t>
+            </a:r>
+          </a:p>
+        </p:txBody>
+      </p:sp>
+      <p:sp>
+        <p:nvSpPr>
           <p:cNvPr id="3" name="Content Placeholder 2"/>
           <p:cNvSpPr>
             <a:spLocks noGrp="1"/>
@@ -19469,11 +19485,23 @@
           <a:lstStyle/>
           <a:p>
             <a:pPr lvl="0" indent="0" marL="0">
-              <a:buNone/>
-            </a:pPr>
-            <a:r>
-              <a:rPr b="1"/>
-              <a:t>What is your level of familiarity with the three learning domains (cognitive, affective and psychomotor)?</a:t>
+              <a:spcBef>
+                <a:spcPts val="3000"/>
+              </a:spcBef>
+              <a:buNone/>
+            </a:pPr>
+            <a:r>
+              <a:rPr b="1"/>
+              <a:t>Question 1</a:t>
+            </a:r>
+          </a:p>
+          <a:p>
+            <a:pPr lvl="0" indent="0" marL="0">
+              <a:buNone/>
+            </a:pPr>
+            <a:r>
+              <a:rPr b="1"/>
+              <a:t>Which of the following concepts or skills do you now feel most confident about in relation to didactics and teaching? (Select all that apply)</a:t>
             </a:r>
           </a:p>
           <a:p>
@@ -19482,7 +19510,7 @@
             </a:pPr>
             <a:r>
               <a:rPr/>
-              <a:t>I have never heard of them before.</a:t>
+              <a:t>Considering the learner’s prior knowledge in the learning process</a:t>
             </a:r>
           </a:p>
           <a:p>
@@ -19491,7 +19519,7 @@
             </a:pPr>
             <a:r>
               <a:rPr/>
-              <a:t>I have heard of them but have never considered them in my teaching.</a:t>
+              <a:t>Constructivism</a:t>
             </a:r>
           </a:p>
           <a:p>
@@ -19500,7 +19528,7 @@
             </a:pPr>
             <a:r>
               <a:rPr/>
-              <a:t>I have a basic understanding and sometimes implement them in my teaching.</a:t>
+              <a:t>Constructive alignment</a:t>
             </a:r>
           </a:p>
           <a:p>
@@ -19509,7 +19537,121 @@
             </a:pPr>
             <a:r>
               <a:rPr/>
+              <a:t>Formulating clear learning objectives</a:t>
+            </a:r>
+          </a:p>
+          <a:p>
+            <a:pPr lvl="0" indent="0" marL="0">
+              <a:spcBef>
+                <a:spcPts val="3000"/>
+              </a:spcBef>
+              <a:buNone/>
+            </a:pPr>
+            <a:r>
+              <a:rPr b="1"/>
+              <a:t>Question 2</a:t>
+            </a:r>
+          </a:p>
+          <a:p>
+            <a:pPr lvl="0" indent="0" marL="0">
+              <a:buNone/>
+            </a:pPr>
+            <a:r>
+              <a:rPr b="1"/>
+              <a:t>What is your level of familiarity with the three learning domains (cognitive, affective and psychomotor)?</a:t>
+            </a:r>
+          </a:p>
+          <a:p>
+            <a:pPr lvl="0" indent="-342900" marL="342900">
+              <a:buAutoNum type="alphaLcPeriod"/>
+            </a:pPr>
+            <a:r>
+              <a:rPr/>
+              <a:t>I have never heard of them before.</a:t>
+            </a:r>
+          </a:p>
+          <a:p>
+            <a:pPr lvl="0" indent="-342900" marL="342900">
+              <a:buAutoNum type="alphaLcPeriod"/>
+            </a:pPr>
+            <a:r>
+              <a:rPr/>
+              <a:t>I have heard of them but have never considered them in my teaching.</a:t>
+            </a:r>
+          </a:p>
+          <a:p>
+            <a:pPr lvl="0" indent="-342900" marL="342900">
+              <a:buAutoNum type="alphaLcPeriod"/>
+            </a:pPr>
+            <a:r>
+              <a:rPr/>
+              <a:t>I have a basic understanding and sometimes implement them in my teaching.</a:t>
+            </a:r>
+          </a:p>
+          <a:p>
+            <a:pPr lvl="0" indent="-342900" marL="342900">
+              <a:buAutoNum type="alphaLcPeriod"/>
+            </a:pPr>
+            <a:r>
+              <a:rPr/>
               <a:t>I am very familiar with these concepts and routinely apply them in my teaching.</a:t>
+            </a:r>
+          </a:p>
+          <a:p>
+            <a:pPr lvl="0" indent="0" marL="0">
+              <a:spcBef>
+                <a:spcPts val="3000"/>
+              </a:spcBef>
+              <a:buNone/>
+            </a:pPr>
+            <a:r>
+              <a:rPr b="1"/>
+              <a:t>Question 3</a:t>
+            </a:r>
+          </a:p>
+          <a:p>
+            <a:pPr lvl="0" indent="0" marL="0">
+              <a:buNone/>
+            </a:pPr>
+            <a:r>
+              <a:rPr b="1"/>
+              <a:t>What is your level of familiarity with Bloom’s taxonomy?</a:t>
+            </a:r>
+          </a:p>
+          <a:p>
+            <a:pPr lvl="0" indent="-342900" marL="342900">
+              <a:buAutoNum type="alphaLcPeriod"/>
+            </a:pPr>
+            <a:r>
+              <a:rPr/>
+              <a:t>I have never heard of it before.</a:t>
+            </a:r>
+          </a:p>
+          <a:p>
+            <a:pPr lvl="0" indent="-342900" marL="342900">
+              <a:buAutoNum type="alphaLcPeriod"/>
+            </a:pPr>
+            <a:r>
+              <a:rPr/>
+              <a:t>I have heard of it but have never implemented it in my teaching.</a:t>
+            </a:r>
+          </a:p>
+          <a:p>
+            <a:pPr lvl="0" indent="-342900" marL="342900">
+              <a:buAutoNum type="alphaLcPeriod"/>
+            </a:pPr>
+            <a:r>
+              <a:rPr/>
+              <a:t>I have a basic understanding and sometimes implement it in my teaching.</a:t>
+            </a:r>
+          </a:p>
+          <a:p>
+            <a:pPr lvl="0" indent="-342900" marL="342900">
+              <a:buAutoNum type="alphaLcPeriod"/>
+            </a:pPr>
+            <a:r>
+              <a:rPr/>
+              <a:t>I am very familiar and have routinely applied this in my teaching.</a:t>
             </a:r>
           </a:p>
         </p:txBody>
@@ -19538,6 +19680,31 @@
       </p:grpSpPr>
       <p:sp>
         <p:nvSpPr>
+          <p:cNvPr id="2" name="Title 1"/>
+          <p:cNvSpPr>
+            <a:spLocks noGrp="1"/>
+          </p:cNvSpPr>
+          <p:nvPr>
+            <p:ph type="title"/>
+          </p:nvPr>
+        </p:nvSpPr>
+        <p:spPr/>
+        <p:txBody>
+          <a:bodyPr/>
+          <a:lstStyle/>
+          <a:p>
+            <a:pPr lvl="0" indent="0" marL="0">
+              <a:buNone/>
+            </a:pPr>
+            <a:r>
+              <a:rPr/>
+              <a:t>Discussion of survey results</a:t>
+            </a:r>
+          </a:p>
+        </p:txBody>
+      </p:sp>
+      <p:sp>
+        <p:nvSpPr>
           <p:cNvPr id="3" name="Content Placeholder 2"/>
           <p:cNvSpPr>
             <a:spLocks noGrp="1"/>
@@ -19554,45 +19721,14 @@
             <a:pPr lvl="0" indent="0" marL="0">
               <a:buNone/>
             </a:pPr>
-            <a:r>
-              <a:rPr b="1"/>
-              <a:t>What is your level of familiarity with Bloom’s taxonomy?</a:t>
-            </a:r>
-          </a:p>
-          <a:p>
-            <a:pPr lvl="0" indent="-342900" marL="342900">
-              <a:buAutoNum type="alphaLcPeriod"/>
-            </a:pPr>
-            <a:r>
-              <a:rPr/>
-              <a:t>I have never heard of it before.</a:t>
-            </a:r>
-          </a:p>
-          <a:p>
-            <a:pPr lvl="0" indent="-342900" marL="342900">
-              <a:buAutoNum type="alphaLcPeriod"/>
-            </a:pPr>
-            <a:r>
-              <a:rPr/>
-              <a:t>I have heard of it but have never implemented it in my teaching.</a:t>
-            </a:r>
-          </a:p>
-          <a:p>
-            <a:pPr lvl="0" indent="-342900" marL="342900">
-              <a:buAutoNum type="alphaLcPeriod"/>
-            </a:pPr>
-            <a:r>
-              <a:rPr/>
-              <a:t>I have a basic understanding and sometimes implement it in my teaching.</a:t>
-            </a:r>
-          </a:p>
-          <a:p>
-            <a:pPr lvl="0" indent="-342900" marL="342900">
-              <a:buAutoNum type="alphaLcPeriod"/>
-            </a:pPr>
-            <a:r>
-              <a:rPr/>
-              <a:t>I am very familiar and have routinely applied this in my teaching.</a:t>
+          </a:p>
+          <a:p>
+            <a:pPr lvl="0" indent="0" marL="0">
+              <a:buNone/>
+            </a:pPr>
+            <a:r>
+              <a:rPr/>
+              <a:t>What do we see in the results?</a:t>
             </a:r>
           </a:p>
         </p:txBody>
@@ -19639,7 +19775,7 @@
             </a:pPr>
             <a:r>
               <a:rPr/>
-              <a:t>Discussion of survey results</a:t>
+              <a:t>Learning objectives - recap</a:t>
             </a:r>
           </a:p>
         </p:txBody>
@@ -19662,14 +19798,61 @@
             <a:pPr lvl="0" indent="0" marL="0">
               <a:buNone/>
             </a:pPr>
-          </a:p>
-          <a:p>
-            <a:pPr lvl="0" indent="0" marL="0">
-              <a:buNone/>
-            </a:pPr>
-            <a:r>
-              <a:rPr/>
-              <a:t>What do we see in the results?</a:t>
+            <a:r>
+              <a:rPr/>
+              <a:t>At the end of this session, you now…</a:t>
+            </a:r>
+          </a:p>
+          <a:p>
+            <a:pPr lvl="0"/>
+            <a:r>
+              <a:rPr b="1"/>
+              <a:t>Remember</a:t>
+            </a:r>
+            <a:r>
+              <a:rPr/>
+              <a:t> basic didactic concepts as the foundation for learning success✅</a:t>
+            </a:r>
+          </a:p>
+          <a:p>
+            <a:pPr lvl="0"/>
+            <a:r>
+              <a:rPr b="1"/>
+              <a:t>Explain</a:t>
+            </a:r>
+            <a:r>
+              <a:rPr/>
+              <a:t> and </a:t>
+            </a:r>
+            <a:r>
+              <a:rPr b="1"/>
+              <a:t>compare</a:t>
+            </a:r>
+            <a:r>
+              <a:rPr/>
+              <a:t> how knowledge can be organized depending on the level of expertise✅</a:t>
+            </a:r>
+          </a:p>
+          <a:p>
+            <a:pPr lvl="0"/>
+            <a:r>
+              <a:rPr b="1"/>
+              <a:t>Evaluate</a:t>
+            </a:r>
+            <a:r>
+              <a:rPr/>
+              <a:t> the alignment between learning objectives, assessment types and teaching activities✅</a:t>
+            </a:r>
+          </a:p>
+          <a:p>
+            <a:pPr lvl="0"/>
+            <a:r>
+              <a:rPr b="1"/>
+              <a:t>Formulate</a:t>
+            </a:r>
+            <a:r>
+              <a:rPr/>
+              <a:t> concrete learning objectives according to specific learning domains for real-world content✅</a:t>
             </a:r>
           </a:p>
         </p:txBody>
@@ -19716,7 +19899,7 @@
             </a:pPr>
             <a:r>
               <a:rPr/>
-              <a:t>Learning objectives - recap</a:t>
+              <a:t>References</a:t>
             </a:r>
           </a:p>
         </p:txBody>
@@ -19741,59 +19924,386 @@
             </a:pPr>
             <a:r>
               <a:rPr/>
-              <a:t>At the end of this session, you now…</a:t>
-            </a:r>
-          </a:p>
-          <a:p>
-            <a:pPr lvl="0"/>
-            <a:r>
-              <a:rPr b="1"/>
-              <a:t>Remember</a:t>
-            </a:r>
-            <a:r>
-              <a:rPr/>
-              <a:t> basic didactic concepts as the foundation for learning success✅</a:t>
-            </a:r>
-          </a:p>
-          <a:p>
-            <a:pPr lvl="0"/>
-            <a:r>
-              <a:rPr b="1"/>
-              <a:t>Explain</a:t>
-            </a:r>
-            <a:r>
-              <a:rPr/>
-              <a:t> and </a:t>
-            </a:r>
-            <a:r>
-              <a:rPr b="1"/>
-              <a:t>compare</a:t>
-            </a:r>
-            <a:r>
-              <a:rPr/>
-              <a:t> how knowledge can be organized depending on the level of expertise✅</a:t>
-            </a:r>
-          </a:p>
-          <a:p>
-            <a:pPr lvl="0"/>
-            <a:r>
-              <a:rPr b="1"/>
-              <a:t>Evaluate</a:t>
-            </a:r>
-            <a:r>
-              <a:rPr/>
-              <a:t> the alignment between learning objectives, assessment types and teaching activities✅</a:t>
-            </a:r>
-          </a:p>
-          <a:p>
-            <a:pPr lvl="0"/>
-            <a:r>
-              <a:rPr b="1"/>
-              <a:t>Formulate</a:t>
-            </a:r>
-            <a:r>
-              <a:rPr/>
-              <a:t> concrete learning objectives according to specific learning domains for real-world content✅</a:t>
+              <a:t>Anderson, L. W., &amp; Krathwohl, D. R. (2001). A taxonomy for learning, teaching, and assessing : A revision of Bloom’s taxonomy of educational objectives: Complete edition. In </a:t>
+            </a:r>
+            <a:r>
+              <a:rPr i="1"/>
+              <a:t>787904</a:t>
+            </a:r>
+            <a:r>
+              <a:rPr/>
+              <a:t>. Addison Wesley Longman.</a:t>
+            </a:r>
+          </a:p>
+          <a:p>
+            <a:pPr lvl="0" indent="0" marL="0">
+              <a:buNone/>
+            </a:pPr>
+            <a:r>
+              <a:rPr/>
+              <a:t>Biggs, J. (1996). Enhancing teaching through constructive alignment. </a:t>
+            </a:r>
+            <a:r>
+              <a:rPr i="1"/>
+              <a:t>Higher Education</a:t>
+            </a:r>
+            <a:r>
+              <a:rPr/>
+              <a:t>, </a:t>
+            </a:r>
+            <a:r>
+              <a:rPr i="1"/>
+              <a:t>32</a:t>
+            </a:r>
+            <a:r>
+              <a:rPr/>
+              <a:t>(3), 347–364. </a:t>
+            </a:r>
+            <a:r>
+              <a:rPr>
+                <a:hlinkClick r:id="rId2"/>
+              </a:rPr>
+              <a:t>https://doi.org/10.1007/BF00138871</a:t>
+            </a:r>
+          </a:p>
+          <a:p>
+            <a:pPr lvl="0" indent="0" marL="0">
+              <a:buNone/>
+            </a:pPr>
+            <a:r>
+              <a:rPr/>
+              <a:t>Bissell, A. N., &amp; Lemons, P. P. (2006). A new method for assessing critical thinking in the classroom. </a:t>
+            </a:r>
+            <a:r>
+              <a:rPr i="1"/>
+              <a:t>BioScience</a:t>
+            </a:r>
+            <a:r>
+              <a:rPr/>
+              <a:t>, </a:t>
+            </a:r>
+            <a:r>
+              <a:rPr i="1"/>
+              <a:t>56</a:t>
+            </a:r>
+            <a:r>
+              <a:rPr/>
+              <a:t>(1), 66–72. </a:t>
+            </a:r>
+            <a:r>
+              <a:rPr>
+                <a:hlinkClick r:id="rId3"/>
+              </a:rPr>
+              <a:t>https://doi.org/10.1641/0006-3568(2006)056[0066:ANMFAC]2.0.CO;2</a:t>
+            </a:r>
+          </a:p>
+          <a:p>
+            <a:pPr lvl="0" indent="0" marL="0">
+              <a:buNone/>
+            </a:pPr>
+            <a:r>
+              <a:rPr/>
+              <a:t>Bloom, B. S., Engelhart, M. D., Furst, E. J., Hill, W. H., Krathwohl, D. R., et al. (1964). </a:t>
+            </a:r>
+            <a:r>
+              <a:rPr i="1"/>
+              <a:t>Taxonomy of educational objectives</a:t>
+            </a:r>
+            <a:r>
+              <a:rPr/>
+              <a:t> (Vol. 2). Longmans, Green New York.</a:t>
+            </a:r>
+          </a:p>
+          <a:p>
+            <a:pPr lvl="0" indent="0" marL="0">
+              <a:buNone/>
+            </a:pPr>
+            <a:r>
+              <a:rPr/>
+              <a:t>Casasola Rivera, W. (2020). El papel de la didáctica en los procesos de enseñanza y aprendizaje universitarios. </a:t>
+            </a:r>
+            <a:r>
+              <a:rPr i="1"/>
+              <a:t>Revista Comunicación</a:t>
+            </a:r>
+            <a:r>
+              <a:rPr/>
+              <a:t>, </a:t>
+            </a:r>
+            <a:r>
+              <a:rPr i="1"/>
+              <a:t>29</a:t>
+            </a:r>
+            <a:r>
+              <a:rPr/>
+              <a:t>(1-2020), 38–51. </a:t>
+            </a:r>
+            <a:r>
+              <a:rPr>
+                <a:hlinkClick r:id="rId4"/>
+              </a:rPr>
+              <a:t>https://doi.org/10.18845/rc.v29i1-2020.5258</a:t>
+            </a:r>
+          </a:p>
+          <a:p>
+            <a:pPr lvl="0" indent="0" marL="0">
+              <a:buNone/>
+            </a:pPr>
+            <a:r>
+              <a:rPr/>
+              <a:t>Crooks, T. J. (1988). The impact of classroom evaluation practices on students. </a:t>
+            </a:r>
+            <a:r>
+              <a:rPr i="1"/>
+              <a:t>Review of Educational Research</a:t>
+            </a:r>
+            <a:r>
+              <a:rPr/>
+              <a:t>, </a:t>
+            </a:r>
+            <a:r>
+              <a:rPr i="1"/>
+              <a:t>58</a:t>
+            </a:r>
+            <a:r>
+              <a:rPr/>
+              <a:t>(4), 438–481. </a:t>
+            </a:r>
+            <a:r>
+              <a:rPr>
+                <a:hlinkClick r:id="rId5"/>
+              </a:rPr>
+              <a:t>https://doi.org/10.3102/00346543058004438</a:t>
+            </a:r>
+          </a:p>
+          <a:p>
+            <a:pPr lvl="0" indent="0" marL="0">
+              <a:buNone/>
+            </a:pPr>
+            <a:r>
+              <a:rPr/>
+              <a:t>Dave, R. (1970). </a:t>
+            </a:r>
+            <a:r>
+              <a:rPr i="1"/>
+              <a:t>Developing and writing behavioural objectives</a:t>
+            </a:r>
+            <a:r>
+              <a:rPr/>
+              <a:t>. Educational Innovators Press.</a:t>
+            </a:r>
+          </a:p>
+          <a:p>
+            <a:pPr lvl="0" indent="0" marL="0">
+              <a:buNone/>
+            </a:pPr>
+            <a:r>
+              <a:rPr/>
+              <a:t>Duit, R. (2015). Didaktik. In R. Gunstone (Ed.), </a:t>
+            </a:r>
+            <a:r>
+              <a:rPr i="1"/>
+              <a:t>Encyclopedia of Science Education</a:t>
+            </a:r>
+            <a:r>
+              <a:rPr/>
+              <a:t> (pp. 325–327). Springer Netherlands. </a:t>
+            </a:r>
+            <a:r>
+              <a:rPr>
+                <a:hlinkClick r:id="rId6"/>
+              </a:rPr>
+              <a:t>https://doi.org/10.1007/978-94-007-2150-0_156</a:t>
+            </a:r>
+          </a:p>
+          <a:p>
+            <a:pPr lvl="0" indent="0" marL="0">
+              <a:buNone/>
+            </a:pPr>
+            <a:r>
+              <a:rPr/>
+              <a:t>Efgivia, M. G., Rinanda, R. Y. A., Suriyani, Hidayat, A., Maulana, I., &amp; Budiarjo, A. (2021). Analysis of constructivism learning theory. </a:t>
+            </a:r>
+            <a:r>
+              <a:rPr i="1"/>
+              <a:t>1st UMGESHIC International Seminar on Health, Social Science and Humanities (UMGESHIC-ISHSSH 2020)</a:t>
+            </a:r>
+            <a:r>
+              <a:rPr/>
+              <a:t>, 208–212. </a:t>
+            </a:r>
+            <a:r>
+              <a:rPr>
+                <a:hlinkClick r:id="rId7"/>
+              </a:rPr>
+              <a:t>https://doi.org/10.2991/assehr.k.211020.032</a:t>
+            </a:r>
+          </a:p>
+          <a:p>
+            <a:pPr lvl="0" indent="0" marL="0">
+              <a:buNone/>
+            </a:pPr>
+            <a:r>
+              <a:rPr/>
+              <a:t>Fosnot, C. T. (2013). </a:t>
+            </a:r>
+            <a:r>
+              <a:rPr i="1"/>
+              <a:t>Constructivism: Theory, perspectives, and practice</a:t>
+            </a:r>
+            <a:r>
+              <a:rPr/>
+              <a:t>. Teachers College Press.</a:t>
+            </a:r>
+          </a:p>
+          <a:p>
+            <a:pPr lvl="0" indent="0" marL="0">
+              <a:buNone/>
+            </a:pPr>
+            <a:r>
+              <a:rPr/>
+              <a:t>Harrow, A. J. (1972). </a:t>
+            </a:r>
+            <a:r>
+              <a:rPr i="1"/>
+              <a:t>A taxonomy of the psychomotor domain: A guide for developing behavioral objectives</a:t>
+            </a:r>
+            <a:r>
+              <a:rPr/>
+              <a:t>. Longman.</a:t>
+            </a:r>
+          </a:p>
+          <a:p>
+            <a:pPr lvl="0" indent="0" marL="0">
+              <a:buNone/>
+            </a:pPr>
+            <a:r>
+              <a:rPr/>
+              <a:t>Krathwohl, D. R., Bloom, B., Masia, B. B., et al. (1964). </a:t>
+            </a:r>
+            <a:r>
+              <a:rPr i="1"/>
+              <a:t>Taxonomy of educational objectives</a:t>
+            </a:r>
+            <a:r>
+              <a:rPr/>
+              <a:t> (Vol. 2). David McKay Company.</a:t>
+            </a:r>
+          </a:p>
+          <a:p>
+            <a:pPr lvl="0" indent="0" marL="0">
+              <a:buNone/>
+            </a:pPr>
+            <a:r>
+              <a:rPr/>
+              <a:t>Lovett, M. C., Bridges, M. W., DiPietro, M., Ambrose, S. A., &amp; Norman, M. K. (2023). </a:t>
+            </a:r>
+            <a:r>
+              <a:rPr i="1"/>
+              <a:t>How learning works: Eight research-based principles for smart teaching</a:t>
+            </a:r>
+            <a:r>
+              <a:rPr/>
+              <a:t>. John Wiley &amp; Sons.</a:t>
+            </a:r>
+          </a:p>
+          <a:p>
+            <a:pPr lvl="0" indent="0" marL="0">
+              <a:buNone/>
+            </a:pPr>
+            <a:r>
+              <a:rPr/>
+              <a:t>Mager, R. F., &amp; Peatt, N. (1962). </a:t>
+            </a:r>
+            <a:r>
+              <a:rPr i="1"/>
+              <a:t>Preparing instructional objectives</a:t>
+            </a:r>
+            <a:r>
+              <a:rPr/>
+              <a:t> (Vol. 62). Fearon Publishers Palo Alto, California.</a:t>
+            </a:r>
+          </a:p>
+          <a:p>
+            <a:pPr lvl="0" indent="0" marL="0">
+              <a:buNone/>
+            </a:pPr>
+            <a:r>
+              <a:rPr/>
+              <a:t>Riskulova, K. D., Yuldoshova, U. B. K., &amp; Tashkent Institute of Finance. (2020). The role of didactics in the teaching process. </a:t>
+            </a:r>
+            <a:r>
+              <a:rPr i="1"/>
+              <a:t>Theoretical &amp; Applied Science</a:t>
+            </a:r>
+            <a:r>
+              <a:rPr/>
+              <a:t>, </a:t>
+            </a:r>
+            <a:r>
+              <a:rPr i="1"/>
+              <a:t>85</a:t>
+            </a:r>
+            <a:r>
+              <a:rPr/>
+              <a:t>(05), 786–792. </a:t>
+            </a:r>
+            <a:r>
+              <a:rPr>
+                <a:hlinkClick r:id="rId8"/>
+              </a:rPr>
+              <a:t>https://doi.org/10.15863/TAS.2020.05.85.146</a:t>
+            </a:r>
+          </a:p>
+          <a:p>
+            <a:pPr lvl="0" indent="0" marL="0">
+              <a:buNone/>
+            </a:pPr>
+            <a:r>
+              <a:rPr/>
+              <a:t>Simpson, E. (1985). </a:t>
+            </a:r>
+            <a:r>
+              <a:rPr i="1"/>
+              <a:t>Educational objectives in the psychomotor domain</a:t>
+            </a:r>
+            <a:r>
+              <a:rPr/>
+              <a:t>. Illinois University.</a:t>
+            </a:r>
+          </a:p>
+          <a:p>
+            <a:pPr lvl="0" indent="0" marL="0">
+              <a:buNone/>
+            </a:pPr>
+            <a:r>
+              <a:rPr/>
+              <a:t>Sjøberg, S. (2010). Constructivism and learning. In B. McGaw &amp; P. Peterson (Eds.), </a:t>
+            </a:r>
+            <a:r>
+              <a:rPr i="1"/>
+              <a:t>International Encyclopaedia of Education</a:t>
+            </a:r>
+            <a:r>
+              <a:rPr/>
+              <a:t> (3rd ed.). Elsevier.</a:t>
+            </a:r>
+          </a:p>
+          <a:p>
+            <a:pPr lvl="0" indent="0" marL="0">
+              <a:buNone/>
+            </a:pPr>
+            <a:r>
+              <a:rPr/>
+              <a:t>Stapleton-Corcoran, E. (2023). Bloom’s taxonomy of educational objectives. </a:t>
+            </a:r>
+            <a:r>
+              <a:rPr i="1"/>
+              <a:t>Center for the Advancement of Teaching Excellence (CATE)</a:t>
+            </a:r>
+            <a:r>
+              <a:rPr/>
+              <a:t>.</a:t>
             </a:r>
           </a:p>
         </p:txBody>
@@ -19830,169 +20340,22 @@
             <p:ph type="title"/>
           </p:nvPr>
         </p:nvSpPr>
-        <p:spPr/>
-        <p:txBody>
-          <a:bodyPr/>
-          <a:lstStyle/>
-          <a:p>
-            <a:pPr lvl="0" indent="0" marL="0">
-              <a:buNone/>
-            </a:pPr>
-            <a:r>
-              <a:rPr/>
-              <a:t>References</a:t>
-            </a:r>
-          </a:p>
-        </p:txBody>
-      </p:sp>
-      <p:sp>
-        <p:nvSpPr>
-          <p:cNvPr id="3" name="Content Placeholder 2"/>
-          <p:cNvSpPr>
-            <a:spLocks noGrp="1"/>
-          </p:cNvSpPr>
-          <p:nvPr>
-            <p:ph idx="1"/>
-          </p:nvPr>
-        </p:nvSpPr>
-        <p:spPr/>
-        <p:txBody>
-          <a:bodyPr/>
-          <a:lstStyle/>
-          <a:p>
-            <a:pPr lvl="0" indent="0" marL="0">
-              <a:buNone/>
-            </a:pPr>
-            <a:r>
-              <a:rPr/>
-              <a:t>Anderson, L. W., &amp; Krathwohl, D. R. (Eds.). (2001). </a:t>
-            </a:r>
-            <a:r>
-              <a:rPr i="1"/>
-              <a:t>A taxonomy for learning, teaching, and assessing: A revision of Bloom’s taxonomy of educational objectives</a:t>
-            </a:r>
-            <a:r>
-              <a:rPr/>
-              <a:t>. Addison Wesley Longman.</a:t>
-            </a:r>
-          </a:p>
-          <a:p>
-            <a:pPr lvl="0" indent="0" marL="0">
-              <a:buNone/>
-            </a:pPr>
-            <a:r>
-              <a:rPr/>
-              <a:t>Bloom, B. S. (Ed.). (1973). </a:t>
-            </a:r>
-            <a:r>
-              <a:rPr i="1"/>
-              <a:t>Taxonomie von Lernzielen im kognitiven Bereich</a:t>
-            </a:r>
-            <a:r>
-              <a:rPr/>
-              <a:t> (3. Aufl.). Beltz.</a:t>
-            </a:r>
-          </a:p>
-          <a:p>
-            <a:pPr lvl="0" indent="0" marL="0">
-              <a:buNone/>
-            </a:pPr>
-            <a:r>
-              <a:rPr/>
-              <a:t>Bloom, B. S., Engelhart, M. D., Furst, E. J., Hill, W. H., &amp; Krathwohl, D. R. (Eds.). (1956). </a:t>
-            </a:r>
-            <a:r>
-              <a:rPr i="1"/>
-              <a:t>Taxonomy of educational objectives: The classification of educational goals. Handbook I: Cognitive domain</a:t>
-            </a:r>
-            <a:r>
-              <a:rPr/>
-              <a:t>. David McKay Company.</a:t>
-            </a:r>
-          </a:p>
-          <a:p>
-            <a:pPr lvl="0" indent="0" marL="0">
-              <a:buNone/>
-            </a:pPr>
-            <a:r>
-              <a:rPr/>
-              <a:t>Bruner, J. S. (1960). </a:t>
-            </a:r>
-            <a:r>
-              <a:rPr i="1"/>
-              <a:t>The process of education</a:t>
-            </a:r>
-            <a:r>
-              <a:rPr/>
-              <a:t>. Harvard University Press.</a:t>
-            </a:r>
-          </a:p>
-          <a:p>
-            <a:pPr lvl="0" indent="0" marL="0">
-              <a:buNone/>
-            </a:pPr>
-            <a:r>
-              <a:rPr/>
-              <a:t>Fosnot, C. T. (Ed.). (2013). </a:t>
-            </a:r>
-            <a:r>
-              <a:rPr i="1"/>
-              <a:t>Constructivism: Theory, perspectives, and practice</a:t>
-            </a:r>
-            <a:r>
-              <a:rPr/>
-              <a:t> (2nd ed.). Teachers College Press.</a:t>
-            </a:r>
-          </a:p>
-          <a:p>
-            <a:pPr lvl="0" indent="0" marL="0">
-              <a:buNone/>
-            </a:pPr>
-            <a:r>
-              <a:rPr/>
-              <a:t>Piaget, J. (1950). </a:t>
-            </a:r>
-            <a:r>
-              <a:rPr i="1"/>
-              <a:t>The psychology of intelligence</a:t>
-            </a:r>
-            <a:r>
-              <a:rPr/>
-              <a:t>. Routledge &amp; Kegan Paul.</a:t>
-            </a:r>
-          </a:p>
-          <a:p>
-            <a:pPr lvl="0" indent="0" marL="0">
-              <a:buNone/>
-            </a:pPr>
-            <a:r>
-              <a:rPr/>
-              <a:t>von Glasersfeld, E. (1995). </a:t>
-            </a:r>
-            <a:r>
-              <a:rPr i="1"/>
-              <a:t>Radical constructivism: A way of knowing and learning</a:t>
-            </a:r>
-            <a:r>
-              <a:rPr/>
-              <a:t>. Falmer Press.</a:t>
-            </a:r>
-          </a:p>
-          <a:p>
-            <a:pPr lvl="0" indent="0" marL="0">
-              <a:buNone/>
-            </a:pPr>
-            <a:r>
-              <a:rPr/>
-              <a:t>Vygotsky, L. S. (1978). </a:t>
-            </a:r>
-            <a:r>
-              <a:rPr i="1"/>
-              <a:t>Mind in society: The development of higher psychological processes</a:t>
-            </a:r>
-            <a:r>
-              <a:rPr/>
-              <a:t>. Harvard University Press.</a:t>
+        <p:spPr>
+          <a:xfrm>
+            <a:off x="722313" y="3305176"/>
+            <a:ext cx="7772400" cy="1021556"/>
+          </a:xfrm>
+        </p:spPr>
+        <p:txBody>
+          <a:bodyPr/>
+          <a:lstStyle/>
+          <a:p>
+            <a:pPr lvl="0" indent="0" marL="0">
+              <a:buNone/>
+            </a:pPr>
+            <a:r>
+              <a:rPr/>
+              <a:t>Thanks!</a:t>
             </a:r>
           </a:p>
         </p:txBody>
@@ -20044,7 +20407,7 @@
             </a:pPr>
             <a:r>
               <a:rPr/>
-              <a:t>Thanks! :)</a:t>
+              <a:t>Additional content slides</a:t>
             </a:r>
           </a:p>
         </p:txBody>
@@ -20081,58 +20444,6 @@
             <p:ph type="title"/>
           </p:nvPr>
         </p:nvSpPr>
-        <p:spPr>
-          <a:xfrm>
-            <a:off x="722313" y="3305176"/>
-            <a:ext cx="7772400" cy="1021556"/>
-          </a:xfrm>
-        </p:spPr>
-        <p:txBody>
-          <a:bodyPr/>
-          <a:lstStyle/>
-          <a:p>
-            <a:pPr lvl="0" indent="0" marL="0">
-              <a:buNone/>
-            </a:pPr>
-            <a:r>
-              <a:rPr/>
-              <a:t>Additional content slides</a:t>
-            </a:r>
-          </a:p>
-        </p:txBody>
-      </p:sp>
-    </p:spTree>
-  </p:cSld>
-</p:sld>
-</file>
-
-<file path=ppt/slides/slide69.xml><?xml version="1.0" encoding="utf-8"?>
-<p:sld xmlns:a="http://schemas.openxmlformats.org/drawingml/2006/main" xmlns:r="http://schemas.openxmlformats.org/officeDocument/2006/relationships" xmlns:p="http://schemas.openxmlformats.org/presentationml/2006/main">
-  <p:cSld>
-    <p:spTree>
-      <p:nvGrpSpPr>
-        <p:cNvPr id="1" name=""/>
-        <p:cNvGrpSpPr/>
-        <p:nvPr/>
-      </p:nvGrpSpPr>
-      <p:grpSpPr>
-        <a:xfrm>
-          <a:off x="0" y="0"/>
-          <a:ext cx="0" cy="0"/>
-          <a:chOff x="0" y="0"/>
-          <a:chExt cx="0" cy="0"/>
-        </a:xfrm>
-      </p:grpSpPr>
-      <p:sp>
-        <p:nvSpPr>
-          <p:cNvPr id="2" name="Title 1"/>
-          <p:cNvSpPr>
-            <a:spLocks noGrp="1"/>
-          </p:cNvSpPr>
-          <p:nvPr>
-            <p:ph type="title"/>
-          </p:nvPr>
-        </p:nvSpPr>
         <p:spPr/>
         <p:txBody>
           <a:bodyPr/>
@@ -20247,7 +20558,7 @@
             </a:pPr>
             <a:r>
               <a:rPr/>
-              <a:t>Sjoberg, 2010; Tauber, 2006</a:t>
+              <a:t>Sjøberg (2010)</a:t>
             </a:r>
           </a:p>
         </p:txBody>
@@ -20535,90 +20846,7 @@
 </p:sld>
 </file>
 
-<file path=ppt/slides/slide7.xml><?xml version="1.0" encoding="utf-8"?>
-<p:sld xmlns:a="http://schemas.openxmlformats.org/drawingml/2006/main" xmlns:r="http://schemas.openxmlformats.org/officeDocument/2006/relationships" xmlns:p="http://schemas.openxmlformats.org/presentationml/2006/main">
-  <p:cSld>
-    <p:spTree>
-      <p:nvGrpSpPr>
-        <p:cNvPr id="1" name=""/>
-        <p:cNvGrpSpPr/>
-        <p:nvPr/>
-      </p:nvGrpSpPr>
-      <p:grpSpPr>
-        <a:xfrm>
-          <a:off x="0" y="0"/>
-          <a:ext cx="0" cy="0"/>
-          <a:chOff x="0" y="0"/>
-          <a:chExt cx="0" cy="0"/>
-        </a:xfrm>
-      </p:grpSpPr>
-      <p:sp>
-        <p:nvSpPr>
-          <p:cNvPr id="3" name="Content Placeholder 2"/>
-          <p:cNvSpPr>
-            <a:spLocks noGrp="1"/>
-          </p:cNvSpPr>
-          <p:nvPr>
-            <p:ph idx="1"/>
-          </p:nvPr>
-        </p:nvSpPr>
-        <p:spPr/>
-        <p:txBody>
-          <a:bodyPr/>
-          <a:lstStyle/>
-          <a:p>
-            <a:pPr lvl="0" indent="0" marL="0">
-              <a:buNone/>
-            </a:pPr>
-            <a:r>
-              <a:rPr b="1"/>
-              <a:t>What is your level of familiarity with the three learning domains (cogntive, affective and psychomotor)?</a:t>
-            </a:r>
-          </a:p>
-          <a:p>
-            <a:pPr lvl="0" indent="-342900" marL="342900">
-              <a:buAutoNum type="alphaLcPeriod"/>
-            </a:pPr>
-            <a:r>
-              <a:rPr/>
-              <a:t>I have never heard of them before.</a:t>
-            </a:r>
-          </a:p>
-          <a:p>
-            <a:pPr lvl="0" indent="-342900" marL="342900">
-              <a:buAutoNum type="alphaLcPeriod"/>
-            </a:pPr>
-            <a:r>
-              <a:rPr/>
-              <a:t>I have heard of them but have never considered them in my teaching.</a:t>
-            </a:r>
-          </a:p>
-          <a:p>
-            <a:pPr lvl="0" indent="-342900" marL="342900">
-              <a:buAutoNum type="alphaLcPeriod"/>
-            </a:pPr>
-            <a:r>
-              <a:rPr/>
-              <a:t>I have a basic understanding and sometimes implement them in my teaching.</a:t>
-            </a:r>
-          </a:p>
-          <a:p>
-            <a:pPr lvl="0" indent="-342900" marL="342900">
-              <a:buAutoNum type="alphaLcPeriod"/>
-            </a:pPr>
-            <a:r>
-              <a:rPr/>
-              <a:t>I am very familiar and have routinely applied them in my teaching.</a:t>
-            </a:r>
-          </a:p>
-        </p:txBody>
-      </p:sp>
-    </p:spTree>
-  </p:cSld>
-</p:sld>
-</file>
-
-<file path=ppt/slides/slide70.xml><?xml version="1.0" encoding="utf-8"?>
+<file path=ppt/slides/slide69.xml><?xml version="1.0" encoding="utf-8"?>
 <p:sld xmlns:a="http://schemas.openxmlformats.org/drawingml/2006/main" xmlns:r="http://schemas.openxmlformats.org/officeDocument/2006/relationships" xmlns:p="http://schemas.openxmlformats.org/presentationml/2006/main">
   <p:cSld>
     <p:spTree>
@@ -20930,6 +21158,167 @@
 </p:sld>
 </file>
 
+<file path=ppt/slides/slide7.xml><?xml version="1.0" encoding="utf-8"?>
+<p:sld xmlns:a="http://schemas.openxmlformats.org/drawingml/2006/main" xmlns:r="http://schemas.openxmlformats.org/officeDocument/2006/relationships" xmlns:p="http://schemas.openxmlformats.org/presentationml/2006/main">
+  <p:cSld>
+    <p:spTree>
+      <p:nvGrpSpPr>
+        <p:cNvPr id="1" name=""/>
+        <p:cNvGrpSpPr/>
+        <p:nvPr/>
+      </p:nvGrpSpPr>
+      <p:grpSpPr>
+        <a:xfrm>
+          <a:off x="0" y="0"/>
+          <a:ext cx="0" cy="0"/>
+          <a:chOff x="0" y="0"/>
+          <a:chExt cx="0" cy="0"/>
+        </a:xfrm>
+      </p:grpSpPr>
+      <p:sp>
+        <p:nvSpPr>
+          <p:cNvPr id="2" name="Title 1"/>
+          <p:cNvSpPr>
+            <a:spLocks noGrp="1"/>
+          </p:cNvSpPr>
+          <p:nvPr>
+            <p:ph type="title"/>
+          </p:nvPr>
+        </p:nvSpPr>
+        <p:spPr/>
+        <p:txBody>
+          <a:bodyPr/>
+          <a:lstStyle/>
+          <a:p>
+            <a:pPr lvl="0" indent="0" marL="0">
+              <a:buNone/>
+            </a:pPr>
+            <a:r>
+              <a:rPr/>
+              <a:t>Discussion of survey results</a:t>
+            </a:r>
+          </a:p>
+        </p:txBody>
+      </p:sp>
+      <p:sp>
+        <p:nvSpPr>
+          <p:cNvPr id="3" name="Content Placeholder 2"/>
+          <p:cNvSpPr>
+            <a:spLocks noGrp="1"/>
+          </p:cNvSpPr>
+          <p:nvPr>
+            <p:ph idx="1"/>
+          </p:nvPr>
+        </p:nvSpPr>
+        <p:spPr/>
+        <p:txBody>
+          <a:bodyPr/>
+          <a:lstStyle/>
+          <a:p>
+            <a:pPr lvl="0" indent="0" marL="0">
+              <a:buNone/>
+            </a:pPr>
+          </a:p>
+          <a:p>
+            <a:pPr lvl="0" indent="0" marL="0">
+              <a:buNone/>
+            </a:pPr>
+            <a:r>
+              <a:rPr/>
+              <a:t>What do we see in the results?</a:t>
+            </a:r>
+          </a:p>
+        </p:txBody>
+      </p:sp>
+    </p:spTree>
+  </p:cSld>
+</p:sld>
+</file>
+
+<file path=ppt/slides/slide70.xml><?xml version="1.0" encoding="utf-8"?>
+<p:sld xmlns:a="http://schemas.openxmlformats.org/drawingml/2006/main" xmlns:r="http://schemas.openxmlformats.org/officeDocument/2006/relationships" xmlns:p="http://schemas.openxmlformats.org/presentationml/2006/main">
+  <p:cSld>
+    <p:spTree>
+      <p:nvGrpSpPr>
+        <p:cNvPr id="1" name=""/>
+        <p:cNvGrpSpPr/>
+        <p:nvPr/>
+      </p:nvGrpSpPr>
+      <p:grpSpPr>
+        <a:xfrm>
+          <a:off x="0" y="0"/>
+          <a:ext cx="0" cy="0"/>
+          <a:chOff x="0" y="0"/>
+          <a:chExt cx="0" cy="0"/>
+        </a:xfrm>
+      </p:grpSpPr>
+      <p:sp>
+        <p:nvSpPr>
+          <p:cNvPr id="2" name="Title 1"/>
+          <p:cNvSpPr>
+            <a:spLocks noGrp="1"/>
+          </p:cNvSpPr>
+          <p:nvPr>
+            <p:ph type="title"/>
+          </p:nvPr>
+        </p:nvSpPr>
+        <p:spPr/>
+        <p:txBody>
+          <a:bodyPr/>
+          <a:lstStyle/>
+          <a:p>
+            <a:pPr lvl="0" indent="0" marL="0">
+              <a:buNone/>
+            </a:pPr>
+            <a:r>
+              <a:rPr/>
+              <a:t>TODO</a:t>
+            </a:r>
+          </a:p>
+        </p:txBody>
+      </p:sp>
+      <p:sp>
+        <p:nvSpPr>
+          <p:cNvPr id="3" name="Content Placeholder 2"/>
+          <p:cNvSpPr>
+            <a:spLocks noGrp="1"/>
+          </p:cNvSpPr>
+          <p:nvPr>
+            <p:ph idx="1"/>
+          </p:nvPr>
+        </p:nvSpPr>
+        <p:spPr/>
+        <p:txBody>
+          <a:bodyPr/>
+          <a:lstStyle/>
+          <a:p>
+            <a:pPr lvl="0"/>
+            <a:r>
+              <a:rPr/>
+              <a:t>☐ Add wordcloud and QR codes</a:t>
+            </a:r>
+          </a:p>
+          <a:p>
+            <a:pPr lvl="0"/>
+            <a:r>
+              <a:rPr/>
+              <a:t>☐ Add alt text to all figures</a:t>
+            </a:r>
+          </a:p>
+          <a:p>
+            <a:pPr lvl="0"/>
+            <a:r>
+              <a:rPr/>
+              <a:t>☐ Sort out all references</a:t>
+            </a:r>
+          </a:p>
+        </p:txBody>
+      </p:sp>
+    </p:spTree>
+  </p:cSld>
+</p:sld>
+</file>
+
 <file path=ppt/slides/slide8.xml><?xml version="1.0" encoding="utf-8"?>
 <p:sld xmlns:a="http://schemas.openxmlformats.org/drawingml/2006/main" xmlns:r="http://schemas.openxmlformats.org/officeDocument/2006/relationships" xmlns:p="http://schemas.openxmlformats.org/presentationml/2006/main">
   <p:cSld>
@@ -20949,6 +21338,31 @@
       </p:grpSpPr>
       <p:sp>
         <p:nvSpPr>
+          <p:cNvPr id="2" name="Title 1"/>
+          <p:cNvSpPr>
+            <a:spLocks noGrp="1"/>
+          </p:cNvSpPr>
+          <p:nvPr>
+            <p:ph type="title"/>
+          </p:nvPr>
+        </p:nvSpPr>
+        <p:spPr/>
+        <p:txBody>
+          <a:bodyPr/>
+          <a:lstStyle/>
+          <a:p>
+            <a:pPr lvl="0" indent="0" marL="0">
+              <a:buNone/>
+            </a:pPr>
+            <a:r>
+              <a:rPr/>
+              <a:t>Today’s session journey</a:t>
+            </a:r>
+          </a:p>
+        </p:txBody>
+      </p:sp>
+      <p:sp>
+        <p:nvSpPr>
           <p:cNvPr id="3" name="Content Placeholder 2"/>
           <p:cNvSpPr>
             <a:spLocks noGrp="1"/>
@@ -20965,45 +21379,41 @@
             <a:pPr lvl="0" indent="0" marL="0">
               <a:buNone/>
             </a:pPr>
-            <a:r>
-              <a:rPr b="1"/>
-              <a:t>What is your level of familiarity with Bloom’s taxonomy?</a:t>
-            </a:r>
-          </a:p>
-          <a:p>
-            <a:pPr lvl="0" indent="-342900" marL="342900">
-              <a:buAutoNum type="alphaLcPeriod"/>
-            </a:pPr>
-            <a:r>
-              <a:rPr/>
-              <a:t>I have never heard of it before.</a:t>
-            </a:r>
-          </a:p>
-          <a:p>
-            <a:pPr lvl="0" indent="-342900" marL="342900">
-              <a:buAutoNum type="alphaLcPeriod"/>
-            </a:pPr>
-            <a:r>
-              <a:rPr/>
-              <a:t>I have heard of it but have never implemented it in my teaching.</a:t>
-            </a:r>
-          </a:p>
-          <a:p>
-            <a:pPr lvl="0" indent="-342900" marL="342900">
-              <a:buAutoNum type="alphaLcPeriod"/>
-            </a:pPr>
-            <a:r>
-              <a:rPr/>
-              <a:t>I have a basic working definition in mind and sometimes implement it in my teaching.</a:t>
-            </a:r>
-          </a:p>
-          <a:p>
-            <a:pPr lvl="0" indent="-342900" marL="342900">
-              <a:buAutoNum type="alphaLcPeriod"/>
-            </a:pPr>
-            <a:r>
-              <a:rPr/>
-              <a:t>I am very familiar and have routinely applied this in my teaching.</a:t>
+          </a:p>
+          <a:p>
+            <a:pPr lvl="0" indent="0" marL="0">
+              <a:buNone/>
+            </a:pPr>
+            <a:r>
+              <a:rPr/>
+              <a:t>From</a:t>
+            </a:r>
+          </a:p>
+          <a:p>
+            <a:pPr lvl="0" indent="0" marL="0">
+              <a:buNone/>
+            </a:pPr>
+            <a:r>
+              <a:rPr b="1"/>
+              <a:t>I am not sure what good teaching in open research involves</a:t>
+            </a:r>
+          </a:p>
+          <a:p>
+            <a:pPr lvl="0" indent="0" marL="0">
+              <a:buNone/>
+            </a:pPr>
+            <a:r>
+              <a:rPr/>
+              <a:t>to</a:t>
+            </a:r>
+          </a:p>
+          <a:p>
+            <a:pPr lvl="0" indent="0" marL="0">
+              <a:buNone/>
+            </a:pPr>
+            <a:r>
+              <a:rPr b="1"/>
+              <a:t>I feel more confident that I can pass on my knowledge of open research to my learners using evidence-based didactic methods.</a:t>
             </a:r>
           </a:p>
         </p:txBody>
@@ -21050,7 +21460,7 @@
             </a:pPr>
             <a:r>
               <a:rPr/>
-              <a:t>Discussion of survey results</a:t>
+              <a:t>Where are we at?</a:t>
             </a:r>
           </a:p>
         </p:txBody>
@@ -21073,14 +21483,75 @@
             <a:pPr lvl="0" indent="0" marL="0">
               <a:buNone/>
             </a:pPr>
-          </a:p>
-          <a:p>
-            <a:pPr lvl="0" indent="0" marL="0">
-              <a:buNone/>
-            </a:pPr>
-            <a:r>
-              <a:rPr/>
-              <a:t>What do we see in the results?</a:t>
+            <a:r>
+              <a:rPr b="1"/>
+              <a:t>Previously</a:t>
+            </a:r>
+            <a:r>
+              <a:rPr/>
+              <a:t>:</a:t>
+            </a:r>
+          </a:p>
+          <a:p>
+            <a:pPr lvl="0"/>
+            <a:r>
+              <a:rPr/>
+              <a:t>Getting to know the group</a:t>
+            </a:r>
+          </a:p>
+          <a:p>
+            <a:pPr lvl="0" indent="0" marL="0">
+              <a:buNone/>
+            </a:pPr>
+            <a:r>
+              <a:rPr b="1"/>
+              <a:t>Up next</a:t>
+            </a:r>
+            <a:r>
+              <a:rPr/>
+              <a:t>:</a:t>
+            </a:r>
+          </a:p>
+          <a:p>
+            <a:pPr lvl="0"/>
+            <a:r>
+              <a:rPr/>
+              <a:t>What is learning?</a:t>
+            </a:r>
+          </a:p>
+          <a:p>
+            <a:pPr lvl="0"/>
+            <a:r>
+              <a:rPr/>
+              <a:t>Constructivism</a:t>
+            </a:r>
+          </a:p>
+          <a:p>
+            <a:pPr lvl="0"/>
+            <a:r>
+              <a:rPr/>
+              <a:t>Constructive alignment</a:t>
+            </a:r>
+          </a:p>
+          <a:p>
+            <a:pPr lvl="0"/>
+            <a:r>
+              <a:rPr/>
+              <a:t>Learning domains</a:t>
+            </a:r>
+          </a:p>
+          <a:p>
+            <a:pPr lvl="0"/>
+            <a:r>
+              <a:rPr/>
+              <a:t>Levels of knowledge: Bloom’s taxonomy</a:t>
+            </a:r>
+          </a:p>
+          <a:p>
+            <a:pPr lvl="0"/>
+            <a:r>
+              <a:rPr/>
+              <a:t>Formulating learning objectives</a:t>
             </a:r>
           </a:p>
         </p:txBody>

--- a/materials/PMM-M1/PMM-M1-S1-Core-Didactic-Principles/PMM-M1-S1-Core-Didactic-Principles-slides.pptx
+++ b/materials/PMM-M1/PMM-M1-S1-Core-Didactic-Principles/PMM-M1-S1-Core-Didactic-Principles-slides.pptx
@@ -9961,7 +9961,7 @@
             </a:pPr>
             <a:r>
               <a:rPr/>
-              <a:t>14/08/2026</a:t>
+              <a:t>16/08/2026</a:t>
             </a:r>
           </a:p>
         </p:txBody>

--- a/materials/PMM-M1/PMM-M1-S1-Core-Didactic-Principles/PMM-M1-S1-Core-Didactic-Principles-slides.pptx
+++ b/materials/PMM-M1/PMM-M1-S1-Core-Didactic-Principles/PMM-M1-S1-Core-Didactic-Principles-slides.pptx
@@ -9961,7 +9961,7 @@
             </a:pPr>
             <a:r>
               <a:rPr/>
-              <a:t>16/08/2026</a:t>
+              <a:t>19/08/2026</a:t>
             </a:r>
           </a:p>
         </p:txBody>
